--- a/thesis/health_rl/burgundy_defense_presentation.pptx
+++ b/thesis/health_rl/burgundy_defense_presentation.pptx
@@ -27,16 +27,16 @@
     <p:sldId id="275" r:id="rId26"/>
     <p:sldId id="276" r:id="rId27"/>
     <p:sldId id="277" r:id="rId28"/>
-    <p:sldId id="278" r:id="rId29"/>
-    <p:sldId id="279" r:id="rId30"/>
-    <p:sldId id="280" r:id="rId31"/>
-    <p:sldId id="281" r:id="rId32"/>
-    <p:sldId id="282" r:id="rId33"/>
-    <p:sldId id="283" r:id="rId34"/>
-    <p:sldId id="284" r:id="rId35"/>
-    <p:sldId id="285" r:id="rId36"/>
-    <p:sldId id="286" r:id="rId37"/>
-    <p:sldId id="287" r:id="rId38"/>
+    <p:sldId id="278" r:id="rId30"/>
+    <p:sldId id="279" r:id="rId31"/>
+    <p:sldId id="280" r:id="rId32"/>
+    <p:sldId id="281" r:id="rId33"/>
+    <p:sldId id="282" r:id="rId34"/>
+    <p:sldId id="283" r:id="rId35"/>
+    <p:sldId id="284" r:id="rId36"/>
+    <p:sldId id="285" r:id="rId37"/>
+    <p:sldId id="286" r:id="rId38"/>
+    <p:sldId id="287" r:id="rId39"/>
   </p:sldIdLst>
   <p:sldSz cx="12191695" cy="6858000" type="screen4x3"/>
   <p:notesSz cx="6858000" cy="9144000"/>
@@ -136,6 +136,426 @@
     </a:lvl9pPr>
   </p:defaultTextStyle>
 </p:presentation>
+</file>
+
+<file path=ppt/notesMasters/notesMaster1.xml><?xml version="1.0" encoding="utf-8"?>
+<p:notesMaster xmlns:a="http://schemas.openxmlformats.org/drawingml/2006/main" xmlns:p="http://schemas.openxmlformats.org/presentationml/2006/main" xmlns:r="http://schemas.openxmlformats.org/officeDocument/2006/relationships">
+  <p:cSld>
+    <p:bg>
+      <p:bgRef idx="1001">
+        <a:schemeClr val="bg1"/>
+      </p:bgRef>
+    </p:bg>
+    <p:spTree>
+      <p:nvGrpSpPr>
+        <p:cNvPr id="1" name=""/>
+        <p:cNvGrpSpPr/>
+        <p:nvPr/>
+      </p:nvGrpSpPr>
+      <p:grpSpPr>
+        <a:xfrm>
+          <a:off x="0" y="0"/>
+          <a:ext cx="0" cy="0"/>
+          <a:chOff x="0" y="0"/>
+          <a:chExt cx="0" cy="0"/>
+        </a:xfrm>
+      </p:grpSpPr>
+      <p:sp>
+        <p:nvSpPr>
+          <p:cNvPr id="2" name="Header Placeholder 1"/>
+          <p:cNvSpPr>
+            <a:spLocks noGrp="1"/>
+          </p:cNvSpPr>
+          <p:nvPr>
+            <p:ph type="hdr" sz="quarter"/>
+          </p:nvPr>
+        </p:nvSpPr>
+        <p:spPr>
+          <a:xfrm>
+            <a:off x="0" y="0"/>
+            <a:ext cx="2971800" cy="457200"/>
+          </a:xfrm>
+          <a:prstGeom prst="rect">
+            <a:avLst/>
+          </a:prstGeom>
+        </p:spPr>
+        <p:txBody>
+          <a:bodyPr vert="horz" lIns="91440" tIns="45720" rIns="91440" bIns="45720" rtlCol="0"/>
+          <a:lstStyle>
+            <a:lvl1pPr algn="l">
+              <a:defRPr sz="1200"/>
+            </a:lvl1pPr>
+          </a:lstStyle>
+          <a:p>
+            <a:endParaRPr lang="en-US"/>
+          </a:p>
+        </p:txBody>
+      </p:sp>
+      <p:sp>
+        <p:nvSpPr>
+          <p:cNvPr id="3" name="Date Placeholder 2"/>
+          <p:cNvSpPr>
+            <a:spLocks noGrp="1"/>
+          </p:cNvSpPr>
+          <p:nvPr>
+            <p:ph type="dt" idx="1"/>
+          </p:nvPr>
+        </p:nvSpPr>
+        <p:spPr>
+          <a:xfrm>
+            <a:off x="3884613" y="0"/>
+            <a:ext cx="2971800" cy="457200"/>
+          </a:xfrm>
+          <a:prstGeom prst="rect">
+            <a:avLst/>
+          </a:prstGeom>
+        </p:spPr>
+        <p:txBody>
+          <a:bodyPr vert="horz" lIns="91440" tIns="45720" rIns="91440" bIns="45720" rtlCol="0"/>
+          <a:lstStyle>
+            <a:lvl1pPr algn="r">
+              <a:defRPr sz="1200"/>
+            </a:lvl1pPr>
+          </a:lstStyle>
+          <a:p>
+            <a:fld id="{0F89C1C7-3DCD-1040-A9CF-14679D8B5DDD}" type="datetimeFigureOut">
+              <a:rPr lang="en-US" smtClean="0"/>
+              <a:t>10/17/16</a:t>
+            </a:fld>
+            <a:endParaRPr lang="en-US"/>
+          </a:p>
+        </p:txBody>
+      </p:sp>
+      <p:sp>
+        <p:nvSpPr>
+          <p:cNvPr id="4" name="Slide Image Placeholder 3"/>
+          <p:cNvSpPr>
+            <a:spLocks noGrp="1" noRot="1" noChangeAspect="1"/>
+          </p:cNvSpPr>
+          <p:nvPr>
+            <p:ph type="sldImg" idx="2"/>
+          </p:nvPr>
+        </p:nvSpPr>
+        <p:spPr>
+          <a:xfrm>
+            <a:off x="1143000" y="685800"/>
+            <a:ext cx="4572000" cy="3429000"/>
+          </a:xfrm>
+          <a:prstGeom prst="rect">
+            <a:avLst/>
+          </a:prstGeom>
+          <a:noFill/>
+          <a:ln w="12700">
+            <a:solidFill>
+              <a:prstClr val="black"/>
+            </a:solidFill>
+          </a:ln>
+        </p:spPr>
+        <p:txBody>
+          <a:bodyPr vert="horz" lIns="91440" tIns="45720" rIns="91440" bIns="45720" rtlCol="0" anchor="ctr"/>
+          <a:lstStyle/>
+          <a:p>
+            <a:endParaRPr lang="en-US"/>
+          </a:p>
+        </p:txBody>
+      </p:sp>
+      <p:sp>
+        <p:nvSpPr>
+          <p:cNvPr id="5" name="Notes Placeholder 4"/>
+          <p:cNvSpPr>
+            <a:spLocks noGrp="1"/>
+          </p:cNvSpPr>
+          <p:nvPr>
+            <p:ph type="body" sz="quarter" idx="3"/>
+          </p:nvPr>
+        </p:nvSpPr>
+        <p:spPr>
+          <a:xfrm>
+            <a:off x="685800" y="4343400"/>
+            <a:ext cx="5486400" cy="4114800"/>
+          </a:xfrm>
+          <a:prstGeom prst="rect">
+            <a:avLst/>
+          </a:prstGeom>
+        </p:spPr>
+        <p:txBody>
+          <a:bodyPr vert="horz" lIns="91440" tIns="45720" rIns="91440" bIns="45720" rtlCol="0"/>
+          <a:lstStyle/>
+          <a:p>
+            <a:pPr lvl="0"/>
+            <a:r>
+              <a:rPr lang="en-US" smtClean="0"/>
+              <a:t>Click to edit Master text styles</a:t>
+            </a:r>
+          </a:p>
+          <a:p>
+            <a:pPr lvl="1"/>
+            <a:r>
+              <a:rPr lang="en-US" smtClean="0"/>
+              <a:t>Second level</a:t>
+            </a:r>
+          </a:p>
+          <a:p>
+            <a:pPr lvl="2"/>
+            <a:r>
+              <a:rPr lang="en-US" smtClean="0"/>
+              <a:t>Third level</a:t>
+            </a:r>
+          </a:p>
+          <a:p>
+            <a:pPr lvl="3"/>
+            <a:r>
+              <a:rPr lang="en-US" smtClean="0"/>
+              <a:t>Fourth level</a:t>
+            </a:r>
+          </a:p>
+          <a:p>
+            <a:pPr lvl="4"/>
+            <a:r>
+              <a:rPr lang="en-US" smtClean="0"/>
+              <a:t>Fifth level</a:t>
+            </a:r>
+            <a:endParaRPr lang="en-US"/>
+          </a:p>
+        </p:txBody>
+      </p:sp>
+      <p:sp>
+        <p:nvSpPr>
+          <p:cNvPr id="6" name="Footer Placeholder 5"/>
+          <p:cNvSpPr>
+            <a:spLocks noGrp="1"/>
+          </p:cNvSpPr>
+          <p:nvPr>
+            <p:ph type="ftr" sz="quarter" idx="4"/>
+          </p:nvPr>
+        </p:nvSpPr>
+        <p:spPr>
+          <a:xfrm>
+            <a:off x="0" y="8685213"/>
+            <a:ext cx="2971800" cy="457200"/>
+          </a:xfrm>
+          <a:prstGeom prst="rect">
+            <a:avLst/>
+          </a:prstGeom>
+        </p:spPr>
+        <p:txBody>
+          <a:bodyPr vert="horz" lIns="91440" tIns="45720" rIns="91440" bIns="45720" rtlCol="0" anchor="b"/>
+          <a:lstStyle>
+            <a:lvl1pPr algn="l">
+              <a:defRPr sz="1200"/>
+            </a:lvl1pPr>
+          </a:lstStyle>
+          <a:p>
+            <a:endParaRPr lang="en-US"/>
+          </a:p>
+        </p:txBody>
+      </p:sp>
+      <p:sp>
+        <p:nvSpPr>
+          <p:cNvPr id="7" name="Slide Number Placeholder 6"/>
+          <p:cNvSpPr>
+            <a:spLocks noGrp="1"/>
+          </p:cNvSpPr>
+          <p:nvPr>
+            <p:ph type="sldNum" sz="quarter" idx="5"/>
+          </p:nvPr>
+        </p:nvSpPr>
+        <p:spPr>
+          <a:xfrm>
+            <a:off x="3884613" y="8685213"/>
+            <a:ext cx="2971800" cy="457200"/>
+          </a:xfrm>
+          <a:prstGeom prst="rect">
+            <a:avLst/>
+          </a:prstGeom>
+        </p:spPr>
+        <p:txBody>
+          <a:bodyPr vert="horz" lIns="91440" tIns="45720" rIns="91440" bIns="45720" rtlCol="0" anchor="b"/>
+          <a:lstStyle>
+            <a:lvl1pPr algn="r">
+              <a:defRPr sz="1200"/>
+            </a:lvl1pPr>
+          </a:lstStyle>
+          <a:p>
+            <a:fld id="{BB5E49A5-4136-284D-997B-48E1D791AD67}" type="slidenum">
+              <a:rPr lang="en-US" smtClean="0"/>
+              <a:t>‹#›</a:t>
+            </a:fld>
+            <a:endParaRPr lang="en-US"/>
+          </a:p>
+        </p:txBody>
+      </p:sp>
+    </p:spTree>
+    <p:extLst>
+      <p:ext uri="{BB962C8B-B14F-4D97-AF65-F5344CB8AC3E}">
+        <p14:creationId xmlns:p14="http://schemas.microsoft.com/office/powerpoint/2010/main" val="2623252185"/>
+      </p:ext>
+    </p:extLst>
+  </p:cSld>
+  <p:clrMap bg1="lt1" tx1="dk1" bg2="lt2" tx2="dk2" accent1="accent1" accent2="accent2" accent3="accent3" accent4="accent4" accent5="accent5" accent6="accent6" hlink="hlink" folHlink="folHlink"/>
+  <p:notesStyle>
+    <a:lvl1pPr marL="0" algn="l" defTabSz="457200" rtl="0" eaLnBrk="1" latinLnBrk="0" hangingPunct="1">
+      <a:defRPr sz="1200" kern="1200">
+        <a:solidFill>
+          <a:schemeClr val="tx1"/>
+        </a:solidFill>
+        <a:latin typeface="+mn-lt"/>
+        <a:ea typeface="+mn-ea"/>
+        <a:cs typeface="+mn-cs"/>
+      </a:defRPr>
+    </a:lvl1pPr>
+    <a:lvl2pPr marL="457200" algn="l" defTabSz="457200" rtl="0" eaLnBrk="1" latinLnBrk="0" hangingPunct="1">
+      <a:defRPr sz="1200" kern="1200">
+        <a:solidFill>
+          <a:schemeClr val="tx1"/>
+        </a:solidFill>
+        <a:latin typeface="+mn-lt"/>
+        <a:ea typeface="+mn-ea"/>
+        <a:cs typeface="+mn-cs"/>
+      </a:defRPr>
+    </a:lvl2pPr>
+    <a:lvl3pPr marL="914400" algn="l" defTabSz="457200" rtl="0" eaLnBrk="1" latinLnBrk="0" hangingPunct="1">
+      <a:defRPr sz="1200" kern="1200">
+        <a:solidFill>
+          <a:schemeClr val="tx1"/>
+        </a:solidFill>
+        <a:latin typeface="+mn-lt"/>
+        <a:ea typeface="+mn-ea"/>
+        <a:cs typeface="+mn-cs"/>
+      </a:defRPr>
+    </a:lvl3pPr>
+    <a:lvl4pPr marL="1371600" algn="l" defTabSz="457200" rtl="0" eaLnBrk="1" latinLnBrk="0" hangingPunct="1">
+      <a:defRPr sz="1200" kern="1200">
+        <a:solidFill>
+          <a:schemeClr val="tx1"/>
+        </a:solidFill>
+        <a:latin typeface="+mn-lt"/>
+        <a:ea typeface="+mn-ea"/>
+        <a:cs typeface="+mn-cs"/>
+      </a:defRPr>
+    </a:lvl4pPr>
+    <a:lvl5pPr marL="1828800" algn="l" defTabSz="457200" rtl="0" eaLnBrk="1" latinLnBrk="0" hangingPunct="1">
+      <a:defRPr sz="1200" kern="1200">
+        <a:solidFill>
+          <a:schemeClr val="tx1"/>
+        </a:solidFill>
+        <a:latin typeface="+mn-lt"/>
+        <a:ea typeface="+mn-ea"/>
+        <a:cs typeface="+mn-cs"/>
+      </a:defRPr>
+    </a:lvl5pPr>
+    <a:lvl6pPr marL="2286000" algn="l" defTabSz="457200" rtl="0" eaLnBrk="1" latinLnBrk="0" hangingPunct="1">
+      <a:defRPr sz="1200" kern="1200">
+        <a:solidFill>
+          <a:schemeClr val="tx1"/>
+        </a:solidFill>
+        <a:latin typeface="+mn-lt"/>
+        <a:ea typeface="+mn-ea"/>
+        <a:cs typeface="+mn-cs"/>
+      </a:defRPr>
+    </a:lvl6pPr>
+    <a:lvl7pPr marL="2743200" algn="l" defTabSz="457200" rtl="0" eaLnBrk="1" latinLnBrk="0" hangingPunct="1">
+      <a:defRPr sz="1200" kern="1200">
+        <a:solidFill>
+          <a:schemeClr val="tx1"/>
+        </a:solidFill>
+        <a:latin typeface="+mn-lt"/>
+        <a:ea typeface="+mn-ea"/>
+        <a:cs typeface="+mn-cs"/>
+      </a:defRPr>
+    </a:lvl7pPr>
+    <a:lvl8pPr marL="3200400" algn="l" defTabSz="457200" rtl="0" eaLnBrk="1" latinLnBrk="0" hangingPunct="1">
+      <a:defRPr sz="1200" kern="1200">
+        <a:solidFill>
+          <a:schemeClr val="tx1"/>
+        </a:solidFill>
+        <a:latin typeface="+mn-lt"/>
+        <a:ea typeface="+mn-ea"/>
+        <a:cs typeface="+mn-cs"/>
+      </a:defRPr>
+    </a:lvl8pPr>
+    <a:lvl9pPr marL="3657600" algn="l" defTabSz="457200" rtl="0" eaLnBrk="1" latinLnBrk="0" hangingPunct="1">
+      <a:defRPr sz="1200" kern="1200">
+        <a:solidFill>
+          <a:schemeClr val="tx1"/>
+        </a:solidFill>
+        <a:latin typeface="+mn-lt"/>
+        <a:ea typeface="+mn-ea"/>
+        <a:cs typeface="+mn-cs"/>
+      </a:defRPr>
+    </a:lvl9pPr>
+  </p:notesStyle>
+</p:notesMaster>
+</file>
+
+<file path=ppt/notesSlides/notesSlide1.xml><?xml version="1.0" encoding="utf-8"?>
+<p:notes xmlns:a="http://schemas.openxmlformats.org/drawingml/2006/main" xmlns:p="http://schemas.openxmlformats.org/presentationml/2006/main" xmlns:r="http://schemas.openxmlformats.org/officeDocument/2006/relationships">
+  <p:cSld>
+    <p:spTree>
+      <p:nvGrpSpPr>
+        <p:cNvPr id="1" name=""/>
+        <p:cNvGrpSpPr/>
+        <p:nvPr/>
+      </p:nvGrpSpPr>
+      <p:grpSpPr>
+        <a:xfrm>
+          <a:off x="0" y="0"/>
+          <a:ext cx="0" cy="0"/>
+          <a:chOff x="0" y="0"/>
+          <a:chExt cx="0" cy="0"/>
+        </a:xfrm>
+      </p:grpSpPr>
+      <p:sp>
+        <p:nvSpPr>
+          <p:cNvPr id="2" name="Slide Image Placeholder 1"/>
+          <p:cNvSpPr>
+            <a:spLocks noGrp="1"/>
+          </p:cNvSpPr>
+          <p:nvPr>
+            <p:ph type="sldImg" idx="2"/>
+          </p:nvPr>
+        </p:nvSpPr>
+        <p:spPr/>
+      </p:sp>
+      <p:sp>
+        <p:nvSpPr>
+          <p:cNvPr id="3" name="Notes Placeholder 2"/>
+          <p:cNvSpPr>
+            <a:spLocks noGrp="1"/>
+          </p:cNvSpPr>
+          <p:nvPr>
+            <p:ph type="body" idx="3" sz="quarter"/>
+          </p:nvPr>
+        </p:nvSpPr>
+        <p:spPr/>
+        <p:txBody>
+          <a:bodyPr/>
+          <a:lstStyle/>
+          <a:p>
+            <a:r>
+              <a:t>Switch to the browser. Walk one applicant through scoring, show the arm the bandit picks and the uncertainty-driven REFER, then the PSI monitor staying GREEN/AMBER, and finally the HITL queue with per-referral cost. If anything breaks, jump to appendix slides A6-A8 and narrate over the screenshots.</a:t>
+            </a:r>
+          </a:p>
+        </p:txBody>
+      </p:sp>
+      <p:sp>
+        <p:nvSpPr>
+          <p:cNvPr id="4" name="Slide Number Placeholder 3"/>
+          <p:cNvSpPr>
+            <a:spLocks noGrp="1"/>
+          </p:cNvSpPr>
+          <p:nvPr>
+            <p:ph type="sldNum" idx="5" sz="quarter"/>
+          </p:nvPr>
+        </p:nvSpPr>
+        <p:spPr/>
+      </p:sp>
+    </p:spTree>
+  </p:cSld>
+  <p:clrMapOvr>
+    <a:masterClrMapping/>
+  </p:clrMapOvr>
+</p:notes>
 </file>
 
 <file path=ppt/slideLayouts/slideLayout1.xml><?xml version="1.0" encoding="utf-8"?>
@@ -3136,11 +3556,12 @@
         <p:spPr>
           <a:xfrm>
             <a:off x="548640" y="274320"/>
-            <a:ext cx="1005840" cy="991695"/>
-          </a:xfrm>
-          <a:prstGeom prst="rect">
-            <a:avLst/>
-          </a:prstGeom>
+            <a:ext cx="914400" cy="901541"/>
+          </a:xfrm>
+          <a:prstGeom prst="rect">
+            <a:avLst/>
+          </a:prstGeom>
+          <a:effectLst/>
         </p:spPr>
       </p:pic>
       <p:pic>
@@ -3159,12 +3580,13 @@
         </p:blipFill>
         <p:spPr>
           <a:xfrm>
-            <a:off x="1691640" y="365760"/>
-            <a:ext cx="1463040" cy="1386393"/>
-          </a:xfrm>
-          <a:prstGeom prst="rect">
-            <a:avLst/>
-          </a:prstGeom>
+            <a:off x="1600200" y="365760"/>
+            <a:ext cx="1325880" cy="1256418"/>
+          </a:xfrm>
+          <a:prstGeom prst="rect">
+            <a:avLst/>
+          </a:prstGeom>
+          <a:effectLst/>
         </p:spPr>
       </p:pic>
       <p:pic>
@@ -3183,12 +3605,13 @@
         </p:blipFill>
         <p:spPr>
           <a:xfrm>
-            <a:off x="10149840" y="320040"/>
-            <a:ext cx="1463040" cy="822960"/>
-          </a:xfrm>
-          <a:prstGeom prst="rect">
-            <a:avLst/>
-          </a:prstGeom>
+            <a:off x="10332720" y="320040"/>
+            <a:ext cx="1325880" cy="745808"/>
+          </a:xfrm>
+          <a:prstGeom prst="rect">
+            <a:avLst/>
+          </a:prstGeom>
+          <a:effectLst/>
         </p:spPr>
       </p:pic>
       <p:sp>
@@ -3199,8 +3622,8 @@
         </p:nvSpPr>
         <p:spPr>
           <a:xfrm>
-            <a:off x="3200400" y="411480"/>
-            <a:ext cx="6400800" cy="457200"/>
+            <a:off x="3108960" y="384048"/>
+            <a:ext cx="6583680" cy="457200"/>
           </a:xfrm>
           <a:prstGeom prst="rect">
             <a:avLst/>
@@ -3230,11 +3653,11 @@
           <a:lstStyle/>
           <a:p>
             <a:pPr algn="ctr">
-              <a:defRPr sz="2400" b="1" i="0">
+              <a:defRPr sz="2200" b="1" i="0">
                 <a:solidFill>
                   <a:srgbClr val="1A1A1A"/>
                 </a:solidFill>
-                <a:latin typeface="Times New Roman"/>
+                <a:latin typeface="Calibri"/>
               </a:defRPr>
             </a:pPr>
             <a:r>
@@ -3251,8 +3674,8 @@
         </p:nvSpPr>
         <p:spPr>
           <a:xfrm>
-            <a:off x="3200400" y="850392"/>
-            <a:ext cx="6400800" cy="365760"/>
+            <a:off x="3108960" y="841248"/>
+            <a:ext cx="6583680" cy="365760"/>
           </a:xfrm>
           <a:prstGeom prst="rect">
             <a:avLst/>
@@ -3282,11 +3705,11 @@
           <a:lstStyle/>
           <a:p>
             <a:pPr algn="ctr">
-              <a:defRPr sz="1700" b="0" i="0">
-                <a:solidFill>
-                  <a:srgbClr val="1A1A1A"/>
-                </a:solidFill>
-                <a:latin typeface="Times New Roman"/>
+              <a:defRPr sz="1500" b="0" i="0">
+                <a:solidFill>
+                  <a:srgbClr val="777777"/>
+                </a:solidFill>
+                <a:latin typeface="Calibri"/>
               </a:defRPr>
             </a:pPr>
             <a:r>
@@ -3303,8 +3726,8 @@
         </p:nvSpPr>
         <p:spPr>
           <a:xfrm>
-            <a:off x="792327" y="1920240"/>
-            <a:ext cx="10607040" cy="2011680"/>
+            <a:off x="5413248" y="1874519"/>
+            <a:ext cx="1371600" cy="41148"/>
           </a:xfrm>
           <a:prstGeom prst="rect">
             <a:avLst/>
@@ -3332,15 +3755,57 @@
           </a:fontRef>
         </p:style>
         <p:txBody>
-          <a:bodyPr rtlCol="0" anchor="ctr" wrap="square" lIns="365760" rIns="365760"/>
+          <a:bodyPr rtlCol="0" anchor="ctr"/>
+          <a:lstStyle/>
+          <a:p>
+            <a:pPr algn="ctr"/>
+          </a:p>
+        </p:txBody>
+      </p:sp>
+      <p:sp>
+        <p:nvSpPr>
+          <p:cNvPr id="8" name="Rectangle 7"/>
+          <p:cNvSpPr/>
+          <p:nvPr/>
+        </p:nvSpPr>
+        <p:spPr>
+          <a:xfrm>
+            <a:off x="822960" y="2148840"/>
+            <a:ext cx="10515600" cy="1554480"/>
+          </a:xfrm>
+          <a:prstGeom prst="rect">
+            <a:avLst/>
+          </a:prstGeom>
+          <a:noFill/>
+          <a:ln>
+            <a:noFill/>
+          </a:ln>
+          <a:effectLst/>
+        </p:spPr>
+        <p:style>
+          <a:lnRef idx="1">
+            <a:schemeClr val="accent1"/>
+          </a:lnRef>
+          <a:fillRef idx="3">
+            <a:schemeClr val="accent1"/>
+          </a:fillRef>
+          <a:effectRef idx="2">
+            <a:schemeClr val="accent1"/>
+          </a:effectRef>
+          <a:fontRef idx="minor">
+            <a:schemeClr val="lt1"/>
+          </a:fontRef>
+        </p:style>
+        <p:txBody>
+          <a:bodyPr rtlCol="0" anchor="ctr" wrap="square" lIns="45720" rIns="45720" tIns="18288" bIns="18288"/>
           <a:lstStyle/>
           <a:p>
             <a:pPr algn="ctr">
-              <a:defRPr sz="2400" b="1">
-                <a:solidFill>
-                  <a:srgbClr val="FFFFFF"/>
-                </a:solidFill>
-                <a:latin typeface="Times New Roman"/>
+              <a:defRPr sz="2700" b="1" i="0">
+                <a:solidFill>
+                  <a:srgbClr val="1A1A1A"/>
+                </a:solidFill>
+                <a:latin typeface="Calibri"/>
               </a:defRPr>
             </a:pPr>
             <a:r>
@@ -3351,14 +3816,58 @@
       </p:sp>
       <p:sp>
         <p:nvSpPr>
-          <p:cNvPr id="8" name="Rectangle 7"/>
-          <p:cNvSpPr/>
-          <p:nvPr/>
-        </p:nvSpPr>
-        <p:spPr>
-          <a:xfrm>
-            <a:off x="0" y="4251960"/>
-            <a:ext cx="12191695" cy="347472"/>
+          <p:cNvPr id="9" name="Rectangle 8"/>
+          <p:cNvSpPr/>
+          <p:nvPr/>
+        </p:nvSpPr>
+        <p:spPr>
+          <a:xfrm>
+            <a:off x="5413248" y="3886200"/>
+            <a:ext cx="1371600" cy="41148"/>
+          </a:xfrm>
+          <a:prstGeom prst="rect">
+            <a:avLst/>
+          </a:prstGeom>
+          <a:solidFill>
+            <a:srgbClr val="5D2A42"/>
+          </a:solidFill>
+          <a:ln>
+            <a:noFill/>
+          </a:ln>
+          <a:effectLst/>
+        </p:spPr>
+        <p:style>
+          <a:lnRef idx="1">
+            <a:schemeClr val="accent1"/>
+          </a:lnRef>
+          <a:fillRef idx="3">
+            <a:schemeClr val="accent1"/>
+          </a:fillRef>
+          <a:effectRef idx="2">
+            <a:schemeClr val="accent1"/>
+          </a:effectRef>
+          <a:fontRef idx="minor">
+            <a:schemeClr val="lt1"/>
+          </a:fontRef>
+        </p:style>
+        <p:txBody>
+          <a:bodyPr rtlCol="0" anchor="ctr"/>
+          <a:lstStyle/>
+          <a:p>
+            <a:pPr algn="ctr"/>
+          </a:p>
+        </p:txBody>
+      </p:sp>
+      <p:sp>
+        <p:nvSpPr>
+          <p:cNvPr id="10" name="Rectangle 9"/>
+          <p:cNvSpPr/>
+          <p:nvPr/>
+        </p:nvSpPr>
+        <p:spPr>
+          <a:xfrm>
+            <a:off x="0" y="4224528"/>
+            <a:ext cx="12191695" cy="310896"/>
           </a:xfrm>
           <a:prstGeom prst="rect">
             <a:avLst/>
@@ -3388,7 +3897,111 @@
           <a:lstStyle/>
           <a:p>
             <a:pPr algn="ctr">
-              <a:defRPr sz="1700" b="0" i="0">
+              <a:defRPr sz="1400" b="0" i="0">
+                <a:solidFill>
+                  <a:srgbClr val="777777"/>
+                </a:solidFill>
+                <a:latin typeface="Calibri"/>
+              </a:defRPr>
+            </a:pPr>
+            <a:r>
+              <a:t>Thesis Defense — Presented by</a:t>
+            </a:r>
+          </a:p>
+        </p:txBody>
+      </p:sp>
+      <p:sp>
+        <p:nvSpPr>
+          <p:cNvPr id="11" name="Rectangle 10"/>
+          <p:cNvSpPr/>
+          <p:nvPr/>
+        </p:nvSpPr>
+        <p:spPr>
+          <a:xfrm>
+            <a:off x="0" y="4535424"/>
+            <a:ext cx="12191695" cy="457200"/>
+          </a:xfrm>
+          <a:prstGeom prst="rect">
+            <a:avLst/>
+          </a:prstGeom>
+          <a:noFill/>
+          <a:ln>
+            <a:noFill/>
+          </a:ln>
+          <a:effectLst/>
+        </p:spPr>
+        <p:style>
+          <a:lnRef idx="1">
+            <a:schemeClr val="accent1"/>
+          </a:lnRef>
+          <a:fillRef idx="3">
+            <a:schemeClr val="accent1"/>
+          </a:fillRef>
+          <a:effectRef idx="2">
+            <a:schemeClr val="accent1"/>
+          </a:effectRef>
+          <a:fontRef idx="minor">
+            <a:schemeClr val="lt1"/>
+          </a:fontRef>
+        </p:style>
+        <p:txBody>
+          <a:bodyPr rtlCol="0" anchor="t" wrap="square" lIns="45720" rIns="45720" tIns="18288" bIns="18288"/>
+          <a:lstStyle/>
+          <a:p>
+            <a:pPr algn="ctr">
+              <a:defRPr sz="2700" b="1" i="0">
+                <a:solidFill>
+                  <a:srgbClr val="5D2A42"/>
+                </a:solidFill>
+                <a:latin typeface="Calibri"/>
+              </a:defRPr>
+            </a:pPr>
+            <a:r>
+              <a:t>LUN CHANPOLY</a:t>
+            </a:r>
+          </a:p>
+        </p:txBody>
+      </p:sp>
+      <p:sp>
+        <p:nvSpPr>
+          <p:cNvPr id="12" name="Rectangle 11"/>
+          <p:cNvSpPr/>
+          <p:nvPr/>
+        </p:nvSpPr>
+        <p:spPr>
+          <a:xfrm>
+            <a:off x="1371600" y="5193792"/>
+            <a:ext cx="5120640" cy="310896"/>
+          </a:xfrm>
+          <a:prstGeom prst="rect">
+            <a:avLst/>
+          </a:prstGeom>
+          <a:noFill/>
+          <a:ln>
+            <a:noFill/>
+          </a:ln>
+          <a:effectLst/>
+        </p:spPr>
+        <p:style>
+          <a:lnRef idx="1">
+            <a:schemeClr val="accent1"/>
+          </a:lnRef>
+          <a:fillRef idx="3">
+            <a:schemeClr val="accent1"/>
+          </a:fillRef>
+          <a:effectRef idx="2">
+            <a:schemeClr val="accent1"/>
+          </a:effectRef>
+          <a:fontRef idx="minor">
+            <a:schemeClr val="lt1"/>
+          </a:fontRef>
+        </p:style>
+        <p:txBody>
+          <a:bodyPr rtlCol="0" anchor="t" wrap="square" lIns="45720" rIns="45720" tIns="18288" bIns="18288"/>
+          <a:lstStyle/>
+          <a:p>
+            <a:pPr algn="l">
+              <a:defRPr sz="1400" b="0" i="0">
                 <a:solidFill>
                   <a:srgbClr val="1A1A1A"/>
                 </a:solidFill>
@@ -3396,21 +4009,21 @@
               </a:defRPr>
             </a:pPr>
             <a:r>
-              <a:t>Presented by:</a:t>
-            </a:r>
-          </a:p>
-        </p:txBody>
-      </p:sp>
-      <p:sp>
-        <p:nvSpPr>
-          <p:cNvPr id="9" name="Rectangle 8"/>
-          <p:cNvSpPr/>
-          <p:nvPr/>
-        </p:nvSpPr>
-        <p:spPr>
-          <a:xfrm>
-            <a:off x="0" y="4590288"/>
-            <a:ext cx="12191695" cy="457200"/>
+              <a:t>Supervisor      :  Dr. HAS Sothea</a:t>
+            </a:r>
+          </a:p>
+        </p:txBody>
+      </p:sp>
+      <p:sp>
+        <p:nvSpPr>
+          <p:cNvPr id="13" name="Rectangle 12"/>
+          <p:cNvSpPr/>
+          <p:nvPr/>
+        </p:nvSpPr>
+        <p:spPr>
+          <a:xfrm>
+            <a:off x="6858000" y="5193792"/>
+            <a:ext cx="5120640" cy="310896"/>
           </a:xfrm>
           <a:prstGeom prst="rect">
             <a:avLst/>
@@ -3439,29 +4052,29 @@
           <a:bodyPr rtlCol="0" anchor="t" wrap="square" lIns="45720" rIns="45720" tIns="18288" bIns="18288"/>
           <a:lstStyle/>
           <a:p>
-            <a:pPr algn="ctr">
-              <a:defRPr sz="2800" b="1" i="0">
+            <a:pPr algn="l">
+              <a:defRPr sz="1400" b="0" i="0">
                 <a:solidFill>
                   <a:srgbClr val="1A1A1A"/>
                 </a:solidFill>
-                <a:latin typeface="Times New Roman"/>
-              </a:defRPr>
-            </a:pPr>
-            <a:r>
-              <a:t>LUN CHANPOLY</a:t>
-            </a:r>
-          </a:p>
-        </p:txBody>
-      </p:sp>
-      <p:sp>
-        <p:nvSpPr>
-          <p:cNvPr id="10" name="Rectangle 9"/>
-          <p:cNvSpPr/>
-          <p:nvPr/>
-        </p:nvSpPr>
-        <p:spPr>
-          <a:xfrm>
-            <a:off x="1371600" y="5212080"/>
+                <a:latin typeface="Calibri"/>
+              </a:defRPr>
+            </a:pPr>
+            <a:r>
+              <a:t>Organization :  DAC (Decent Actuarial Consultants)</a:t>
+            </a:r>
+          </a:p>
+        </p:txBody>
+      </p:sp>
+      <p:sp>
+        <p:nvSpPr>
+          <p:cNvPr id="14" name="Rectangle 13"/>
+          <p:cNvSpPr/>
+          <p:nvPr/>
+        </p:nvSpPr>
+        <p:spPr>
+          <a:xfrm>
+            <a:off x="1371600" y="5522976"/>
             <a:ext cx="5120640" cy="310896"/>
           </a:xfrm>
           <a:prstGeom prst="rect">
@@ -3492,7 +4105,7 @@
           <a:lstStyle/>
           <a:p>
             <a:pPr algn="l">
-              <a:defRPr sz="1500" b="0" i="0">
+              <a:defRPr sz="1400" b="0" i="0">
                 <a:solidFill>
                   <a:srgbClr val="1A1A1A"/>
                 </a:solidFill>
@@ -3500,20 +4113,20 @@
               </a:defRPr>
             </a:pPr>
             <a:r>
-              <a:t>Supervisor      :  Dr. HAS Sothea</a:t>
-            </a:r>
-          </a:p>
-        </p:txBody>
-      </p:sp>
-      <p:sp>
-        <p:nvSpPr>
-          <p:cNvPr id="11" name="Rectangle 10"/>
-          <p:cNvSpPr/>
-          <p:nvPr/>
-        </p:nvSpPr>
-        <p:spPr>
-          <a:xfrm>
-            <a:off x="6858000" y="5212080"/>
+              <a:t>Co-Supervisor  :  Mr. PHOK Ponna</a:t>
+            </a:r>
+          </a:p>
+        </p:txBody>
+      </p:sp>
+      <p:sp>
+        <p:nvSpPr>
+          <p:cNvPr id="15" name="Rectangle 14"/>
+          <p:cNvSpPr/>
+          <p:nvPr/>
+        </p:nvSpPr>
+        <p:spPr>
+          <a:xfrm>
+            <a:off x="6858000" y="5522976"/>
             <a:ext cx="5120640" cy="310896"/>
           </a:xfrm>
           <a:prstGeom prst="rect">
@@ -3544,7 +4157,7 @@
           <a:lstStyle/>
           <a:p>
             <a:pPr algn="l">
-              <a:defRPr sz="1500" b="0" i="0">
+              <a:defRPr sz="1400" b="0" i="0">
                 <a:solidFill>
                   <a:srgbClr val="1A1A1A"/>
                 </a:solidFill>
@@ -3552,110 +4165,6 @@
               </a:defRPr>
             </a:pPr>
             <a:r>
-              <a:t>Organization :  DAC (Decent Actuarial Consultants)</a:t>
-            </a:r>
-          </a:p>
-        </p:txBody>
-      </p:sp>
-      <p:sp>
-        <p:nvSpPr>
-          <p:cNvPr id="12" name="Rectangle 11"/>
-          <p:cNvSpPr/>
-          <p:nvPr/>
-        </p:nvSpPr>
-        <p:spPr>
-          <a:xfrm>
-            <a:off x="1371600" y="5541264"/>
-            <a:ext cx="5120640" cy="310896"/>
-          </a:xfrm>
-          <a:prstGeom prst="rect">
-            <a:avLst/>
-          </a:prstGeom>
-          <a:noFill/>
-          <a:ln>
-            <a:noFill/>
-          </a:ln>
-          <a:effectLst/>
-        </p:spPr>
-        <p:style>
-          <a:lnRef idx="1">
-            <a:schemeClr val="accent1"/>
-          </a:lnRef>
-          <a:fillRef idx="3">
-            <a:schemeClr val="accent1"/>
-          </a:fillRef>
-          <a:effectRef idx="2">
-            <a:schemeClr val="accent1"/>
-          </a:effectRef>
-          <a:fontRef idx="minor">
-            <a:schemeClr val="lt1"/>
-          </a:fontRef>
-        </p:style>
-        <p:txBody>
-          <a:bodyPr rtlCol="0" anchor="t" wrap="square" lIns="45720" rIns="45720" tIns="18288" bIns="18288"/>
-          <a:lstStyle/>
-          <a:p>
-            <a:pPr algn="l">
-              <a:defRPr sz="1500" b="0" i="0">
-                <a:solidFill>
-                  <a:srgbClr val="1A1A1A"/>
-                </a:solidFill>
-                <a:latin typeface="Calibri"/>
-              </a:defRPr>
-            </a:pPr>
-            <a:r>
-              <a:t>Co-Supervisor  :  Mr. PHOK Ponna</a:t>
-            </a:r>
-          </a:p>
-        </p:txBody>
-      </p:sp>
-      <p:sp>
-        <p:nvSpPr>
-          <p:cNvPr id="13" name="Rectangle 12"/>
-          <p:cNvSpPr/>
-          <p:nvPr/>
-        </p:nvSpPr>
-        <p:spPr>
-          <a:xfrm>
-            <a:off x="6858000" y="5541264"/>
-            <a:ext cx="5120640" cy="310896"/>
-          </a:xfrm>
-          <a:prstGeom prst="rect">
-            <a:avLst/>
-          </a:prstGeom>
-          <a:noFill/>
-          <a:ln>
-            <a:noFill/>
-          </a:ln>
-          <a:effectLst/>
-        </p:spPr>
-        <p:style>
-          <a:lnRef idx="1">
-            <a:schemeClr val="accent1"/>
-          </a:lnRef>
-          <a:fillRef idx="3">
-            <a:schemeClr val="accent1"/>
-          </a:fillRef>
-          <a:effectRef idx="2">
-            <a:schemeClr val="accent1"/>
-          </a:effectRef>
-          <a:fontRef idx="minor">
-            <a:schemeClr val="lt1"/>
-          </a:fontRef>
-        </p:style>
-        <p:txBody>
-          <a:bodyPr rtlCol="0" anchor="t" wrap="square" lIns="45720" rIns="45720" tIns="18288" bIns="18288"/>
-          <a:lstStyle/>
-          <a:p>
-            <a:pPr algn="l">
-              <a:defRPr sz="1500" b="0" i="0">
-                <a:solidFill>
-                  <a:srgbClr val="1A1A1A"/>
-                </a:solidFill>
-                <a:latin typeface="Calibri"/>
-              </a:defRPr>
-            </a:pPr>
-            <a:r>
               <a:t>Duration        :  Mar 2026 – Jun 2026</a:t>
             </a:r>
           </a:p>
@@ -3663,7 +4172,7 @@
       </p:sp>
       <p:sp>
         <p:nvSpPr>
-          <p:cNvPr id="14" name="Rectangle 13"/>
+          <p:cNvPr id="16" name="Rectangle 15"/>
           <p:cNvSpPr/>
           <p:nvPr/>
         </p:nvSpPr>
@@ -3700,9 +4209,9 @@
           <a:lstStyle/>
           <a:p>
             <a:pPr algn="ctr">
-              <a:defRPr sz="1700" b="0" i="0">
-                <a:solidFill>
-                  <a:srgbClr val="1A1A1A"/>
+              <a:defRPr sz="1500" b="1" i="0">
+                <a:solidFill>
+                  <a:srgbClr val="777777"/>
                 </a:solidFill>
                 <a:latin typeface="Calibri"/>
               </a:defRPr>
@@ -15756,8 +16265,60 @@
         </p:nvSpPr>
         <p:spPr>
           <a:xfrm>
-            <a:off x="0" y="0"/>
-            <a:ext cx="2103120" cy="6858000"/>
+            <a:off x="457200" y="502920"/>
+            <a:ext cx="8229600" cy="640080"/>
+          </a:xfrm>
+          <a:prstGeom prst="rect">
+            <a:avLst/>
+          </a:prstGeom>
+          <a:noFill/>
+          <a:ln>
+            <a:noFill/>
+          </a:ln>
+          <a:effectLst/>
+        </p:spPr>
+        <p:style>
+          <a:lnRef idx="1">
+            <a:schemeClr val="accent1"/>
+          </a:lnRef>
+          <a:fillRef idx="3">
+            <a:schemeClr val="accent1"/>
+          </a:fillRef>
+          <a:effectRef idx="2">
+            <a:schemeClr val="accent1"/>
+          </a:effectRef>
+          <a:fontRef idx="minor">
+            <a:schemeClr val="lt1"/>
+          </a:fontRef>
+        </p:style>
+        <p:txBody>
+          <a:bodyPr rtlCol="0" anchor="t" wrap="square" lIns="45720" rIns="45720" tIns="18288" bIns="18288"/>
+          <a:lstStyle/>
+          <a:p>
+            <a:pPr algn="l">
+              <a:defRPr sz="3000" b="1" i="0">
+                <a:solidFill>
+                  <a:srgbClr val="1A1A1A"/>
+                </a:solidFill>
+                <a:latin typeface="Calibri"/>
+              </a:defRPr>
+            </a:pPr>
+            <a:r>
+              <a:t>Table of Contents</a:t>
+            </a:r>
+          </a:p>
+        </p:txBody>
+      </p:sp>
+      <p:sp>
+        <p:nvSpPr>
+          <p:cNvPr id="3" name="Rectangle 2"/>
+          <p:cNvSpPr/>
+          <p:nvPr/>
+        </p:nvSpPr>
+        <p:spPr>
+          <a:xfrm>
+            <a:off x="457200" y="1207008"/>
+            <a:ext cx="502920" cy="41148"/>
           </a:xfrm>
           <a:prstGeom prst="rect">
             <a:avLst/>
@@ -15794,20 +16355,124 @@
       </p:sp>
       <p:sp>
         <p:nvSpPr>
-          <p:cNvPr id="3" name="Rectangle 2"/>
-          <p:cNvSpPr/>
-          <p:nvPr/>
-        </p:nvSpPr>
-        <p:spPr>
-          <a:xfrm>
-            <a:off x="502920" y="411480"/>
-            <a:ext cx="502920" cy="45720"/>
+          <p:cNvPr id="4" name="Rectangle 3"/>
+          <p:cNvSpPr/>
+          <p:nvPr/>
+        </p:nvSpPr>
+        <p:spPr>
+          <a:xfrm>
+            <a:off x="822960" y="1783080"/>
+            <a:ext cx="1005840" cy="594360"/>
+          </a:xfrm>
+          <a:prstGeom prst="rect">
+            <a:avLst/>
+          </a:prstGeom>
+          <a:noFill/>
+          <a:ln>
+            <a:noFill/>
+          </a:ln>
+          <a:effectLst/>
+        </p:spPr>
+        <p:style>
+          <a:lnRef idx="1">
+            <a:schemeClr val="accent1"/>
+          </a:lnRef>
+          <a:fillRef idx="3">
+            <a:schemeClr val="accent1"/>
+          </a:fillRef>
+          <a:effectRef idx="2">
+            <a:schemeClr val="accent1"/>
+          </a:effectRef>
+          <a:fontRef idx="minor">
+            <a:schemeClr val="lt1"/>
+          </a:fontRef>
+        </p:style>
+        <p:txBody>
+          <a:bodyPr rtlCol="0" anchor="t" wrap="square" lIns="45720" rIns="45720" tIns="18288" bIns="18288"/>
+          <a:lstStyle/>
+          <a:p>
+            <a:pPr algn="l">
+              <a:defRPr sz="3000" b="1" i="0">
+                <a:solidFill>
+                  <a:srgbClr val="5D2A42"/>
+                </a:solidFill>
+                <a:latin typeface="Calibri"/>
+              </a:defRPr>
+            </a:pPr>
+            <a:r>
+              <a:t>i</a:t>
+            </a:r>
+          </a:p>
+        </p:txBody>
+      </p:sp>
+      <p:sp>
+        <p:nvSpPr>
+          <p:cNvPr id="5" name="Rectangle 4"/>
+          <p:cNvSpPr/>
+          <p:nvPr/>
+        </p:nvSpPr>
+        <p:spPr>
+          <a:xfrm>
+            <a:off x="1965960" y="1837944"/>
+            <a:ext cx="4206240" cy="457200"/>
+          </a:xfrm>
+          <a:prstGeom prst="rect">
+            <a:avLst/>
+          </a:prstGeom>
+          <a:noFill/>
+          <a:ln>
+            <a:noFill/>
+          </a:ln>
+          <a:effectLst/>
+        </p:spPr>
+        <p:style>
+          <a:lnRef idx="1">
+            <a:schemeClr val="accent1"/>
+          </a:lnRef>
+          <a:fillRef idx="3">
+            <a:schemeClr val="accent1"/>
+          </a:fillRef>
+          <a:effectRef idx="2">
+            <a:schemeClr val="accent1"/>
+          </a:effectRef>
+          <a:fontRef idx="minor">
+            <a:schemeClr val="lt1"/>
+          </a:fontRef>
+        </p:style>
+        <p:txBody>
+          <a:bodyPr rtlCol="0" anchor="t" wrap="square" lIns="45720" rIns="45720" tIns="18288" bIns="18288"/>
+          <a:lstStyle/>
+          <a:p>
+            <a:pPr algn="l">
+              <a:defRPr sz="1900" b="1" i="0">
+                <a:solidFill>
+                  <a:srgbClr val="1A1A1A"/>
+                </a:solidFill>
+                <a:latin typeface="Calibri"/>
+              </a:defRPr>
+            </a:pPr>
+            <a:r>
+              <a:t>Introduction</a:t>
+            </a:r>
+          </a:p>
+        </p:txBody>
+      </p:sp>
+      <p:sp>
+        <p:nvSpPr>
+          <p:cNvPr id="6" name="Rectangle 5"/>
+          <p:cNvSpPr/>
+          <p:nvPr/>
+        </p:nvSpPr>
+        <p:spPr>
+          <a:xfrm>
+            <a:off x="1965960" y="2350008"/>
+            <a:ext cx="3931920" cy="10972"/>
           </a:xfrm>
           <a:prstGeom prst="rect">
             <a:avLst/>
           </a:prstGeom>
           <a:solidFill>
-            <a:srgbClr val="FFFFFF"/>
+            <a:srgbClr val="DDDDDD"/>
           </a:solidFill>
           <a:ln>
             <a:noFill/>
@@ -15838,20 +16503,124 @@
       </p:sp>
       <p:sp>
         <p:nvSpPr>
-          <p:cNvPr id="4" name="Rectangle 3"/>
-          <p:cNvSpPr/>
-          <p:nvPr/>
-        </p:nvSpPr>
-        <p:spPr>
-          <a:xfrm>
-            <a:off x="502920" y="576072"/>
-            <a:ext cx="502920" cy="45720"/>
+          <p:cNvPr id="7" name="Rectangle 6"/>
+          <p:cNvSpPr/>
+          <p:nvPr/>
+        </p:nvSpPr>
+        <p:spPr>
+          <a:xfrm>
+            <a:off x="822960" y="3200400"/>
+            <a:ext cx="1005840" cy="594360"/>
+          </a:xfrm>
+          <a:prstGeom prst="rect">
+            <a:avLst/>
+          </a:prstGeom>
+          <a:noFill/>
+          <a:ln>
+            <a:noFill/>
+          </a:ln>
+          <a:effectLst/>
+        </p:spPr>
+        <p:style>
+          <a:lnRef idx="1">
+            <a:schemeClr val="accent1"/>
+          </a:lnRef>
+          <a:fillRef idx="3">
+            <a:schemeClr val="accent1"/>
+          </a:fillRef>
+          <a:effectRef idx="2">
+            <a:schemeClr val="accent1"/>
+          </a:effectRef>
+          <a:fontRef idx="minor">
+            <a:schemeClr val="lt1"/>
+          </a:fontRef>
+        </p:style>
+        <p:txBody>
+          <a:bodyPr rtlCol="0" anchor="t" wrap="square" lIns="45720" rIns="45720" tIns="18288" bIns="18288"/>
+          <a:lstStyle/>
+          <a:p>
+            <a:pPr algn="l">
+              <a:defRPr sz="3000" b="1" i="0">
+                <a:solidFill>
+                  <a:srgbClr val="5D2A42"/>
+                </a:solidFill>
+                <a:latin typeface="Calibri"/>
+              </a:defRPr>
+            </a:pPr>
+            <a:r>
+              <a:t>ii</a:t>
+            </a:r>
+          </a:p>
+        </p:txBody>
+      </p:sp>
+      <p:sp>
+        <p:nvSpPr>
+          <p:cNvPr id="8" name="Rectangle 7"/>
+          <p:cNvSpPr/>
+          <p:nvPr/>
+        </p:nvSpPr>
+        <p:spPr>
+          <a:xfrm>
+            <a:off x="1965960" y="3255264"/>
+            <a:ext cx="4206240" cy="457200"/>
+          </a:xfrm>
+          <a:prstGeom prst="rect">
+            <a:avLst/>
+          </a:prstGeom>
+          <a:noFill/>
+          <a:ln>
+            <a:noFill/>
+          </a:ln>
+          <a:effectLst/>
+        </p:spPr>
+        <p:style>
+          <a:lnRef idx="1">
+            <a:schemeClr val="accent1"/>
+          </a:lnRef>
+          <a:fillRef idx="3">
+            <a:schemeClr val="accent1"/>
+          </a:fillRef>
+          <a:effectRef idx="2">
+            <a:schemeClr val="accent1"/>
+          </a:effectRef>
+          <a:fontRef idx="minor">
+            <a:schemeClr val="lt1"/>
+          </a:fontRef>
+        </p:style>
+        <p:txBody>
+          <a:bodyPr rtlCol="0" anchor="t" wrap="square" lIns="45720" rIns="45720" tIns="18288" bIns="18288"/>
+          <a:lstStyle/>
+          <a:p>
+            <a:pPr algn="l">
+              <a:defRPr sz="1900" b="1" i="0">
+                <a:solidFill>
+                  <a:srgbClr val="1A1A1A"/>
+                </a:solidFill>
+                <a:latin typeface="Calibri"/>
+              </a:defRPr>
+            </a:pPr>
+            <a:r>
+              <a:t>Internship at DAC</a:t>
+            </a:r>
+          </a:p>
+        </p:txBody>
+      </p:sp>
+      <p:sp>
+        <p:nvSpPr>
+          <p:cNvPr id="9" name="Rectangle 8"/>
+          <p:cNvSpPr/>
+          <p:nvPr/>
+        </p:nvSpPr>
+        <p:spPr>
+          <a:xfrm>
+            <a:off x="1965960" y="3767328"/>
+            <a:ext cx="3931920" cy="10972"/>
           </a:xfrm>
           <a:prstGeom prst="rect">
             <a:avLst/>
           </a:prstGeom>
           <a:solidFill>
-            <a:srgbClr val="FFFFFF"/>
+            <a:srgbClr val="DDDDDD"/>
           </a:solidFill>
           <a:ln>
             <a:noFill/>
@@ -15882,20 +16651,124 @@
       </p:sp>
       <p:sp>
         <p:nvSpPr>
-          <p:cNvPr id="5" name="Rectangle 4"/>
-          <p:cNvSpPr/>
-          <p:nvPr/>
-        </p:nvSpPr>
-        <p:spPr>
-          <a:xfrm>
-            <a:off x="502920" y="740664"/>
-            <a:ext cx="502920" cy="45720"/>
+          <p:cNvPr id="10" name="Rectangle 9"/>
+          <p:cNvSpPr/>
+          <p:nvPr/>
+        </p:nvSpPr>
+        <p:spPr>
+          <a:xfrm>
+            <a:off x="822960" y="4617720"/>
+            <a:ext cx="1005840" cy="594360"/>
+          </a:xfrm>
+          <a:prstGeom prst="rect">
+            <a:avLst/>
+          </a:prstGeom>
+          <a:noFill/>
+          <a:ln>
+            <a:noFill/>
+          </a:ln>
+          <a:effectLst/>
+        </p:spPr>
+        <p:style>
+          <a:lnRef idx="1">
+            <a:schemeClr val="accent1"/>
+          </a:lnRef>
+          <a:fillRef idx="3">
+            <a:schemeClr val="accent1"/>
+          </a:fillRef>
+          <a:effectRef idx="2">
+            <a:schemeClr val="accent1"/>
+          </a:effectRef>
+          <a:fontRef idx="minor">
+            <a:schemeClr val="lt1"/>
+          </a:fontRef>
+        </p:style>
+        <p:txBody>
+          <a:bodyPr rtlCol="0" anchor="t" wrap="square" lIns="45720" rIns="45720" tIns="18288" bIns="18288"/>
+          <a:lstStyle/>
+          <a:p>
+            <a:pPr algn="l">
+              <a:defRPr sz="3000" b="1" i="0">
+                <a:solidFill>
+                  <a:srgbClr val="5D2A42"/>
+                </a:solidFill>
+                <a:latin typeface="Calibri"/>
+              </a:defRPr>
+            </a:pPr>
+            <a:r>
+              <a:t>iii</a:t>
+            </a:r>
+          </a:p>
+        </p:txBody>
+      </p:sp>
+      <p:sp>
+        <p:nvSpPr>
+          <p:cNvPr id="11" name="Rectangle 10"/>
+          <p:cNvSpPr/>
+          <p:nvPr/>
+        </p:nvSpPr>
+        <p:spPr>
+          <a:xfrm>
+            <a:off x="1965960" y="4672584"/>
+            <a:ext cx="4206240" cy="457200"/>
+          </a:xfrm>
+          <a:prstGeom prst="rect">
+            <a:avLst/>
+          </a:prstGeom>
+          <a:noFill/>
+          <a:ln>
+            <a:noFill/>
+          </a:ln>
+          <a:effectLst/>
+        </p:spPr>
+        <p:style>
+          <a:lnRef idx="1">
+            <a:schemeClr val="accent1"/>
+          </a:lnRef>
+          <a:fillRef idx="3">
+            <a:schemeClr val="accent1"/>
+          </a:fillRef>
+          <a:effectRef idx="2">
+            <a:schemeClr val="accent1"/>
+          </a:effectRef>
+          <a:fontRef idx="minor">
+            <a:schemeClr val="lt1"/>
+          </a:fontRef>
+        </p:style>
+        <p:txBody>
+          <a:bodyPr rtlCol="0" anchor="t" wrap="square" lIns="45720" rIns="45720" tIns="18288" bIns="18288"/>
+          <a:lstStyle/>
+          <a:p>
+            <a:pPr algn="l">
+              <a:defRPr sz="1900" b="1" i="0">
+                <a:solidFill>
+                  <a:srgbClr val="1A1A1A"/>
+                </a:solidFill>
+                <a:latin typeface="Calibri"/>
+              </a:defRPr>
+            </a:pPr>
+            <a:r>
+              <a:t>Literature Review</a:t>
+            </a:r>
+          </a:p>
+        </p:txBody>
+      </p:sp>
+      <p:sp>
+        <p:nvSpPr>
+          <p:cNvPr id="12" name="Rectangle 11"/>
+          <p:cNvSpPr/>
+          <p:nvPr/>
+        </p:nvSpPr>
+        <p:spPr>
+          <a:xfrm>
+            <a:off x="1965960" y="5184648"/>
+            <a:ext cx="3931920" cy="10972"/>
           </a:xfrm>
           <a:prstGeom prst="rect">
             <a:avLst/>
           </a:prstGeom>
           <a:solidFill>
-            <a:srgbClr val="FFFFFF"/>
+            <a:srgbClr val="DDDDDD"/>
           </a:solidFill>
           <a:ln>
             <a:noFill/>
@@ -15926,20 +16799,124 @@
       </p:sp>
       <p:sp>
         <p:nvSpPr>
-          <p:cNvPr id="6" name="Rectangle 5"/>
-          <p:cNvSpPr/>
-          <p:nvPr/>
-        </p:nvSpPr>
-        <p:spPr>
-          <a:xfrm>
-            <a:off x="594360" y="2743200"/>
-            <a:ext cx="777240" cy="777240"/>
+          <p:cNvPr id="13" name="Rectangle 12"/>
+          <p:cNvSpPr/>
+          <p:nvPr/>
+        </p:nvSpPr>
+        <p:spPr>
+          <a:xfrm>
+            <a:off x="6492240" y="1783080"/>
+            <a:ext cx="1005840" cy="594360"/>
+          </a:xfrm>
+          <a:prstGeom prst="rect">
+            <a:avLst/>
+          </a:prstGeom>
+          <a:noFill/>
+          <a:ln>
+            <a:noFill/>
+          </a:ln>
+          <a:effectLst/>
+        </p:spPr>
+        <p:style>
+          <a:lnRef idx="1">
+            <a:schemeClr val="accent1"/>
+          </a:lnRef>
+          <a:fillRef idx="3">
+            <a:schemeClr val="accent1"/>
+          </a:fillRef>
+          <a:effectRef idx="2">
+            <a:schemeClr val="accent1"/>
+          </a:effectRef>
+          <a:fontRef idx="minor">
+            <a:schemeClr val="lt1"/>
+          </a:fontRef>
+        </p:style>
+        <p:txBody>
+          <a:bodyPr rtlCol="0" anchor="t" wrap="square" lIns="45720" rIns="45720" tIns="18288" bIns="18288"/>
+          <a:lstStyle/>
+          <a:p>
+            <a:pPr algn="l">
+              <a:defRPr sz="3000" b="1" i="0">
+                <a:solidFill>
+                  <a:srgbClr val="5D2A42"/>
+                </a:solidFill>
+                <a:latin typeface="Calibri"/>
+              </a:defRPr>
+            </a:pPr>
+            <a:r>
+              <a:t>iv</a:t>
+            </a:r>
+          </a:p>
+        </p:txBody>
+      </p:sp>
+      <p:sp>
+        <p:nvSpPr>
+          <p:cNvPr id="14" name="Rectangle 13"/>
+          <p:cNvSpPr/>
+          <p:nvPr/>
+        </p:nvSpPr>
+        <p:spPr>
+          <a:xfrm>
+            <a:off x="7635240" y="1837944"/>
+            <a:ext cx="4206240" cy="457200"/>
+          </a:xfrm>
+          <a:prstGeom prst="rect">
+            <a:avLst/>
+          </a:prstGeom>
+          <a:noFill/>
+          <a:ln>
+            <a:noFill/>
+          </a:ln>
+          <a:effectLst/>
+        </p:spPr>
+        <p:style>
+          <a:lnRef idx="1">
+            <a:schemeClr val="accent1"/>
+          </a:lnRef>
+          <a:fillRef idx="3">
+            <a:schemeClr val="accent1"/>
+          </a:fillRef>
+          <a:effectRef idx="2">
+            <a:schemeClr val="accent1"/>
+          </a:effectRef>
+          <a:fontRef idx="minor">
+            <a:schemeClr val="lt1"/>
+          </a:fontRef>
+        </p:style>
+        <p:txBody>
+          <a:bodyPr rtlCol="0" anchor="t" wrap="square" lIns="45720" rIns="45720" tIns="18288" bIns="18288"/>
+          <a:lstStyle/>
+          <a:p>
+            <a:pPr algn="l">
+              <a:defRPr sz="1900" b="1" i="0">
+                <a:solidFill>
+                  <a:srgbClr val="1A1A1A"/>
+                </a:solidFill>
+                <a:latin typeface="Calibri"/>
+              </a:defRPr>
+            </a:pPr>
+            <a:r>
+              <a:t>Methodology</a:t>
+            </a:r>
+          </a:p>
+        </p:txBody>
+      </p:sp>
+      <p:sp>
+        <p:nvSpPr>
+          <p:cNvPr id="15" name="Rectangle 14"/>
+          <p:cNvSpPr/>
+          <p:nvPr/>
+        </p:nvSpPr>
+        <p:spPr>
+          <a:xfrm>
+            <a:off x="7635240" y="2350008"/>
+            <a:ext cx="3931920" cy="10972"/>
           </a:xfrm>
           <a:prstGeom prst="rect">
             <a:avLst/>
           </a:prstGeom>
           <a:solidFill>
-            <a:srgbClr val="FFFFFF"/>
+            <a:srgbClr val="DDDDDD"/>
           </a:solidFill>
           <a:ln>
             <a:noFill/>
@@ -15964,31 +16941,130 @@
           <a:bodyPr rtlCol="0" anchor="ctr"/>
           <a:lstStyle/>
           <a:p>
-            <a:pPr algn="ctr">
-              <a:defRPr sz="2800"/>
-            </a:pPr>
-            <a:r>
-              <a:t>🎓</a:t>
-            </a:r>
-          </a:p>
-        </p:txBody>
-      </p:sp>
-      <p:sp>
-        <p:nvSpPr>
-          <p:cNvPr id="7" name="Rectangle 6"/>
-          <p:cNvSpPr/>
-          <p:nvPr/>
-        </p:nvSpPr>
-        <p:spPr>
-          <a:xfrm>
-            <a:off x="502920" y="6263640"/>
-            <a:ext cx="118872" cy="118872"/>
+            <a:pPr algn="ctr"/>
+          </a:p>
+        </p:txBody>
+      </p:sp>
+      <p:sp>
+        <p:nvSpPr>
+          <p:cNvPr id="16" name="Rectangle 15"/>
+          <p:cNvSpPr/>
+          <p:nvPr/>
+        </p:nvSpPr>
+        <p:spPr>
+          <a:xfrm>
+            <a:off x="6492240" y="3200400"/>
+            <a:ext cx="1005840" cy="594360"/>
+          </a:xfrm>
+          <a:prstGeom prst="rect">
+            <a:avLst/>
+          </a:prstGeom>
+          <a:noFill/>
+          <a:ln>
+            <a:noFill/>
+          </a:ln>
+          <a:effectLst/>
+        </p:spPr>
+        <p:style>
+          <a:lnRef idx="1">
+            <a:schemeClr val="accent1"/>
+          </a:lnRef>
+          <a:fillRef idx="3">
+            <a:schemeClr val="accent1"/>
+          </a:fillRef>
+          <a:effectRef idx="2">
+            <a:schemeClr val="accent1"/>
+          </a:effectRef>
+          <a:fontRef idx="minor">
+            <a:schemeClr val="lt1"/>
+          </a:fontRef>
+        </p:style>
+        <p:txBody>
+          <a:bodyPr rtlCol="0" anchor="t" wrap="square" lIns="45720" rIns="45720" tIns="18288" bIns="18288"/>
+          <a:lstStyle/>
+          <a:p>
+            <a:pPr algn="l">
+              <a:defRPr sz="3000" b="1" i="0">
+                <a:solidFill>
+                  <a:srgbClr val="5D2A42"/>
+                </a:solidFill>
+                <a:latin typeface="Calibri"/>
+              </a:defRPr>
+            </a:pPr>
+            <a:r>
+              <a:t>v</a:t>
+            </a:r>
+          </a:p>
+        </p:txBody>
+      </p:sp>
+      <p:sp>
+        <p:nvSpPr>
+          <p:cNvPr id="17" name="Rectangle 16"/>
+          <p:cNvSpPr/>
+          <p:nvPr/>
+        </p:nvSpPr>
+        <p:spPr>
+          <a:xfrm>
+            <a:off x="7635240" y="3255264"/>
+            <a:ext cx="4206240" cy="457200"/>
+          </a:xfrm>
+          <a:prstGeom prst="rect">
+            <a:avLst/>
+          </a:prstGeom>
+          <a:noFill/>
+          <a:ln>
+            <a:noFill/>
+          </a:ln>
+          <a:effectLst/>
+        </p:spPr>
+        <p:style>
+          <a:lnRef idx="1">
+            <a:schemeClr val="accent1"/>
+          </a:lnRef>
+          <a:fillRef idx="3">
+            <a:schemeClr val="accent1"/>
+          </a:fillRef>
+          <a:effectRef idx="2">
+            <a:schemeClr val="accent1"/>
+          </a:effectRef>
+          <a:fontRef idx="minor">
+            <a:schemeClr val="lt1"/>
+          </a:fontRef>
+        </p:style>
+        <p:txBody>
+          <a:bodyPr rtlCol="0" anchor="t" wrap="square" lIns="45720" rIns="45720" tIns="18288" bIns="18288"/>
+          <a:lstStyle/>
+          <a:p>
+            <a:pPr algn="l">
+              <a:defRPr sz="1900" b="1" i="0">
+                <a:solidFill>
+                  <a:srgbClr val="1A1A1A"/>
+                </a:solidFill>
+                <a:latin typeface="Calibri"/>
+              </a:defRPr>
+            </a:pPr>
+            <a:r>
+              <a:t>Results &amp; Discussion</a:t>
+            </a:r>
+          </a:p>
+        </p:txBody>
+      </p:sp>
+      <p:sp>
+        <p:nvSpPr>
+          <p:cNvPr id="18" name="Rectangle 17"/>
+          <p:cNvSpPr/>
+          <p:nvPr/>
+        </p:nvSpPr>
+        <p:spPr>
+          <a:xfrm>
+            <a:off x="7635240" y="3767328"/>
+            <a:ext cx="3931920" cy="10972"/>
           </a:xfrm>
           <a:prstGeom prst="rect">
             <a:avLst/>
           </a:prstGeom>
           <a:solidFill>
-            <a:srgbClr val="FFFFFF"/>
+            <a:srgbClr val="DDDDDD"/>
           </a:solidFill>
           <a:ln>
             <a:noFill/>
@@ -16019,20 +17095,124 @@
       </p:sp>
       <p:sp>
         <p:nvSpPr>
-          <p:cNvPr id="8" name="Rectangle 7"/>
-          <p:cNvSpPr/>
-          <p:nvPr/>
-        </p:nvSpPr>
-        <p:spPr>
-          <a:xfrm>
-            <a:off x="758952" y="6263640"/>
-            <a:ext cx="118872" cy="118872"/>
+          <p:cNvPr id="19" name="Rectangle 18"/>
+          <p:cNvSpPr/>
+          <p:nvPr/>
+        </p:nvSpPr>
+        <p:spPr>
+          <a:xfrm>
+            <a:off x="6492240" y="4617720"/>
+            <a:ext cx="1005840" cy="594360"/>
+          </a:xfrm>
+          <a:prstGeom prst="rect">
+            <a:avLst/>
+          </a:prstGeom>
+          <a:noFill/>
+          <a:ln>
+            <a:noFill/>
+          </a:ln>
+          <a:effectLst/>
+        </p:spPr>
+        <p:style>
+          <a:lnRef idx="1">
+            <a:schemeClr val="accent1"/>
+          </a:lnRef>
+          <a:fillRef idx="3">
+            <a:schemeClr val="accent1"/>
+          </a:fillRef>
+          <a:effectRef idx="2">
+            <a:schemeClr val="accent1"/>
+          </a:effectRef>
+          <a:fontRef idx="minor">
+            <a:schemeClr val="lt1"/>
+          </a:fontRef>
+        </p:style>
+        <p:txBody>
+          <a:bodyPr rtlCol="0" anchor="t" wrap="square" lIns="45720" rIns="45720" tIns="18288" bIns="18288"/>
+          <a:lstStyle/>
+          <a:p>
+            <a:pPr algn="l">
+              <a:defRPr sz="3000" b="1" i="0">
+                <a:solidFill>
+                  <a:srgbClr val="5D2A42"/>
+                </a:solidFill>
+                <a:latin typeface="Calibri"/>
+              </a:defRPr>
+            </a:pPr>
+            <a:r>
+              <a:t>vi</a:t>
+            </a:r>
+          </a:p>
+        </p:txBody>
+      </p:sp>
+      <p:sp>
+        <p:nvSpPr>
+          <p:cNvPr id="20" name="Rectangle 19"/>
+          <p:cNvSpPr/>
+          <p:nvPr/>
+        </p:nvSpPr>
+        <p:spPr>
+          <a:xfrm>
+            <a:off x="7635240" y="4672584"/>
+            <a:ext cx="4206240" cy="457200"/>
+          </a:xfrm>
+          <a:prstGeom prst="rect">
+            <a:avLst/>
+          </a:prstGeom>
+          <a:noFill/>
+          <a:ln>
+            <a:noFill/>
+          </a:ln>
+          <a:effectLst/>
+        </p:spPr>
+        <p:style>
+          <a:lnRef idx="1">
+            <a:schemeClr val="accent1"/>
+          </a:lnRef>
+          <a:fillRef idx="3">
+            <a:schemeClr val="accent1"/>
+          </a:fillRef>
+          <a:effectRef idx="2">
+            <a:schemeClr val="accent1"/>
+          </a:effectRef>
+          <a:fontRef idx="minor">
+            <a:schemeClr val="lt1"/>
+          </a:fontRef>
+        </p:style>
+        <p:txBody>
+          <a:bodyPr rtlCol="0" anchor="t" wrap="square" lIns="45720" rIns="45720" tIns="18288" bIns="18288"/>
+          <a:lstStyle/>
+          <a:p>
+            <a:pPr algn="l">
+              <a:defRPr sz="1900" b="1" i="0">
+                <a:solidFill>
+                  <a:srgbClr val="1A1A1A"/>
+                </a:solidFill>
+                <a:latin typeface="Calibri"/>
+              </a:defRPr>
+            </a:pPr>
+            <a:r>
+              <a:t>Limitations &amp; Conclusions</a:t>
+            </a:r>
+          </a:p>
+        </p:txBody>
+      </p:sp>
+      <p:sp>
+        <p:nvSpPr>
+          <p:cNvPr id="21" name="Rectangle 20"/>
+          <p:cNvSpPr/>
+          <p:nvPr/>
+        </p:nvSpPr>
+        <p:spPr>
+          <a:xfrm>
+            <a:off x="7635240" y="5184648"/>
+            <a:ext cx="3931920" cy="10972"/>
           </a:xfrm>
           <a:prstGeom prst="rect">
             <a:avLst/>
           </a:prstGeom>
           <a:solidFill>
-            <a:srgbClr val="FFFFFF"/>
+            <a:srgbClr val="DDDDDD"/>
           </a:solidFill>
           <a:ln>
             <a:noFill/>
@@ -16063,966 +17243,14 @@
       </p:sp>
       <p:sp>
         <p:nvSpPr>
-          <p:cNvPr id="9" name="Rectangle 8"/>
-          <p:cNvSpPr/>
-          <p:nvPr/>
-        </p:nvSpPr>
-        <p:spPr>
-          <a:xfrm>
-            <a:off x="1014984" y="6263640"/>
-            <a:ext cx="118872" cy="118872"/>
-          </a:xfrm>
-          <a:prstGeom prst="rect">
-            <a:avLst/>
-          </a:prstGeom>
-          <a:solidFill>
-            <a:srgbClr val="FFFFFF"/>
-          </a:solidFill>
-          <a:ln>
-            <a:noFill/>
-          </a:ln>
-          <a:effectLst/>
-        </p:spPr>
-        <p:style>
-          <a:lnRef idx="1">
-            <a:schemeClr val="accent1"/>
-          </a:lnRef>
-          <a:fillRef idx="3">
-            <a:schemeClr val="accent1"/>
-          </a:fillRef>
-          <a:effectRef idx="2">
-            <a:schemeClr val="accent1"/>
-          </a:effectRef>
-          <a:fontRef idx="minor">
-            <a:schemeClr val="lt1"/>
-          </a:fontRef>
-        </p:style>
-        <p:txBody>
-          <a:bodyPr rtlCol="0" anchor="ctr"/>
-          <a:lstStyle/>
-          <a:p>
-            <a:pPr algn="ctr"/>
-          </a:p>
-        </p:txBody>
-      </p:sp>
-      <p:sp>
-        <p:nvSpPr>
-          <p:cNvPr id="10" name="Rectangle 9"/>
-          <p:cNvSpPr/>
-          <p:nvPr/>
-        </p:nvSpPr>
-        <p:spPr>
-          <a:xfrm>
-            <a:off x="2651760" y="365760"/>
-            <a:ext cx="8229600" cy="777240"/>
-          </a:xfrm>
-          <a:prstGeom prst="rect">
-            <a:avLst/>
-          </a:prstGeom>
-          <a:noFill/>
-          <a:ln>
-            <a:noFill/>
-          </a:ln>
-          <a:effectLst/>
-        </p:spPr>
-        <p:style>
-          <a:lnRef idx="1">
-            <a:schemeClr val="accent1"/>
-          </a:lnRef>
-          <a:fillRef idx="3">
-            <a:schemeClr val="accent1"/>
-          </a:fillRef>
-          <a:effectRef idx="2">
-            <a:schemeClr val="accent1"/>
-          </a:effectRef>
-          <a:fontRef idx="minor">
-            <a:schemeClr val="lt1"/>
-          </a:fontRef>
-        </p:style>
-        <p:txBody>
-          <a:bodyPr rtlCol="0" anchor="t" wrap="square" lIns="45720" rIns="45720" tIns="18288" bIns="18288"/>
-          <a:lstStyle/>
-          <a:p>
-            <a:pPr algn="l">
-              <a:defRPr sz="3600" b="1" i="0">
-                <a:solidFill>
-                  <a:srgbClr val="1A1A1A"/>
-                </a:solidFill>
-                <a:latin typeface="Times New Roman"/>
-              </a:defRPr>
-            </a:pPr>
-            <a:r>
-              <a:t>TABLE OF CONTENT</a:t>
-            </a:r>
-          </a:p>
-        </p:txBody>
-      </p:sp>
-      <p:sp>
-        <p:nvSpPr>
-          <p:cNvPr id="11" name="Rectangle 10"/>
-          <p:cNvSpPr/>
-          <p:nvPr/>
-        </p:nvSpPr>
-        <p:spPr>
-          <a:xfrm>
-            <a:off x="2743200" y="1325880"/>
-            <a:ext cx="640080" cy="640080"/>
-          </a:xfrm>
-          <a:prstGeom prst="rect">
-            <a:avLst/>
-          </a:prstGeom>
-          <a:solidFill>
-            <a:srgbClr val="5D2A42"/>
-          </a:solidFill>
-          <a:ln>
-            <a:noFill/>
-          </a:ln>
-          <a:effectLst/>
-        </p:spPr>
-        <p:style>
-          <a:lnRef idx="1">
-            <a:schemeClr val="accent1"/>
-          </a:lnRef>
-          <a:fillRef idx="3">
-            <a:schemeClr val="accent1"/>
-          </a:fillRef>
-          <a:effectRef idx="2">
-            <a:schemeClr val="accent1"/>
-          </a:effectRef>
-          <a:fontRef idx="minor">
-            <a:schemeClr val="lt1"/>
-          </a:fontRef>
-        </p:style>
-        <p:txBody>
-          <a:bodyPr rtlCol="0" anchor="ctr"/>
-          <a:lstStyle/>
-          <a:p>
-            <a:pPr algn="ctr">
-              <a:defRPr sz="2200" b="1">
-                <a:solidFill>
-                  <a:srgbClr val="FFFFFF"/>
-                </a:solidFill>
-                <a:latin typeface="Times New Roman"/>
-              </a:defRPr>
-            </a:pPr>
-            <a:r>
-              <a:t>i</a:t>
-            </a:r>
-          </a:p>
-        </p:txBody>
-      </p:sp>
-      <p:sp>
-        <p:nvSpPr>
-          <p:cNvPr id="12" name="Rectangle 11"/>
-          <p:cNvSpPr/>
-          <p:nvPr/>
-        </p:nvSpPr>
-        <p:spPr>
-          <a:xfrm>
-            <a:off x="3566160" y="1362456"/>
-            <a:ext cx="3840480" cy="411480"/>
-          </a:xfrm>
-          <a:prstGeom prst="rect">
-            <a:avLst/>
-          </a:prstGeom>
-          <a:noFill/>
-          <a:ln>
-            <a:noFill/>
-          </a:ln>
-          <a:effectLst/>
-        </p:spPr>
-        <p:style>
-          <a:lnRef idx="1">
-            <a:schemeClr val="accent1"/>
-          </a:lnRef>
-          <a:fillRef idx="3">
-            <a:schemeClr val="accent1"/>
-          </a:fillRef>
-          <a:effectRef idx="2">
-            <a:schemeClr val="accent1"/>
-          </a:effectRef>
-          <a:fontRef idx="minor">
-            <a:schemeClr val="lt1"/>
-          </a:fontRef>
-        </p:style>
-        <p:txBody>
-          <a:bodyPr rtlCol="0" anchor="t" wrap="square" lIns="45720" rIns="45720" tIns="18288" bIns="18288"/>
-          <a:lstStyle/>
-          <a:p>
-            <a:pPr algn="l">
-              <a:defRPr sz="1800" b="1" i="0">
-                <a:solidFill>
-                  <a:srgbClr val="1A1A1A"/>
-                </a:solidFill>
-                <a:latin typeface="Times New Roman"/>
-              </a:defRPr>
-            </a:pPr>
-            <a:r>
-              <a:t>Introduction</a:t>
-            </a:r>
-          </a:p>
-        </p:txBody>
-      </p:sp>
-      <p:sp>
-        <p:nvSpPr>
-          <p:cNvPr id="13" name="Rectangle 12"/>
-          <p:cNvSpPr/>
-          <p:nvPr/>
-        </p:nvSpPr>
-        <p:spPr>
-          <a:xfrm>
-            <a:off x="3566160" y="1856232"/>
-            <a:ext cx="1280160" cy="36576"/>
-          </a:xfrm>
-          <a:prstGeom prst="rect">
-            <a:avLst/>
-          </a:prstGeom>
-          <a:solidFill>
-            <a:srgbClr val="5D2A42"/>
-          </a:solidFill>
-          <a:ln>
-            <a:noFill/>
-          </a:ln>
-          <a:effectLst/>
-        </p:spPr>
-        <p:style>
-          <a:lnRef idx="1">
-            <a:schemeClr val="accent1"/>
-          </a:lnRef>
-          <a:fillRef idx="3">
-            <a:schemeClr val="accent1"/>
-          </a:fillRef>
-          <a:effectRef idx="2">
-            <a:schemeClr val="accent1"/>
-          </a:effectRef>
-          <a:fontRef idx="minor">
-            <a:schemeClr val="lt1"/>
-          </a:fontRef>
-        </p:style>
-        <p:txBody>
-          <a:bodyPr rtlCol="0" anchor="ctr"/>
-          <a:lstStyle/>
-          <a:p>
-            <a:pPr algn="ctr"/>
-          </a:p>
-        </p:txBody>
-      </p:sp>
-      <p:sp>
-        <p:nvSpPr>
-          <p:cNvPr id="14" name="Rectangle 13"/>
-          <p:cNvSpPr/>
-          <p:nvPr/>
-        </p:nvSpPr>
-        <p:spPr>
-          <a:xfrm>
-            <a:off x="2743200" y="2788920"/>
-            <a:ext cx="640080" cy="640080"/>
-          </a:xfrm>
-          <a:prstGeom prst="rect">
-            <a:avLst/>
-          </a:prstGeom>
-          <a:solidFill>
-            <a:srgbClr val="5D2A42"/>
-          </a:solidFill>
-          <a:ln>
-            <a:noFill/>
-          </a:ln>
-          <a:effectLst/>
-        </p:spPr>
-        <p:style>
-          <a:lnRef idx="1">
-            <a:schemeClr val="accent1"/>
-          </a:lnRef>
-          <a:fillRef idx="3">
-            <a:schemeClr val="accent1"/>
-          </a:fillRef>
-          <a:effectRef idx="2">
-            <a:schemeClr val="accent1"/>
-          </a:effectRef>
-          <a:fontRef idx="minor">
-            <a:schemeClr val="lt1"/>
-          </a:fontRef>
-        </p:style>
-        <p:txBody>
-          <a:bodyPr rtlCol="0" anchor="ctr"/>
-          <a:lstStyle/>
-          <a:p>
-            <a:pPr algn="ctr">
-              <a:defRPr sz="2200" b="1">
-                <a:solidFill>
-                  <a:srgbClr val="FFFFFF"/>
-                </a:solidFill>
-                <a:latin typeface="Times New Roman"/>
-              </a:defRPr>
-            </a:pPr>
-            <a:r>
-              <a:t>ii</a:t>
-            </a:r>
-          </a:p>
-        </p:txBody>
-      </p:sp>
-      <p:sp>
-        <p:nvSpPr>
-          <p:cNvPr id="15" name="Rectangle 14"/>
-          <p:cNvSpPr/>
-          <p:nvPr/>
-        </p:nvSpPr>
-        <p:spPr>
-          <a:xfrm>
-            <a:off x="3566160" y="2825496"/>
-            <a:ext cx="3840480" cy="411480"/>
-          </a:xfrm>
-          <a:prstGeom prst="rect">
-            <a:avLst/>
-          </a:prstGeom>
-          <a:noFill/>
-          <a:ln>
-            <a:noFill/>
-          </a:ln>
-          <a:effectLst/>
-        </p:spPr>
-        <p:style>
-          <a:lnRef idx="1">
-            <a:schemeClr val="accent1"/>
-          </a:lnRef>
-          <a:fillRef idx="3">
-            <a:schemeClr val="accent1"/>
-          </a:fillRef>
-          <a:effectRef idx="2">
-            <a:schemeClr val="accent1"/>
-          </a:effectRef>
-          <a:fontRef idx="minor">
-            <a:schemeClr val="lt1"/>
-          </a:fontRef>
-        </p:style>
-        <p:txBody>
-          <a:bodyPr rtlCol="0" anchor="t" wrap="square" lIns="45720" rIns="45720" tIns="18288" bIns="18288"/>
-          <a:lstStyle/>
-          <a:p>
-            <a:pPr algn="l">
-              <a:defRPr sz="1800" b="1" i="0">
-                <a:solidFill>
-                  <a:srgbClr val="1A1A1A"/>
-                </a:solidFill>
-                <a:latin typeface="Times New Roman"/>
-              </a:defRPr>
-            </a:pPr>
-            <a:r>
-              <a:t>Internship at DAC</a:t>
-            </a:r>
-          </a:p>
-        </p:txBody>
-      </p:sp>
-      <p:sp>
-        <p:nvSpPr>
-          <p:cNvPr id="16" name="Rectangle 15"/>
-          <p:cNvSpPr/>
-          <p:nvPr/>
-        </p:nvSpPr>
-        <p:spPr>
-          <a:xfrm>
-            <a:off x="3566160" y="3319272"/>
-            <a:ext cx="1280160" cy="36576"/>
-          </a:xfrm>
-          <a:prstGeom prst="rect">
-            <a:avLst/>
-          </a:prstGeom>
-          <a:solidFill>
-            <a:srgbClr val="5D2A42"/>
-          </a:solidFill>
-          <a:ln>
-            <a:noFill/>
-          </a:ln>
-          <a:effectLst/>
-        </p:spPr>
-        <p:style>
-          <a:lnRef idx="1">
-            <a:schemeClr val="accent1"/>
-          </a:lnRef>
-          <a:fillRef idx="3">
-            <a:schemeClr val="accent1"/>
-          </a:fillRef>
-          <a:effectRef idx="2">
-            <a:schemeClr val="accent1"/>
-          </a:effectRef>
-          <a:fontRef idx="minor">
-            <a:schemeClr val="lt1"/>
-          </a:fontRef>
-        </p:style>
-        <p:txBody>
-          <a:bodyPr rtlCol="0" anchor="ctr"/>
-          <a:lstStyle/>
-          <a:p>
-            <a:pPr algn="ctr"/>
-          </a:p>
-        </p:txBody>
-      </p:sp>
-      <p:sp>
-        <p:nvSpPr>
-          <p:cNvPr id="17" name="Rectangle 16"/>
-          <p:cNvSpPr/>
-          <p:nvPr/>
-        </p:nvSpPr>
-        <p:spPr>
-          <a:xfrm>
-            <a:off x="2743200" y="4251960"/>
-            <a:ext cx="640080" cy="640080"/>
-          </a:xfrm>
-          <a:prstGeom prst="rect">
-            <a:avLst/>
-          </a:prstGeom>
-          <a:solidFill>
-            <a:srgbClr val="5D2A42"/>
-          </a:solidFill>
-          <a:ln>
-            <a:noFill/>
-          </a:ln>
-          <a:effectLst/>
-        </p:spPr>
-        <p:style>
-          <a:lnRef idx="1">
-            <a:schemeClr val="accent1"/>
-          </a:lnRef>
-          <a:fillRef idx="3">
-            <a:schemeClr val="accent1"/>
-          </a:fillRef>
-          <a:effectRef idx="2">
-            <a:schemeClr val="accent1"/>
-          </a:effectRef>
-          <a:fontRef idx="minor">
-            <a:schemeClr val="lt1"/>
-          </a:fontRef>
-        </p:style>
-        <p:txBody>
-          <a:bodyPr rtlCol="0" anchor="ctr"/>
-          <a:lstStyle/>
-          <a:p>
-            <a:pPr algn="ctr">
-              <a:defRPr sz="2200" b="1">
-                <a:solidFill>
-                  <a:srgbClr val="FFFFFF"/>
-                </a:solidFill>
-                <a:latin typeface="Times New Roman"/>
-              </a:defRPr>
-            </a:pPr>
-            <a:r>
-              <a:t>iii</a:t>
-            </a:r>
-          </a:p>
-        </p:txBody>
-      </p:sp>
-      <p:sp>
-        <p:nvSpPr>
-          <p:cNvPr id="18" name="Rectangle 17"/>
-          <p:cNvSpPr/>
-          <p:nvPr/>
-        </p:nvSpPr>
-        <p:spPr>
-          <a:xfrm>
-            <a:off x="3566160" y="4288536"/>
-            <a:ext cx="3840480" cy="411480"/>
-          </a:xfrm>
-          <a:prstGeom prst="rect">
-            <a:avLst/>
-          </a:prstGeom>
-          <a:noFill/>
-          <a:ln>
-            <a:noFill/>
-          </a:ln>
-          <a:effectLst/>
-        </p:spPr>
-        <p:style>
-          <a:lnRef idx="1">
-            <a:schemeClr val="accent1"/>
-          </a:lnRef>
-          <a:fillRef idx="3">
-            <a:schemeClr val="accent1"/>
-          </a:fillRef>
-          <a:effectRef idx="2">
-            <a:schemeClr val="accent1"/>
-          </a:effectRef>
-          <a:fontRef idx="minor">
-            <a:schemeClr val="lt1"/>
-          </a:fontRef>
-        </p:style>
-        <p:txBody>
-          <a:bodyPr rtlCol="0" anchor="t" wrap="square" lIns="45720" rIns="45720" tIns="18288" bIns="18288"/>
-          <a:lstStyle/>
-          <a:p>
-            <a:pPr algn="l">
-              <a:defRPr sz="1800" b="1" i="0">
-                <a:solidFill>
-                  <a:srgbClr val="1A1A1A"/>
-                </a:solidFill>
-                <a:latin typeface="Times New Roman"/>
-              </a:defRPr>
-            </a:pPr>
-            <a:r>
-              <a:t>Literature Review</a:t>
-            </a:r>
-          </a:p>
-        </p:txBody>
-      </p:sp>
-      <p:sp>
-        <p:nvSpPr>
-          <p:cNvPr id="19" name="Rectangle 18"/>
-          <p:cNvSpPr/>
-          <p:nvPr/>
-        </p:nvSpPr>
-        <p:spPr>
-          <a:xfrm>
-            <a:off x="3566160" y="4782312"/>
-            <a:ext cx="1280160" cy="36576"/>
-          </a:xfrm>
-          <a:prstGeom prst="rect">
-            <a:avLst/>
-          </a:prstGeom>
-          <a:solidFill>
-            <a:srgbClr val="5D2A42"/>
-          </a:solidFill>
-          <a:ln>
-            <a:noFill/>
-          </a:ln>
-          <a:effectLst/>
-        </p:spPr>
-        <p:style>
-          <a:lnRef idx="1">
-            <a:schemeClr val="accent1"/>
-          </a:lnRef>
-          <a:fillRef idx="3">
-            <a:schemeClr val="accent1"/>
-          </a:fillRef>
-          <a:effectRef idx="2">
-            <a:schemeClr val="accent1"/>
-          </a:effectRef>
-          <a:fontRef idx="minor">
-            <a:schemeClr val="lt1"/>
-          </a:fontRef>
-        </p:style>
-        <p:txBody>
-          <a:bodyPr rtlCol="0" anchor="ctr"/>
-          <a:lstStyle/>
-          <a:p>
-            <a:pPr algn="ctr"/>
-          </a:p>
-        </p:txBody>
-      </p:sp>
-      <p:sp>
-        <p:nvSpPr>
-          <p:cNvPr id="20" name="Rectangle 19"/>
-          <p:cNvSpPr/>
-          <p:nvPr/>
-        </p:nvSpPr>
-        <p:spPr>
-          <a:xfrm>
-            <a:off x="7406640" y="1325880"/>
-            <a:ext cx="640080" cy="640080"/>
-          </a:xfrm>
-          <a:prstGeom prst="rect">
-            <a:avLst/>
-          </a:prstGeom>
-          <a:solidFill>
-            <a:srgbClr val="5D2A42"/>
-          </a:solidFill>
-          <a:ln>
-            <a:noFill/>
-          </a:ln>
-          <a:effectLst/>
-        </p:spPr>
-        <p:style>
-          <a:lnRef idx="1">
-            <a:schemeClr val="accent1"/>
-          </a:lnRef>
-          <a:fillRef idx="3">
-            <a:schemeClr val="accent1"/>
-          </a:fillRef>
-          <a:effectRef idx="2">
-            <a:schemeClr val="accent1"/>
-          </a:effectRef>
-          <a:fontRef idx="minor">
-            <a:schemeClr val="lt1"/>
-          </a:fontRef>
-        </p:style>
-        <p:txBody>
-          <a:bodyPr rtlCol="0" anchor="ctr"/>
-          <a:lstStyle/>
-          <a:p>
-            <a:pPr algn="ctr">
-              <a:defRPr sz="2200" b="1">
-                <a:solidFill>
-                  <a:srgbClr val="FFFFFF"/>
-                </a:solidFill>
-                <a:latin typeface="Times New Roman"/>
-              </a:defRPr>
-            </a:pPr>
-            <a:r>
-              <a:t>iv</a:t>
-            </a:r>
-          </a:p>
-        </p:txBody>
-      </p:sp>
-      <p:sp>
-        <p:nvSpPr>
-          <p:cNvPr id="21" name="Rectangle 20"/>
-          <p:cNvSpPr/>
-          <p:nvPr/>
-        </p:nvSpPr>
-        <p:spPr>
-          <a:xfrm>
-            <a:off x="8229600" y="1362456"/>
-            <a:ext cx="3840480" cy="411480"/>
-          </a:xfrm>
-          <a:prstGeom prst="rect">
-            <a:avLst/>
-          </a:prstGeom>
-          <a:noFill/>
-          <a:ln>
-            <a:noFill/>
-          </a:ln>
-          <a:effectLst/>
-        </p:spPr>
-        <p:style>
-          <a:lnRef idx="1">
-            <a:schemeClr val="accent1"/>
-          </a:lnRef>
-          <a:fillRef idx="3">
-            <a:schemeClr val="accent1"/>
-          </a:fillRef>
-          <a:effectRef idx="2">
-            <a:schemeClr val="accent1"/>
-          </a:effectRef>
-          <a:fontRef idx="minor">
-            <a:schemeClr val="lt1"/>
-          </a:fontRef>
-        </p:style>
-        <p:txBody>
-          <a:bodyPr rtlCol="0" anchor="t" wrap="square" lIns="45720" rIns="45720" tIns="18288" bIns="18288"/>
-          <a:lstStyle/>
-          <a:p>
-            <a:pPr algn="l">
-              <a:defRPr sz="1800" b="1" i="0">
-                <a:solidFill>
-                  <a:srgbClr val="1A1A1A"/>
-                </a:solidFill>
-                <a:latin typeface="Times New Roman"/>
-              </a:defRPr>
-            </a:pPr>
-            <a:r>
-              <a:t>Methodology</a:t>
-            </a:r>
-          </a:p>
-        </p:txBody>
-      </p:sp>
-      <p:sp>
-        <p:nvSpPr>
           <p:cNvPr id="22" name="Rectangle 21"/>
           <p:cNvSpPr/>
           <p:nvPr/>
         </p:nvSpPr>
         <p:spPr>
           <a:xfrm>
-            <a:off x="8229600" y="1856232"/>
-            <a:ext cx="1280160" cy="36576"/>
-          </a:xfrm>
-          <a:prstGeom prst="rect">
-            <a:avLst/>
-          </a:prstGeom>
-          <a:solidFill>
-            <a:srgbClr val="5D2A42"/>
-          </a:solidFill>
-          <a:ln>
-            <a:noFill/>
-          </a:ln>
-          <a:effectLst/>
-        </p:spPr>
-        <p:style>
-          <a:lnRef idx="1">
-            <a:schemeClr val="accent1"/>
-          </a:lnRef>
-          <a:fillRef idx="3">
-            <a:schemeClr val="accent1"/>
-          </a:fillRef>
-          <a:effectRef idx="2">
-            <a:schemeClr val="accent1"/>
-          </a:effectRef>
-          <a:fontRef idx="minor">
-            <a:schemeClr val="lt1"/>
-          </a:fontRef>
-        </p:style>
-        <p:txBody>
-          <a:bodyPr rtlCol="0" anchor="ctr"/>
-          <a:lstStyle/>
-          <a:p>
-            <a:pPr algn="ctr"/>
-          </a:p>
-        </p:txBody>
-      </p:sp>
-      <p:sp>
-        <p:nvSpPr>
-          <p:cNvPr id="23" name="Rectangle 22"/>
-          <p:cNvSpPr/>
-          <p:nvPr/>
-        </p:nvSpPr>
-        <p:spPr>
-          <a:xfrm>
-            <a:off x="7406640" y="2788920"/>
-            <a:ext cx="640080" cy="640080"/>
-          </a:xfrm>
-          <a:prstGeom prst="rect">
-            <a:avLst/>
-          </a:prstGeom>
-          <a:solidFill>
-            <a:srgbClr val="5D2A42"/>
-          </a:solidFill>
-          <a:ln>
-            <a:noFill/>
-          </a:ln>
-          <a:effectLst/>
-        </p:spPr>
-        <p:style>
-          <a:lnRef idx="1">
-            <a:schemeClr val="accent1"/>
-          </a:lnRef>
-          <a:fillRef idx="3">
-            <a:schemeClr val="accent1"/>
-          </a:fillRef>
-          <a:effectRef idx="2">
-            <a:schemeClr val="accent1"/>
-          </a:effectRef>
-          <a:fontRef idx="minor">
-            <a:schemeClr val="lt1"/>
-          </a:fontRef>
-        </p:style>
-        <p:txBody>
-          <a:bodyPr rtlCol="0" anchor="ctr"/>
-          <a:lstStyle/>
-          <a:p>
-            <a:pPr algn="ctr">
-              <a:defRPr sz="2200" b="1">
-                <a:solidFill>
-                  <a:srgbClr val="FFFFFF"/>
-                </a:solidFill>
-                <a:latin typeface="Times New Roman"/>
-              </a:defRPr>
-            </a:pPr>
-            <a:r>
-              <a:t>v</a:t>
-            </a:r>
-          </a:p>
-        </p:txBody>
-      </p:sp>
-      <p:sp>
-        <p:nvSpPr>
-          <p:cNvPr id="24" name="Rectangle 23"/>
-          <p:cNvSpPr/>
-          <p:nvPr/>
-        </p:nvSpPr>
-        <p:spPr>
-          <a:xfrm>
-            <a:off x="8229600" y="2825496"/>
-            <a:ext cx="3840480" cy="411480"/>
-          </a:xfrm>
-          <a:prstGeom prst="rect">
-            <a:avLst/>
-          </a:prstGeom>
-          <a:noFill/>
-          <a:ln>
-            <a:noFill/>
-          </a:ln>
-          <a:effectLst/>
-        </p:spPr>
-        <p:style>
-          <a:lnRef idx="1">
-            <a:schemeClr val="accent1"/>
-          </a:lnRef>
-          <a:fillRef idx="3">
-            <a:schemeClr val="accent1"/>
-          </a:fillRef>
-          <a:effectRef idx="2">
-            <a:schemeClr val="accent1"/>
-          </a:effectRef>
-          <a:fontRef idx="minor">
-            <a:schemeClr val="lt1"/>
-          </a:fontRef>
-        </p:style>
-        <p:txBody>
-          <a:bodyPr rtlCol="0" anchor="t" wrap="square" lIns="45720" rIns="45720" tIns="18288" bIns="18288"/>
-          <a:lstStyle/>
-          <a:p>
-            <a:pPr algn="l">
-              <a:defRPr sz="1800" b="1" i="0">
-                <a:solidFill>
-                  <a:srgbClr val="1A1A1A"/>
-                </a:solidFill>
-                <a:latin typeface="Times New Roman"/>
-              </a:defRPr>
-            </a:pPr>
-            <a:r>
-              <a:t>Results &amp; Discussion</a:t>
-            </a:r>
-          </a:p>
-        </p:txBody>
-      </p:sp>
-      <p:sp>
-        <p:nvSpPr>
-          <p:cNvPr id="25" name="Rectangle 24"/>
-          <p:cNvSpPr/>
-          <p:nvPr/>
-        </p:nvSpPr>
-        <p:spPr>
-          <a:xfrm>
-            <a:off x="8229600" y="3319272"/>
-            <a:ext cx="1280160" cy="36576"/>
-          </a:xfrm>
-          <a:prstGeom prst="rect">
-            <a:avLst/>
-          </a:prstGeom>
-          <a:solidFill>
-            <a:srgbClr val="5D2A42"/>
-          </a:solidFill>
-          <a:ln>
-            <a:noFill/>
-          </a:ln>
-          <a:effectLst/>
-        </p:spPr>
-        <p:style>
-          <a:lnRef idx="1">
-            <a:schemeClr val="accent1"/>
-          </a:lnRef>
-          <a:fillRef idx="3">
-            <a:schemeClr val="accent1"/>
-          </a:fillRef>
-          <a:effectRef idx="2">
-            <a:schemeClr val="accent1"/>
-          </a:effectRef>
-          <a:fontRef idx="minor">
-            <a:schemeClr val="lt1"/>
-          </a:fontRef>
-        </p:style>
-        <p:txBody>
-          <a:bodyPr rtlCol="0" anchor="ctr"/>
-          <a:lstStyle/>
-          <a:p>
-            <a:pPr algn="ctr"/>
-          </a:p>
-        </p:txBody>
-      </p:sp>
-      <p:sp>
-        <p:nvSpPr>
-          <p:cNvPr id="26" name="Rectangle 25"/>
-          <p:cNvSpPr/>
-          <p:nvPr/>
-        </p:nvSpPr>
-        <p:spPr>
-          <a:xfrm>
-            <a:off x="7406640" y="4251960"/>
-            <a:ext cx="640080" cy="640080"/>
-          </a:xfrm>
-          <a:prstGeom prst="rect">
-            <a:avLst/>
-          </a:prstGeom>
-          <a:solidFill>
-            <a:srgbClr val="5D2A42"/>
-          </a:solidFill>
-          <a:ln>
-            <a:noFill/>
-          </a:ln>
-          <a:effectLst/>
-        </p:spPr>
-        <p:style>
-          <a:lnRef idx="1">
-            <a:schemeClr val="accent1"/>
-          </a:lnRef>
-          <a:fillRef idx="3">
-            <a:schemeClr val="accent1"/>
-          </a:fillRef>
-          <a:effectRef idx="2">
-            <a:schemeClr val="accent1"/>
-          </a:effectRef>
-          <a:fontRef idx="minor">
-            <a:schemeClr val="lt1"/>
-          </a:fontRef>
-        </p:style>
-        <p:txBody>
-          <a:bodyPr rtlCol="0" anchor="ctr"/>
-          <a:lstStyle/>
-          <a:p>
-            <a:pPr algn="ctr">
-              <a:defRPr sz="2200" b="1">
-                <a:solidFill>
-                  <a:srgbClr val="FFFFFF"/>
-                </a:solidFill>
-                <a:latin typeface="Times New Roman"/>
-              </a:defRPr>
-            </a:pPr>
-            <a:r>
-              <a:t>vi</a:t>
-            </a:r>
-          </a:p>
-        </p:txBody>
-      </p:sp>
-      <p:sp>
-        <p:nvSpPr>
-          <p:cNvPr id="27" name="Rectangle 26"/>
-          <p:cNvSpPr/>
-          <p:nvPr/>
-        </p:nvSpPr>
-        <p:spPr>
-          <a:xfrm>
-            <a:off x="8229600" y="4288536"/>
-            <a:ext cx="3840480" cy="411480"/>
-          </a:xfrm>
-          <a:prstGeom prst="rect">
-            <a:avLst/>
-          </a:prstGeom>
-          <a:noFill/>
-          <a:ln>
-            <a:noFill/>
-          </a:ln>
-          <a:effectLst/>
-        </p:spPr>
-        <p:style>
-          <a:lnRef idx="1">
-            <a:schemeClr val="accent1"/>
-          </a:lnRef>
-          <a:fillRef idx="3">
-            <a:schemeClr val="accent1"/>
-          </a:fillRef>
-          <a:effectRef idx="2">
-            <a:schemeClr val="accent1"/>
-          </a:effectRef>
-          <a:fontRef idx="minor">
-            <a:schemeClr val="lt1"/>
-          </a:fontRef>
-        </p:style>
-        <p:txBody>
-          <a:bodyPr rtlCol="0" anchor="t" wrap="square" lIns="45720" rIns="45720" tIns="18288" bIns="18288"/>
-          <a:lstStyle/>
-          <a:p>
-            <a:pPr algn="l">
-              <a:defRPr sz="1800" b="1" i="0">
-                <a:solidFill>
-                  <a:srgbClr val="1A1A1A"/>
-                </a:solidFill>
-                <a:latin typeface="Times New Roman"/>
-              </a:defRPr>
-            </a:pPr>
-            <a:r>
-              <a:t>Limitations &amp; Conclusions</a:t>
-            </a:r>
-          </a:p>
-        </p:txBody>
-      </p:sp>
-      <p:sp>
-        <p:nvSpPr>
-          <p:cNvPr id="28" name="Rectangle 27"/>
-          <p:cNvSpPr/>
-          <p:nvPr/>
-        </p:nvSpPr>
-        <p:spPr>
-          <a:xfrm>
-            <a:off x="8229600" y="4782312"/>
-            <a:ext cx="1280160" cy="36576"/>
+            <a:off x="0" y="6656832"/>
+            <a:ext cx="12191695" cy="201168"/>
           </a:xfrm>
           <a:prstGeom prst="rect">
             <a:avLst/>
@@ -18876,8 +19104,113 @@
         </p:nvSpPr>
         <p:spPr>
           <a:xfrm>
-            <a:off x="0" y="0"/>
-            <a:ext cx="12191695" cy="1828800"/>
+            <a:off x="457200" y="640080"/>
+            <a:ext cx="5486400" cy="310896"/>
+          </a:xfrm>
+          <a:prstGeom prst="rect">
+            <a:avLst/>
+          </a:prstGeom>
+          <a:noFill/>
+          <a:ln>
+            <a:noFill/>
+          </a:ln>
+          <a:effectLst/>
+        </p:spPr>
+        <p:style>
+          <a:lnRef idx="1">
+            <a:schemeClr val="accent1"/>
+          </a:lnRef>
+          <a:fillRef idx="3">
+            <a:schemeClr val="accent1"/>
+          </a:fillRef>
+          <a:effectRef idx="2">
+            <a:schemeClr val="accent1"/>
+          </a:effectRef>
+          <a:fontRef idx="minor">
+            <a:schemeClr val="lt1"/>
+          </a:fontRef>
+        </p:style>
+        <p:txBody>
+          <a:bodyPr rtlCol="0" anchor="t" wrap="square" lIns="45720" rIns="45720" tIns="18288" bIns="18288"/>
+          <a:lstStyle/>
+          <a:p>
+            <a:pPr algn="l">
+              <a:defRPr sz="1200" b="1" i="0">
+                <a:solidFill>
+                  <a:srgbClr val="5D2A42"/>
+                </a:solidFill>
+                <a:latin typeface="Calibri"/>
+              </a:defRPr>
+            </a:pPr>
+            <a:r>
+              <a:rPr spc="200"/>
+              <a:t>LIVE DEMONSTRATION</a:t>
+            </a:r>
+          </a:p>
+        </p:txBody>
+      </p:sp>
+      <p:sp>
+        <p:nvSpPr>
+          <p:cNvPr id="3" name="Rectangle 2"/>
+          <p:cNvSpPr/>
+          <p:nvPr/>
+        </p:nvSpPr>
+        <p:spPr>
+          <a:xfrm>
+            <a:off x="457200" y="1005840"/>
+            <a:ext cx="10972800" cy="640080"/>
+          </a:xfrm>
+          <a:prstGeom prst="rect">
+            <a:avLst/>
+          </a:prstGeom>
+          <a:noFill/>
+          <a:ln>
+            <a:noFill/>
+          </a:ln>
+          <a:effectLst/>
+        </p:spPr>
+        <p:style>
+          <a:lnRef idx="1">
+            <a:schemeClr val="accent1"/>
+          </a:lnRef>
+          <a:fillRef idx="3">
+            <a:schemeClr val="accent1"/>
+          </a:fillRef>
+          <a:effectRef idx="2">
+            <a:schemeClr val="accent1"/>
+          </a:effectRef>
+          <a:fontRef idx="minor">
+            <a:schemeClr val="lt1"/>
+          </a:fontRef>
+        </p:style>
+        <p:txBody>
+          <a:bodyPr rtlCol="0" anchor="t" wrap="square" lIns="45720" rIns="45720" tIns="18288" bIns="18288"/>
+          <a:lstStyle/>
+          <a:p>
+            <a:pPr algn="l">
+              <a:defRPr sz="3000" b="1" i="0">
+                <a:solidFill>
+                  <a:srgbClr val="1A1A1A"/>
+                </a:solidFill>
+                <a:latin typeface="Calibri"/>
+              </a:defRPr>
+            </a:pPr>
+            <a:r>
+              <a:t>Adaptive Underwriting Dashboard</a:t>
+            </a:r>
+          </a:p>
+        </p:txBody>
+      </p:sp>
+      <p:sp>
+        <p:nvSpPr>
+          <p:cNvPr id="4" name="Rectangle 3"/>
+          <p:cNvSpPr/>
+          <p:nvPr/>
+        </p:nvSpPr>
+        <p:spPr>
+          <a:xfrm>
+            <a:off x="457200" y="1755648"/>
+            <a:ext cx="502920" cy="41148"/>
           </a:xfrm>
           <a:prstGeom prst="rect">
             <a:avLst/>
@@ -18914,14 +19247,14 @@
       </p:sp>
       <p:sp>
         <p:nvSpPr>
-          <p:cNvPr id="3" name="Rectangle 2"/>
-          <p:cNvSpPr/>
-          <p:nvPr/>
-        </p:nvSpPr>
-        <p:spPr>
-          <a:xfrm>
-            <a:off x="0" y="457200"/>
-            <a:ext cx="12191695" cy="914400"/>
+          <p:cNvPr id="5" name="Rectangle 4"/>
+          <p:cNvSpPr/>
+          <p:nvPr/>
+        </p:nvSpPr>
+        <p:spPr>
+          <a:xfrm>
+            <a:off x="457200" y="2377440"/>
+            <a:ext cx="457200" cy="457200"/>
           </a:xfrm>
           <a:prstGeom prst="rect">
             <a:avLst/>
@@ -18950,117 +19283,12 @@
           <a:bodyPr rtlCol="0" anchor="t" wrap="square" lIns="45720" rIns="45720" tIns="18288" bIns="18288"/>
           <a:lstStyle/>
           <a:p>
-            <a:pPr algn="ctr">
-              <a:defRPr sz="5200" b="1" i="0">
-                <a:solidFill>
-                  <a:srgbClr val="FFFFFF"/>
-                </a:solidFill>
-                <a:latin typeface="Times New Roman"/>
-              </a:defRPr>
-            </a:pPr>
-            <a:r>
-              <a:t>DEMONSTRATION</a:t>
-            </a:r>
-          </a:p>
-        </p:txBody>
-      </p:sp>
-      <p:sp>
-        <p:nvSpPr>
-          <p:cNvPr id="4" name="Rectangle 3"/>
-          <p:cNvSpPr/>
-          <p:nvPr/>
-        </p:nvSpPr>
-        <p:spPr>
-          <a:xfrm>
-            <a:off x="457200" y="2103120"/>
-            <a:ext cx="11277295" cy="457200"/>
-          </a:xfrm>
-          <a:prstGeom prst="rect">
-            <a:avLst/>
-          </a:prstGeom>
-          <a:noFill/>
-          <a:ln>
-            <a:noFill/>
-          </a:ln>
-          <a:effectLst/>
-        </p:spPr>
-        <p:style>
-          <a:lnRef idx="1">
-            <a:schemeClr val="accent1"/>
-          </a:lnRef>
-          <a:fillRef idx="3">
-            <a:schemeClr val="accent1"/>
-          </a:fillRef>
-          <a:effectRef idx="2">
-            <a:schemeClr val="accent1"/>
-          </a:effectRef>
-          <a:fontRef idx="minor">
-            <a:schemeClr val="lt1"/>
-          </a:fontRef>
-        </p:style>
-        <p:txBody>
-          <a:bodyPr rtlCol="0" anchor="t" wrap="square" lIns="45720" rIns="45720" tIns="18288" bIns="18288"/>
-          <a:lstStyle/>
-          <a:p>
-            <a:pPr algn="ctr">
-              <a:defRPr sz="2400" b="1" i="0">
+            <a:pPr algn="l">
+              <a:defRPr sz="2200" b="1" i="0">
                 <a:solidFill>
                   <a:srgbClr val="5D2A42"/>
                 </a:solidFill>
-                <a:latin typeface="Times New Roman"/>
-              </a:defRPr>
-            </a:pPr>
-            <a:r>
-              <a:t>Live Adaptive Underwriting Dashboard</a:t>
-            </a:r>
-          </a:p>
-        </p:txBody>
-      </p:sp>
-      <p:sp>
-        <p:nvSpPr>
-          <p:cNvPr id="5" name="Rectangle 4"/>
-          <p:cNvSpPr/>
-          <p:nvPr/>
-        </p:nvSpPr>
-        <p:spPr>
-          <a:xfrm>
-            <a:off x="457200" y="2834640"/>
-            <a:ext cx="457200" cy="457200"/>
-          </a:xfrm>
-          <a:prstGeom prst="rect">
-            <a:avLst/>
-          </a:prstGeom>
-          <a:solidFill>
-            <a:srgbClr val="5D2A42"/>
-          </a:solidFill>
-          <a:ln>
-            <a:noFill/>
-          </a:ln>
-          <a:effectLst/>
-        </p:spPr>
-        <p:style>
-          <a:lnRef idx="1">
-            <a:schemeClr val="accent1"/>
-          </a:lnRef>
-          <a:fillRef idx="3">
-            <a:schemeClr val="accent1"/>
-          </a:fillRef>
-          <a:effectRef idx="2">
-            <a:schemeClr val="accent1"/>
-          </a:effectRef>
-          <a:fontRef idx="minor">
-            <a:schemeClr val="lt1"/>
-          </a:fontRef>
-        </p:style>
-        <p:txBody>
-          <a:bodyPr rtlCol="0" anchor="ctr"/>
-          <a:lstStyle/>
-          <a:p>
-            <a:pPr algn="ctr">
-              <a:defRPr sz="1800" b="1">
-                <a:solidFill>
-                  <a:srgbClr val="FFFFFF"/>
-                </a:solidFill>
+                <a:latin typeface="Calibri"/>
               </a:defRPr>
             </a:pPr>
             <a:r>
@@ -19077,8 +19305,8 @@
         </p:nvSpPr>
         <p:spPr>
           <a:xfrm>
-            <a:off x="1051560" y="2834640"/>
-            <a:ext cx="1097280" cy="457200"/>
+            <a:off x="1051560" y="2423160"/>
+            <a:ext cx="1097280" cy="411480"/>
           </a:xfrm>
           <a:prstGeom prst="rect">
             <a:avLst/>
@@ -19110,7 +19338,7 @@
             <a:pPr algn="l">
               <a:defRPr sz="1600" b="1" i="0">
                 <a:solidFill>
-                  <a:srgbClr val="5D2A42"/>
+                  <a:srgbClr val="1A1A1A"/>
                 </a:solidFill>
                 <a:latin typeface="Calibri"/>
               </a:defRPr>
@@ -19129,8 +19357,8 @@
         </p:nvSpPr>
         <p:spPr>
           <a:xfrm>
-            <a:off x="2286000" y="2834640"/>
-            <a:ext cx="9601200" cy="457200"/>
+            <a:off x="2286000" y="2441448"/>
+            <a:ext cx="9601200" cy="411480"/>
           </a:xfrm>
           <a:prstGeom prst="rect">
             <a:avLst/>
@@ -19162,9 +19390,9 @@
             <a:pPr algn="l">
               <a:defRPr sz="1400" b="0" i="0">
                 <a:solidFill>
-                  <a:srgbClr val="1A1A1A"/>
-                </a:solidFill>
-                <a:latin typeface="Courier New"/>
+                  <a:srgbClr val="3A3A3A"/>
+                </a:solidFill>
+                <a:latin typeface="Consolas"/>
               </a:defRPr>
             </a:pPr>
             <a:r>
@@ -19181,43 +19409,86 @@
         </p:nvSpPr>
         <p:spPr>
           <a:xfrm>
-            <a:off x="457200" y="3429000"/>
+            <a:off x="457200" y="2907792"/>
+            <a:ext cx="10881360" cy="10972"/>
+          </a:xfrm>
+          <a:prstGeom prst="rect">
+            <a:avLst/>
+          </a:prstGeom>
+          <a:solidFill>
+            <a:srgbClr val="DDDDDD"/>
+          </a:solidFill>
+          <a:ln>
+            <a:noFill/>
+          </a:ln>
+          <a:effectLst/>
+        </p:spPr>
+        <p:style>
+          <a:lnRef idx="1">
+            <a:schemeClr val="accent1"/>
+          </a:lnRef>
+          <a:fillRef idx="3">
+            <a:schemeClr val="accent1"/>
+          </a:fillRef>
+          <a:effectRef idx="2">
+            <a:schemeClr val="accent1"/>
+          </a:effectRef>
+          <a:fontRef idx="minor">
+            <a:schemeClr val="lt1"/>
+          </a:fontRef>
+        </p:style>
+        <p:txBody>
+          <a:bodyPr rtlCol="0" anchor="ctr"/>
+          <a:lstStyle/>
+          <a:p>
+            <a:pPr algn="ctr"/>
+          </a:p>
+        </p:txBody>
+      </p:sp>
+      <p:sp>
+        <p:nvSpPr>
+          <p:cNvPr id="9" name="Rectangle 8"/>
+          <p:cNvSpPr/>
+          <p:nvPr/>
+        </p:nvSpPr>
+        <p:spPr>
+          <a:xfrm>
+            <a:off x="457200" y="3090672"/>
             <a:ext cx="457200" cy="457200"/>
           </a:xfrm>
           <a:prstGeom prst="rect">
             <a:avLst/>
           </a:prstGeom>
-          <a:solidFill>
-            <a:srgbClr val="5D2A42"/>
-          </a:solidFill>
-          <a:ln>
-            <a:noFill/>
-          </a:ln>
-          <a:effectLst/>
-        </p:spPr>
-        <p:style>
-          <a:lnRef idx="1">
-            <a:schemeClr val="accent1"/>
-          </a:lnRef>
-          <a:fillRef idx="3">
-            <a:schemeClr val="accent1"/>
-          </a:fillRef>
-          <a:effectRef idx="2">
-            <a:schemeClr val="accent1"/>
-          </a:effectRef>
-          <a:fontRef idx="minor">
-            <a:schemeClr val="lt1"/>
-          </a:fontRef>
-        </p:style>
-        <p:txBody>
-          <a:bodyPr rtlCol="0" anchor="ctr"/>
-          <a:lstStyle/>
-          <a:p>
-            <a:pPr algn="ctr">
-              <a:defRPr sz="1800" b="1">
-                <a:solidFill>
-                  <a:srgbClr val="FFFFFF"/>
-                </a:solidFill>
+          <a:noFill/>
+          <a:ln>
+            <a:noFill/>
+          </a:ln>
+          <a:effectLst/>
+        </p:spPr>
+        <p:style>
+          <a:lnRef idx="1">
+            <a:schemeClr val="accent1"/>
+          </a:lnRef>
+          <a:fillRef idx="3">
+            <a:schemeClr val="accent1"/>
+          </a:fillRef>
+          <a:effectRef idx="2">
+            <a:schemeClr val="accent1"/>
+          </a:effectRef>
+          <a:fontRef idx="minor">
+            <a:schemeClr val="lt1"/>
+          </a:fontRef>
+        </p:style>
+        <p:txBody>
+          <a:bodyPr rtlCol="0" anchor="t" wrap="square" lIns="45720" rIns="45720" tIns="18288" bIns="18288"/>
+          <a:lstStyle/>
+          <a:p>
+            <a:pPr algn="l">
+              <a:defRPr sz="2200" b="1" i="0">
+                <a:solidFill>
+                  <a:srgbClr val="5D2A42"/>
+                </a:solidFill>
+                <a:latin typeface="Calibri"/>
               </a:defRPr>
             </a:pPr>
             <a:r>
@@ -19228,14 +19499,14 @@
       </p:sp>
       <p:sp>
         <p:nvSpPr>
-          <p:cNvPr id="9" name="Rectangle 8"/>
-          <p:cNvSpPr/>
-          <p:nvPr/>
-        </p:nvSpPr>
-        <p:spPr>
-          <a:xfrm>
-            <a:off x="1051560" y="3429000"/>
-            <a:ext cx="1097280" cy="457200"/>
+          <p:cNvPr id="10" name="Rectangle 9"/>
+          <p:cNvSpPr/>
+          <p:nvPr/>
+        </p:nvSpPr>
+        <p:spPr>
+          <a:xfrm>
+            <a:off x="1051560" y="3136392"/>
+            <a:ext cx="1097280" cy="411480"/>
           </a:xfrm>
           <a:prstGeom prst="rect">
             <a:avLst/>
@@ -19267,7 +19538,7 @@
             <a:pPr algn="l">
               <a:defRPr sz="1600" b="1" i="0">
                 <a:solidFill>
-                  <a:srgbClr val="5D2A42"/>
+                  <a:srgbClr val="1A1A1A"/>
                 </a:solidFill>
                 <a:latin typeface="Calibri"/>
               </a:defRPr>
@@ -19280,14 +19551,14 @@
       </p:sp>
       <p:sp>
         <p:nvSpPr>
-          <p:cNvPr id="10" name="Rectangle 9"/>
-          <p:cNvSpPr/>
-          <p:nvPr/>
-        </p:nvSpPr>
-        <p:spPr>
-          <a:xfrm>
-            <a:off x="2286000" y="3429000"/>
-            <a:ext cx="9601200" cy="457200"/>
+          <p:cNvPr id="11" name="Rectangle 10"/>
+          <p:cNvSpPr/>
+          <p:nvPr/>
+        </p:nvSpPr>
+        <p:spPr>
+          <a:xfrm>
+            <a:off x="2286000" y="3154680"/>
+            <a:ext cx="9601200" cy="411480"/>
           </a:xfrm>
           <a:prstGeom prst="rect">
             <a:avLst/>
@@ -19319,9 +19590,9 @@
             <a:pPr algn="l">
               <a:defRPr sz="1400" b="0" i="0">
                 <a:solidFill>
-                  <a:srgbClr val="1A1A1A"/>
-                </a:solidFill>
-                <a:latin typeface="Courier New"/>
+                  <a:srgbClr val="3A3A3A"/>
+                </a:solidFill>
+                <a:latin typeface="Consolas"/>
               </a:defRPr>
             </a:pPr>
             <a:r>
@@ -19332,49 +19603,92 @@
       </p:sp>
       <p:sp>
         <p:nvSpPr>
-          <p:cNvPr id="11" name="Rectangle 10"/>
-          <p:cNvSpPr/>
-          <p:nvPr/>
-        </p:nvSpPr>
-        <p:spPr>
-          <a:xfrm>
-            <a:off x="457200" y="4023360"/>
+          <p:cNvPr id="12" name="Rectangle 11"/>
+          <p:cNvSpPr/>
+          <p:nvPr/>
+        </p:nvSpPr>
+        <p:spPr>
+          <a:xfrm>
+            <a:off x="457200" y="3621024"/>
+            <a:ext cx="10881360" cy="10972"/>
+          </a:xfrm>
+          <a:prstGeom prst="rect">
+            <a:avLst/>
+          </a:prstGeom>
+          <a:solidFill>
+            <a:srgbClr val="DDDDDD"/>
+          </a:solidFill>
+          <a:ln>
+            <a:noFill/>
+          </a:ln>
+          <a:effectLst/>
+        </p:spPr>
+        <p:style>
+          <a:lnRef idx="1">
+            <a:schemeClr val="accent1"/>
+          </a:lnRef>
+          <a:fillRef idx="3">
+            <a:schemeClr val="accent1"/>
+          </a:fillRef>
+          <a:effectRef idx="2">
+            <a:schemeClr val="accent1"/>
+          </a:effectRef>
+          <a:fontRef idx="minor">
+            <a:schemeClr val="lt1"/>
+          </a:fontRef>
+        </p:style>
+        <p:txBody>
+          <a:bodyPr rtlCol="0" anchor="ctr"/>
+          <a:lstStyle/>
+          <a:p>
+            <a:pPr algn="ctr"/>
+          </a:p>
+        </p:txBody>
+      </p:sp>
+      <p:sp>
+        <p:nvSpPr>
+          <p:cNvPr id="13" name="Rectangle 12"/>
+          <p:cNvSpPr/>
+          <p:nvPr/>
+        </p:nvSpPr>
+        <p:spPr>
+          <a:xfrm>
+            <a:off x="457200" y="3803904"/>
             <a:ext cx="457200" cy="457200"/>
           </a:xfrm>
           <a:prstGeom prst="rect">
             <a:avLst/>
           </a:prstGeom>
-          <a:solidFill>
-            <a:srgbClr val="5D2A42"/>
-          </a:solidFill>
-          <a:ln>
-            <a:noFill/>
-          </a:ln>
-          <a:effectLst/>
-        </p:spPr>
-        <p:style>
-          <a:lnRef idx="1">
-            <a:schemeClr val="accent1"/>
-          </a:lnRef>
-          <a:fillRef idx="3">
-            <a:schemeClr val="accent1"/>
-          </a:fillRef>
-          <a:effectRef idx="2">
-            <a:schemeClr val="accent1"/>
-          </a:effectRef>
-          <a:fontRef idx="minor">
-            <a:schemeClr val="lt1"/>
-          </a:fontRef>
-        </p:style>
-        <p:txBody>
-          <a:bodyPr rtlCol="0" anchor="ctr"/>
-          <a:lstStyle/>
-          <a:p>
-            <a:pPr algn="ctr">
-              <a:defRPr sz="1800" b="1">
-                <a:solidFill>
-                  <a:srgbClr val="FFFFFF"/>
-                </a:solidFill>
+          <a:noFill/>
+          <a:ln>
+            <a:noFill/>
+          </a:ln>
+          <a:effectLst/>
+        </p:spPr>
+        <p:style>
+          <a:lnRef idx="1">
+            <a:schemeClr val="accent1"/>
+          </a:lnRef>
+          <a:fillRef idx="3">
+            <a:schemeClr val="accent1"/>
+          </a:fillRef>
+          <a:effectRef idx="2">
+            <a:schemeClr val="accent1"/>
+          </a:effectRef>
+          <a:fontRef idx="minor">
+            <a:schemeClr val="lt1"/>
+          </a:fontRef>
+        </p:style>
+        <p:txBody>
+          <a:bodyPr rtlCol="0" anchor="t" wrap="square" lIns="45720" rIns="45720" tIns="18288" bIns="18288"/>
+          <a:lstStyle/>
+          <a:p>
+            <a:pPr algn="l">
+              <a:defRPr sz="2200" b="1" i="0">
+                <a:solidFill>
+                  <a:srgbClr val="5D2A42"/>
+                </a:solidFill>
+                <a:latin typeface="Calibri"/>
               </a:defRPr>
             </a:pPr>
             <a:r>
@@ -19385,14 +19699,14 @@
       </p:sp>
       <p:sp>
         <p:nvSpPr>
-          <p:cNvPr id="12" name="Rectangle 11"/>
-          <p:cNvSpPr/>
-          <p:nvPr/>
-        </p:nvSpPr>
-        <p:spPr>
-          <a:xfrm>
-            <a:off x="1051560" y="4023360"/>
-            <a:ext cx="1097280" cy="457200"/>
+          <p:cNvPr id="14" name="Rectangle 13"/>
+          <p:cNvSpPr/>
+          <p:nvPr/>
+        </p:nvSpPr>
+        <p:spPr>
+          <a:xfrm>
+            <a:off x="1051560" y="3849624"/>
+            <a:ext cx="1097280" cy="411480"/>
           </a:xfrm>
           <a:prstGeom prst="rect">
             <a:avLst/>
@@ -19424,7 +19738,7 @@
             <a:pPr algn="l">
               <a:defRPr sz="1600" b="1" i="0">
                 <a:solidFill>
-                  <a:srgbClr val="5D2A42"/>
+                  <a:srgbClr val="1A1A1A"/>
                 </a:solidFill>
                 <a:latin typeface="Calibri"/>
               </a:defRPr>
@@ -19437,14 +19751,14 @@
       </p:sp>
       <p:sp>
         <p:nvSpPr>
-          <p:cNvPr id="13" name="Rectangle 12"/>
-          <p:cNvSpPr/>
-          <p:nvPr/>
-        </p:nvSpPr>
-        <p:spPr>
-          <a:xfrm>
-            <a:off x="2286000" y="4023360"/>
-            <a:ext cx="9601200" cy="457200"/>
+          <p:cNvPr id="15" name="Rectangle 14"/>
+          <p:cNvSpPr/>
+          <p:nvPr/>
+        </p:nvSpPr>
+        <p:spPr>
+          <a:xfrm>
+            <a:off x="2286000" y="3867912"/>
+            <a:ext cx="9601200" cy="411480"/>
           </a:xfrm>
           <a:prstGeom prst="rect">
             <a:avLst/>
@@ -19476,62 +19790,105 @@
             <a:pPr algn="l">
               <a:defRPr sz="1400" b="0" i="0">
                 <a:solidFill>
-                  <a:srgbClr val="1A1A1A"/>
-                </a:solidFill>
-                <a:latin typeface="Courier New"/>
-              </a:defRPr>
-            </a:pPr>
-            <a:r>
-              <a:t>Score applicant → bandit arm selection → PSI monitor panel</a:t>
-            </a:r>
-          </a:p>
-        </p:txBody>
-      </p:sp>
-      <p:sp>
-        <p:nvSpPr>
-          <p:cNvPr id="14" name="Rectangle 13"/>
-          <p:cNvSpPr/>
-          <p:nvPr/>
-        </p:nvSpPr>
-        <p:spPr>
-          <a:xfrm>
-            <a:off x="457200" y="4617720"/>
+                  <a:srgbClr val="3A3A3A"/>
+                </a:solidFill>
+                <a:latin typeface="Consolas"/>
+              </a:defRPr>
+            </a:pPr>
+            <a:r>
+              <a:t>Score applicant -&gt; bandit arm selection -&gt; PSI monitor panel</a:t>
+            </a:r>
+          </a:p>
+        </p:txBody>
+      </p:sp>
+      <p:sp>
+        <p:nvSpPr>
+          <p:cNvPr id="16" name="Rectangle 15"/>
+          <p:cNvSpPr/>
+          <p:nvPr/>
+        </p:nvSpPr>
+        <p:spPr>
+          <a:xfrm>
+            <a:off x="457200" y="4334256"/>
+            <a:ext cx="10881360" cy="10972"/>
+          </a:xfrm>
+          <a:prstGeom prst="rect">
+            <a:avLst/>
+          </a:prstGeom>
+          <a:solidFill>
+            <a:srgbClr val="DDDDDD"/>
+          </a:solidFill>
+          <a:ln>
+            <a:noFill/>
+          </a:ln>
+          <a:effectLst/>
+        </p:spPr>
+        <p:style>
+          <a:lnRef idx="1">
+            <a:schemeClr val="accent1"/>
+          </a:lnRef>
+          <a:fillRef idx="3">
+            <a:schemeClr val="accent1"/>
+          </a:fillRef>
+          <a:effectRef idx="2">
+            <a:schemeClr val="accent1"/>
+          </a:effectRef>
+          <a:fontRef idx="minor">
+            <a:schemeClr val="lt1"/>
+          </a:fontRef>
+        </p:style>
+        <p:txBody>
+          <a:bodyPr rtlCol="0" anchor="ctr"/>
+          <a:lstStyle/>
+          <a:p>
+            <a:pPr algn="ctr"/>
+          </a:p>
+        </p:txBody>
+      </p:sp>
+      <p:sp>
+        <p:nvSpPr>
+          <p:cNvPr id="17" name="Rectangle 16"/>
+          <p:cNvSpPr/>
+          <p:nvPr/>
+        </p:nvSpPr>
+        <p:spPr>
+          <a:xfrm>
+            <a:off x="457200" y="4517136"/>
             <a:ext cx="457200" cy="457200"/>
           </a:xfrm>
           <a:prstGeom prst="rect">
             <a:avLst/>
           </a:prstGeom>
-          <a:solidFill>
-            <a:srgbClr val="5D2A42"/>
-          </a:solidFill>
-          <a:ln>
-            <a:noFill/>
-          </a:ln>
-          <a:effectLst/>
-        </p:spPr>
-        <p:style>
-          <a:lnRef idx="1">
-            <a:schemeClr val="accent1"/>
-          </a:lnRef>
-          <a:fillRef idx="3">
-            <a:schemeClr val="accent1"/>
-          </a:fillRef>
-          <a:effectRef idx="2">
-            <a:schemeClr val="accent1"/>
-          </a:effectRef>
-          <a:fontRef idx="minor">
-            <a:schemeClr val="lt1"/>
-          </a:fontRef>
-        </p:style>
-        <p:txBody>
-          <a:bodyPr rtlCol="0" anchor="ctr"/>
-          <a:lstStyle/>
-          <a:p>
-            <a:pPr algn="ctr">
-              <a:defRPr sz="1800" b="1">
-                <a:solidFill>
-                  <a:srgbClr val="FFFFFF"/>
-                </a:solidFill>
+          <a:noFill/>
+          <a:ln>
+            <a:noFill/>
+          </a:ln>
+          <a:effectLst/>
+        </p:spPr>
+        <p:style>
+          <a:lnRef idx="1">
+            <a:schemeClr val="accent1"/>
+          </a:lnRef>
+          <a:fillRef idx="3">
+            <a:schemeClr val="accent1"/>
+          </a:fillRef>
+          <a:effectRef idx="2">
+            <a:schemeClr val="accent1"/>
+          </a:effectRef>
+          <a:fontRef idx="minor">
+            <a:schemeClr val="lt1"/>
+          </a:fontRef>
+        </p:style>
+        <p:txBody>
+          <a:bodyPr rtlCol="0" anchor="t" wrap="square" lIns="45720" rIns="45720" tIns="18288" bIns="18288"/>
+          <a:lstStyle/>
+          <a:p>
+            <a:pPr algn="l">
+              <a:defRPr sz="2200" b="1" i="0">
+                <a:solidFill>
+                  <a:srgbClr val="5D2A42"/>
+                </a:solidFill>
+                <a:latin typeface="Calibri"/>
               </a:defRPr>
             </a:pPr>
             <a:r>
@@ -19542,14 +19899,14 @@
       </p:sp>
       <p:sp>
         <p:nvSpPr>
-          <p:cNvPr id="15" name="Rectangle 14"/>
-          <p:cNvSpPr/>
-          <p:nvPr/>
-        </p:nvSpPr>
-        <p:spPr>
-          <a:xfrm>
-            <a:off x="1051560" y="4617720"/>
-            <a:ext cx="1097280" cy="457200"/>
+          <p:cNvPr id="18" name="Rectangle 17"/>
+          <p:cNvSpPr/>
+          <p:nvPr/>
+        </p:nvSpPr>
+        <p:spPr>
+          <a:xfrm>
+            <a:off x="1051560" y="4562856"/>
+            <a:ext cx="1097280" cy="411480"/>
           </a:xfrm>
           <a:prstGeom prst="rect">
             <a:avLst/>
@@ -19581,7 +19938,7 @@
             <a:pPr algn="l">
               <a:defRPr sz="1600" b="1" i="0">
                 <a:solidFill>
-                  <a:srgbClr val="5D2A42"/>
+                  <a:srgbClr val="1A1A1A"/>
                 </a:solidFill>
                 <a:latin typeface="Calibri"/>
               </a:defRPr>
@@ -19594,14 +19951,14 @@
       </p:sp>
       <p:sp>
         <p:nvSpPr>
-          <p:cNvPr id="16" name="Rectangle 15"/>
-          <p:cNvSpPr/>
-          <p:nvPr/>
-        </p:nvSpPr>
-        <p:spPr>
-          <a:xfrm>
-            <a:off x="2286000" y="4617720"/>
-            <a:ext cx="9601200" cy="457200"/>
+          <p:cNvPr id="19" name="Rectangle 18"/>
+          <p:cNvSpPr/>
+          <p:nvPr/>
+        </p:nvSpPr>
+        <p:spPr>
+          <a:xfrm>
+            <a:off x="2286000" y="4581144"/>
+            <a:ext cx="9601200" cy="411480"/>
           </a:xfrm>
           <a:prstGeom prst="rect">
             <a:avLst/>
@@ -19633,9 +19990,9 @@
             <a:pPr algn="l">
               <a:defRPr sz="1400" b="0" i="0">
                 <a:solidFill>
-                  <a:srgbClr val="1A1A1A"/>
-                </a:solidFill>
-                <a:latin typeface="Courier New"/>
+                  <a:srgbClr val="3A3A3A"/>
+                </a:solidFill>
+                <a:latin typeface="Consolas"/>
               </a:defRPr>
             </a:pPr>
             <a:r>
@@ -19646,14 +20003,58 @@
       </p:sp>
       <p:sp>
         <p:nvSpPr>
-          <p:cNvPr id="17" name="Rectangle 16"/>
-          <p:cNvSpPr/>
-          <p:nvPr/>
-        </p:nvSpPr>
-        <p:spPr>
-          <a:xfrm>
-            <a:off x="457200" y="5486400"/>
-            <a:ext cx="11277295" cy="347472"/>
+          <p:cNvPr id="20" name="Rectangle 19"/>
+          <p:cNvSpPr/>
+          <p:nvPr/>
+        </p:nvSpPr>
+        <p:spPr>
+          <a:xfrm>
+            <a:off x="457200" y="5047488"/>
+            <a:ext cx="10881360" cy="10972"/>
+          </a:xfrm>
+          <a:prstGeom prst="rect">
+            <a:avLst/>
+          </a:prstGeom>
+          <a:solidFill>
+            <a:srgbClr val="DDDDDD"/>
+          </a:solidFill>
+          <a:ln>
+            <a:noFill/>
+          </a:ln>
+          <a:effectLst/>
+        </p:spPr>
+        <p:style>
+          <a:lnRef idx="1">
+            <a:schemeClr val="accent1"/>
+          </a:lnRef>
+          <a:fillRef idx="3">
+            <a:schemeClr val="accent1"/>
+          </a:fillRef>
+          <a:effectRef idx="2">
+            <a:schemeClr val="accent1"/>
+          </a:effectRef>
+          <a:fontRef idx="minor">
+            <a:schemeClr val="lt1"/>
+          </a:fontRef>
+        </p:style>
+        <p:txBody>
+          <a:bodyPr rtlCol="0" anchor="ctr"/>
+          <a:lstStyle/>
+          <a:p>
+            <a:pPr algn="ctr"/>
+          </a:p>
+        </p:txBody>
+      </p:sp>
+      <p:sp>
+        <p:nvSpPr>
+          <p:cNvPr id="21" name="Rectangle 20"/>
+          <p:cNvSpPr/>
+          <p:nvPr/>
+        </p:nvSpPr>
+        <p:spPr>
+          <a:xfrm>
+            <a:off x="457200" y="6272784"/>
+            <a:ext cx="11277295" cy="329184"/>
           </a:xfrm>
           <a:prstGeom prst="rect">
             <a:avLst/>
@@ -19682,23 +20083,23 @@
           <a:bodyPr rtlCol="0" anchor="t" wrap="square" lIns="45720" rIns="45720" tIns="18288" bIns="18288"/>
           <a:lstStyle/>
           <a:p>
-            <a:pPr algn="ctr">
-              <a:defRPr sz="1300" b="0" i="1">
-                <a:solidFill>
-                  <a:srgbClr val="3A3A3A"/>
-                </a:solidFill>
-                <a:latin typeface="Calibri"/>
-              </a:defRPr>
-            </a:pPr>
-            <a:r>
-              <a:t>Fallback: demo screenshots available in appendix (A6–A8).</a:t>
-            </a:r>
-          </a:p>
-        </p:txBody>
-      </p:sp>
-      <p:sp>
-        <p:nvSpPr>
-          <p:cNvPr id="18" name="Rectangle 17"/>
+            <a:pPr algn="l">
+              <a:defRPr sz="1050" b="0" i="1">
+                <a:solidFill>
+                  <a:srgbClr val="777777"/>
+                </a:solidFill>
+                <a:latin typeface="Calibri"/>
+              </a:defRPr>
+            </a:pPr>
+            <a:r>
+              <a:t>Fallback: demo screenshots in appendix (A6-A8) if the live run fails.</a:t>
+            </a:r>
+          </a:p>
+        </p:txBody>
+      </p:sp>
+      <p:sp>
+        <p:nvSpPr>
+          <p:cNvPr id="22" name="Rectangle 21"/>
           <p:cNvSpPr/>
           <p:nvPr/>
         </p:nvSpPr>
@@ -19766,8 +20167,8 @@
         </p:nvSpPr>
         <p:spPr>
           <a:xfrm>
-            <a:off x="792327" y="1737360"/>
-            <a:ext cx="10607040" cy="2377440"/>
+            <a:off x="5413248" y="1828800"/>
+            <a:ext cx="1371600" cy="41148"/>
           </a:xfrm>
           <a:prstGeom prst="rect">
             <a:avLst/>
@@ -19795,26 +20196,107 @@
           </a:fontRef>
         </p:style>
         <p:txBody>
-          <a:bodyPr rtlCol="0" anchor="ctr" wrap="square" lIns="365760" rIns="365760"/>
+          <a:bodyPr rtlCol="0" anchor="ctr"/>
+          <a:lstStyle/>
+          <a:p>
+            <a:pPr algn="ctr"/>
+          </a:p>
+        </p:txBody>
+      </p:sp>
+      <p:sp>
+        <p:nvSpPr>
+          <p:cNvPr id="3" name="Rectangle 2"/>
+          <p:cNvSpPr/>
+          <p:nvPr/>
+        </p:nvSpPr>
+        <p:spPr>
+          <a:xfrm>
+            <a:off x="0" y="2148840"/>
+            <a:ext cx="12191695" cy="914400"/>
+          </a:xfrm>
+          <a:prstGeom prst="rect">
+            <a:avLst/>
+          </a:prstGeom>
+          <a:noFill/>
+          <a:ln>
+            <a:noFill/>
+          </a:ln>
+          <a:effectLst/>
+        </p:spPr>
+        <p:style>
+          <a:lnRef idx="1">
+            <a:schemeClr val="accent1"/>
+          </a:lnRef>
+          <a:fillRef idx="3">
+            <a:schemeClr val="accent1"/>
+          </a:fillRef>
+          <a:effectRef idx="2">
+            <a:schemeClr val="accent1"/>
+          </a:effectRef>
+          <a:fontRef idx="minor">
+            <a:schemeClr val="lt1"/>
+          </a:fontRef>
+        </p:style>
+        <p:txBody>
+          <a:bodyPr rtlCol="0" anchor="t" wrap="square" lIns="45720" rIns="45720" tIns="18288" bIns="18288"/>
           <a:lstStyle/>
           <a:p>
             <a:pPr algn="ctr">
-              <a:defRPr sz="5200" b="1">
-                <a:solidFill>
-                  <a:srgbClr val="FFFFFF"/>
-                </a:solidFill>
-                <a:latin typeface="Times New Roman"/>
-              </a:defRPr>
-            </a:pPr>
-            <a:r>
-              <a:t>Thank You</a:t>
-            </a:r>
-          </a:p>
+              <a:defRPr sz="5400" b="1" i="0">
+                <a:solidFill>
+                  <a:srgbClr val="1A1A1A"/>
+                </a:solidFill>
+                <a:latin typeface="Calibri"/>
+              </a:defRPr>
+            </a:pPr>
+            <a:r>
+              <a:t>Thank you.</a:t>
+            </a:r>
+          </a:p>
+        </p:txBody>
+      </p:sp>
+      <p:sp>
+        <p:nvSpPr>
+          <p:cNvPr id="4" name="Rectangle 3"/>
+          <p:cNvSpPr/>
+          <p:nvPr/>
+        </p:nvSpPr>
+        <p:spPr>
+          <a:xfrm>
+            <a:off x="0" y="3154680"/>
+            <a:ext cx="12191695" cy="457200"/>
+          </a:xfrm>
+          <a:prstGeom prst="rect">
+            <a:avLst/>
+          </a:prstGeom>
+          <a:noFill/>
+          <a:ln>
+            <a:noFill/>
+          </a:ln>
+          <a:effectLst/>
+        </p:spPr>
+        <p:style>
+          <a:lnRef idx="1">
+            <a:schemeClr val="accent1"/>
+          </a:lnRef>
+          <a:fillRef idx="3">
+            <a:schemeClr val="accent1"/>
+          </a:fillRef>
+          <a:effectRef idx="2">
+            <a:schemeClr val="accent1"/>
+          </a:effectRef>
+          <a:fontRef idx="minor">
+            <a:schemeClr val="lt1"/>
+          </a:fontRef>
+        </p:style>
+        <p:txBody>
+          <a:bodyPr rtlCol="0" anchor="t" wrap="square" lIns="45720" rIns="45720" tIns="18288" bIns="18288"/>
+          <a:lstStyle/>
           <a:p>
             <a:pPr algn="ctr">
-              <a:defRPr sz="2400">
-                <a:solidFill>
-                  <a:srgbClr val="FFFFFF"/>
+              <a:defRPr sz="2000" b="0" i="0">
+                <a:solidFill>
+                  <a:srgbClr val="5D2A42"/>
                 </a:solidFill>
                 <a:latin typeface="Calibri"/>
               </a:defRPr>
@@ -19827,13 +20309,13 @@
       </p:sp>
       <p:sp>
         <p:nvSpPr>
-          <p:cNvPr id="3" name="Rectangle 2"/>
-          <p:cNvSpPr/>
-          <p:nvPr/>
-        </p:nvSpPr>
-        <p:spPr>
-          <a:xfrm>
-            <a:off x="0" y="4389120"/>
+          <p:cNvPr id="5" name="Rectangle 4"/>
+          <p:cNvSpPr/>
+          <p:nvPr/>
+        </p:nvSpPr>
+        <p:spPr>
+          <a:xfrm>
+            <a:off x="0" y="4297680"/>
             <a:ext cx="12191695" cy="384048"/>
           </a:xfrm>
           <a:prstGeom prst="rect">
@@ -19864,11 +20346,11 @@
           <a:lstStyle/>
           <a:p>
             <a:pPr algn="ctr">
-              <a:defRPr sz="2200" b="1" i="0">
+              <a:defRPr sz="2000" b="1" i="0">
                 <a:solidFill>
                   <a:srgbClr val="1A1A1A"/>
                 </a:solidFill>
-                <a:latin typeface="Times New Roman"/>
+                <a:latin typeface="Calibri"/>
               </a:defRPr>
             </a:pPr>
             <a:r>
@@ -19879,13 +20361,13 @@
       </p:sp>
       <p:sp>
         <p:nvSpPr>
-          <p:cNvPr id="4" name="Rectangle 3"/>
-          <p:cNvSpPr/>
-          <p:nvPr/>
-        </p:nvSpPr>
-        <p:spPr>
-          <a:xfrm>
-            <a:off x="0" y="4828032"/>
+          <p:cNvPr id="6" name="Rectangle 5"/>
+          <p:cNvSpPr/>
+          <p:nvPr/>
+        </p:nvSpPr>
+        <p:spPr>
+          <a:xfrm>
+            <a:off x="0" y="4709160"/>
             <a:ext cx="12191695" cy="347472"/>
           </a:xfrm>
           <a:prstGeom prst="rect">
@@ -19916,9 +20398,9 @@
           <a:lstStyle/>
           <a:p>
             <a:pPr algn="ctr">
-              <a:defRPr sz="1700" b="0" i="0">
-                <a:solidFill>
-                  <a:srgbClr val="3A3A3A"/>
+              <a:defRPr sz="1500" b="0" i="0">
+                <a:solidFill>
+                  <a:srgbClr val="777777"/>
                 </a:solidFill>
                 <a:latin typeface="Calibri"/>
               </a:defRPr>
@@ -19931,13 +20413,13 @@
       </p:sp>
       <p:sp>
         <p:nvSpPr>
-          <p:cNvPr id="5" name="Rectangle 4"/>
-          <p:cNvSpPr/>
-          <p:nvPr/>
-        </p:nvSpPr>
-        <p:spPr>
-          <a:xfrm>
-            <a:off x="0" y="5230368"/>
+          <p:cNvPr id="7" name="Rectangle 6"/>
+          <p:cNvSpPr/>
+          <p:nvPr/>
+        </p:nvSpPr>
+        <p:spPr>
+          <a:xfrm>
+            <a:off x="0" y="5074920"/>
             <a:ext cx="12191695" cy="347472"/>
           </a:xfrm>
           <a:prstGeom prst="rect">
@@ -19968,9 +20450,9 @@
           <a:lstStyle/>
           <a:p>
             <a:pPr algn="ctr">
-              <a:defRPr sz="1600" b="0" i="0">
-                <a:solidFill>
-                  <a:srgbClr val="3A3A3A"/>
+              <a:defRPr sz="1400" b="0" i="0">
+                <a:solidFill>
+                  <a:srgbClr val="777777"/>
                 </a:solidFill>
                 <a:latin typeface="Calibri"/>
               </a:defRPr>
@@ -19981,9 +20463,84 @@
           </a:p>
         </p:txBody>
       </p:sp>
-      <p:sp>
-        <p:nvSpPr>
-          <p:cNvPr id="6" name="Rectangle 5"/>
+      <p:pic>
+        <p:nvPicPr>
+          <p:cNvPr id="8" name="Picture 7" descr="ITC.jpg"/>
+          <p:cNvPicPr>
+            <a:picLocks noChangeAspect="1"/>
+          </p:cNvPicPr>
+          <p:nvPr/>
+        </p:nvPicPr>
+        <p:blipFill>
+          <a:blip r:embed="rId2"/>
+          <a:stretch>
+            <a:fillRect/>
+          </a:stretch>
+        </p:blipFill>
+        <p:spPr>
+          <a:xfrm>
+            <a:off x="4983480" y="5623560"/>
+            <a:ext cx="640080" cy="631079"/>
+          </a:xfrm>
+          <a:prstGeom prst="rect">
+            <a:avLst/>
+          </a:prstGeom>
+          <a:effectLst/>
+        </p:spPr>
+      </p:pic>
+      <p:pic>
+        <p:nvPicPr>
+          <p:cNvPr id="9" name="Picture 8" descr="AMS.png"/>
+          <p:cNvPicPr>
+            <a:picLocks noChangeAspect="1"/>
+          </p:cNvPicPr>
+          <p:nvPr/>
+        </p:nvPicPr>
+        <p:blipFill>
+          <a:blip r:embed="rId3"/>
+          <a:stretch>
+            <a:fillRect/>
+          </a:stretch>
+        </p:blipFill>
+        <p:spPr>
+          <a:xfrm>
+            <a:off x="5715000" y="5623560"/>
+            <a:ext cx="640080" cy="606547"/>
+          </a:xfrm>
+          <a:prstGeom prst="rect">
+            <a:avLst/>
+          </a:prstGeom>
+          <a:effectLst/>
+        </p:spPr>
+      </p:pic>
+      <p:pic>
+        <p:nvPicPr>
+          <p:cNvPr id="10" name="Picture 9" descr="DAC.jpg"/>
+          <p:cNvPicPr>
+            <a:picLocks noChangeAspect="1"/>
+          </p:cNvPicPr>
+          <p:nvPr/>
+        </p:nvPicPr>
+        <p:blipFill>
+          <a:blip r:embed="rId4"/>
+          <a:stretch>
+            <a:fillRect/>
+          </a:stretch>
+        </p:blipFill>
+        <p:spPr>
+          <a:xfrm>
+            <a:off x="6537960" y="5623560"/>
+            <a:ext cx="640080" cy="360045"/>
+          </a:xfrm>
+          <a:prstGeom prst="rect">
+            <a:avLst/>
+          </a:prstGeom>
+          <a:effectLst/>
+        </p:spPr>
+      </p:pic>
+      <p:sp>
+        <p:nvSpPr>
+          <p:cNvPr id="11" name="Rectangle 10"/>
           <p:cNvSpPr/>
           <p:nvPr/>
         </p:nvSpPr>
@@ -20051,8 +20608,60 @@
         </p:nvSpPr>
         <p:spPr>
           <a:xfrm>
-            <a:off x="0" y="0"/>
-            <a:ext cx="12191695" cy="1828800"/>
+            <a:off x="457200" y="822960"/>
+            <a:ext cx="9144000" cy="914400"/>
+          </a:xfrm>
+          <a:prstGeom prst="rect">
+            <a:avLst/>
+          </a:prstGeom>
+          <a:noFill/>
+          <a:ln>
+            <a:noFill/>
+          </a:ln>
+          <a:effectLst/>
+        </p:spPr>
+        <p:style>
+          <a:lnRef idx="1">
+            <a:schemeClr val="accent1"/>
+          </a:lnRef>
+          <a:fillRef idx="3">
+            <a:schemeClr val="accent1"/>
+          </a:fillRef>
+          <a:effectRef idx="2">
+            <a:schemeClr val="accent1"/>
+          </a:effectRef>
+          <a:fontRef idx="minor">
+            <a:schemeClr val="lt1"/>
+          </a:fontRef>
+        </p:style>
+        <p:txBody>
+          <a:bodyPr rtlCol="0" anchor="t" wrap="square" lIns="45720" rIns="45720" tIns="18288" bIns="18288"/>
+          <a:lstStyle/>
+          <a:p>
+            <a:pPr algn="l">
+              <a:defRPr sz="4800" b="1" i="0">
+                <a:solidFill>
+                  <a:srgbClr val="5D2A42"/>
+                </a:solidFill>
+                <a:latin typeface="Calibri"/>
+              </a:defRPr>
+            </a:pPr>
+            <a:r>
+              <a:t>APPENDIX</a:t>
+            </a:r>
+          </a:p>
+        </p:txBody>
+      </p:sp>
+      <p:sp>
+        <p:nvSpPr>
+          <p:cNvPr id="3" name="Rectangle 2"/>
+          <p:cNvSpPr/>
+          <p:nvPr/>
+        </p:nvSpPr>
+        <p:spPr>
+          <a:xfrm>
+            <a:off x="457200" y="1874519"/>
+            <a:ext cx="502920" cy="41148"/>
           </a:xfrm>
           <a:prstGeom prst="rect">
             <a:avLst/>
@@ -20089,14 +20698,14 @@
       </p:sp>
       <p:sp>
         <p:nvSpPr>
-          <p:cNvPr id="3" name="Rectangle 2"/>
-          <p:cNvSpPr/>
-          <p:nvPr/>
-        </p:nvSpPr>
-        <p:spPr>
-          <a:xfrm>
-            <a:off x="0" y="457200"/>
-            <a:ext cx="12191695" cy="914400"/>
+          <p:cNvPr id="4" name="Rectangle 3"/>
+          <p:cNvSpPr/>
+          <p:nvPr/>
+        </p:nvSpPr>
+        <p:spPr>
+          <a:xfrm>
+            <a:off x="914400" y="2331720"/>
+            <a:ext cx="1097280" cy="365760"/>
           </a:xfrm>
           <a:prstGeom prst="rect">
             <a:avLst/>
@@ -20125,65 +20734,12 @@
           <a:bodyPr rtlCol="0" anchor="t" wrap="square" lIns="45720" rIns="45720" tIns="18288" bIns="18288"/>
           <a:lstStyle/>
           <a:p>
-            <a:pPr algn="ctr">
-              <a:defRPr sz="5200" b="1" i="0">
-                <a:solidFill>
-                  <a:srgbClr val="FFFFFF"/>
-                </a:solidFill>
-                <a:latin typeface="Times New Roman"/>
-              </a:defRPr>
-            </a:pPr>
-            <a:r>
-              <a:t>APPENDIX</a:t>
-            </a:r>
-          </a:p>
-        </p:txBody>
-      </p:sp>
-      <p:sp>
-        <p:nvSpPr>
-          <p:cNvPr id="4" name="Rectangle 3"/>
-          <p:cNvSpPr/>
-          <p:nvPr/>
-        </p:nvSpPr>
-        <p:spPr>
-          <a:xfrm>
-            <a:off x="1097280" y="2103120"/>
-            <a:ext cx="822960" cy="457200"/>
-          </a:xfrm>
-          <a:prstGeom prst="rect">
-            <a:avLst/>
-          </a:prstGeom>
-          <a:solidFill>
-            <a:srgbClr val="5D2A42"/>
-          </a:solidFill>
-          <a:ln>
-            <a:noFill/>
-          </a:ln>
-          <a:effectLst/>
-        </p:spPr>
-        <p:style>
-          <a:lnRef idx="1">
-            <a:schemeClr val="accent1"/>
-          </a:lnRef>
-          <a:fillRef idx="3">
-            <a:schemeClr val="accent1"/>
-          </a:fillRef>
-          <a:effectRef idx="2">
-            <a:schemeClr val="accent1"/>
-          </a:effectRef>
-          <a:fontRef idx="minor">
-            <a:schemeClr val="lt1"/>
-          </a:fontRef>
-        </p:style>
-        <p:txBody>
-          <a:bodyPr rtlCol="0" anchor="ctr"/>
-          <a:lstStyle/>
-          <a:p>
-            <a:pPr algn="ctr">
-              <a:defRPr sz="1100" b="1">
-                <a:solidFill>
-                  <a:srgbClr val="FFFFFF"/>
-                </a:solidFill>
+            <a:pPr algn="l">
+              <a:defRPr sz="1500" b="1" i="0">
+                <a:solidFill>
+                  <a:srgbClr val="5D2A42"/>
+                </a:solidFill>
+                <a:latin typeface="Calibri"/>
               </a:defRPr>
             </a:pPr>
             <a:r>
@@ -20200,8 +20756,8 @@
         </p:nvSpPr>
         <p:spPr>
           <a:xfrm>
-            <a:off x="2103120" y="2176272"/>
-            <a:ext cx="9144000" cy="347472"/>
+            <a:off x="2194560" y="2331720"/>
+            <a:ext cx="9144000" cy="365760"/>
           </a:xfrm>
           <a:prstGeom prst="rect">
             <a:avLst/>
@@ -20252,43 +20808,42 @@
         </p:nvSpPr>
         <p:spPr>
           <a:xfrm>
-            <a:off x="1097280" y="2697480"/>
-            <a:ext cx="822960" cy="457200"/>
-          </a:xfrm>
-          <a:prstGeom prst="rect">
-            <a:avLst/>
-          </a:prstGeom>
-          <a:solidFill>
-            <a:srgbClr val="5D2A42"/>
-          </a:solidFill>
-          <a:ln>
-            <a:noFill/>
-          </a:ln>
-          <a:effectLst/>
-        </p:spPr>
-        <p:style>
-          <a:lnRef idx="1">
-            <a:schemeClr val="accent1"/>
-          </a:lnRef>
-          <a:fillRef idx="3">
-            <a:schemeClr val="accent1"/>
-          </a:fillRef>
-          <a:effectRef idx="2">
-            <a:schemeClr val="accent1"/>
-          </a:effectRef>
-          <a:fontRef idx="minor">
-            <a:schemeClr val="lt1"/>
-          </a:fontRef>
-        </p:style>
-        <p:txBody>
-          <a:bodyPr rtlCol="0" anchor="ctr"/>
-          <a:lstStyle/>
-          <a:p>
-            <a:pPr algn="ctr">
-              <a:defRPr sz="1100" b="1">
-                <a:solidFill>
-                  <a:srgbClr val="FFFFFF"/>
-                </a:solidFill>
+            <a:off x="914400" y="2953512"/>
+            <a:ext cx="1097280" cy="365760"/>
+          </a:xfrm>
+          <a:prstGeom prst="rect">
+            <a:avLst/>
+          </a:prstGeom>
+          <a:noFill/>
+          <a:ln>
+            <a:noFill/>
+          </a:ln>
+          <a:effectLst/>
+        </p:spPr>
+        <p:style>
+          <a:lnRef idx="1">
+            <a:schemeClr val="accent1"/>
+          </a:lnRef>
+          <a:fillRef idx="3">
+            <a:schemeClr val="accent1"/>
+          </a:fillRef>
+          <a:effectRef idx="2">
+            <a:schemeClr val="accent1"/>
+          </a:effectRef>
+          <a:fontRef idx="minor">
+            <a:schemeClr val="lt1"/>
+          </a:fontRef>
+        </p:style>
+        <p:txBody>
+          <a:bodyPr rtlCol="0" anchor="t" wrap="square" lIns="45720" rIns="45720" tIns="18288" bIns="18288"/>
+          <a:lstStyle/>
+          <a:p>
+            <a:pPr algn="l">
+              <a:defRPr sz="1500" b="1" i="0">
+                <a:solidFill>
+                  <a:srgbClr val="5D2A42"/>
+                </a:solidFill>
+                <a:latin typeface="Calibri"/>
               </a:defRPr>
             </a:pPr>
             <a:r>
@@ -20305,8 +20860,8 @@
         </p:nvSpPr>
         <p:spPr>
           <a:xfrm>
-            <a:off x="2103120" y="2770632"/>
-            <a:ext cx="9144000" cy="347472"/>
+            <a:off x="2194560" y="2953512"/>
+            <a:ext cx="9144000" cy="365760"/>
           </a:xfrm>
           <a:prstGeom prst="rect">
             <a:avLst/>
@@ -20357,43 +20912,42 @@
         </p:nvSpPr>
         <p:spPr>
           <a:xfrm>
-            <a:off x="1097280" y="3291840"/>
-            <a:ext cx="822960" cy="457200"/>
-          </a:xfrm>
-          <a:prstGeom prst="rect">
-            <a:avLst/>
-          </a:prstGeom>
-          <a:solidFill>
-            <a:srgbClr val="5D2A42"/>
-          </a:solidFill>
-          <a:ln>
-            <a:noFill/>
-          </a:ln>
-          <a:effectLst/>
-        </p:spPr>
-        <p:style>
-          <a:lnRef idx="1">
-            <a:schemeClr val="accent1"/>
-          </a:lnRef>
-          <a:fillRef idx="3">
-            <a:schemeClr val="accent1"/>
-          </a:fillRef>
-          <a:effectRef idx="2">
-            <a:schemeClr val="accent1"/>
-          </a:effectRef>
-          <a:fontRef idx="minor">
-            <a:schemeClr val="lt1"/>
-          </a:fontRef>
-        </p:style>
-        <p:txBody>
-          <a:bodyPr rtlCol="0" anchor="ctr"/>
-          <a:lstStyle/>
-          <a:p>
-            <a:pPr algn="ctr">
-              <a:defRPr sz="1100" b="1">
-                <a:solidFill>
-                  <a:srgbClr val="FFFFFF"/>
-                </a:solidFill>
+            <a:off x="914400" y="3575304"/>
+            <a:ext cx="1097280" cy="365760"/>
+          </a:xfrm>
+          <a:prstGeom prst="rect">
+            <a:avLst/>
+          </a:prstGeom>
+          <a:noFill/>
+          <a:ln>
+            <a:noFill/>
+          </a:ln>
+          <a:effectLst/>
+        </p:spPr>
+        <p:style>
+          <a:lnRef idx="1">
+            <a:schemeClr val="accent1"/>
+          </a:lnRef>
+          <a:fillRef idx="3">
+            <a:schemeClr val="accent1"/>
+          </a:fillRef>
+          <a:effectRef idx="2">
+            <a:schemeClr val="accent1"/>
+          </a:effectRef>
+          <a:fontRef idx="minor">
+            <a:schemeClr val="lt1"/>
+          </a:fontRef>
+        </p:style>
+        <p:txBody>
+          <a:bodyPr rtlCol="0" anchor="t" wrap="square" lIns="45720" rIns="45720" tIns="18288" bIns="18288"/>
+          <a:lstStyle/>
+          <a:p>
+            <a:pPr algn="l">
+              <a:defRPr sz="1500" b="1" i="0">
+                <a:solidFill>
+                  <a:srgbClr val="5D2A42"/>
+                </a:solidFill>
+                <a:latin typeface="Calibri"/>
               </a:defRPr>
             </a:pPr>
             <a:r>
@@ -20410,8 +20964,8 @@
         </p:nvSpPr>
         <p:spPr>
           <a:xfrm>
-            <a:off x="2103120" y="3364992"/>
-            <a:ext cx="9144000" cy="347472"/>
+            <a:off x="2194560" y="3575304"/>
+            <a:ext cx="9144000" cy="365760"/>
           </a:xfrm>
           <a:prstGeom prst="rect">
             <a:avLst/>
@@ -20462,43 +21016,42 @@
         </p:nvSpPr>
         <p:spPr>
           <a:xfrm>
-            <a:off x="1097280" y="3886200"/>
-            <a:ext cx="822960" cy="457200"/>
-          </a:xfrm>
-          <a:prstGeom prst="rect">
-            <a:avLst/>
-          </a:prstGeom>
-          <a:solidFill>
-            <a:srgbClr val="5D2A42"/>
-          </a:solidFill>
-          <a:ln>
-            <a:noFill/>
-          </a:ln>
-          <a:effectLst/>
-        </p:spPr>
-        <p:style>
-          <a:lnRef idx="1">
-            <a:schemeClr val="accent1"/>
-          </a:lnRef>
-          <a:fillRef idx="3">
-            <a:schemeClr val="accent1"/>
-          </a:fillRef>
-          <a:effectRef idx="2">
-            <a:schemeClr val="accent1"/>
-          </a:effectRef>
-          <a:fontRef idx="minor">
-            <a:schemeClr val="lt1"/>
-          </a:fontRef>
-        </p:style>
-        <p:txBody>
-          <a:bodyPr rtlCol="0" anchor="ctr"/>
-          <a:lstStyle/>
-          <a:p>
-            <a:pPr algn="ctr">
-              <a:defRPr sz="1100" b="1">
-                <a:solidFill>
-                  <a:srgbClr val="FFFFFF"/>
-                </a:solidFill>
+            <a:off x="914400" y="4197096"/>
+            <a:ext cx="1097280" cy="365760"/>
+          </a:xfrm>
+          <a:prstGeom prst="rect">
+            <a:avLst/>
+          </a:prstGeom>
+          <a:noFill/>
+          <a:ln>
+            <a:noFill/>
+          </a:ln>
+          <a:effectLst/>
+        </p:spPr>
+        <p:style>
+          <a:lnRef idx="1">
+            <a:schemeClr val="accent1"/>
+          </a:lnRef>
+          <a:fillRef idx="3">
+            <a:schemeClr val="accent1"/>
+          </a:fillRef>
+          <a:effectRef idx="2">
+            <a:schemeClr val="accent1"/>
+          </a:effectRef>
+          <a:fontRef idx="minor">
+            <a:schemeClr val="lt1"/>
+          </a:fontRef>
+        </p:style>
+        <p:txBody>
+          <a:bodyPr rtlCol="0" anchor="t" wrap="square" lIns="45720" rIns="45720" tIns="18288" bIns="18288"/>
+          <a:lstStyle/>
+          <a:p>
+            <a:pPr algn="l">
+              <a:defRPr sz="1500" b="1" i="0">
+                <a:solidFill>
+                  <a:srgbClr val="5D2A42"/>
+                </a:solidFill>
+                <a:latin typeface="Calibri"/>
               </a:defRPr>
             </a:pPr>
             <a:r>
@@ -20515,8 +21068,8 @@
         </p:nvSpPr>
         <p:spPr>
           <a:xfrm>
-            <a:off x="2103120" y="3959352"/>
-            <a:ext cx="9144000" cy="347472"/>
+            <a:off x="2194560" y="4197096"/>
+            <a:ext cx="9144000" cy="365760"/>
           </a:xfrm>
           <a:prstGeom prst="rect">
             <a:avLst/>
@@ -20567,43 +21120,42 @@
         </p:nvSpPr>
         <p:spPr>
           <a:xfrm>
-            <a:off x="1097280" y="4480560"/>
-            <a:ext cx="822960" cy="457200"/>
-          </a:xfrm>
-          <a:prstGeom prst="rect">
-            <a:avLst/>
-          </a:prstGeom>
-          <a:solidFill>
-            <a:srgbClr val="5D2A42"/>
-          </a:solidFill>
-          <a:ln>
-            <a:noFill/>
-          </a:ln>
-          <a:effectLst/>
-        </p:spPr>
-        <p:style>
-          <a:lnRef idx="1">
-            <a:schemeClr val="accent1"/>
-          </a:lnRef>
-          <a:fillRef idx="3">
-            <a:schemeClr val="accent1"/>
-          </a:fillRef>
-          <a:effectRef idx="2">
-            <a:schemeClr val="accent1"/>
-          </a:effectRef>
-          <a:fontRef idx="minor">
-            <a:schemeClr val="lt1"/>
-          </a:fontRef>
-        </p:style>
-        <p:txBody>
-          <a:bodyPr rtlCol="0" anchor="ctr"/>
-          <a:lstStyle/>
-          <a:p>
-            <a:pPr algn="ctr">
-              <a:defRPr sz="1100" b="1">
-                <a:solidFill>
-                  <a:srgbClr val="FFFFFF"/>
-                </a:solidFill>
+            <a:off x="914400" y="4818888"/>
+            <a:ext cx="1097280" cy="365760"/>
+          </a:xfrm>
+          <a:prstGeom prst="rect">
+            <a:avLst/>
+          </a:prstGeom>
+          <a:noFill/>
+          <a:ln>
+            <a:noFill/>
+          </a:ln>
+          <a:effectLst/>
+        </p:spPr>
+        <p:style>
+          <a:lnRef idx="1">
+            <a:schemeClr val="accent1"/>
+          </a:lnRef>
+          <a:fillRef idx="3">
+            <a:schemeClr val="accent1"/>
+          </a:fillRef>
+          <a:effectRef idx="2">
+            <a:schemeClr val="accent1"/>
+          </a:effectRef>
+          <a:fontRef idx="minor">
+            <a:schemeClr val="lt1"/>
+          </a:fontRef>
+        </p:style>
+        <p:txBody>
+          <a:bodyPr rtlCol="0" anchor="t" wrap="square" lIns="45720" rIns="45720" tIns="18288" bIns="18288"/>
+          <a:lstStyle/>
+          <a:p>
+            <a:pPr algn="l">
+              <a:defRPr sz="1500" b="1" i="0">
+                <a:solidFill>
+                  <a:srgbClr val="5D2A42"/>
+                </a:solidFill>
+                <a:latin typeface="Calibri"/>
               </a:defRPr>
             </a:pPr>
             <a:r>
@@ -20620,8 +21172,8 @@
         </p:nvSpPr>
         <p:spPr>
           <a:xfrm>
-            <a:off x="2103120" y="4553712"/>
-            <a:ext cx="9144000" cy="347472"/>
+            <a:off x="2194560" y="4818888"/>
+            <a:ext cx="9144000" cy="365760"/>
           </a:xfrm>
           <a:prstGeom prst="rect">
             <a:avLst/>
@@ -20672,47 +21224,46 @@
         </p:nvSpPr>
         <p:spPr>
           <a:xfrm>
-            <a:off x="1097280" y="5074920"/>
-            <a:ext cx="822960" cy="457200"/>
-          </a:xfrm>
-          <a:prstGeom prst="rect">
-            <a:avLst/>
-          </a:prstGeom>
-          <a:solidFill>
-            <a:srgbClr val="5D2A42"/>
-          </a:solidFill>
-          <a:ln>
-            <a:noFill/>
-          </a:ln>
-          <a:effectLst/>
-        </p:spPr>
-        <p:style>
-          <a:lnRef idx="1">
-            <a:schemeClr val="accent1"/>
-          </a:lnRef>
-          <a:fillRef idx="3">
-            <a:schemeClr val="accent1"/>
-          </a:fillRef>
-          <a:effectRef idx="2">
-            <a:schemeClr val="accent1"/>
-          </a:effectRef>
-          <a:fontRef idx="minor">
-            <a:schemeClr val="lt1"/>
-          </a:fontRef>
-        </p:style>
-        <p:txBody>
-          <a:bodyPr rtlCol="0" anchor="ctr"/>
-          <a:lstStyle/>
-          <a:p>
-            <a:pPr algn="ctr">
-              <a:defRPr sz="1100" b="1">
-                <a:solidFill>
-                  <a:srgbClr val="FFFFFF"/>
-                </a:solidFill>
-              </a:defRPr>
-            </a:pPr>
-            <a:r>
-              <a:t>A6–A8</a:t>
+            <a:off x="914400" y="5440680"/>
+            <a:ext cx="1097280" cy="365760"/>
+          </a:xfrm>
+          <a:prstGeom prst="rect">
+            <a:avLst/>
+          </a:prstGeom>
+          <a:noFill/>
+          <a:ln>
+            <a:noFill/>
+          </a:ln>
+          <a:effectLst/>
+        </p:spPr>
+        <p:style>
+          <a:lnRef idx="1">
+            <a:schemeClr val="accent1"/>
+          </a:lnRef>
+          <a:fillRef idx="3">
+            <a:schemeClr val="accent1"/>
+          </a:fillRef>
+          <a:effectRef idx="2">
+            <a:schemeClr val="accent1"/>
+          </a:effectRef>
+          <a:fontRef idx="minor">
+            <a:schemeClr val="lt1"/>
+          </a:fontRef>
+        </p:style>
+        <p:txBody>
+          <a:bodyPr rtlCol="0" anchor="t" wrap="square" lIns="45720" rIns="45720" tIns="18288" bIns="18288"/>
+          <a:lstStyle/>
+          <a:p>
+            <a:pPr algn="l">
+              <a:defRPr sz="1500" b="1" i="0">
+                <a:solidFill>
+                  <a:srgbClr val="5D2A42"/>
+                </a:solidFill>
+                <a:latin typeface="Calibri"/>
+              </a:defRPr>
+            </a:pPr>
+            <a:r>
+              <a:t>A6-A8</a:t>
             </a:r>
           </a:p>
         </p:txBody>
@@ -20725,8 +21276,8 @@
         </p:nvSpPr>
         <p:spPr>
           <a:xfrm>
-            <a:off x="2103120" y="5148072"/>
-            <a:ext cx="9144000" cy="347472"/>
+            <a:off x="2194560" y="5440680"/>
+            <a:ext cx="9144000" cy="365760"/>
           </a:xfrm>
           <a:prstGeom prst="rect">
             <a:avLst/>
@@ -37404,4 +37955,324 @@
   </a:objectDefaults>
   <a:extraClrSchemeLst/>
 </a:theme>
+</file>
+
+<file path=ppt/theme/theme2.xml><?xml version="1.0" encoding="utf-8"?>
+<a:theme xmlns:a="http://schemas.openxmlformats.org/drawingml/2006/main" name="Office Theme">
+  <a:themeElements>
+    <a:clrScheme name="Office">
+      <a:dk1>
+        <a:sysClr val="windowText" lastClr="000000"/>
+      </a:dk1>
+      <a:lt1>
+        <a:sysClr val="window" lastClr="FFFFFF"/>
+      </a:lt1>
+      <a:dk2>
+        <a:srgbClr val="1F497D"/>
+      </a:dk2>
+      <a:lt2>
+        <a:srgbClr val="EEECE1"/>
+      </a:lt2>
+      <a:accent1>
+        <a:srgbClr val="4F81BD"/>
+      </a:accent1>
+      <a:accent2>
+        <a:srgbClr val="C0504D"/>
+      </a:accent2>
+      <a:accent3>
+        <a:srgbClr val="9BBB59"/>
+      </a:accent3>
+      <a:accent4>
+        <a:srgbClr val="8064A2"/>
+      </a:accent4>
+      <a:accent5>
+        <a:srgbClr val="4BACC6"/>
+      </a:accent5>
+      <a:accent6>
+        <a:srgbClr val="F79646"/>
+      </a:accent6>
+      <a:hlink>
+        <a:srgbClr val="0000FF"/>
+      </a:hlink>
+      <a:folHlink>
+        <a:srgbClr val="800080"/>
+      </a:folHlink>
+    </a:clrScheme>
+    <a:fontScheme name="Office">
+      <a:majorFont>
+        <a:latin typeface="Calibri"/>
+        <a:ea typeface=""/>
+        <a:cs typeface=""/>
+        <a:font script="Jpan" typeface="ＭＳ Ｐゴシック"/>
+        <a:font script="Hang" typeface="맑은 고딕"/>
+        <a:font script="Hans" typeface="宋体"/>
+        <a:font script="Hant" typeface="新細明體"/>
+        <a:font script="Arab" typeface="Times New Roman"/>
+        <a:font script="Hebr" typeface="Times New Roman"/>
+        <a:font script="Thai" typeface="Angsana New"/>
+        <a:font script="Ethi" typeface="Nyala"/>
+        <a:font script="Beng" typeface="Vrinda"/>
+        <a:font script="Gujr" typeface="Shruti"/>
+        <a:font script="Khmr" typeface="MoolBoran"/>
+        <a:font script="Knda" typeface="Tunga"/>
+        <a:font script="Guru" typeface="Raavi"/>
+        <a:font script="Cans" typeface="Euphemia"/>
+        <a:font script="Cher" typeface="Plantagenet Cherokee"/>
+        <a:font script="Yiii" typeface="Microsoft Yi Baiti"/>
+        <a:font script="Tibt" typeface="Microsoft Himalaya"/>
+        <a:font script="Thaa" typeface="MV Boli"/>
+        <a:font script="Deva" typeface="Mangal"/>
+        <a:font script="Telu" typeface="Gautami"/>
+        <a:font script="Taml" typeface="Latha"/>
+        <a:font script="Syrc" typeface="Estrangelo Edessa"/>
+        <a:font script="Orya" typeface="Kalinga"/>
+        <a:font script="Mlym" typeface="Kartika"/>
+        <a:font script="Laoo" typeface="DokChampa"/>
+        <a:font script="Sinh" typeface="Iskoola Pota"/>
+        <a:font script="Mong" typeface="Mongolian Baiti"/>
+        <a:font script="Viet" typeface="Times New Roman"/>
+        <a:font script="Uigh" typeface="Microsoft Uighur"/>
+        <a:font script="Geor" typeface="Sylfaen"/>
+      </a:majorFont>
+      <a:minorFont>
+        <a:latin typeface="Calibri"/>
+        <a:ea typeface=""/>
+        <a:cs typeface=""/>
+        <a:font script="Jpan" typeface="ＭＳ Ｐゴシック"/>
+        <a:font script="Hang" typeface="맑은 고딕"/>
+        <a:font script="Hans" typeface="宋体"/>
+        <a:font script="Hant" typeface="新細明體"/>
+        <a:font script="Arab" typeface="Arial"/>
+        <a:font script="Hebr" typeface="Arial"/>
+        <a:font script="Thai" typeface="Cordia New"/>
+        <a:font script="Ethi" typeface="Nyala"/>
+        <a:font script="Beng" typeface="Vrinda"/>
+        <a:font script="Gujr" typeface="Shruti"/>
+        <a:font script="Khmr" typeface="DaunPenh"/>
+        <a:font script="Knda" typeface="Tunga"/>
+        <a:font script="Guru" typeface="Raavi"/>
+        <a:font script="Cans" typeface="Euphemia"/>
+        <a:font script="Cher" typeface="Plantagenet Cherokee"/>
+        <a:font script="Yiii" typeface="Microsoft Yi Baiti"/>
+        <a:font script="Tibt" typeface="Microsoft Himalaya"/>
+        <a:font script="Thaa" typeface="MV Boli"/>
+        <a:font script="Deva" typeface="Mangal"/>
+        <a:font script="Telu" typeface="Gautami"/>
+        <a:font script="Taml" typeface="Latha"/>
+        <a:font script="Syrc" typeface="Estrangelo Edessa"/>
+        <a:font script="Orya" typeface="Kalinga"/>
+        <a:font script="Mlym" typeface="Kartika"/>
+        <a:font script="Laoo" typeface="DokChampa"/>
+        <a:font script="Sinh" typeface="Iskoola Pota"/>
+        <a:font script="Mong" typeface="Mongolian Baiti"/>
+        <a:font script="Viet" typeface="Arial"/>
+        <a:font script="Uigh" typeface="Microsoft Uighur"/>
+        <a:font script="Geor" typeface="Sylfaen"/>
+      </a:minorFont>
+    </a:fontScheme>
+    <a:fmtScheme name="Office">
+      <a:fillStyleLst>
+        <a:solidFill>
+          <a:schemeClr val="phClr"/>
+        </a:solidFill>
+        <a:gradFill rotWithShape="1">
+          <a:gsLst>
+            <a:gs pos="0">
+              <a:schemeClr val="phClr">
+                <a:tint val="50000"/>
+                <a:satMod val="300000"/>
+              </a:schemeClr>
+            </a:gs>
+            <a:gs pos="35000">
+              <a:schemeClr val="phClr">
+                <a:tint val="37000"/>
+                <a:satMod val="300000"/>
+              </a:schemeClr>
+            </a:gs>
+            <a:gs pos="100000">
+              <a:schemeClr val="phClr">
+                <a:tint val="15000"/>
+                <a:satMod val="350000"/>
+              </a:schemeClr>
+            </a:gs>
+          </a:gsLst>
+          <a:lin ang="16200000" scaled="1"/>
+        </a:gradFill>
+        <a:gradFill rotWithShape="1">
+          <a:gsLst>
+            <a:gs pos="0">
+              <a:schemeClr val="phClr">
+                <a:tint val="100000"/>
+                <a:shade val="100000"/>
+                <a:satMod val="130000"/>
+              </a:schemeClr>
+            </a:gs>
+            <a:gs pos="100000">
+              <a:schemeClr val="phClr">
+                <a:tint val="50000"/>
+                <a:shade val="100000"/>
+                <a:satMod val="350000"/>
+              </a:schemeClr>
+            </a:gs>
+          </a:gsLst>
+          <a:lin ang="16200000" scaled="0"/>
+        </a:gradFill>
+      </a:fillStyleLst>
+      <a:lnStyleLst>
+        <a:ln w="9525" cap="flat" cmpd="sng" algn="ctr">
+          <a:solidFill>
+            <a:schemeClr val="phClr">
+              <a:shade val="95000"/>
+              <a:satMod val="105000"/>
+            </a:schemeClr>
+          </a:solidFill>
+          <a:prstDash val="solid"/>
+        </a:ln>
+        <a:ln w="25400" cap="flat" cmpd="sng" algn="ctr">
+          <a:solidFill>
+            <a:schemeClr val="phClr"/>
+          </a:solidFill>
+          <a:prstDash val="solid"/>
+        </a:ln>
+        <a:ln w="38100" cap="flat" cmpd="sng" algn="ctr">
+          <a:solidFill>
+            <a:schemeClr val="phClr"/>
+          </a:solidFill>
+          <a:prstDash val="solid"/>
+        </a:ln>
+      </a:lnStyleLst>
+      <a:effectStyleLst>
+        <a:effectStyle>
+          <a:effectLst>
+            <a:outerShdw blurRad="40000" dist="20000" dir="5400000" rotWithShape="0">
+              <a:srgbClr val="000000">
+                <a:alpha val="38000"/>
+              </a:srgbClr>
+            </a:outerShdw>
+          </a:effectLst>
+        </a:effectStyle>
+        <a:effectStyle>
+          <a:effectLst>
+            <a:outerShdw blurRad="40000" dist="23000" dir="5400000" rotWithShape="0">
+              <a:srgbClr val="000000">
+                <a:alpha val="35000"/>
+              </a:srgbClr>
+            </a:outerShdw>
+          </a:effectLst>
+        </a:effectStyle>
+        <a:effectStyle>
+          <a:effectLst>
+            <a:outerShdw blurRad="40000" dist="23000" dir="5400000" rotWithShape="0">
+              <a:srgbClr val="000000">
+                <a:alpha val="35000"/>
+              </a:srgbClr>
+            </a:outerShdw>
+          </a:effectLst>
+          <a:scene3d>
+            <a:camera prst="orthographicFront">
+              <a:rot lat="0" lon="0" rev="0"/>
+            </a:camera>
+            <a:lightRig rig="threePt" dir="t">
+              <a:rot lat="0" lon="0" rev="1200000"/>
+            </a:lightRig>
+          </a:scene3d>
+          <a:sp3d>
+            <a:bevelT w="63500" h="25400"/>
+          </a:sp3d>
+        </a:effectStyle>
+      </a:effectStyleLst>
+      <a:bgFillStyleLst>
+        <a:solidFill>
+          <a:schemeClr val="phClr"/>
+        </a:solidFill>
+        <a:gradFill rotWithShape="1">
+          <a:gsLst>
+            <a:gs pos="0">
+              <a:schemeClr val="phClr">
+                <a:tint val="40000"/>
+                <a:satMod val="350000"/>
+              </a:schemeClr>
+            </a:gs>
+            <a:gs pos="40000">
+              <a:schemeClr val="phClr">
+                <a:tint val="45000"/>
+                <a:shade val="99000"/>
+                <a:satMod val="350000"/>
+              </a:schemeClr>
+            </a:gs>
+            <a:gs pos="100000">
+              <a:schemeClr val="phClr">
+                <a:shade val="20000"/>
+                <a:satMod val="255000"/>
+              </a:schemeClr>
+            </a:gs>
+          </a:gsLst>
+          <a:path path="circle">
+            <a:fillToRect l="50000" t="-80000" r="50000" b="180000"/>
+          </a:path>
+        </a:gradFill>
+        <a:gradFill rotWithShape="1">
+          <a:gsLst>
+            <a:gs pos="0">
+              <a:schemeClr val="phClr">
+                <a:tint val="80000"/>
+                <a:satMod val="300000"/>
+              </a:schemeClr>
+            </a:gs>
+            <a:gs pos="100000">
+              <a:schemeClr val="phClr">
+                <a:shade val="30000"/>
+                <a:satMod val="200000"/>
+              </a:schemeClr>
+            </a:gs>
+          </a:gsLst>
+          <a:path path="circle">
+            <a:fillToRect l="50000" t="50000" r="50000" b="50000"/>
+          </a:path>
+        </a:gradFill>
+      </a:bgFillStyleLst>
+    </a:fmtScheme>
+  </a:themeElements>
+  <a:objectDefaults>
+    <a:spDef>
+      <a:spPr/>
+      <a:bodyPr/>
+      <a:lstStyle/>
+      <a:style>
+        <a:lnRef idx="1">
+          <a:schemeClr val="accent1"/>
+        </a:lnRef>
+        <a:fillRef idx="3">
+          <a:schemeClr val="accent1"/>
+        </a:fillRef>
+        <a:effectRef idx="2">
+          <a:schemeClr val="accent1"/>
+        </a:effectRef>
+        <a:fontRef idx="minor">
+          <a:schemeClr val="lt1"/>
+        </a:fontRef>
+      </a:style>
+    </a:spDef>
+    <a:lnDef>
+      <a:spPr/>
+      <a:bodyPr/>
+      <a:lstStyle/>
+      <a:style>
+        <a:lnRef idx="2">
+          <a:schemeClr val="accent1"/>
+        </a:lnRef>
+        <a:fillRef idx="0">
+          <a:schemeClr val="accent1"/>
+        </a:fillRef>
+        <a:effectRef idx="1">
+          <a:schemeClr val="accent1"/>
+        </a:effectRef>
+        <a:fontRef idx="minor">
+          <a:schemeClr val="tx1"/>
+        </a:fontRef>
+      </a:style>
+    </a:lnDef>
+  </a:objectDefaults>
+  <a:extraClrSchemeLst/>
+</a:theme>
 </file>
--- a/thesis/health_rl/burgundy_defense_presentation.pptx
+++ b/thesis/health_rl/burgundy_defense_presentation.pptx
@@ -8,25 +8,25 @@
     <p:sldId id="256" r:id="rId7"/>
     <p:sldId id="257" r:id="rId8"/>
     <p:sldId id="258" r:id="rId9"/>
-    <p:sldId id="259" r:id="rId10"/>
-    <p:sldId id="260" r:id="rId11"/>
-    <p:sldId id="261" r:id="rId12"/>
-    <p:sldId id="262" r:id="rId13"/>
-    <p:sldId id="263" r:id="rId14"/>
-    <p:sldId id="264" r:id="rId15"/>
-    <p:sldId id="265" r:id="rId16"/>
-    <p:sldId id="266" r:id="rId17"/>
-    <p:sldId id="267" r:id="rId18"/>
-    <p:sldId id="268" r:id="rId19"/>
-    <p:sldId id="269" r:id="rId20"/>
-    <p:sldId id="270" r:id="rId21"/>
-    <p:sldId id="271" r:id="rId22"/>
-    <p:sldId id="272" r:id="rId23"/>
-    <p:sldId id="273" r:id="rId24"/>
-    <p:sldId id="274" r:id="rId25"/>
-    <p:sldId id="275" r:id="rId26"/>
-    <p:sldId id="276" r:id="rId27"/>
-    <p:sldId id="277" r:id="rId28"/>
+    <p:sldId id="259" r:id="rId11"/>
+    <p:sldId id="260" r:id="rId12"/>
+    <p:sldId id="261" r:id="rId13"/>
+    <p:sldId id="262" r:id="rId14"/>
+    <p:sldId id="263" r:id="rId15"/>
+    <p:sldId id="264" r:id="rId16"/>
+    <p:sldId id="265" r:id="rId17"/>
+    <p:sldId id="266" r:id="rId18"/>
+    <p:sldId id="267" r:id="rId19"/>
+    <p:sldId id="268" r:id="rId20"/>
+    <p:sldId id="269" r:id="rId21"/>
+    <p:sldId id="270" r:id="rId22"/>
+    <p:sldId id="271" r:id="rId23"/>
+    <p:sldId id="272" r:id="rId24"/>
+    <p:sldId id="273" r:id="rId25"/>
+    <p:sldId id="274" r:id="rId26"/>
+    <p:sldId id="275" r:id="rId27"/>
+    <p:sldId id="276" r:id="rId28"/>
+    <p:sldId id="277" r:id="rId29"/>
     <p:sldId id="278" r:id="rId30"/>
     <p:sldId id="279" r:id="rId31"/>
     <p:sldId id="280" r:id="rId32"/>
@@ -489,6 +489,356 @@
 </file>
 
 <file path=ppt/notesSlides/notesSlide1.xml><?xml version="1.0" encoding="utf-8"?>
+<p:notes xmlns:a="http://schemas.openxmlformats.org/drawingml/2006/main" xmlns:p="http://schemas.openxmlformats.org/presentationml/2006/main" xmlns:r="http://schemas.openxmlformats.org/officeDocument/2006/relationships">
+  <p:cSld>
+    <p:spTree>
+      <p:nvGrpSpPr>
+        <p:cNvPr id="1" name=""/>
+        <p:cNvGrpSpPr/>
+        <p:nvPr/>
+      </p:nvGrpSpPr>
+      <p:grpSpPr>
+        <a:xfrm>
+          <a:off x="0" y="0"/>
+          <a:ext cx="0" cy="0"/>
+          <a:chOff x="0" y="0"/>
+          <a:chExt cx="0" cy="0"/>
+        </a:xfrm>
+      </p:grpSpPr>
+      <p:sp>
+        <p:nvSpPr>
+          <p:cNvPr id="2" name="Slide Image Placeholder 1"/>
+          <p:cNvSpPr>
+            <a:spLocks noGrp="1"/>
+          </p:cNvSpPr>
+          <p:nvPr>
+            <p:ph type="sldImg" idx="2"/>
+          </p:nvPr>
+        </p:nvSpPr>
+        <p:spPr/>
+      </p:sp>
+      <p:sp>
+        <p:nvSpPr>
+          <p:cNvPr id="3" name="Notes Placeholder 2"/>
+          <p:cNvSpPr>
+            <a:spLocks noGrp="1"/>
+          </p:cNvSpPr>
+          <p:nvPr>
+            <p:ph type="body" idx="3" sz="quarter"/>
+          </p:nvPr>
+        </p:nvSpPr>
+        <p:spPr/>
+        <p:txBody>
+          <a:bodyPr/>
+          <a:lstStyle/>
+          <a:p>
+            <a:r>
+              <a:t>Cambodia context: the National Social Security Fund covers only formal-sector workers, roughly 16 percent; private voluntary insurance is nascent and underwriting is mostly manual and rule-based. Actuaries apply fixed premium rules without learning from outcomes, suboptimal decisions compound over a growing applicant pool, and penetration is below 10 percent (2023 estimate). The opportunity: a contextual bandit learns online from each decision while a PSI guardrail watches demographic fairness.</a:t>
+            </a:r>
+          </a:p>
+        </p:txBody>
+      </p:sp>
+      <p:sp>
+        <p:nvSpPr>
+          <p:cNvPr id="4" name="Slide Number Placeholder 3"/>
+          <p:cNvSpPr>
+            <a:spLocks noGrp="1"/>
+          </p:cNvSpPr>
+          <p:nvPr>
+            <p:ph type="sldNum" idx="5" sz="quarter"/>
+          </p:nvPr>
+        </p:nvSpPr>
+        <p:spPr/>
+      </p:sp>
+    </p:spTree>
+  </p:cSld>
+  <p:clrMapOvr>
+    <a:masterClrMapping/>
+  </p:clrMapOvr>
+</p:notes>
+</file>
+
+<file path=ppt/notesSlides/notesSlide2.xml><?xml version="1.0" encoding="utf-8"?>
+<p:notes xmlns:a="http://schemas.openxmlformats.org/drawingml/2006/main" xmlns:p="http://schemas.openxmlformats.org/presentationml/2006/main" xmlns:r="http://schemas.openxmlformats.org/officeDocument/2006/relationships">
+  <p:cSld>
+    <p:spTree>
+      <p:nvGrpSpPr>
+        <p:cNvPr id="1" name=""/>
+        <p:cNvGrpSpPr/>
+        <p:nvPr/>
+      </p:nvGrpSpPr>
+      <p:grpSpPr>
+        <a:xfrm>
+          <a:off x="0" y="0"/>
+          <a:ext cx="0" cy="0"/>
+          <a:chOff x="0" y="0"/>
+          <a:chExt cx="0" cy="0"/>
+        </a:xfrm>
+      </p:grpSpPr>
+      <p:sp>
+        <p:nvSpPr>
+          <p:cNvPr id="2" name="Slide Image Placeholder 1"/>
+          <p:cNvSpPr>
+            <a:spLocks noGrp="1"/>
+          </p:cNvSpPr>
+          <p:nvPr>
+            <p:ph type="sldImg" idx="2"/>
+          </p:nvPr>
+        </p:nvSpPr>
+        <p:spPr/>
+      </p:sp>
+      <p:sp>
+        <p:nvSpPr>
+          <p:cNvPr id="3" name="Notes Placeholder 2"/>
+          <p:cNvSpPr>
+            <a:spLocks noGrp="1"/>
+          </p:cNvSpPr>
+          <p:nvPr>
+            <p:ph type="body" idx="3" sz="quarter"/>
+          </p:nvPr>
+        </p:nvSpPr>
+        <p:spPr/>
+        <p:txBody>
+          <a:bodyPr/>
+          <a:lstStyle/>
+          <a:p>
+            <a:r>
+              <a:t>Four concrete failures of the status quo. One: fixed age/BMI/income cutoffs ignore context, so a misclassified high-risk applicant generates uncorrected losses. Two: the claims signal is never fed back, so accuracy degrades silently as demographics shift. Three: no parity metric is tracked, so regional or occupational concentration can develop undetected. Four: there is no triage - actuaries spend time on high-volume routine cases instead of genuine edge cases.</a:t>
+            </a:r>
+          </a:p>
+        </p:txBody>
+      </p:sp>
+      <p:sp>
+        <p:nvSpPr>
+          <p:cNvPr id="4" name="Slide Number Placeholder 3"/>
+          <p:cNvSpPr>
+            <a:spLocks noGrp="1"/>
+          </p:cNvSpPr>
+          <p:nvPr>
+            <p:ph type="sldNum" idx="5" sz="quarter"/>
+          </p:nvPr>
+        </p:nvSpPr>
+        <p:spPr/>
+      </p:sp>
+    </p:spTree>
+  </p:cSld>
+  <p:clrMapOvr>
+    <a:masterClrMapping/>
+  </p:clrMapOvr>
+</p:notes>
+</file>
+
+<file path=ppt/notesSlides/notesSlide3.xml><?xml version="1.0" encoding="utf-8"?>
+<p:notes xmlns:a="http://schemas.openxmlformats.org/drawingml/2006/main" xmlns:p="http://schemas.openxmlformats.org/presentationml/2006/main" xmlns:r="http://schemas.openxmlformats.org/officeDocument/2006/relationships">
+  <p:cSld>
+    <p:spTree>
+      <p:nvGrpSpPr>
+        <p:cNvPr id="1" name=""/>
+        <p:cNvGrpSpPr/>
+        <p:nvPr/>
+      </p:nvGrpSpPr>
+      <p:grpSpPr>
+        <a:xfrm>
+          <a:off x="0" y="0"/>
+          <a:ext cx="0" cy="0"/>
+          <a:chOff x="0" y="0"/>
+          <a:chExt cx="0" cy="0"/>
+        </a:xfrm>
+      </p:grpSpPr>
+      <p:sp>
+        <p:nvSpPr>
+          <p:cNvPr id="2" name="Slide Image Placeholder 1"/>
+          <p:cNvSpPr>
+            <a:spLocks noGrp="1"/>
+          </p:cNvSpPr>
+          <p:nvPr>
+            <p:ph type="sldImg" idx="2"/>
+          </p:nvPr>
+        </p:nvSpPr>
+        <p:spPr/>
+      </p:sp>
+      <p:sp>
+        <p:nvSpPr>
+          <p:cNvPr id="3" name="Notes Placeholder 2"/>
+          <p:cNvSpPr>
+            <a:spLocks noGrp="1"/>
+          </p:cNvSpPr>
+          <p:nvPr>
+            <p:ph type="body" idx="3" sz="quarter"/>
+          </p:nvPr>
+        </p:nvSpPr>
+        <p:spPr/>
+        <p:txBody>
+          <a:bodyPr/>
+          <a:lstStyle/>
+          <a:p>
+            <a:r>
+              <a:t>Read the goal once, slowly. The four objectives map one-to-one onto the chapters: O1 the algorithms (Chapter IV), O2 the dataset (Chapter IV), O3 the evaluation (Chapter V), O4 fairness plus HITL (Chapter V). These are verbatim from the thesis - the examiners will check the wording.</a:t>
+            </a:r>
+          </a:p>
+        </p:txBody>
+      </p:sp>
+      <p:sp>
+        <p:nvSpPr>
+          <p:cNvPr id="4" name="Slide Number Placeholder 3"/>
+          <p:cNvSpPr>
+            <a:spLocks noGrp="1"/>
+          </p:cNvSpPr>
+          <p:nvPr>
+            <p:ph type="sldNum" idx="5" sz="quarter"/>
+          </p:nvPr>
+        </p:nvSpPr>
+        <p:spPr/>
+      </p:sp>
+    </p:spTree>
+  </p:cSld>
+  <p:clrMapOvr>
+    <a:masterClrMapping/>
+  </p:clrMapOvr>
+</p:notes>
+</file>
+
+<file path=ppt/notesSlides/notesSlide4.xml><?xml version="1.0" encoding="utf-8"?>
+<p:notes xmlns:a="http://schemas.openxmlformats.org/drawingml/2006/main" xmlns:p="http://schemas.openxmlformats.org/presentationml/2006/main" xmlns:r="http://schemas.openxmlformats.org/officeDocument/2006/relationships">
+  <p:cSld>
+    <p:spTree>
+      <p:nvGrpSpPr>
+        <p:cNvPr id="1" name=""/>
+        <p:cNvGrpSpPr/>
+        <p:nvPr/>
+      </p:nvGrpSpPr>
+      <p:grpSpPr>
+        <a:xfrm>
+          <a:off x="0" y="0"/>
+          <a:ext cx="0" cy="0"/>
+          <a:chOff x="0" y="0"/>
+          <a:chExt cx="0" cy="0"/>
+        </a:xfrm>
+      </p:grpSpPr>
+      <p:sp>
+        <p:nvSpPr>
+          <p:cNvPr id="2" name="Slide Image Placeholder 1"/>
+          <p:cNvSpPr>
+            <a:spLocks noGrp="1"/>
+          </p:cNvSpPr>
+          <p:nvPr>
+            <p:ph type="sldImg" idx="2"/>
+          </p:nvPr>
+        </p:nvSpPr>
+        <p:spPr/>
+      </p:sp>
+      <p:sp>
+        <p:nvSpPr>
+          <p:cNvPr id="3" name="Notes Placeholder 2"/>
+          <p:cNvSpPr>
+            <a:spLocks noGrp="1"/>
+          </p:cNvSpPr>
+          <p:nvPr>
+            <p:ph type="body" idx="3" sz="quarter"/>
+          </p:nvPr>
+        </p:nvSpPr>
+        <p:spPr/>
+        <p:txBody>
+          <a:bodyPr/>
+          <a:lstStyle/>
+          <a:p>
+            <a:r>
+              <a:t>Decent Actuarial Consultants is a Phnom Penh actuarial consultancy serving insurers, pension funds and regulators across Southeast Asia. The thesis is embedded in a DAC-supervised research internship, March through June 2026; the deliverable is the end-to-end adaptive underwriting prototype plus this report. Timeline: March scoping and dataset design, April algorithms, May experiments, June writing and defense preparation.</a:t>
+            </a:r>
+          </a:p>
+        </p:txBody>
+      </p:sp>
+      <p:sp>
+        <p:nvSpPr>
+          <p:cNvPr id="4" name="Slide Number Placeholder 3"/>
+          <p:cNvSpPr>
+            <a:spLocks noGrp="1"/>
+          </p:cNvSpPr>
+          <p:nvPr>
+            <p:ph type="sldNum" idx="5" sz="quarter"/>
+          </p:nvPr>
+        </p:nvSpPr>
+        <p:spPr/>
+      </p:sp>
+    </p:spTree>
+  </p:cSld>
+  <p:clrMapOvr>
+    <a:masterClrMapping/>
+  </p:clrMapOvr>
+</p:notes>
+</file>
+
+<file path=ppt/notesSlides/notesSlide5.xml><?xml version="1.0" encoding="utf-8"?>
+<p:notes xmlns:a="http://schemas.openxmlformats.org/drawingml/2006/main" xmlns:p="http://schemas.openxmlformats.org/presentationml/2006/main" xmlns:r="http://schemas.openxmlformats.org/officeDocument/2006/relationships">
+  <p:cSld>
+    <p:spTree>
+      <p:nvGrpSpPr>
+        <p:cNvPr id="1" name=""/>
+        <p:cNvGrpSpPr/>
+        <p:nvPr/>
+      </p:nvGrpSpPr>
+      <p:grpSpPr>
+        <a:xfrm>
+          <a:off x="0" y="0"/>
+          <a:ext cx="0" cy="0"/>
+          <a:chOff x="0" y="0"/>
+          <a:chExt cx="0" cy="0"/>
+        </a:xfrm>
+      </p:grpSpPr>
+      <p:sp>
+        <p:nvSpPr>
+          <p:cNvPr id="2" name="Slide Image Placeholder 1"/>
+          <p:cNvSpPr>
+            <a:spLocks noGrp="1"/>
+          </p:cNvSpPr>
+          <p:nvPr>
+            <p:ph type="sldImg" idx="2"/>
+          </p:nvPr>
+        </p:nvSpPr>
+        <p:spPr/>
+      </p:sp>
+      <p:sp>
+        <p:nvSpPr>
+          <p:cNvPr id="3" name="Notes Placeholder 2"/>
+          <p:cNvSpPr>
+            <a:spLocks noGrp="1"/>
+          </p:cNvSpPr>
+          <p:nvPr>
+            <p:ph type="body" idx="3" sz="quarter"/>
+          </p:nvPr>
+        </p:nvSpPr>
+        <p:spPr/>
+        <p:txBody>
+          <a:bodyPr/>
+          <a:lstStyle/>
+          <a:p>
+            <a:r>
+              <a:t>Five strands inform the method. Bouneffouf showed LinUCB works for clinical decisions. Li et al. 2010 give the LinUCB regret bound, Agrawal and Goyal 2013 the LinTS guarantee - together they justify the two proposed policies. Frees and Kusner frame insurance fairness constraints; Yurdakul's PSI gives the monitoring metric with the 0.10/0.25 thresholds; Christiano motivates the human-in-the-loop wrapper. The thesis reviews thirty-plus sources; this is the load-bearing subset.</a:t>
+            </a:r>
+          </a:p>
+        </p:txBody>
+      </p:sp>
+      <p:sp>
+        <p:nvSpPr>
+          <p:cNvPr id="4" name="Slide Number Placeholder 3"/>
+          <p:cNvSpPr>
+            <a:spLocks noGrp="1"/>
+          </p:cNvSpPr>
+          <p:nvPr>
+            <p:ph type="sldNum" idx="5" sz="quarter"/>
+          </p:nvPr>
+        </p:nvSpPr>
+        <p:spPr/>
+      </p:sp>
+    </p:spTree>
+  </p:cSld>
+  <p:clrMapOvr>
+    <a:masterClrMapping/>
+  </p:clrMapOvr>
+</p:notes>
+</file>
+
+<file path=ppt/notesSlides/notesSlide6.xml><?xml version="1.0" encoding="utf-8"?>
 <p:notes xmlns:a="http://schemas.openxmlformats.org/drawingml/2006/main" xmlns:p="http://schemas.openxmlformats.org/presentationml/2006/main" xmlns:r="http://schemas.openxmlformats.org/officeDocument/2006/relationships">
   <p:cSld>
     <p:spTree>
@@ -29020,161 +29370,46 @@
         </p:nvSpPr>
         <p:spPr>
           <a:xfrm>
-            <a:off x="457200" y="1207008"/>
-            <a:ext cx="5943600" cy="4754880"/>
-          </a:xfrm>
-          <a:prstGeom prst="rect">
-            <a:avLst/>
-          </a:prstGeom>
-          <a:noFill/>
-          <a:ln>
-            <a:noFill/>
-          </a:ln>
-          <a:effectLst/>
-        </p:spPr>
-        <p:style>
-          <a:lnRef idx="1">
-            <a:schemeClr val="accent1"/>
-          </a:lnRef>
-          <a:fillRef idx="3">
-            <a:schemeClr val="accent1"/>
-          </a:fillRef>
-          <a:effectRef idx="2">
-            <a:schemeClr val="accent1"/>
-          </a:effectRef>
-          <a:fontRef idx="minor">
-            <a:schemeClr val="lt1"/>
-          </a:fontRef>
-        </p:style>
-        <p:txBody>
-          <a:bodyPr rtlCol="0" anchor="ctr" wrap="square"/>
-          <a:lstStyle/>
-          <a:p>
-            <a:pPr algn="ctr">
-              <a:spcAft>
-                <a:spcPts val="400"/>
-              </a:spcAft>
-              <a:defRPr sz="1300" b="1">
-                <a:solidFill>
-                  <a:srgbClr val="1A1A1A"/>
-                </a:solidFill>
-                <a:latin typeface="Calibri"/>
-              </a:defRPr>
-            </a:pPr>
-            <a:r>
-              <a:t>• Cambodia health insurance landscape:</a:t>
-            </a:r>
-          </a:p>
-          <a:p>
-            <a:pPr>
-              <a:spcAft>
-                <a:spcPts val="400"/>
-              </a:spcAft>
-              <a:defRPr sz="1300" b="0">
-                <a:solidFill>
-                  <a:srgbClr val="1A1A1A"/>
-                </a:solidFill>
-                <a:latin typeface="Calibri"/>
-              </a:defRPr>
-            </a:pPr>
-            <a:r>
-              <a:t>• National Social Security Fund (NSSF) covers formal-sector workers only (~16%)</a:t>
-            </a:r>
-          </a:p>
-          <a:p>
-            <a:pPr>
-              <a:spcAft>
-                <a:spcPts val="400"/>
-              </a:spcAft>
-              <a:defRPr sz="1300" b="0">
-                <a:solidFill>
-                  <a:srgbClr val="1A1A1A"/>
-                </a:solidFill>
-                <a:latin typeface="Calibri"/>
-              </a:defRPr>
-            </a:pPr>
-            <a:r>
-              <a:t>• Private voluntary insurance nascent; underwriting mostly manual rule-based</a:t>
-            </a:r>
-          </a:p>
-          <a:p>
-            <a:pPr>
-              <a:spcAft>
-                <a:spcPts val="400"/>
-              </a:spcAft>
-              <a:defRPr sz="1300" b="0">
-                <a:solidFill>
-                  <a:srgbClr val="1A1A1A"/>
-                </a:solidFill>
-                <a:latin typeface="Calibri"/>
-              </a:defRPr>
-            </a:pPr>
-            <a:r>
-              <a:t>• Actuaries apply fixed premium rules without learning from outcomes</a:t>
-            </a:r>
-          </a:p>
-          <a:p>
-            <a:pPr>
-              <a:spcAft>
-                <a:spcPts val="400"/>
-              </a:spcAft>
-              <a:defRPr sz="1300" b="1">
-                <a:solidFill>
-                  <a:srgbClr val="1A1A1A"/>
-                </a:solidFill>
-                <a:latin typeface="Calibri"/>
-              </a:defRPr>
-            </a:pPr>
-            <a:r>
-              <a:t>• The underwriting bottleneck:</a:t>
-            </a:r>
-          </a:p>
-          <a:p>
-            <a:pPr>
-              <a:spcAft>
-                <a:spcPts val="400"/>
-              </a:spcAft>
-              <a:defRPr sz="1300" b="0">
-                <a:solidFill>
-                  <a:srgbClr val="1A1A1A"/>
-                </a:solidFill>
-                <a:latin typeface="Calibri"/>
-              </a:defRPr>
-            </a:pPr>
-            <a:r>
-              <a:t>• Static thresholds are set at training time and never updated</a:t>
-            </a:r>
-          </a:p>
-          <a:p>
-            <a:pPr>
-              <a:spcAft>
-                <a:spcPts val="400"/>
-              </a:spcAft>
-              <a:defRPr sz="1300" b="0">
-                <a:solidFill>
-                  <a:srgbClr val="1A1A1A"/>
-                </a:solidFill>
-                <a:latin typeface="Calibri"/>
-              </a:defRPr>
-            </a:pPr>
-            <a:r>
-              <a:t>• Suboptimal decisions compound over a growing applicant pool</a:t>
-            </a:r>
-          </a:p>
-          <a:p>
-            <a:pPr>
-              <a:spcAft>
-                <a:spcPts val="400"/>
-              </a:spcAft>
-              <a:defRPr sz="1300" b="0">
-                <a:solidFill>
-                  <a:srgbClr val="1A1A1A"/>
-                </a:solidFill>
-                <a:latin typeface="Calibri"/>
-              </a:defRPr>
-            </a:pPr>
-            <a:r>
-              <a:t>• No systematic demographic-parity monitoring in current practice</a:t>
+            <a:off x="457200" y="1298448"/>
+            <a:ext cx="5852160" cy="822960"/>
+          </a:xfrm>
+          <a:prstGeom prst="rect">
+            <a:avLst/>
+          </a:prstGeom>
+          <a:noFill/>
+          <a:ln>
+            <a:noFill/>
+          </a:ln>
+          <a:effectLst/>
+        </p:spPr>
+        <p:style>
+          <a:lnRef idx="1">
+            <a:schemeClr val="accent1"/>
+          </a:lnRef>
+          <a:fillRef idx="3">
+            <a:schemeClr val="accent1"/>
+          </a:fillRef>
+          <a:effectRef idx="2">
+            <a:schemeClr val="accent1"/>
+          </a:effectRef>
+          <a:fontRef idx="minor">
+            <a:schemeClr val="lt1"/>
+          </a:fontRef>
+        </p:style>
+        <p:txBody>
+          <a:bodyPr rtlCol="0" anchor="t" wrap="square" lIns="45720" rIns="45720" tIns="18288" bIns="18288"/>
+          <a:lstStyle/>
+          <a:p>
+            <a:pPr algn="l">
+              <a:defRPr sz="6000" b="1" i="0">
+                <a:solidFill>
+                  <a:srgbClr val="5D2A42"/>
+                </a:solidFill>
+                <a:latin typeface="Calibri"/>
+              </a:defRPr>
+            </a:pPr>
+            <a:r>
+              <a:t>&lt; 10 %</a:t>
             </a:r>
           </a:p>
         </p:txBody>
@@ -29187,8 +29422,61 @@
         </p:nvSpPr>
         <p:spPr>
           <a:xfrm>
-            <a:off x="6675120" y="1207008"/>
-            <a:ext cx="5029200" cy="1737360"/>
+            <a:off x="457200" y="2167128"/>
+            <a:ext cx="5852160" cy="329184"/>
+          </a:xfrm>
+          <a:prstGeom prst="rect">
+            <a:avLst/>
+          </a:prstGeom>
+          <a:noFill/>
+          <a:ln>
+            <a:noFill/>
+          </a:ln>
+          <a:effectLst/>
+        </p:spPr>
+        <p:style>
+          <a:lnRef idx="1">
+            <a:schemeClr val="accent1"/>
+          </a:lnRef>
+          <a:fillRef idx="3">
+            <a:schemeClr val="accent1"/>
+          </a:fillRef>
+          <a:effectRef idx="2">
+            <a:schemeClr val="accent1"/>
+          </a:effectRef>
+          <a:fontRef idx="minor">
+            <a:schemeClr val="lt1"/>
+          </a:fontRef>
+        </p:style>
+        <p:txBody>
+          <a:bodyPr rtlCol="0" anchor="t" wrap="square" lIns="45720" rIns="45720" tIns="18288" bIns="18288"/>
+          <a:lstStyle/>
+          <a:p>
+            <a:pPr algn="l">
+              <a:defRPr sz="1000" b="0" i="0">
+                <a:solidFill>
+                  <a:srgbClr val="777777"/>
+                </a:solidFill>
+                <a:latin typeface="Calibri"/>
+              </a:defRPr>
+            </a:pPr>
+            <a:r>
+              <a:rPr spc="80"/>
+              <a:t>HEALTH-INSURANCE PENETRATION IN CAMBODIA (2023 EST.)</a:t>
+            </a:r>
+          </a:p>
+        </p:txBody>
+      </p:sp>
+      <p:sp>
+        <p:nvSpPr>
+          <p:cNvPr id="9" name="Rectangle 8"/>
+          <p:cNvSpPr/>
+          <p:nvPr/>
+        </p:nvSpPr>
+        <p:spPr>
+          <a:xfrm>
+            <a:off x="457200" y="2962656"/>
+            <a:ext cx="91440" cy="91440"/>
           </a:xfrm>
           <a:prstGeom prst="rect">
             <a:avLst/>
@@ -29225,118 +29513,354 @@
       </p:sp>
       <p:sp>
         <p:nvSpPr>
-          <p:cNvPr id="9" name="Rectangle 8"/>
+          <p:cNvPr id="10" name="Rectangle 9"/>
+          <p:cNvSpPr/>
+          <p:nvPr/>
+        </p:nvSpPr>
+        <p:spPr>
+          <a:xfrm>
+            <a:off x="713232" y="2852928"/>
+            <a:ext cx="5596128" cy="566928"/>
+          </a:xfrm>
+          <a:prstGeom prst="rect">
+            <a:avLst/>
+          </a:prstGeom>
+          <a:noFill/>
+          <a:ln>
+            <a:noFill/>
+          </a:ln>
+          <a:effectLst/>
+        </p:spPr>
+        <p:style>
+          <a:lnRef idx="1">
+            <a:schemeClr val="accent1"/>
+          </a:lnRef>
+          <a:fillRef idx="3">
+            <a:schemeClr val="accent1"/>
+          </a:fillRef>
+          <a:effectRef idx="2">
+            <a:schemeClr val="accent1"/>
+          </a:effectRef>
+          <a:fontRef idx="minor">
+            <a:schemeClr val="lt1"/>
+          </a:fontRef>
+        </p:style>
+        <p:txBody>
+          <a:bodyPr rtlCol="0" anchor="t" wrap="square" lIns="45720" rIns="45720" tIns="18288" bIns="18288"/>
+          <a:lstStyle/>
+          <a:p>
+            <a:pPr algn="l">
+              <a:defRPr sz="1700" b="0" i="0">
+                <a:solidFill>
+                  <a:srgbClr val="1A1A1A"/>
+                </a:solidFill>
+                <a:latin typeface="Calibri"/>
+              </a:defRPr>
+            </a:pPr>
+            <a:r>
+              <a:t>NSSF covers formal-sector workers only (~16%)</a:t>
+            </a:r>
+          </a:p>
+        </p:txBody>
+      </p:sp>
+      <p:sp>
+        <p:nvSpPr>
+          <p:cNvPr id="11" name="Rectangle 10"/>
+          <p:cNvSpPr/>
+          <p:nvPr/>
+        </p:nvSpPr>
+        <p:spPr>
+          <a:xfrm>
+            <a:off x="457200" y="3529584"/>
+            <a:ext cx="91440" cy="91440"/>
+          </a:xfrm>
+          <a:prstGeom prst="rect">
+            <a:avLst/>
+          </a:prstGeom>
+          <a:solidFill>
+            <a:srgbClr val="5D2A42"/>
+          </a:solidFill>
+          <a:ln>
+            <a:noFill/>
+          </a:ln>
+          <a:effectLst/>
+        </p:spPr>
+        <p:style>
+          <a:lnRef idx="1">
+            <a:schemeClr val="accent1"/>
+          </a:lnRef>
+          <a:fillRef idx="3">
+            <a:schemeClr val="accent1"/>
+          </a:fillRef>
+          <a:effectRef idx="2">
+            <a:schemeClr val="accent1"/>
+          </a:effectRef>
+          <a:fontRef idx="minor">
+            <a:schemeClr val="lt1"/>
+          </a:fontRef>
+        </p:style>
+        <p:txBody>
+          <a:bodyPr rtlCol="0" anchor="ctr"/>
+          <a:lstStyle/>
+          <a:p>
+            <a:pPr algn="ctr"/>
+          </a:p>
+        </p:txBody>
+      </p:sp>
+      <p:sp>
+        <p:nvSpPr>
+          <p:cNvPr id="12" name="Rectangle 11"/>
+          <p:cNvSpPr/>
+          <p:nvPr/>
+        </p:nvSpPr>
+        <p:spPr>
+          <a:xfrm>
+            <a:off x="713232" y="3419856"/>
+            <a:ext cx="5596128" cy="566928"/>
+          </a:xfrm>
+          <a:prstGeom prst="rect">
+            <a:avLst/>
+          </a:prstGeom>
+          <a:noFill/>
+          <a:ln>
+            <a:noFill/>
+          </a:ln>
+          <a:effectLst/>
+        </p:spPr>
+        <p:style>
+          <a:lnRef idx="1">
+            <a:schemeClr val="accent1"/>
+          </a:lnRef>
+          <a:fillRef idx="3">
+            <a:schemeClr val="accent1"/>
+          </a:fillRef>
+          <a:effectRef idx="2">
+            <a:schemeClr val="accent1"/>
+          </a:effectRef>
+          <a:fontRef idx="minor">
+            <a:schemeClr val="lt1"/>
+          </a:fontRef>
+        </p:style>
+        <p:txBody>
+          <a:bodyPr rtlCol="0" anchor="t" wrap="square" lIns="45720" rIns="45720" tIns="18288" bIns="18288"/>
+          <a:lstStyle/>
+          <a:p>
+            <a:pPr algn="l">
+              <a:defRPr sz="1700" b="0" i="0">
+                <a:solidFill>
+                  <a:srgbClr val="1A1A1A"/>
+                </a:solidFill>
+                <a:latin typeface="Calibri"/>
+              </a:defRPr>
+            </a:pPr>
+            <a:r>
+              <a:t>Private underwriting is manual and rule-based</a:t>
+            </a:r>
+          </a:p>
+        </p:txBody>
+      </p:sp>
+      <p:sp>
+        <p:nvSpPr>
+          <p:cNvPr id="13" name="Rectangle 12"/>
+          <p:cNvSpPr/>
+          <p:nvPr/>
+        </p:nvSpPr>
+        <p:spPr>
+          <a:xfrm>
+            <a:off x="457200" y="4096512"/>
+            <a:ext cx="91440" cy="91440"/>
+          </a:xfrm>
+          <a:prstGeom prst="rect">
+            <a:avLst/>
+          </a:prstGeom>
+          <a:solidFill>
+            <a:srgbClr val="5D2A42"/>
+          </a:solidFill>
+          <a:ln>
+            <a:noFill/>
+          </a:ln>
+          <a:effectLst/>
+        </p:spPr>
+        <p:style>
+          <a:lnRef idx="1">
+            <a:schemeClr val="accent1"/>
+          </a:lnRef>
+          <a:fillRef idx="3">
+            <a:schemeClr val="accent1"/>
+          </a:fillRef>
+          <a:effectRef idx="2">
+            <a:schemeClr val="accent1"/>
+          </a:effectRef>
+          <a:fontRef idx="minor">
+            <a:schemeClr val="lt1"/>
+          </a:fontRef>
+        </p:style>
+        <p:txBody>
+          <a:bodyPr rtlCol="0" anchor="ctr"/>
+          <a:lstStyle/>
+          <a:p>
+            <a:pPr algn="ctr"/>
+          </a:p>
+        </p:txBody>
+      </p:sp>
+      <p:sp>
+        <p:nvSpPr>
+          <p:cNvPr id="14" name="Rectangle 13"/>
+          <p:cNvSpPr/>
+          <p:nvPr/>
+        </p:nvSpPr>
+        <p:spPr>
+          <a:xfrm>
+            <a:off x="713232" y="3986784"/>
+            <a:ext cx="5596128" cy="566928"/>
+          </a:xfrm>
+          <a:prstGeom prst="rect">
+            <a:avLst/>
+          </a:prstGeom>
+          <a:noFill/>
+          <a:ln>
+            <a:noFill/>
+          </a:ln>
+          <a:effectLst/>
+        </p:spPr>
+        <p:style>
+          <a:lnRef idx="1">
+            <a:schemeClr val="accent1"/>
+          </a:lnRef>
+          <a:fillRef idx="3">
+            <a:schemeClr val="accent1"/>
+          </a:fillRef>
+          <a:effectRef idx="2">
+            <a:schemeClr val="accent1"/>
+          </a:effectRef>
+          <a:fontRef idx="minor">
+            <a:schemeClr val="lt1"/>
+          </a:fontRef>
+        </p:style>
+        <p:txBody>
+          <a:bodyPr rtlCol="0" anchor="t" wrap="square" lIns="45720" rIns="45720" tIns="18288" bIns="18288"/>
+          <a:lstStyle/>
+          <a:p>
+            <a:pPr algn="l">
+              <a:defRPr sz="1700" b="0" i="0">
+                <a:solidFill>
+                  <a:srgbClr val="1A1A1A"/>
+                </a:solidFill>
+                <a:latin typeface="Calibri"/>
+              </a:defRPr>
+            </a:pPr>
+            <a:r>
+              <a:t>Static rules never learn from outcomes</a:t>
+            </a:r>
+          </a:p>
+        </p:txBody>
+      </p:sp>
+      <p:sp>
+        <p:nvSpPr>
+          <p:cNvPr id="15" name="Rectangle 14"/>
+          <p:cNvSpPr/>
+          <p:nvPr/>
+        </p:nvSpPr>
+        <p:spPr>
+          <a:xfrm>
+            <a:off x="457200" y="4663440"/>
+            <a:ext cx="91440" cy="91440"/>
+          </a:xfrm>
+          <a:prstGeom prst="rect">
+            <a:avLst/>
+          </a:prstGeom>
+          <a:solidFill>
+            <a:srgbClr val="5D2A42"/>
+          </a:solidFill>
+          <a:ln>
+            <a:noFill/>
+          </a:ln>
+          <a:effectLst/>
+        </p:spPr>
+        <p:style>
+          <a:lnRef idx="1">
+            <a:schemeClr val="accent1"/>
+          </a:lnRef>
+          <a:fillRef idx="3">
+            <a:schemeClr val="accent1"/>
+          </a:fillRef>
+          <a:effectRef idx="2">
+            <a:schemeClr val="accent1"/>
+          </a:effectRef>
+          <a:fontRef idx="minor">
+            <a:schemeClr val="lt1"/>
+          </a:fontRef>
+        </p:style>
+        <p:txBody>
+          <a:bodyPr rtlCol="0" anchor="ctr"/>
+          <a:lstStyle/>
+          <a:p>
+            <a:pPr algn="ctr"/>
+          </a:p>
+        </p:txBody>
+      </p:sp>
+      <p:sp>
+        <p:nvSpPr>
+          <p:cNvPr id="16" name="Rectangle 15"/>
+          <p:cNvSpPr/>
+          <p:nvPr/>
+        </p:nvSpPr>
+        <p:spPr>
+          <a:xfrm>
+            <a:off x="713232" y="4553712"/>
+            <a:ext cx="5596128" cy="566928"/>
+          </a:xfrm>
+          <a:prstGeom prst="rect">
+            <a:avLst/>
+          </a:prstGeom>
+          <a:noFill/>
+          <a:ln>
+            <a:noFill/>
+          </a:ln>
+          <a:effectLst/>
+        </p:spPr>
+        <p:style>
+          <a:lnRef idx="1">
+            <a:schemeClr val="accent1"/>
+          </a:lnRef>
+          <a:fillRef idx="3">
+            <a:schemeClr val="accent1"/>
+          </a:fillRef>
+          <a:effectRef idx="2">
+            <a:schemeClr val="accent1"/>
+          </a:effectRef>
+          <a:fontRef idx="minor">
+            <a:schemeClr val="lt1"/>
+          </a:fontRef>
+        </p:style>
+        <p:txBody>
+          <a:bodyPr rtlCol="0" anchor="t" wrap="square" lIns="45720" rIns="45720" tIns="18288" bIns="18288"/>
+          <a:lstStyle/>
+          <a:p>
+            <a:pPr algn="l">
+              <a:defRPr sz="1700" b="0" i="0">
+                <a:solidFill>
+                  <a:srgbClr val="1A1A1A"/>
+                </a:solidFill>
+                <a:latin typeface="Calibri"/>
+              </a:defRPr>
+            </a:pPr>
+            <a:r>
+              <a:t>No demographic-parity monitoring in practice</a:t>
+            </a:r>
+          </a:p>
+        </p:txBody>
+      </p:sp>
+      <p:sp>
+        <p:nvSpPr>
+          <p:cNvPr id="17" name="Rectangle 16"/>
           <p:cNvSpPr/>
           <p:nvPr/>
         </p:nvSpPr>
         <p:spPr>
           <a:xfrm>
             <a:off x="6675120" y="1298448"/>
-            <a:ext cx="5029200" cy="777240"/>
-          </a:xfrm>
-          <a:prstGeom prst="rect">
-            <a:avLst/>
-          </a:prstGeom>
-          <a:noFill/>
-          <a:ln>
-            <a:noFill/>
-          </a:ln>
-          <a:effectLst/>
-        </p:spPr>
-        <p:style>
-          <a:lnRef idx="1">
-            <a:schemeClr val="accent1"/>
-          </a:lnRef>
-          <a:fillRef idx="3">
-            <a:schemeClr val="accent1"/>
-          </a:fillRef>
-          <a:effectRef idx="2">
-            <a:schemeClr val="accent1"/>
-          </a:effectRef>
-          <a:fontRef idx="minor">
-            <a:schemeClr val="lt1"/>
-          </a:fontRef>
-        </p:style>
-        <p:txBody>
-          <a:bodyPr rtlCol="0" anchor="t" wrap="square" lIns="45720" rIns="45720" tIns="18288" bIns="18288"/>
-          <a:lstStyle/>
-          <a:p>
-            <a:pPr algn="ctr">
-              <a:defRPr sz="5200" b="1" i="0">
-                <a:solidFill>
-                  <a:srgbClr val="FFFFFF"/>
-                </a:solidFill>
-                <a:latin typeface="Times New Roman"/>
-              </a:defRPr>
-            </a:pPr>
-            <a:r>
-              <a:t>&lt; 10 %</a:t>
-            </a:r>
-          </a:p>
-        </p:txBody>
-      </p:sp>
-      <p:sp>
-        <p:nvSpPr>
-          <p:cNvPr id="10" name="Rectangle 9"/>
-          <p:cNvSpPr/>
-          <p:nvPr/>
-        </p:nvSpPr>
-        <p:spPr>
-          <a:xfrm>
-            <a:off x="6675120" y="2121408"/>
-            <a:ext cx="5029200" cy="640080"/>
-          </a:xfrm>
-          <a:prstGeom prst="rect">
-            <a:avLst/>
-          </a:prstGeom>
-          <a:noFill/>
-          <a:ln>
-            <a:noFill/>
-          </a:ln>
-          <a:effectLst/>
-        </p:spPr>
-        <p:style>
-          <a:lnRef idx="1">
-            <a:schemeClr val="accent1"/>
-          </a:lnRef>
-          <a:fillRef idx="3">
-            <a:schemeClr val="accent1"/>
-          </a:fillRef>
-          <a:effectRef idx="2">
-            <a:schemeClr val="accent1"/>
-          </a:effectRef>
-          <a:fontRef idx="minor">
-            <a:schemeClr val="lt1"/>
-          </a:fontRef>
-        </p:style>
-        <p:txBody>
-          <a:bodyPr rtlCol="0" anchor="t" wrap="square" lIns="45720" rIns="45720" tIns="18288" bIns="18288"/>
-          <a:lstStyle/>
-          <a:p>
-            <a:pPr algn="ctr">
-              <a:defRPr sz="1300" b="0" i="0">
-                <a:solidFill>
-                  <a:srgbClr val="FFFFFF"/>
-                </a:solidFill>
-                <a:latin typeface="Calibri"/>
-              </a:defRPr>
-            </a:pPr>
-            <a:r>
-              <a:t>Health insurance penetration rate in Cambodia (2023 estimate)</a:t>
-            </a:r>
-          </a:p>
-        </p:txBody>
-      </p:sp>
-      <p:sp>
-        <p:nvSpPr>
-          <p:cNvPr id="11" name="Rectangle 10"/>
-          <p:cNvSpPr/>
-          <p:nvPr/>
-        </p:nvSpPr>
-        <p:spPr>
-          <a:xfrm>
-            <a:off x="6675120" y="3127248"/>
-            <a:ext cx="5029200" cy="2468880"/>
+            <a:ext cx="5029200" cy="4206240"/>
           </a:xfrm>
           <a:prstGeom prst="rect">
             <a:avLst/>
@@ -29368,7 +29892,7 @@
           <a:lstStyle/>
           <a:p>
             <a:pPr algn="l">
-              <a:defRPr sz="1300" b="0">
+              <a:defRPr sz="1500" b="0">
                 <a:solidFill>
                   <a:srgbClr val="1A1A1A"/>
                 </a:solidFill>
@@ -29376,12 +29900,12 @@
               </a:defRPr>
             </a:pPr>
             <a:r>
-              <a:t>Research opportunity:</a:t>
+              <a:t>Research opportunity</a:t>
             </a:r>
             <a:br/>
             <a:br/>
             <a:r>
-              <a:t>Contextual bandits can learn from underwriting decisions in real time, adapting to Cambodia-specific risk patterns while monitoring demographic fairness automatically.</a:t>
+              <a:t>Contextual bandits can learn from every underwriting decision in real time, adapting to Cambodia-specific risk patterns while demographic fairness is monitored automatically.</a:t>
             </a:r>
           </a:p>
         </p:txBody>
@@ -30466,14 +30990,14 @@
         </p:nvSpPr>
         <p:spPr>
           <a:xfrm>
-            <a:off x="457200" y="1207008"/>
-            <a:ext cx="5394960" cy="2103120"/>
+            <a:off x="457200" y="1389888"/>
+            <a:ext cx="5486400" cy="2148840"/>
           </a:xfrm>
           <a:prstGeom prst="rect">
             <a:avLst/>
           </a:prstGeom>
           <a:solidFill>
-            <a:srgbClr val="F2EEEF"/>
+            <a:srgbClr val="F7F5F6"/>
           </a:solidFill>
           <a:ln>
             <a:noFill/>
@@ -30510,8 +31034,8 @@
         </p:nvSpPr>
         <p:spPr>
           <a:xfrm>
-            <a:off x="457200" y="1207008"/>
-            <a:ext cx="5394960" cy="384048"/>
+            <a:off x="457200" y="1389888"/>
+            <a:ext cx="64008" cy="2148840"/>
           </a:xfrm>
           <a:prstGeom prst="rect">
             <a:avLst/>
@@ -30554,8 +31078,8 @@
         </p:nvSpPr>
         <p:spPr>
           <a:xfrm>
-            <a:off x="566928" y="1261872"/>
-            <a:ext cx="5212080" cy="292608"/>
+            <a:off x="731520" y="1709928"/>
+            <a:ext cx="4937760" cy="457200"/>
           </a:xfrm>
           <a:prstGeom prst="rect">
             <a:avLst/>
@@ -30585,9 +31109,9 @@
           <a:lstStyle/>
           <a:p>
             <a:pPr algn="l">
-              <a:defRPr sz="1400" b="1" i="0">
-                <a:solidFill>
-                  <a:srgbClr val="FFFFFF"/>
+              <a:defRPr sz="2000" b="1" i="0">
+                <a:solidFill>
+                  <a:srgbClr val="1A1A1A"/>
                 </a:solidFill>
                 <a:latin typeface="Calibri"/>
               </a:defRPr>
@@ -30606,8 +31130,8 @@
         </p:nvSpPr>
         <p:spPr>
           <a:xfrm>
-            <a:off x="594360" y="1682496"/>
-            <a:ext cx="5120640" cy="1536192"/>
+            <a:off x="731520" y="2304288"/>
+            <a:ext cx="4937760" cy="1005840"/>
           </a:xfrm>
           <a:prstGeom prst="rect">
             <a:avLst/>
@@ -30637,15 +31161,15 @@
           <a:lstStyle/>
           <a:p>
             <a:pPr algn="l">
-              <a:defRPr sz="1200" b="0" i="0">
-                <a:solidFill>
-                  <a:srgbClr val="1A1A1A"/>
-                </a:solidFill>
-                <a:latin typeface="Calibri"/>
-              </a:defRPr>
-            </a:pPr>
-            <a:r>
-              <a:t>Fixed age/BMI/income cutoffs ignore applicant context. A high-risk applicant misclassified as low-risk generates uncorrected losses.</a:t>
+              <a:defRPr sz="1500" b="0" i="0">
+                <a:solidFill>
+                  <a:srgbClr val="3A3A3A"/>
+                </a:solidFill>
+                <a:latin typeface="Calibri"/>
+              </a:defRPr>
+            </a:pPr>
+            <a:r>
+              <a:t>Fixed cutoffs ignore applicant context</a:t>
             </a:r>
           </a:p>
         </p:txBody>
@@ -30658,14 +31182,14 @@
         </p:nvSpPr>
         <p:spPr>
           <a:xfrm>
-            <a:off x="6492240" y="1207008"/>
-            <a:ext cx="5394960" cy="2103120"/>
+            <a:off x="6309360" y="1389888"/>
+            <a:ext cx="5486400" cy="2148840"/>
           </a:xfrm>
           <a:prstGeom prst="rect">
             <a:avLst/>
           </a:prstGeom>
           <a:solidFill>
-            <a:srgbClr val="F2EEEF"/>
+            <a:srgbClr val="F7F5F6"/>
           </a:solidFill>
           <a:ln>
             <a:noFill/>
@@ -30702,8 +31226,8 @@
         </p:nvSpPr>
         <p:spPr>
           <a:xfrm>
-            <a:off x="6492240" y="1207008"/>
-            <a:ext cx="5394960" cy="384048"/>
+            <a:off x="6309360" y="1389888"/>
+            <a:ext cx="64008" cy="2148840"/>
           </a:xfrm>
           <a:prstGeom prst="rect">
             <a:avLst/>
@@ -30746,8 +31270,8 @@
         </p:nvSpPr>
         <p:spPr>
           <a:xfrm>
-            <a:off x="6601968" y="1261872"/>
-            <a:ext cx="5212080" cy="292608"/>
+            <a:off x="6583680" y="1709928"/>
+            <a:ext cx="4937760" cy="457200"/>
           </a:xfrm>
           <a:prstGeom prst="rect">
             <a:avLst/>
@@ -30777,9 +31301,9 @@
           <a:lstStyle/>
           <a:p>
             <a:pPr algn="l">
-              <a:defRPr sz="1400" b="1" i="0">
-                <a:solidFill>
-                  <a:srgbClr val="FFFFFF"/>
+              <a:defRPr sz="2000" b="1" i="0">
+                <a:solidFill>
+                  <a:srgbClr val="1A1A1A"/>
                 </a:solidFill>
                 <a:latin typeface="Calibri"/>
               </a:defRPr>
@@ -30798,8 +31322,8 @@
         </p:nvSpPr>
         <p:spPr>
           <a:xfrm>
-            <a:off x="6629400" y="1682496"/>
-            <a:ext cx="5120640" cy="1536192"/>
+            <a:off x="6583680" y="2304288"/>
+            <a:ext cx="4937760" cy="1005840"/>
           </a:xfrm>
           <a:prstGeom prst="rect">
             <a:avLst/>
@@ -30829,15 +31353,15 @@
           <a:lstStyle/>
           <a:p>
             <a:pPr algn="l">
-              <a:defRPr sz="1200" b="0" i="0">
-                <a:solidFill>
-                  <a:srgbClr val="1A1A1A"/>
-                </a:solidFill>
-                <a:latin typeface="Calibri"/>
-              </a:defRPr>
-            </a:pPr>
-            <a:r>
-              <a:t>Reward signal (claims) is never fed back to the model. Accuracy degrades silently as population demographics shift.</a:t>
+              <a:defRPr sz="1500" b="0" i="0">
+                <a:solidFill>
+                  <a:srgbClr val="3A3A3A"/>
+                </a:solidFill>
+                <a:latin typeface="Calibri"/>
+              </a:defRPr>
+            </a:pPr>
+            <a:r>
+              <a:t>Claims feedback never reaches the model</a:t>
             </a:r>
           </a:p>
         </p:txBody>
@@ -30850,14 +31374,14 @@
         </p:nvSpPr>
         <p:spPr>
           <a:xfrm>
-            <a:off x="457200" y="3538728"/>
-            <a:ext cx="5394960" cy="2103120"/>
+            <a:off x="457200" y="3813048"/>
+            <a:ext cx="5486400" cy="2148840"/>
           </a:xfrm>
           <a:prstGeom prst="rect">
             <a:avLst/>
           </a:prstGeom>
           <a:solidFill>
-            <a:srgbClr val="F2EEEF"/>
+            <a:srgbClr val="F7F5F6"/>
           </a:solidFill>
           <a:ln>
             <a:noFill/>
@@ -30894,8 +31418,8 @@
         </p:nvSpPr>
         <p:spPr>
           <a:xfrm>
-            <a:off x="457200" y="3538728"/>
-            <a:ext cx="5394960" cy="384048"/>
+            <a:off x="457200" y="3813048"/>
+            <a:ext cx="64008" cy="2148840"/>
           </a:xfrm>
           <a:prstGeom prst="rect">
             <a:avLst/>
@@ -30938,8 +31462,8 @@
         </p:nvSpPr>
         <p:spPr>
           <a:xfrm>
-            <a:off x="566928" y="3593592"/>
-            <a:ext cx="5212080" cy="292608"/>
+            <a:off x="731520" y="4133088"/>
+            <a:ext cx="4937760" cy="457200"/>
           </a:xfrm>
           <a:prstGeom prst="rect">
             <a:avLst/>
@@ -30969,9 +31493,9 @@
           <a:lstStyle/>
           <a:p>
             <a:pPr algn="l">
-              <a:defRPr sz="1400" b="1" i="0">
-                <a:solidFill>
-                  <a:srgbClr val="FFFFFF"/>
+              <a:defRPr sz="2000" b="1" i="0">
+                <a:solidFill>
+                  <a:srgbClr val="1A1A1A"/>
                 </a:solidFill>
                 <a:latin typeface="Calibri"/>
               </a:defRPr>
@@ -30990,8 +31514,8 @@
         </p:nvSpPr>
         <p:spPr>
           <a:xfrm>
-            <a:off x="594360" y="4014216"/>
-            <a:ext cx="5120640" cy="1536192"/>
+            <a:off x="731520" y="4727448"/>
+            <a:ext cx="4937760" cy="1005840"/>
           </a:xfrm>
           <a:prstGeom prst="rect">
             <a:avLst/>
@@ -31021,15 +31545,15 @@
           <a:lstStyle/>
           <a:p>
             <a:pPr algn="l">
-              <a:defRPr sz="1200" b="0" i="0">
-                <a:solidFill>
-                  <a:srgbClr val="1A1A1A"/>
-                </a:solidFill>
-                <a:latin typeface="Calibri"/>
-              </a:defRPr>
-            </a:pPr>
-            <a:r>
-              <a:t>No parity metric is tracked. Rule-based systems can develop regional or occupational concentration entirely undetected.</a:t>
+              <a:defRPr sz="1500" b="0" i="0">
+                <a:solidFill>
+                  <a:srgbClr val="3A3A3A"/>
+                </a:solidFill>
+                <a:latin typeface="Calibri"/>
+              </a:defRPr>
+            </a:pPr>
+            <a:r>
+              <a:t>No parity metric is tracked</a:t>
             </a:r>
           </a:p>
         </p:txBody>
@@ -31042,14 +31566,14 @@
         </p:nvSpPr>
         <p:spPr>
           <a:xfrm>
-            <a:off x="6492240" y="3538728"/>
-            <a:ext cx="5394960" cy="2103120"/>
+            <a:off x="6309360" y="3813048"/>
+            <a:ext cx="5486400" cy="2148840"/>
           </a:xfrm>
           <a:prstGeom prst="rect">
             <a:avLst/>
           </a:prstGeom>
           <a:solidFill>
-            <a:srgbClr val="F2EEEF"/>
+            <a:srgbClr val="F7F5F6"/>
           </a:solidFill>
           <a:ln>
             <a:noFill/>
@@ -31086,8 +31610,8 @@
         </p:nvSpPr>
         <p:spPr>
           <a:xfrm>
-            <a:off x="6492240" y="3538728"/>
-            <a:ext cx="5394960" cy="384048"/>
+            <a:off x="6309360" y="3813048"/>
+            <a:ext cx="64008" cy="2148840"/>
           </a:xfrm>
           <a:prstGeom prst="rect">
             <a:avLst/>
@@ -31130,8 +31654,8 @@
         </p:nvSpPr>
         <p:spPr>
           <a:xfrm>
-            <a:off x="6601968" y="3593592"/>
-            <a:ext cx="5212080" cy="292608"/>
+            <a:off x="6583680" y="4133088"/>
+            <a:ext cx="4937760" cy="457200"/>
           </a:xfrm>
           <a:prstGeom prst="rect">
             <a:avLst/>
@@ -31161,15 +31685,15 @@
           <a:lstStyle/>
           <a:p>
             <a:pPr algn="l">
-              <a:defRPr sz="1400" b="1" i="0">
-                <a:solidFill>
-                  <a:srgbClr val="FFFFFF"/>
-                </a:solidFill>
-                <a:latin typeface="Calibri"/>
-              </a:defRPr>
-            </a:pPr>
-            <a:r>
-              <a:t>No triage mechanism</a:t>
+              <a:defRPr sz="2000" b="1" i="0">
+                <a:solidFill>
+                  <a:srgbClr val="1A1A1A"/>
+                </a:solidFill>
+                <a:latin typeface="Calibri"/>
+              </a:defRPr>
+            </a:pPr>
+            <a:r>
+              <a:t>No triage</a:t>
             </a:r>
           </a:p>
         </p:txBody>
@@ -31182,8 +31706,8 @@
         </p:nvSpPr>
         <p:spPr>
           <a:xfrm>
-            <a:off x="6629400" y="4014216"/>
-            <a:ext cx="5120640" cy="1536192"/>
+            <a:off x="6583680" y="4727448"/>
+            <a:ext cx="4937760" cy="1005840"/>
           </a:xfrm>
           <a:prstGeom prst="rect">
             <a:avLst/>
@@ -31213,15 +31737,15 @@
           <a:lstStyle/>
           <a:p>
             <a:pPr algn="l">
-              <a:defRPr sz="1200" b="0" i="0">
-                <a:solidFill>
-                  <a:srgbClr val="1A1A1A"/>
-                </a:solidFill>
-                <a:latin typeface="Calibri"/>
-              </a:defRPr>
-            </a:pPr>
-            <a:r>
-              <a:t>Low-confidence borderline cases are not flagged. Actuaries review high-volume routine cases instead of genuine edge cases.</a:t>
+              <a:defRPr sz="1500" b="0" i="0">
+                <a:solidFill>
+                  <a:srgbClr val="3A3A3A"/>
+                </a:solidFill>
+                <a:latin typeface="Calibri"/>
+              </a:defRPr>
+            </a:pPr>
+            <a:r>
+              <a:t>Experts review routine, not borderline, cases</a:t>
             </a:r>
           </a:p>
         </p:txBody>
@@ -31506,7 +32030,7 @@
         <p:spPr>
           <a:xfrm>
             <a:off x="457200" y="1207008"/>
-            <a:ext cx="11277295" cy="329184"/>
+            <a:ext cx="3657600" cy="292608"/>
           </a:xfrm>
           <a:prstGeom prst="rect">
             <a:avLst/>
@@ -31536,7 +32060,7 @@
           <a:lstStyle/>
           <a:p>
             <a:pPr algn="l">
-              <a:defRPr sz="1500" b="1" i="0">
+              <a:defRPr sz="1100" b="1" i="0">
                 <a:solidFill>
                   <a:srgbClr val="5D2A42"/>
                 </a:solidFill>
@@ -31544,7 +32068,8 @@
               </a:defRPr>
             </a:pPr>
             <a:r>
-              <a:t>Research Goal</a:t>
+              <a:rPr spc="120"/>
+              <a:t>RESEARCH GOAL</a:t>
             </a:r>
           </a:p>
         </p:txBody>
@@ -31557,8 +32082,8 @@
         </p:nvSpPr>
         <p:spPr>
           <a:xfrm>
-            <a:off x="457200" y="1572768"/>
-            <a:ext cx="11277295" cy="640080"/>
+            <a:off x="457200" y="1554480"/>
+            <a:ext cx="11277295" cy="685800"/>
           </a:xfrm>
           <a:prstGeom prst="rect">
             <a:avLst/>
@@ -31588,7 +32113,7 @@
           <a:lstStyle/>
           <a:p>
             <a:pPr algn="l">
-              <a:defRPr sz="1300" b="0" i="0">
+              <a:defRPr sz="1500" b="0" i="0">
                 <a:solidFill>
                   <a:srgbClr val="1A1A1A"/>
                 </a:solidFill>
@@ -31609,14 +32134,275 @@
         </p:nvSpPr>
         <p:spPr>
           <a:xfrm>
-            <a:off x="457200" y="2286000"/>
-            <a:ext cx="11277295" cy="27432"/>
+            <a:off x="457200" y="2441448"/>
+            <a:ext cx="3657600" cy="292608"/>
+          </a:xfrm>
+          <a:prstGeom prst="rect">
+            <a:avLst/>
+          </a:prstGeom>
+          <a:noFill/>
+          <a:ln>
+            <a:noFill/>
+          </a:ln>
+          <a:effectLst/>
+        </p:spPr>
+        <p:style>
+          <a:lnRef idx="1">
+            <a:schemeClr val="accent1"/>
+          </a:lnRef>
+          <a:fillRef idx="3">
+            <a:schemeClr val="accent1"/>
+          </a:fillRef>
+          <a:effectRef idx="2">
+            <a:schemeClr val="accent1"/>
+          </a:effectRef>
+          <a:fontRef idx="minor">
+            <a:schemeClr val="lt1"/>
+          </a:fontRef>
+        </p:style>
+        <p:txBody>
+          <a:bodyPr rtlCol="0" anchor="t" wrap="square" lIns="45720" rIns="45720" tIns="18288" bIns="18288"/>
+          <a:lstStyle/>
+          <a:p>
+            <a:pPr algn="l">
+              <a:defRPr sz="1100" b="1" i="0">
+                <a:solidFill>
+                  <a:srgbClr val="5D2A42"/>
+                </a:solidFill>
+                <a:latin typeface="Calibri"/>
+              </a:defRPr>
+            </a:pPr>
+            <a:r>
+              <a:rPr spc="120"/>
+              <a:t>OBJECTIVES</a:t>
+            </a:r>
+          </a:p>
+        </p:txBody>
+      </p:sp>
+      <p:sp>
+        <p:nvSpPr>
+          <p:cNvPr id="10" name="Rectangle 9"/>
+          <p:cNvSpPr/>
+          <p:nvPr/>
+        </p:nvSpPr>
+        <p:spPr>
+          <a:xfrm>
+            <a:off x="457200" y="2852928"/>
+            <a:ext cx="685800" cy="457200"/>
+          </a:xfrm>
+          <a:prstGeom prst="rect">
+            <a:avLst/>
+          </a:prstGeom>
+          <a:noFill/>
+          <a:ln>
+            <a:noFill/>
+          </a:ln>
+          <a:effectLst/>
+        </p:spPr>
+        <p:style>
+          <a:lnRef idx="1">
+            <a:schemeClr val="accent1"/>
+          </a:lnRef>
+          <a:fillRef idx="3">
+            <a:schemeClr val="accent1"/>
+          </a:fillRef>
+          <a:effectRef idx="2">
+            <a:schemeClr val="accent1"/>
+          </a:effectRef>
+          <a:fontRef idx="minor">
+            <a:schemeClr val="lt1"/>
+          </a:fontRef>
+        </p:style>
+        <p:txBody>
+          <a:bodyPr rtlCol="0" anchor="t" wrap="square" lIns="45720" rIns="45720" tIns="18288" bIns="18288"/>
+          <a:lstStyle/>
+          <a:p>
+            <a:pPr algn="l">
+              <a:defRPr sz="2000" b="1" i="0">
+                <a:solidFill>
+                  <a:srgbClr val="5D2A42"/>
+                </a:solidFill>
+                <a:latin typeface="Calibri"/>
+              </a:defRPr>
+            </a:pPr>
+            <a:r>
+              <a:t>O1</a:t>
+            </a:r>
+          </a:p>
+        </p:txBody>
+      </p:sp>
+      <p:sp>
+        <p:nvSpPr>
+          <p:cNvPr id="11" name="Rectangle 10"/>
+          <p:cNvSpPr/>
+          <p:nvPr/>
+        </p:nvSpPr>
+        <p:spPr>
+          <a:xfrm>
+            <a:off x="1234440" y="2871216"/>
+            <a:ext cx="10500055" cy="777240"/>
+          </a:xfrm>
+          <a:prstGeom prst="rect">
+            <a:avLst/>
+          </a:prstGeom>
+          <a:noFill/>
+          <a:ln>
+            <a:noFill/>
+          </a:ln>
+          <a:effectLst/>
+        </p:spPr>
+        <p:style>
+          <a:lnRef idx="1">
+            <a:schemeClr val="accent1"/>
+          </a:lnRef>
+          <a:fillRef idx="3">
+            <a:schemeClr val="accent1"/>
+          </a:fillRef>
+          <a:effectRef idx="2">
+            <a:schemeClr val="accent1"/>
+          </a:effectRef>
+          <a:fontRef idx="minor">
+            <a:schemeClr val="lt1"/>
+          </a:fontRef>
+        </p:style>
+        <p:txBody>
+          <a:bodyPr rtlCol="0" anchor="t" wrap="square" lIns="45720" rIns="45720" tIns="18288" bIns="18288"/>
+          <a:lstStyle/>
+          <a:p>
+            <a:pPr algn="l">
+              <a:defRPr sz="1400" b="0" i="0">
+                <a:solidFill>
+                  <a:srgbClr val="1A1A1A"/>
+                </a:solidFill>
+                <a:latin typeface="Calibri"/>
+              </a:defRPr>
+            </a:pPr>
+            <a:r>
+              <a:t>Implement and adapt linear contextual bandit algorithms (LinUCB, LinTS) for multi-arm health insurance underwriting decisions.</a:t>
+            </a:r>
+          </a:p>
+        </p:txBody>
+      </p:sp>
+      <p:sp>
+        <p:nvSpPr>
+          <p:cNvPr id="12" name="Rectangle 11"/>
+          <p:cNvSpPr/>
+          <p:nvPr/>
+        </p:nvSpPr>
+        <p:spPr>
+          <a:xfrm>
+            <a:off x="457200" y="3721608"/>
+            <a:ext cx="685800" cy="457200"/>
+          </a:xfrm>
+          <a:prstGeom prst="rect">
+            <a:avLst/>
+          </a:prstGeom>
+          <a:noFill/>
+          <a:ln>
+            <a:noFill/>
+          </a:ln>
+          <a:effectLst/>
+        </p:spPr>
+        <p:style>
+          <a:lnRef idx="1">
+            <a:schemeClr val="accent1"/>
+          </a:lnRef>
+          <a:fillRef idx="3">
+            <a:schemeClr val="accent1"/>
+          </a:fillRef>
+          <a:effectRef idx="2">
+            <a:schemeClr val="accent1"/>
+          </a:effectRef>
+          <a:fontRef idx="minor">
+            <a:schemeClr val="lt1"/>
+          </a:fontRef>
+        </p:style>
+        <p:txBody>
+          <a:bodyPr rtlCol="0" anchor="t" wrap="square" lIns="45720" rIns="45720" tIns="18288" bIns="18288"/>
+          <a:lstStyle/>
+          <a:p>
+            <a:pPr algn="l">
+              <a:defRPr sz="2000" b="1" i="0">
+                <a:solidFill>
+                  <a:srgbClr val="5D2A42"/>
+                </a:solidFill>
+                <a:latin typeface="Calibri"/>
+              </a:defRPr>
+            </a:pPr>
+            <a:r>
+              <a:t>O2</a:t>
+            </a:r>
+          </a:p>
+        </p:txBody>
+      </p:sp>
+      <p:sp>
+        <p:nvSpPr>
+          <p:cNvPr id="13" name="Rectangle 12"/>
+          <p:cNvSpPr/>
+          <p:nvPr/>
+        </p:nvSpPr>
+        <p:spPr>
+          <a:xfrm>
+            <a:off x="1234440" y="3739896"/>
+            <a:ext cx="10500055" cy="777240"/>
+          </a:xfrm>
+          <a:prstGeom prst="rect">
+            <a:avLst/>
+          </a:prstGeom>
+          <a:noFill/>
+          <a:ln>
+            <a:noFill/>
+          </a:ln>
+          <a:effectLst/>
+        </p:spPr>
+        <p:style>
+          <a:lnRef idx="1">
+            <a:schemeClr val="accent1"/>
+          </a:lnRef>
+          <a:fillRef idx="3">
+            <a:schemeClr val="accent1"/>
+          </a:fillRef>
+          <a:effectRef idx="2">
+            <a:schemeClr val="accent1"/>
+          </a:effectRef>
+          <a:fontRef idx="minor">
+            <a:schemeClr val="lt1"/>
+          </a:fontRef>
+        </p:style>
+        <p:txBody>
+          <a:bodyPr rtlCol="0" anchor="t" wrap="square" lIns="45720" rIns="45720" tIns="18288" bIns="18288"/>
+          <a:lstStyle/>
+          <a:p>
+            <a:pPr algn="l">
+              <a:defRPr sz="1400" b="0" i="0">
+                <a:solidFill>
+                  <a:srgbClr val="1A1A1A"/>
+                </a:solidFill>
+                <a:latin typeface="Calibri"/>
+              </a:defRPr>
+            </a:pPr>
+            <a:r>
+              <a:t>Construct a 2,000-record synthetic Cambodia applicant dataset anchored on CDHS, STEPS, ILO, and WHO demographic distributions.</a:t>
+            </a:r>
+          </a:p>
+        </p:txBody>
+      </p:sp>
+      <p:sp>
+        <p:nvSpPr>
+          <p:cNvPr id="14" name="Rectangle 13"/>
+          <p:cNvSpPr/>
+          <p:nvPr/>
+        </p:nvSpPr>
+        <p:spPr>
+          <a:xfrm>
+            <a:off x="457200" y="3630168"/>
+            <a:ext cx="11277295" cy="10972"/>
           </a:xfrm>
           <a:prstGeom prst="rect">
             <a:avLst/>
           </a:prstGeom>
           <a:solidFill>
-            <a:srgbClr val="5D2A42"/>
+            <a:srgbClr val="DDDDDD"/>
           </a:solidFill>
           <a:ln>
             <a:noFill/>
@@ -31647,14 +32433,14 @@
       </p:sp>
       <p:sp>
         <p:nvSpPr>
-          <p:cNvPr id="10" name="Rectangle 9"/>
-          <p:cNvSpPr/>
-          <p:nvPr/>
-        </p:nvSpPr>
-        <p:spPr>
-          <a:xfrm>
-            <a:off x="457200" y="2395728"/>
-            <a:ext cx="11277295" cy="329184"/>
+          <p:cNvPr id="15" name="Rectangle 14"/>
+          <p:cNvSpPr/>
+          <p:nvPr/>
+        </p:nvSpPr>
+        <p:spPr>
+          <a:xfrm>
+            <a:off x="457200" y="4590288"/>
+            <a:ext cx="685800" cy="457200"/>
           </a:xfrm>
           <a:prstGeom prst="rect">
             <a:avLst/>
@@ -31684,7 +32470,7 @@
           <a:lstStyle/>
           <a:p>
             <a:pPr algn="l">
-              <a:defRPr sz="1500" b="1" i="0">
+              <a:defRPr sz="2000" b="1" i="0">
                 <a:solidFill>
                   <a:srgbClr val="5D2A42"/>
                 </a:solidFill>
@@ -31692,27 +32478,79 @@
               </a:defRPr>
             </a:pPr>
             <a:r>
-              <a:t>Objectives</a:t>
-            </a:r>
-          </a:p>
-        </p:txBody>
-      </p:sp>
-      <p:sp>
-        <p:nvSpPr>
-          <p:cNvPr id="11" name="Rectangle 10"/>
-          <p:cNvSpPr/>
-          <p:nvPr/>
-        </p:nvSpPr>
-        <p:spPr>
-          <a:xfrm>
-            <a:off x="457200" y="2834640"/>
-            <a:ext cx="411480" cy="411480"/>
+              <a:t>O3</a:t>
+            </a:r>
+          </a:p>
+        </p:txBody>
+      </p:sp>
+      <p:sp>
+        <p:nvSpPr>
+          <p:cNvPr id="16" name="Rectangle 15"/>
+          <p:cNvSpPr/>
+          <p:nvPr/>
+        </p:nvSpPr>
+        <p:spPr>
+          <a:xfrm>
+            <a:off x="1234440" y="4608576"/>
+            <a:ext cx="10500055" cy="777240"/>
+          </a:xfrm>
+          <a:prstGeom prst="rect">
+            <a:avLst/>
+          </a:prstGeom>
+          <a:noFill/>
+          <a:ln>
+            <a:noFill/>
+          </a:ln>
+          <a:effectLst/>
+        </p:spPr>
+        <p:style>
+          <a:lnRef idx="1">
+            <a:schemeClr val="accent1"/>
+          </a:lnRef>
+          <a:fillRef idx="3">
+            <a:schemeClr val="accent1"/>
+          </a:fillRef>
+          <a:effectRef idx="2">
+            <a:schemeClr val="accent1"/>
+          </a:effectRef>
+          <a:fontRef idx="minor">
+            <a:schemeClr val="lt1"/>
+          </a:fontRef>
+        </p:style>
+        <p:txBody>
+          <a:bodyPr rtlCol="0" anchor="t" wrap="square" lIns="45720" rIns="45720" tIns="18288" bIns="18288"/>
+          <a:lstStyle/>
+          <a:p>
+            <a:pPr algn="l">
+              <a:defRPr sz="1400" b="0" i="0">
+                <a:solidFill>
+                  <a:srgbClr val="1A1A1A"/>
+                </a:solidFill>
+                <a:latin typeface="Calibri"/>
+              </a:defRPr>
+            </a:pPr>
+            <a:r>
+              <a:t>Evaluate bandit performance versus static rule-based baselines via 20-seed multi-run trials, bootstrap CIs, and paired Wilcoxon tests.</a:t>
+            </a:r>
+          </a:p>
+        </p:txBody>
+      </p:sp>
+      <p:sp>
+        <p:nvSpPr>
+          <p:cNvPr id="17" name="Rectangle 16"/>
+          <p:cNvSpPr/>
+          <p:nvPr/>
+        </p:nvSpPr>
+        <p:spPr>
+          <a:xfrm>
+            <a:off x="457200" y="4498848"/>
+            <a:ext cx="11277295" cy="10972"/>
           </a:xfrm>
           <a:prstGeom prst="rect">
             <a:avLst/>
           </a:prstGeom>
           <a:solidFill>
-            <a:srgbClr val="5D2A42"/>
+            <a:srgbClr val="DDDDDD"/>
           </a:solidFill>
           <a:ln>
             <a:noFill/>
@@ -31737,29 +32575,20 @@
           <a:bodyPr rtlCol="0" anchor="ctr"/>
           <a:lstStyle/>
           <a:p>
-            <a:pPr algn="ctr">
-              <a:defRPr sz="1100" b="1">
-                <a:solidFill>
-                  <a:srgbClr val="FFFFFF"/>
-                </a:solidFill>
-              </a:defRPr>
-            </a:pPr>
-            <a:r>
-              <a:t>O1</a:t>
-            </a:r>
-          </a:p>
-        </p:txBody>
-      </p:sp>
-      <p:sp>
-        <p:nvSpPr>
-          <p:cNvPr id="12" name="Rectangle 11"/>
-          <p:cNvSpPr/>
-          <p:nvPr/>
-        </p:nvSpPr>
-        <p:spPr>
-          <a:xfrm>
-            <a:off x="1005840" y="2834640"/>
-            <a:ext cx="10728655" cy="868680"/>
+            <a:pPr algn="ctr"/>
+          </a:p>
+        </p:txBody>
+      </p:sp>
+      <p:sp>
+        <p:nvSpPr>
+          <p:cNvPr id="18" name="Rectangle 17"/>
+          <p:cNvSpPr/>
+          <p:nvPr/>
+        </p:nvSpPr>
+        <p:spPr>
+          <a:xfrm>
+            <a:off x="457200" y="5458968"/>
+            <a:ext cx="685800" cy="457200"/>
           </a:xfrm>
           <a:prstGeom prst="rect">
             <a:avLst/>
@@ -31789,7 +32618,59 @@
           <a:lstStyle/>
           <a:p>
             <a:pPr algn="l">
-              <a:defRPr sz="1300" b="0" i="0">
+              <a:defRPr sz="2000" b="1" i="0">
+                <a:solidFill>
+                  <a:srgbClr val="5D2A42"/>
+                </a:solidFill>
+                <a:latin typeface="Calibri"/>
+              </a:defRPr>
+            </a:pPr>
+            <a:r>
+              <a:t>O4</a:t>
+            </a:r>
+          </a:p>
+        </p:txBody>
+      </p:sp>
+      <p:sp>
+        <p:nvSpPr>
+          <p:cNvPr id="19" name="Rectangle 18"/>
+          <p:cNvSpPr/>
+          <p:nvPr/>
+        </p:nvSpPr>
+        <p:spPr>
+          <a:xfrm>
+            <a:off x="1234440" y="5477256"/>
+            <a:ext cx="10500055" cy="777240"/>
+          </a:xfrm>
+          <a:prstGeom prst="rect">
+            <a:avLst/>
+          </a:prstGeom>
+          <a:noFill/>
+          <a:ln>
+            <a:noFill/>
+          </a:ln>
+          <a:effectLst/>
+        </p:spPr>
+        <p:style>
+          <a:lnRef idx="1">
+            <a:schemeClr val="accent1"/>
+          </a:lnRef>
+          <a:fillRef idx="3">
+            <a:schemeClr val="accent1"/>
+          </a:fillRef>
+          <a:effectRef idx="2">
+            <a:schemeClr val="accent1"/>
+          </a:effectRef>
+          <a:fontRef idx="minor">
+            <a:schemeClr val="lt1"/>
+          </a:fontRef>
+        </p:style>
+        <p:txBody>
+          <a:bodyPr rtlCol="0" anchor="t" wrap="square" lIns="45720" rIns="45720" tIns="18288" bIns="18288"/>
+          <a:lstStyle/>
+          <a:p>
+            <a:pPr algn="l">
+              <a:defRPr sz="1400" b="0" i="0">
                 <a:solidFill>
                   <a:srgbClr val="1A1A1A"/>
                 </a:solidFill>
@@ -31797,27 +32678,27 @@
               </a:defRPr>
             </a:pPr>
             <a:r>
-              <a:t>Implement and adapt linear contextual bandit algorithms (LinUCB, LinTS) for multi-arm health insurance underwriting decisions.</a:t>
-            </a:r>
-          </a:p>
-        </p:txBody>
-      </p:sp>
-      <p:sp>
-        <p:nvSpPr>
-          <p:cNvPr id="13" name="Rectangle 12"/>
-          <p:cNvSpPr/>
-          <p:nvPr/>
-        </p:nvSpPr>
-        <p:spPr>
-          <a:xfrm>
-            <a:off x="457200" y="3822192"/>
-            <a:ext cx="411480" cy="411480"/>
+              <a:t>Assess demographic fairness via PSI monitoring across region and occupation, and integrate a human-in-the-loop underwriting wrapper.</a:t>
+            </a:r>
+          </a:p>
+        </p:txBody>
+      </p:sp>
+      <p:sp>
+        <p:nvSpPr>
+          <p:cNvPr id="20" name="Rectangle 19"/>
+          <p:cNvSpPr/>
+          <p:nvPr/>
+        </p:nvSpPr>
+        <p:spPr>
+          <a:xfrm>
+            <a:off x="457200" y="5367528"/>
+            <a:ext cx="11277295" cy="10972"/>
           </a:xfrm>
           <a:prstGeom prst="rect">
             <a:avLst/>
           </a:prstGeom>
           <a:solidFill>
-            <a:srgbClr val="5D2A42"/>
+            <a:srgbClr val="DDDDDD"/>
           </a:solidFill>
           <a:ln>
             <a:noFill/>
@@ -31842,278 +32723,7 @@
           <a:bodyPr rtlCol="0" anchor="ctr"/>
           <a:lstStyle/>
           <a:p>
-            <a:pPr algn="ctr">
-              <a:defRPr sz="1100" b="1">
-                <a:solidFill>
-                  <a:srgbClr val="FFFFFF"/>
-                </a:solidFill>
-              </a:defRPr>
-            </a:pPr>
-            <a:r>
-              <a:t>O2</a:t>
-            </a:r>
-          </a:p>
-        </p:txBody>
-      </p:sp>
-      <p:sp>
-        <p:nvSpPr>
-          <p:cNvPr id="14" name="Rectangle 13"/>
-          <p:cNvSpPr/>
-          <p:nvPr/>
-        </p:nvSpPr>
-        <p:spPr>
-          <a:xfrm>
-            <a:off x="1005840" y="3822192"/>
-            <a:ext cx="10728655" cy="868680"/>
-          </a:xfrm>
-          <a:prstGeom prst="rect">
-            <a:avLst/>
-          </a:prstGeom>
-          <a:noFill/>
-          <a:ln>
-            <a:noFill/>
-          </a:ln>
-          <a:effectLst/>
-        </p:spPr>
-        <p:style>
-          <a:lnRef idx="1">
-            <a:schemeClr val="accent1"/>
-          </a:lnRef>
-          <a:fillRef idx="3">
-            <a:schemeClr val="accent1"/>
-          </a:fillRef>
-          <a:effectRef idx="2">
-            <a:schemeClr val="accent1"/>
-          </a:effectRef>
-          <a:fontRef idx="minor">
-            <a:schemeClr val="lt1"/>
-          </a:fontRef>
-        </p:style>
-        <p:txBody>
-          <a:bodyPr rtlCol="0" anchor="t" wrap="square" lIns="45720" rIns="45720" tIns="18288" bIns="18288"/>
-          <a:lstStyle/>
-          <a:p>
-            <a:pPr algn="l">
-              <a:defRPr sz="1300" b="0" i="0">
-                <a:solidFill>
-                  <a:srgbClr val="1A1A1A"/>
-                </a:solidFill>
-                <a:latin typeface="Calibri"/>
-              </a:defRPr>
-            </a:pPr>
-            <a:r>
-              <a:t>Construct a 2,000-record synthetic Cambodia applicant dataset anchored on CDHS, STEPS, ILO, and WHO demographic distributions.</a:t>
-            </a:r>
-          </a:p>
-        </p:txBody>
-      </p:sp>
-      <p:sp>
-        <p:nvSpPr>
-          <p:cNvPr id="15" name="Rectangle 14"/>
-          <p:cNvSpPr/>
-          <p:nvPr/>
-        </p:nvSpPr>
-        <p:spPr>
-          <a:xfrm>
-            <a:off x="457200" y="4809744"/>
-            <a:ext cx="411480" cy="411480"/>
-          </a:xfrm>
-          <a:prstGeom prst="rect">
-            <a:avLst/>
-          </a:prstGeom>
-          <a:solidFill>
-            <a:srgbClr val="5D2A42"/>
-          </a:solidFill>
-          <a:ln>
-            <a:noFill/>
-          </a:ln>
-          <a:effectLst/>
-        </p:spPr>
-        <p:style>
-          <a:lnRef idx="1">
-            <a:schemeClr val="accent1"/>
-          </a:lnRef>
-          <a:fillRef idx="3">
-            <a:schemeClr val="accent1"/>
-          </a:fillRef>
-          <a:effectRef idx="2">
-            <a:schemeClr val="accent1"/>
-          </a:effectRef>
-          <a:fontRef idx="minor">
-            <a:schemeClr val="lt1"/>
-          </a:fontRef>
-        </p:style>
-        <p:txBody>
-          <a:bodyPr rtlCol="0" anchor="ctr"/>
-          <a:lstStyle/>
-          <a:p>
-            <a:pPr algn="ctr">
-              <a:defRPr sz="1100" b="1">
-                <a:solidFill>
-                  <a:srgbClr val="FFFFFF"/>
-                </a:solidFill>
-              </a:defRPr>
-            </a:pPr>
-            <a:r>
-              <a:t>O3</a:t>
-            </a:r>
-          </a:p>
-        </p:txBody>
-      </p:sp>
-      <p:sp>
-        <p:nvSpPr>
-          <p:cNvPr id="16" name="Rectangle 15"/>
-          <p:cNvSpPr/>
-          <p:nvPr/>
-        </p:nvSpPr>
-        <p:spPr>
-          <a:xfrm>
-            <a:off x="1005840" y="4809744"/>
-            <a:ext cx="10728655" cy="868680"/>
-          </a:xfrm>
-          <a:prstGeom prst="rect">
-            <a:avLst/>
-          </a:prstGeom>
-          <a:noFill/>
-          <a:ln>
-            <a:noFill/>
-          </a:ln>
-          <a:effectLst/>
-        </p:spPr>
-        <p:style>
-          <a:lnRef idx="1">
-            <a:schemeClr val="accent1"/>
-          </a:lnRef>
-          <a:fillRef idx="3">
-            <a:schemeClr val="accent1"/>
-          </a:fillRef>
-          <a:effectRef idx="2">
-            <a:schemeClr val="accent1"/>
-          </a:effectRef>
-          <a:fontRef idx="minor">
-            <a:schemeClr val="lt1"/>
-          </a:fontRef>
-        </p:style>
-        <p:txBody>
-          <a:bodyPr rtlCol="0" anchor="t" wrap="square" lIns="45720" rIns="45720" tIns="18288" bIns="18288"/>
-          <a:lstStyle/>
-          <a:p>
-            <a:pPr algn="l">
-              <a:defRPr sz="1300" b="0" i="0">
-                <a:solidFill>
-                  <a:srgbClr val="1A1A1A"/>
-                </a:solidFill>
-                <a:latin typeface="Calibri"/>
-              </a:defRPr>
-            </a:pPr>
-            <a:r>
-              <a:t>Evaluate bandit performance versus static rule-based baselines via 20-seed multi-run trials, bootstrap CIs, and paired Wilcoxon tests.</a:t>
-            </a:r>
-          </a:p>
-        </p:txBody>
-      </p:sp>
-      <p:sp>
-        <p:nvSpPr>
-          <p:cNvPr id="17" name="Rectangle 16"/>
-          <p:cNvSpPr/>
-          <p:nvPr/>
-        </p:nvSpPr>
-        <p:spPr>
-          <a:xfrm>
-            <a:off x="457200" y="5797296"/>
-            <a:ext cx="411480" cy="411480"/>
-          </a:xfrm>
-          <a:prstGeom prst="rect">
-            <a:avLst/>
-          </a:prstGeom>
-          <a:solidFill>
-            <a:srgbClr val="5D2A42"/>
-          </a:solidFill>
-          <a:ln>
-            <a:noFill/>
-          </a:ln>
-          <a:effectLst/>
-        </p:spPr>
-        <p:style>
-          <a:lnRef idx="1">
-            <a:schemeClr val="accent1"/>
-          </a:lnRef>
-          <a:fillRef idx="3">
-            <a:schemeClr val="accent1"/>
-          </a:fillRef>
-          <a:effectRef idx="2">
-            <a:schemeClr val="accent1"/>
-          </a:effectRef>
-          <a:fontRef idx="minor">
-            <a:schemeClr val="lt1"/>
-          </a:fontRef>
-        </p:style>
-        <p:txBody>
-          <a:bodyPr rtlCol="0" anchor="ctr"/>
-          <a:lstStyle/>
-          <a:p>
-            <a:pPr algn="ctr">
-              <a:defRPr sz="1100" b="1">
-                <a:solidFill>
-                  <a:srgbClr val="FFFFFF"/>
-                </a:solidFill>
-              </a:defRPr>
-            </a:pPr>
-            <a:r>
-              <a:t>O4</a:t>
-            </a:r>
-          </a:p>
-        </p:txBody>
-      </p:sp>
-      <p:sp>
-        <p:nvSpPr>
-          <p:cNvPr id="18" name="Rectangle 17"/>
-          <p:cNvSpPr/>
-          <p:nvPr/>
-        </p:nvSpPr>
-        <p:spPr>
-          <a:xfrm>
-            <a:off x="1005840" y="5797296"/>
-            <a:ext cx="10728655" cy="868680"/>
-          </a:xfrm>
-          <a:prstGeom prst="rect">
-            <a:avLst/>
-          </a:prstGeom>
-          <a:noFill/>
-          <a:ln>
-            <a:noFill/>
-          </a:ln>
-          <a:effectLst/>
-        </p:spPr>
-        <p:style>
-          <a:lnRef idx="1">
-            <a:schemeClr val="accent1"/>
-          </a:lnRef>
-          <a:fillRef idx="3">
-            <a:schemeClr val="accent1"/>
-          </a:fillRef>
-          <a:effectRef idx="2">
-            <a:schemeClr val="accent1"/>
-          </a:effectRef>
-          <a:fontRef idx="minor">
-            <a:schemeClr val="lt1"/>
-          </a:fontRef>
-        </p:style>
-        <p:txBody>
-          <a:bodyPr rtlCol="0" anchor="t" wrap="square" lIns="45720" rIns="45720" tIns="18288" bIns="18288"/>
-          <a:lstStyle/>
-          <a:p>
-            <a:pPr algn="l">
-              <a:defRPr sz="1300" b="0" i="0">
-                <a:solidFill>
-                  <a:srgbClr val="1A1A1A"/>
-                </a:solidFill>
-                <a:latin typeface="Calibri"/>
-              </a:defRPr>
-            </a:pPr>
-            <a:r>
-              <a:t>Assess demographic fairness via PSI monitoring across region and occupation, and integrate a human-in-the-loop underwriting wrapper.</a:t>
-            </a:r>
+            <a:pPr algn="ctr"/>
           </a:p>
         </p:txBody>
       </p:sp>
@@ -32396,215 +33006,8 @@
         </p:nvSpPr>
         <p:spPr>
           <a:xfrm>
-            <a:off x="457200" y="1207008"/>
-            <a:ext cx="5760720" cy="329184"/>
-          </a:xfrm>
-          <a:prstGeom prst="rect">
-            <a:avLst/>
-          </a:prstGeom>
-          <a:noFill/>
-          <a:ln>
-            <a:noFill/>
-          </a:ln>
-          <a:effectLst/>
-        </p:spPr>
-        <p:style>
-          <a:lnRef idx="1">
-            <a:schemeClr val="accent1"/>
-          </a:lnRef>
-          <a:fillRef idx="3">
-            <a:schemeClr val="accent1"/>
-          </a:fillRef>
-          <a:effectRef idx="2">
-            <a:schemeClr val="accent1"/>
-          </a:effectRef>
-          <a:fontRef idx="minor">
-            <a:schemeClr val="lt1"/>
-          </a:fontRef>
-        </p:style>
-        <p:txBody>
-          <a:bodyPr rtlCol="0" anchor="t" wrap="square" lIns="45720" rIns="45720" tIns="18288" bIns="18288"/>
-          <a:lstStyle/>
-          <a:p>
-            <a:pPr algn="l">
-              <a:defRPr sz="1500" b="1" i="0">
-                <a:solidFill>
-                  <a:srgbClr val="5D2A42"/>
-                </a:solidFill>
-                <a:latin typeface="Calibri"/>
-              </a:defRPr>
-            </a:pPr>
-            <a:r>
-              <a:t>About DAC</a:t>
-            </a:r>
-          </a:p>
-        </p:txBody>
-      </p:sp>
-      <p:sp>
-        <p:nvSpPr>
-          <p:cNvPr id="8" name="Rectangle 7"/>
-          <p:cNvSpPr/>
-          <p:nvPr/>
-        </p:nvSpPr>
-        <p:spPr>
-          <a:xfrm>
-            <a:off x="457200" y="1591056"/>
-            <a:ext cx="5760720" cy="2286000"/>
-          </a:xfrm>
-          <a:prstGeom prst="rect">
-            <a:avLst/>
-          </a:prstGeom>
-          <a:noFill/>
-          <a:ln>
-            <a:noFill/>
-          </a:ln>
-          <a:effectLst/>
-        </p:spPr>
-        <p:style>
-          <a:lnRef idx="1">
-            <a:schemeClr val="accent1"/>
-          </a:lnRef>
-          <a:fillRef idx="3">
-            <a:schemeClr val="accent1"/>
-          </a:fillRef>
-          <a:effectRef idx="2">
-            <a:schemeClr val="accent1"/>
-          </a:effectRef>
-          <a:fontRef idx="minor">
-            <a:schemeClr val="lt1"/>
-          </a:fontRef>
-        </p:style>
-        <p:txBody>
-          <a:bodyPr rtlCol="0" anchor="ctr" wrap="square"/>
-          <a:lstStyle/>
-          <a:p>
-            <a:pPr algn="ctr">
-              <a:spcAft>
-                <a:spcPts val="400"/>
-              </a:spcAft>
-              <a:defRPr sz="1300" b="0">
-                <a:solidFill>
-                  <a:srgbClr val="1A1A1A"/>
-                </a:solidFill>
-                <a:latin typeface="Calibri"/>
-              </a:defRPr>
-            </a:pPr>
-            <a:r>
-              <a:t>• Decent Actuarial Consultants Co., Ltd. -- Phnom Penh, Cambodia</a:t>
-            </a:r>
-          </a:p>
-          <a:p>
-            <a:pPr>
-              <a:spcAft>
-                <a:spcPts val="400"/>
-              </a:spcAft>
-              <a:defRPr sz="1300" b="0">
-                <a:solidFill>
-                  <a:srgbClr val="1A1A1A"/>
-                </a:solidFill>
-                <a:latin typeface="Calibri"/>
-              </a:defRPr>
-            </a:pPr>
-            <a:r>
-              <a:t>• Actuarial consulting: life &amp; health insurance, pension, regulatory advice</a:t>
-            </a:r>
-          </a:p>
-          <a:p>
-            <a:pPr>
-              <a:spcAft>
-                <a:spcPts val="400"/>
-              </a:spcAft>
-              <a:defRPr sz="1300" b="0">
-                <a:solidFill>
-                  <a:srgbClr val="1A1A1A"/>
-                </a:solidFill>
-                <a:latin typeface="Calibri"/>
-              </a:defRPr>
-            </a:pPr>
-            <a:r>
-              <a:t>• Clients: insurance companies, pension funds, and regulators across SE Asia</a:t>
-            </a:r>
-          </a:p>
-          <a:p>
-            <a:pPr>
-              <a:spcAft>
-                <a:spcPts val="400"/>
-              </a:spcAft>
-              <a:defRPr sz="1300" b="0">
-                <a:solidFill>
-                  <a:srgbClr val="1A1A1A"/>
-                </a:solidFill>
-                <a:latin typeface="Calibri"/>
-              </a:defRPr>
-            </a:pPr>
-            <a:r>
-              <a:t>• This thesis is embedded in a DAC-supervised research internship</a:t>
-            </a:r>
-          </a:p>
-        </p:txBody>
-      </p:sp>
-      <p:sp>
-        <p:nvSpPr>
-          <p:cNvPr id="9" name="Rectangle 8"/>
-          <p:cNvSpPr/>
-          <p:nvPr/>
-        </p:nvSpPr>
-        <p:spPr>
-          <a:xfrm>
-            <a:off x="457200" y="4041648"/>
-            <a:ext cx="5760720" cy="329184"/>
-          </a:xfrm>
-          <a:prstGeom prst="rect">
-            <a:avLst/>
-          </a:prstGeom>
-          <a:noFill/>
-          <a:ln>
-            <a:noFill/>
-          </a:ln>
-          <a:effectLst/>
-        </p:spPr>
-        <p:style>
-          <a:lnRef idx="1">
-            <a:schemeClr val="accent1"/>
-          </a:lnRef>
-          <a:fillRef idx="3">
-            <a:schemeClr val="accent1"/>
-          </a:fillRef>
-          <a:effectRef idx="2">
-            <a:schemeClr val="accent1"/>
-          </a:effectRef>
-          <a:fontRef idx="minor">
-            <a:schemeClr val="lt1"/>
-          </a:fontRef>
-        </p:style>
-        <p:txBody>
-          <a:bodyPr rtlCol="0" anchor="t" wrap="square" lIns="45720" rIns="45720" tIns="18288" bIns="18288"/>
-          <a:lstStyle/>
-          <a:p>
-            <a:pPr algn="l">
-              <a:defRPr sz="1500" b="1" i="0">
-                <a:solidFill>
-                  <a:srgbClr val="5D2A42"/>
-                </a:solidFill>
-                <a:latin typeface="Calibri"/>
-              </a:defRPr>
-            </a:pPr>
-            <a:r>
-              <a:t>Internship Timeline</a:t>
-            </a:r>
-          </a:p>
-        </p:txBody>
-      </p:sp>
-      <p:sp>
-        <p:nvSpPr>
-          <p:cNvPr id="10" name="Rectangle 9"/>
-          <p:cNvSpPr/>
-          <p:nvPr/>
-        </p:nvSpPr>
-        <p:spPr>
-          <a:xfrm>
-            <a:off x="457200" y="4453128"/>
-            <a:ext cx="2651760" cy="1188720"/>
+            <a:off x="457200" y="1408176"/>
+            <a:ext cx="91440" cy="91440"/>
           </a:xfrm>
           <a:prstGeom prst="rect">
             <a:avLst/>
@@ -32641,14 +33044,14 @@
       </p:sp>
       <p:sp>
         <p:nvSpPr>
-          <p:cNvPr id="11" name="Rectangle 10"/>
-          <p:cNvSpPr/>
-          <p:nvPr/>
-        </p:nvSpPr>
-        <p:spPr>
-          <a:xfrm>
-            <a:off x="548640" y="4507992"/>
-            <a:ext cx="2468880" cy="347472"/>
+          <p:cNvPr id="8" name="Rectangle 7"/>
+          <p:cNvSpPr/>
+          <p:nvPr/>
+        </p:nvSpPr>
+        <p:spPr>
+          <a:xfrm>
+            <a:off x="713232" y="1298448"/>
+            <a:ext cx="5596128" cy="566928"/>
           </a:xfrm>
           <a:prstGeom prst="rect">
             <a:avLst/>
@@ -32677,238 +33080,30 @@
           <a:bodyPr rtlCol="0" anchor="t" wrap="square" lIns="45720" rIns="45720" tIns="18288" bIns="18288"/>
           <a:lstStyle/>
           <a:p>
-            <a:pPr algn="ctr">
-              <a:defRPr sz="1300" b="1" i="0">
-                <a:solidFill>
-                  <a:srgbClr val="FFFFFF"/>
-                </a:solidFill>
-                <a:latin typeface="Calibri"/>
-              </a:defRPr>
-            </a:pPr>
-            <a:r>
-              <a:t>Mar 2026</a:t>
-            </a:r>
-          </a:p>
-        </p:txBody>
-      </p:sp>
-      <p:sp>
-        <p:nvSpPr>
-          <p:cNvPr id="12" name="Rectangle 11"/>
-          <p:cNvSpPr/>
-          <p:nvPr/>
-        </p:nvSpPr>
-        <p:spPr>
-          <a:xfrm>
-            <a:off x="548640" y="4910328"/>
-            <a:ext cx="2468880" cy="594360"/>
-          </a:xfrm>
-          <a:prstGeom prst="rect">
-            <a:avLst/>
-          </a:prstGeom>
-          <a:noFill/>
-          <a:ln>
-            <a:noFill/>
-          </a:ln>
-          <a:effectLst/>
-        </p:spPr>
-        <p:style>
-          <a:lnRef idx="1">
-            <a:schemeClr val="accent1"/>
-          </a:lnRef>
-          <a:fillRef idx="3">
-            <a:schemeClr val="accent1"/>
-          </a:fillRef>
-          <a:effectRef idx="2">
-            <a:schemeClr val="accent1"/>
-          </a:effectRef>
-          <a:fontRef idx="minor">
-            <a:schemeClr val="lt1"/>
-          </a:fontRef>
-        </p:style>
-        <p:txBody>
-          <a:bodyPr rtlCol="0" anchor="t" wrap="square" lIns="45720" rIns="45720" tIns="18288" bIns="18288"/>
-          <a:lstStyle/>
-          <a:p>
-            <a:pPr algn="ctr">
-              <a:defRPr sz="1100" b="0" i="0">
-                <a:solidFill>
-                  <a:srgbClr val="FFFFFF"/>
-                </a:solidFill>
-                <a:latin typeface="Calibri"/>
-              </a:defRPr>
-            </a:pPr>
-            <a:r>
-              <a:t>Problem scoping</a:t>
-            </a:r>
-            <a:br/>
-            <a:r>
-              <a:t>&amp; dataset design</a:t>
-            </a:r>
-          </a:p>
-        </p:txBody>
-      </p:sp>
-      <p:sp>
-        <p:nvSpPr>
-          <p:cNvPr id="13" name="Rectangle 12"/>
-          <p:cNvSpPr/>
-          <p:nvPr/>
-        </p:nvSpPr>
-        <p:spPr>
-          <a:xfrm>
-            <a:off x="3246120" y="4453128"/>
-            <a:ext cx="2651760" cy="1188720"/>
-          </a:xfrm>
-          <a:prstGeom prst="rect">
-            <a:avLst/>
-          </a:prstGeom>
-          <a:solidFill>
-            <a:srgbClr val="471F33"/>
-          </a:solidFill>
-          <a:ln>
-            <a:noFill/>
-          </a:ln>
-          <a:effectLst/>
-        </p:spPr>
-        <p:style>
-          <a:lnRef idx="1">
-            <a:schemeClr val="accent1"/>
-          </a:lnRef>
-          <a:fillRef idx="3">
-            <a:schemeClr val="accent1"/>
-          </a:fillRef>
-          <a:effectRef idx="2">
-            <a:schemeClr val="accent1"/>
-          </a:effectRef>
-          <a:fontRef idx="minor">
-            <a:schemeClr val="lt1"/>
-          </a:fontRef>
-        </p:style>
-        <p:txBody>
-          <a:bodyPr rtlCol="0" anchor="ctr"/>
-          <a:lstStyle/>
-          <a:p>
-            <a:pPr algn="ctr"/>
-          </a:p>
-        </p:txBody>
-      </p:sp>
-      <p:sp>
-        <p:nvSpPr>
-          <p:cNvPr id="14" name="Rectangle 13"/>
-          <p:cNvSpPr/>
-          <p:nvPr/>
-        </p:nvSpPr>
-        <p:spPr>
-          <a:xfrm>
-            <a:off x="3337560" y="4507992"/>
-            <a:ext cx="2468880" cy="347472"/>
-          </a:xfrm>
-          <a:prstGeom prst="rect">
-            <a:avLst/>
-          </a:prstGeom>
-          <a:noFill/>
-          <a:ln>
-            <a:noFill/>
-          </a:ln>
-          <a:effectLst/>
-        </p:spPr>
-        <p:style>
-          <a:lnRef idx="1">
-            <a:schemeClr val="accent1"/>
-          </a:lnRef>
-          <a:fillRef idx="3">
-            <a:schemeClr val="accent1"/>
-          </a:fillRef>
-          <a:effectRef idx="2">
-            <a:schemeClr val="accent1"/>
-          </a:effectRef>
-          <a:fontRef idx="minor">
-            <a:schemeClr val="lt1"/>
-          </a:fontRef>
-        </p:style>
-        <p:txBody>
-          <a:bodyPr rtlCol="0" anchor="t" wrap="square" lIns="45720" rIns="45720" tIns="18288" bIns="18288"/>
-          <a:lstStyle/>
-          <a:p>
-            <a:pPr algn="ctr">
-              <a:defRPr sz="1300" b="1" i="0">
-                <a:solidFill>
-                  <a:srgbClr val="FFFFFF"/>
-                </a:solidFill>
-                <a:latin typeface="Calibri"/>
-              </a:defRPr>
-            </a:pPr>
-            <a:r>
-              <a:t>Apr 2026</a:t>
-            </a:r>
-          </a:p>
-        </p:txBody>
-      </p:sp>
-      <p:sp>
-        <p:nvSpPr>
-          <p:cNvPr id="15" name="Rectangle 14"/>
-          <p:cNvSpPr/>
-          <p:nvPr/>
-        </p:nvSpPr>
-        <p:spPr>
-          <a:xfrm>
-            <a:off x="3337560" y="4910328"/>
-            <a:ext cx="2468880" cy="594360"/>
-          </a:xfrm>
-          <a:prstGeom prst="rect">
-            <a:avLst/>
-          </a:prstGeom>
-          <a:noFill/>
-          <a:ln>
-            <a:noFill/>
-          </a:ln>
-          <a:effectLst/>
-        </p:spPr>
-        <p:style>
-          <a:lnRef idx="1">
-            <a:schemeClr val="accent1"/>
-          </a:lnRef>
-          <a:fillRef idx="3">
-            <a:schemeClr val="accent1"/>
-          </a:fillRef>
-          <a:effectRef idx="2">
-            <a:schemeClr val="accent1"/>
-          </a:effectRef>
-          <a:fontRef idx="minor">
-            <a:schemeClr val="lt1"/>
-          </a:fontRef>
-        </p:style>
-        <p:txBody>
-          <a:bodyPr rtlCol="0" anchor="t" wrap="square" lIns="45720" rIns="45720" tIns="18288" bIns="18288"/>
-          <a:lstStyle/>
-          <a:p>
-            <a:pPr algn="ctr">
-              <a:defRPr sz="1100" b="0" i="0">
-                <a:solidFill>
-                  <a:srgbClr val="FFFFFF"/>
-                </a:solidFill>
-                <a:latin typeface="Calibri"/>
-              </a:defRPr>
-            </a:pPr>
-            <a:r>
-              <a:t>Algorithm</a:t>
-            </a:r>
-            <a:br/>
-            <a:r>
-              <a:t>implementation</a:t>
-            </a:r>
-          </a:p>
-        </p:txBody>
-      </p:sp>
-      <p:sp>
-        <p:nvSpPr>
-          <p:cNvPr id="16" name="Rectangle 15"/>
-          <p:cNvSpPr/>
-          <p:nvPr/>
-        </p:nvSpPr>
-        <p:spPr>
-          <a:xfrm>
-            <a:off x="6035040" y="4453128"/>
-            <a:ext cx="2651760" cy="1188720"/>
+            <a:pPr algn="l">
+              <a:defRPr sz="1700" b="0" i="0">
+                <a:solidFill>
+                  <a:srgbClr val="1A1A1A"/>
+                </a:solidFill>
+                <a:latin typeface="Calibri"/>
+              </a:defRPr>
+            </a:pPr>
+            <a:r>
+              <a:t>DAC -- actuarial consulting, Phnom Penh</a:t>
+            </a:r>
+          </a:p>
+        </p:txBody>
+      </p:sp>
+      <p:sp>
+        <p:nvSpPr>
+          <p:cNvPr id="9" name="Rectangle 8"/>
+          <p:cNvSpPr/>
+          <p:nvPr/>
+        </p:nvSpPr>
+        <p:spPr>
+          <a:xfrm>
+            <a:off x="457200" y="1975104"/>
+            <a:ext cx="91440" cy="91440"/>
           </a:xfrm>
           <a:prstGeom prst="rect">
             <a:avLst/>
@@ -32945,14 +33140,14 @@
       </p:sp>
       <p:sp>
         <p:nvSpPr>
-          <p:cNvPr id="17" name="Rectangle 16"/>
-          <p:cNvSpPr/>
-          <p:nvPr/>
-        </p:nvSpPr>
-        <p:spPr>
-          <a:xfrm>
-            <a:off x="6126480" y="4507992"/>
-            <a:ext cx="2468880" cy="347472"/>
+          <p:cNvPr id="10" name="Rectangle 9"/>
+          <p:cNvSpPr/>
+          <p:nvPr/>
+        </p:nvSpPr>
+        <p:spPr>
+          <a:xfrm>
+            <a:off x="713232" y="1865376"/>
+            <a:ext cx="5596128" cy="566928"/>
           </a:xfrm>
           <a:prstGeom prst="rect">
             <a:avLst/>
@@ -32981,30 +33176,74 @@
           <a:bodyPr rtlCol="0" anchor="t" wrap="square" lIns="45720" rIns="45720" tIns="18288" bIns="18288"/>
           <a:lstStyle/>
           <a:p>
-            <a:pPr algn="ctr">
-              <a:defRPr sz="1300" b="1" i="0">
-                <a:solidFill>
-                  <a:srgbClr val="FFFFFF"/>
-                </a:solidFill>
-                <a:latin typeface="Calibri"/>
-              </a:defRPr>
-            </a:pPr>
-            <a:r>
-              <a:t>May 2026</a:t>
-            </a:r>
-          </a:p>
-        </p:txBody>
-      </p:sp>
-      <p:sp>
-        <p:nvSpPr>
-          <p:cNvPr id="18" name="Rectangle 17"/>
-          <p:cNvSpPr/>
-          <p:nvPr/>
-        </p:nvSpPr>
-        <p:spPr>
-          <a:xfrm>
-            <a:off x="6126480" y="4910328"/>
-            <a:ext cx="2468880" cy="594360"/>
+            <a:pPr algn="l">
+              <a:defRPr sz="1700" b="0" i="0">
+                <a:solidFill>
+                  <a:srgbClr val="1A1A1A"/>
+                </a:solidFill>
+                <a:latin typeface="Calibri"/>
+              </a:defRPr>
+            </a:pPr>
+            <a:r>
+              <a:t>Clients: insurers, pension funds, regulators</a:t>
+            </a:r>
+          </a:p>
+        </p:txBody>
+      </p:sp>
+      <p:sp>
+        <p:nvSpPr>
+          <p:cNvPr id="11" name="Rectangle 10"/>
+          <p:cNvSpPr/>
+          <p:nvPr/>
+        </p:nvSpPr>
+        <p:spPr>
+          <a:xfrm>
+            <a:off x="457200" y="2542032"/>
+            <a:ext cx="91440" cy="91440"/>
+          </a:xfrm>
+          <a:prstGeom prst="rect">
+            <a:avLst/>
+          </a:prstGeom>
+          <a:solidFill>
+            <a:srgbClr val="5D2A42"/>
+          </a:solidFill>
+          <a:ln>
+            <a:noFill/>
+          </a:ln>
+          <a:effectLst/>
+        </p:spPr>
+        <p:style>
+          <a:lnRef idx="1">
+            <a:schemeClr val="accent1"/>
+          </a:lnRef>
+          <a:fillRef idx="3">
+            <a:schemeClr val="accent1"/>
+          </a:fillRef>
+          <a:effectRef idx="2">
+            <a:schemeClr val="accent1"/>
+          </a:effectRef>
+          <a:fontRef idx="minor">
+            <a:schemeClr val="lt1"/>
+          </a:fontRef>
+        </p:style>
+        <p:txBody>
+          <a:bodyPr rtlCol="0" anchor="ctr"/>
+          <a:lstStyle/>
+          <a:p>
+            <a:pPr algn="ctr"/>
+          </a:p>
+        </p:txBody>
+      </p:sp>
+      <p:sp>
+        <p:nvSpPr>
+          <p:cNvPr id="12" name="Rectangle 11"/>
+          <p:cNvSpPr/>
+          <p:nvPr/>
+        </p:nvSpPr>
+        <p:spPr>
+          <a:xfrm>
+            <a:off x="713232" y="2432304"/>
+            <a:ext cx="5596128" cy="566928"/>
           </a:xfrm>
           <a:prstGeom prst="rect">
             <a:avLst/>
@@ -33033,40 +33272,36 @@
           <a:bodyPr rtlCol="0" anchor="t" wrap="square" lIns="45720" rIns="45720" tIns="18288" bIns="18288"/>
           <a:lstStyle/>
           <a:p>
-            <a:pPr algn="ctr">
-              <a:defRPr sz="1100" b="0" i="0">
-                <a:solidFill>
-                  <a:srgbClr val="FFFFFF"/>
-                </a:solidFill>
-                <a:latin typeface="Calibri"/>
-              </a:defRPr>
-            </a:pPr>
-            <a:r>
-              <a:t>Experiments</a:t>
-            </a:r>
-            <a:br/>
-            <a:r>
-              <a:t>&amp; analysis</a:t>
-            </a:r>
-          </a:p>
-        </p:txBody>
-      </p:sp>
-      <p:sp>
-        <p:nvSpPr>
-          <p:cNvPr id="19" name="Rectangle 18"/>
-          <p:cNvSpPr/>
-          <p:nvPr/>
-        </p:nvSpPr>
-        <p:spPr>
-          <a:xfrm>
-            <a:off x="8823960" y="4453128"/>
-            <a:ext cx="2651760" cy="1188720"/>
+            <a:pPr algn="l">
+              <a:defRPr sz="1700" b="0" i="0">
+                <a:solidFill>
+                  <a:srgbClr val="1A1A1A"/>
+                </a:solidFill>
+                <a:latin typeface="Calibri"/>
+              </a:defRPr>
+            </a:pPr>
+            <a:r>
+              <a:t>Role: research intern, Mar-Jun 2026</a:t>
+            </a:r>
+          </a:p>
+        </p:txBody>
+      </p:sp>
+      <p:sp>
+        <p:nvSpPr>
+          <p:cNvPr id="13" name="Rectangle 12"/>
+          <p:cNvSpPr/>
+          <p:nvPr/>
+        </p:nvSpPr>
+        <p:spPr>
+          <a:xfrm>
+            <a:off x="457200" y="3108960"/>
+            <a:ext cx="91440" cy="91440"/>
           </a:xfrm>
           <a:prstGeom prst="rect">
             <a:avLst/>
           </a:prstGeom>
           <a:solidFill>
-            <a:srgbClr val="471F33"/>
+            <a:srgbClr val="5D2A42"/>
           </a:solidFill>
           <a:ln>
             <a:noFill/>
@@ -33097,14 +33332,14 @@
       </p:sp>
       <p:sp>
         <p:nvSpPr>
-          <p:cNvPr id="20" name="Rectangle 19"/>
-          <p:cNvSpPr/>
-          <p:nvPr/>
-        </p:nvSpPr>
-        <p:spPr>
-          <a:xfrm>
-            <a:off x="8915400" y="4507992"/>
-            <a:ext cx="2468880" cy="347472"/>
+          <p:cNvPr id="14" name="Rectangle 13"/>
+          <p:cNvSpPr/>
+          <p:nvPr/>
+        </p:nvSpPr>
+        <p:spPr>
+          <a:xfrm>
+            <a:off x="713232" y="2999232"/>
+            <a:ext cx="5596128" cy="566928"/>
           </a:xfrm>
           <a:prstGeom prst="rect">
             <a:avLst/>
@@ -33133,86 +33368,30 @@
           <a:bodyPr rtlCol="0" anchor="t" wrap="square" lIns="45720" rIns="45720" tIns="18288" bIns="18288"/>
           <a:lstStyle/>
           <a:p>
-            <a:pPr algn="ctr">
-              <a:defRPr sz="1300" b="1" i="0">
-                <a:solidFill>
-                  <a:srgbClr val="FFFFFF"/>
-                </a:solidFill>
-                <a:latin typeface="Calibri"/>
-              </a:defRPr>
-            </a:pPr>
-            <a:r>
-              <a:t>Jun 2026</a:t>
-            </a:r>
-          </a:p>
-        </p:txBody>
-      </p:sp>
-      <p:sp>
-        <p:nvSpPr>
-          <p:cNvPr id="21" name="Rectangle 20"/>
-          <p:cNvSpPr/>
-          <p:nvPr/>
-        </p:nvSpPr>
-        <p:spPr>
-          <a:xfrm>
-            <a:off x="8915400" y="4910328"/>
-            <a:ext cx="2468880" cy="594360"/>
-          </a:xfrm>
-          <a:prstGeom prst="rect">
-            <a:avLst/>
-          </a:prstGeom>
-          <a:noFill/>
-          <a:ln>
-            <a:noFill/>
-          </a:ln>
-          <a:effectLst/>
-        </p:spPr>
-        <p:style>
-          <a:lnRef idx="1">
-            <a:schemeClr val="accent1"/>
-          </a:lnRef>
-          <a:fillRef idx="3">
-            <a:schemeClr val="accent1"/>
-          </a:fillRef>
-          <a:effectRef idx="2">
-            <a:schemeClr val="accent1"/>
-          </a:effectRef>
-          <a:fontRef idx="minor">
-            <a:schemeClr val="lt1"/>
-          </a:fontRef>
-        </p:style>
-        <p:txBody>
-          <a:bodyPr rtlCol="0" anchor="t" wrap="square" lIns="45720" rIns="45720" tIns="18288" bIns="18288"/>
-          <a:lstStyle/>
-          <a:p>
-            <a:pPr algn="ctr">
-              <a:defRPr sz="1100" b="0" i="0">
-                <a:solidFill>
-                  <a:srgbClr val="FFFFFF"/>
-                </a:solidFill>
-                <a:latin typeface="Calibri"/>
-              </a:defRPr>
-            </a:pPr>
-            <a:r>
-              <a:t>Thesis writing</a:t>
-            </a:r>
-            <a:br/>
-            <a:r>
-              <a:t>&amp; defense prep</a:t>
-            </a:r>
-          </a:p>
-        </p:txBody>
-      </p:sp>
-      <p:sp>
-        <p:nvSpPr>
-          <p:cNvPr id="22" name="Rectangle 21"/>
-          <p:cNvSpPr/>
-          <p:nvPr/>
-        </p:nvSpPr>
-        <p:spPr>
-          <a:xfrm>
-            <a:off x="6583680" y="1207008"/>
-            <a:ext cx="5120640" cy="2926080"/>
+            <a:pPr algn="l">
+              <a:defRPr sz="1700" b="0" i="0">
+                <a:solidFill>
+                  <a:srgbClr val="1A1A1A"/>
+                </a:solidFill>
+                <a:latin typeface="Calibri"/>
+              </a:defRPr>
+            </a:pPr>
+            <a:r>
+              <a:t>Deliverable: underwriting prototype + thesis</a:t>
+            </a:r>
+          </a:p>
+        </p:txBody>
+      </p:sp>
+      <p:sp>
+        <p:nvSpPr>
+          <p:cNvPr id="15" name="Rectangle 14"/>
+          <p:cNvSpPr/>
+          <p:nvPr/>
+        </p:nvSpPr>
+        <p:spPr>
+          <a:xfrm>
+            <a:off x="6675120" y="1298448"/>
+            <a:ext cx="5029200" cy="2286000"/>
           </a:xfrm>
           <a:prstGeom prst="rect">
             <a:avLst/>
@@ -33244,7 +33423,7 @@
           <a:lstStyle/>
           <a:p>
             <a:pPr algn="l">
-              <a:defRPr sz="1300" b="0">
+              <a:defRPr sz="1500" b="0">
                 <a:solidFill>
                   <a:srgbClr val="1A1A1A"/>
                 </a:solidFill>
@@ -33252,22 +33431,661 @@
               </a:defRPr>
             </a:pPr>
             <a:r>
-              <a:t>Role: Research Intern</a:t>
+              <a:t>Supervision</a:t>
             </a:r>
             <a:br/>
             <a:br/>
             <a:r>
-              <a:t>Deliverable: end-to-end adaptive underwriting prototype + thesis report</a:t>
+              <a:t>Thesis advisor: Dr. HAS Sothea (ITC)</a:t>
             </a:r>
             <a:br/>
-            <a:br/>
-            <a:r>
-              <a:t>Duration: Mar 2026 – Jun 2026</a:t>
-            </a:r>
-            <a:br/>
-            <a:br/>
-            <a:r>
-              <a:t>Supervisor: Mr. PHOK Ponna (DAC)  |  Thesis advisor: Dr. HAS Sothea (ITC)</a:t>
+            <a:r>
+              <a:t>Field supervisor: Mr. PHOK Ponna (DAC)</a:t>
+            </a:r>
+          </a:p>
+        </p:txBody>
+      </p:sp>
+      <p:sp>
+        <p:nvSpPr>
+          <p:cNvPr id="16" name="Rectangle 15"/>
+          <p:cNvSpPr/>
+          <p:nvPr/>
+        </p:nvSpPr>
+        <p:spPr>
+          <a:xfrm>
+            <a:off x="457200" y="3995928"/>
+            <a:ext cx="3657600" cy="292608"/>
+          </a:xfrm>
+          <a:prstGeom prst="rect">
+            <a:avLst/>
+          </a:prstGeom>
+          <a:noFill/>
+          <a:ln>
+            <a:noFill/>
+          </a:ln>
+          <a:effectLst/>
+        </p:spPr>
+        <p:style>
+          <a:lnRef idx="1">
+            <a:schemeClr val="accent1"/>
+          </a:lnRef>
+          <a:fillRef idx="3">
+            <a:schemeClr val="accent1"/>
+          </a:fillRef>
+          <a:effectRef idx="2">
+            <a:schemeClr val="accent1"/>
+          </a:effectRef>
+          <a:fontRef idx="minor">
+            <a:schemeClr val="lt1"/>
+          </a:fontRef>
+        </p:style>
+        <p:txBody>
+          <a:bodyPr rtlCol="0" anchor="t" wrap="square" lIns="45720" rIns="45720" tIns="18288" bIns="18288"/>
+          <a:lstStyle/>
+          <a:p>
+            <a:pPr algn="l">
+              <a:defRPr sz="1100" b="1" i="0">
+                <a:solidFill>
+                  <a:srgbClr val="5D2A42"/>
+                </a:solidFill>
+                <a:latin typeface="Calibri"/>
+              </a:defRPr>
+            </a:pPr>
+            <a:r>
+              <a:rPr spc="120"/>
+              <a:t>INTERNSHIP TIMELINE</a:t>
+            </a:r>
+          </a:p>
+        </p:txBody>
+      </p:sp>
+      <p:sp>
+        <p:nvSpPr>
+          <p:cNvPr id="17" name="Rectangle 16"/>
+          <p:cNvSpPr/>
+          <p:nvPr/>
+        </p:nvSpPr>
+        <p:spPr>
+          <a:xfrm>
+            <a:off x="457200" y="4407408"/>
+            <a:ext cx="2743200" cy="45720"/>
+          </a:xfrm>
+          <a:prstGeom prst="rect">
+            <a:avLst/>
+          </a:prstGeom>
+          <a:solidFill>
+            <a:srgbClr val="5D2A42"/>
+          </a:solidFill>
+          <a:ln>
+            <a:noFill/>
+          </a:ln>
+          <a:effectLst/>
+        </p:spPr>
+        <p:style>
+          <a:lnRef idx="1">
+            <a:schemeClr val="accent1"/>
+          </a:lnRef>
+          <a:fillRef idx="3">
+            <a:schemeClr val="accent1"/>
+          </a:fillRef>
+          <a:effectRef idx="2">
+            <a:schemeClr val="accent1"/>
+          </a:effectRef>
+          <a:fontRef idx="minor">
+            <a:schemeClr val="lt1"/>
+          </a:fontRef>
+        </p:style>
+        <p:txBody>
+          <a:bodyPr rtlCol="0" anchor="ctr"/>
+          <a:lstStyle/>
+          <a:p>
+            <a:pPr algn="ctr"/>
+          </a:p>
+        </p:txBody>
+      </p:sp>
+      <p:sp>
+        <p:nvSpPr>
+          <p:cNvPr id="18" name="Rectangle 17"/>
+          <p:cNvSpPr/>
+          <p:nvPr/>
+        </p:nvSpPr>
+        <p:spPr>
+          <a:xfrm>
+            <a:off x="457200" y="4544568"/>
+            <a:ext cx="2560320" cy="329184"/>
+          </a:xfrm>
+          <a:prstGeom prst="rect">
+            <a:avLst/>
+          </a:prstGeom>
+          <a:noFill/>
+          <a:ln>
+            <a:noFill/>
+          </a:ln>
+          <a:effectLst/>
+        </p:spPr>
+        <p:style>
+          <a:lnRef idx="1">
+            <a:schemeClr val="accent1"/>
+          </a:lnRef>
+          <a:fillRef idx="3">
+            <a:schemeClr val="accent1"/>
+          </a:fillRef>
+          <a:effectRef idx="2">
+            <a:schemeClr val="accent1"/>
+          </a:effectRef>
+          <a:fontRef idx="minor">
+            <a:schemeClr val="lt1"/>
+          </a:fontRef>
+        </p:style>
+        <p:txBody>
+          <a:bodyPr rtlCol="0" anchor="t" wrap="square" lIns="45720" rIns="45720" tIns="18288" bIns="18288"/>
+          <a:lstStyle/>
+          <a:p>
+            <a:pPr algn="l">
+              <a:defRPr sz="1400" b="1" i="0">
+                <a:solidFill>
+                  <a:srgbClr val="5D2A42"/>
+                </a:solidFill>
+                <a:latin typeface="Calibri"/>
+              </a:defRPr>
+            </a:pPr>
+            <a:r>
+              <a:t>Mar 2026</a:t>
+            </a:r>
+          </a:p>
+        </p:txBody>
+      </p:sp>
+      <p:sp>
+        <p:nvSpPr>
+          <p:cNvPr id="19" name="Rectangle 18"/>
+          <p:cNvSpPr/>
+          <p:nvPr/>
+        </p:nvSpPr>
+        <p:spPr>
+          <a:xfrm>
+            <a:off x="457200" y="4910328"/>
+            <a:ext cx="2560320" cy="731520"/>
+          </a:xfrm>
+          <a:prstGeom prst="rect">
+            <a:avLst/>
+          </a:prstGeom>
+          <a:noFill/>
+          <a:ln>
+            <a:noFill/>
+          </a:ln>
+          <a:effectLst/>
+        </p:spPr>
+        <p:style>
+          <a:lnRef idx="1">
+            <a:schemeClr val="accent1"/>
+          </a:lnRef>
+          <a:fillRef idx="3">
+            <a:schemeClr val="accent1"/>
+          </a:fillRef>
+          <a:effectRef idx="2">
+            <a:schemeClr val="accent1"/>
+          </a:effectRef>
+          <a:fontRef idx="minor">
+            <a:schemeClr val="lt1"/>
+          </a:fontRef>
+        </p:style>
+        <p:txBody>
+          <a:bodyPr rtlCol="0" anchor="t" wrap="square" lIns="45720" rIns="45720" tIns="18288" bIns="18288"/>
+          <a:lstStyle/>
+          <a:p>
+            <a:pPr algn="l">
+              <a:defRPr sz="1200" b="0" i="0">
+                <a:solidFill>
+                  <a:srgbClr val="3A3A3A"/>
+                </a:solidFill>
+                <a:latin typeface="Calibri"/>
+              </a:defRPr>
+            </a:pPr>
+            <a:r>
+              <a:t>Problem scoping &amp; dataset design</a:t>
+            </a:r>
+          </a:p>
+        </p:txBody>
+      </p:sp>
+      <p:sp>
+        <p:nvSpPr>
+          <p:cNvPr id="20" name="Rectangle 19"/>
+          <p:cNvSpPr/>
+          <p:nvPr/>
+        </p:nvSpPr>
+        <p:spPr>
+          <a:xfrm>
+            <a:off x="3291840" y="4407408"/>
+            <a:ext cx="2743200" cy="45720"/>
+          </a:xfrm>
+          <a:prstGeom prst="rect">
+            <a:avLst/>
+          </a:prstGeom>
+          <a:solidFill>
+            <a:srgbClr val="5D2A42"/>
+          </a:solidFill>
+          <a:ln>
+            <a:noFill/>
+          </a:ln>
+          <a:effectLst/>
+        </p:spPr>
+        <p:style>
+          <a:lnRef idx="1">
+            <a:schemeClr val="accent1"/>
+          </a:lnRef>
+          <a:fillRef idx="3">
+            <a:schemeClr val="accent1"/>
+          </a:fillRef>
+          <a:effectRef idx="2">
+            <a:schemeClr val="accent1"/>
+          </a:effectRef>
+          <a:fontRef idx="minor">
+            <a:schemeClr val="lt1"/>
+          </a:fontRef>
+        </p:style>
+        <p:txBody>
+          <a:bodyPr rtlCol="0" anchor="ctr"/>
+          <a:lstStyle/>
+          <a:p>
+            <a:pPr algn="ctr"/>
+          </a:p>
+        </p:txBody>
+      </p:sp>
+      <p:sp>
+        <p:nvSpPr>
+          <p:cNvPr id="21" name="Rectangle 20"/>
+          <p:cNvSpPr/>
+          <p:nvPr/>
+        </p:nvSpPr>
+        <p:spPr>
+          <a:xfrm>
+            <a:off x="3291840" y="4544568"/>
+            <a:ext cx="2560320" cy="329184"/>
+          </a:xfrm>
+          <a:prstGeom prst="rect">
+            <a:avLst/>
+          </a:prstGeom>
+          <a:noFill/>
+          <a:ln>
+            <a:noFill/>
+          </a:ln>
+          <a:effectLst/>
+        </p:spPr>
+        <p:style>
+          <a:lnRef idx="1">
+            <a:schemeClr val="accent1"/>
+          </a:lnRef>
+          <a:fillRef idx="3">
+            <a:schemeClr val="accent1"/>
+          </a:fillRef>
+          <a:effectRef idx="2">
+            <a:schemeClr val="accent1"/>
+          </a:effectRef>
+          <a:fontRef idx="minor">
+            <a:schemeClr val="lt1"/>
+          </a:fontRef>
+        </p:style>
+        <p:txBody>
+          <a:bodyPr rtlCol="0" anchor="t" wrap="square" lIns="45720" rIns="45720" tIns="18288" bIns="18288"/>
+          <a:lstStyle/>
+          <a:p>
+            <a:pPr algn="l">
+              <a:defRPr sz="1400" b="1" i="0">
+                <a:solidFill>
+                  <a:srgbClr val="5D2A42"/>
+                </a:solidFill>
+                <a:latin typeface="Calibri"/>
+              </a:defRPr>
+            </a:pPr>
+            <a:r>
+              <a:t>Apr 2026</a:t>
+            </a:r>
+          </a:p>
+        </p:txBody>
+      </p:sp>
+      <p:sp>
+        <p:nvSpPr>
+          <p:cNvPr id="22" name="Rectangle 21"/>
+          <p:cNvSpPr/>
+          <p:nvPr/>
+        </p:nvSpPr>
+        <p:spPr>
+          <a:xfrm>
+            <a:off x="3291840" y="4910328"/>
+            <a:ext cx="2560320" cy="731520"/>
+          </a:xfrm>
+          <a:prstGeom prst="rect">
+            <a:avLst/>
+          </a:prstGeom>
+          <a:noFill/>
+          <a:ln>
+            <a:noFill/>
+          </a:ln>
+          <a:effectLst/>
+        </p:spPr>
+        <p:style>
+          <a:lnRef idx="1">
+            <a:schemeClr val="accent1"/>
+          </a:lnRef>
+          <a:fillRef idx="3">
+            <a:schemeClr val="accent1"/>
+          </a:fillRef>
+          <a:effectRef idx="2">
+            <a:schemeClr val="accent1"/>
+          </a:effectRef>
+          <a:fontRef idx="minor">
+            <a:schemeClr val="lt1"/>
+          </a:fontRef>
+        </p:style>
+        <p:txBody>
+          <a:bodyPr rtlCol="0" anchor="t" wrap="square" lIns="45720" rIns="45720" tIns="18288" bIns="18288"/>
+          <a:lstStyle/>
+          <a:p>
+            <a:pPr algn="l">
+              <a:defRPr sz="1200" b="0" i="0">
+                <a:solidFill>
+                  <a:srgbClr val="3A3A3A"/>
+                </a:solidFill>
+                <a:latin typeface="Calibri"/>
+              </a:defRPr>
+            </a:pPr>
+            <a:r>
+              <a:t>Algorithm implementation</a:t>
+            </a:r>
+          </a:p>
+        </p:txBody>
+      </p:sp>
+      <p:sp>
+        <p:nvSpPr>
+          <p:cNvPr id="23" name="Rectangle 22"/>
+          <p:cNvSpPr/>
+          <p:nvPr/>
+        </p:nvSpPr>
+        <p:spPr>
+          <a:xfrm>
+            <a:off x="6126480" y="4407408"/>
+            <a:ext cx="2743200" cy="45720"/>
+          </a:xfrm>
+          <a:prstGeom prst="rect">
+            <a:avLst/>
+          </a:prstGeom>
+          <a:solidFill>
+            <a:srgbClr val="5D2A42"/>
+          </a:solidFill>
+          <a:ln>
+            <a:noFill/>
+          </a:ln>
+          <a:effectLst/>
+        </p:spPr>
+        <p:style>
+          <a:lnRef idx="1">
+            <a:schemeClr val="accent1"/>
+          </a:lnRef>
+          <a:fillRef idx="3">
+            <a:schemeClr val="accent1"/>
+          </a:fillRef>
+          <a:effectRef idx="2">
+            <a:schemeClr val="accent1"/>
+          </a:effectRef>
+          <a:fontRef idx="minor">
+            <a:schemeClr val="lt1"/>
+          </a:fontRef>
+        </p:style>
+        <p:txBody>
+          <a:bodyPr rtlCol="0" anchor="ctr"/>
+          <a:lstStyle/>
+          <a:p>
+            <a:pPr algn="ctr"/>
+          </a:p>
+        </p:txBody>
+      </p:sp>
+      <p:sp>
+        <p:nvSpPr>
+          <p:cNvPr id="24" name="Rectangle 23"/>
+          <p:cNvSpPr/>
+          <p:nvPr/>
+        </p:nvSpPr>
+        <p:spPr>
+          <a:xfrm>
+            <a:off x="6126480" y="4544568"/>
+            <a:ext cx="2560320" cy="329184"/>
+          </a:xfrm>
+          <a:prstGeom prst="rect">
+            <a:avLst/>
+          </a:prstGeom>
+          <a:noFill/>
+          <a:ln>
+            <a:noFill/>
+          </a:ln>
+          <a:effectLst/>
+        </p:spPr>
+        <p:style>
+          <a:lnRef idx="1">
+            <a:schemeClr val="accent1"/>
+          </a:lnRef>
+          <a:fillRef idx="3">
+            <a:schemeClr val="accent1"/>
+          </a:fillRef>
+          <a:effectRef idx="2">
+            <a:schemeClr val="accent1"/>
+          </a:effectRef>
+          <a:fontRef idx="minor">
+            <a:schemeClr val="lt1"/>
+          </a:fontRef>
+        </p:style>
+        <p:txBody>
+          <a:bodyPr rtlCol="0" anchor="t" wrap="square" lIns="45720" rIns="45720" tIns="18288" bIns="18288"/>
+          <a:lstStyle/>
+          <a:p>
+            <a:pPr algn="l">
+              <a:defRPr sz="1400" b="1" i="0">
+                <a:solidFill>
+                  <a:srgbClr val="5D2A42"/>
+                </a:solidFill>
+                <a:latin typeface="Calibri"/>
+              </a:defRPr>
+            </a:pPr>
+            <a:r>
+              <a:t>May 2026</a:t>
+            </a:r>
+          </a:p>
+        </p:txBody>
+      </p:sp>
+      <p:sp>
+        <p:nvSpPr>
+          <p:cNvPr id="25" name="Rectangle 24"/>
+          <p:cNvSpPr/>
+          <p:nvPr/>
+        </p:nvSpPr>
+        <p:spPr>
+          <a:xfrm>
+            <a:off x="6126480" y="4910328"/>
+            <a:ext cx="2560320" cy="731520"/>
+          </a:xfrm>
+          <a:prstGeom prst="rect">
+            <a:avLst/>
+          </a:prstGeom>
+          <a:noFill/>
+          <a:ln>
+            <a:noFill/>
+          </a:ln>
+          <a:effectLst/>
+        </p:spPr>
+        <p:style>
+          <a:lnRef idx="1">
+            <a:schemeClr val="accent1"/>
+          </a:lnRef>
+          <a:fillRef idx="3">
+            <a:schemeClr val="accent1"/>
+          </a:fillRef>
+          <a:effectRef idx="2">
+            <a:schemeClr val="accent1"/>
+          </a:effectRef>
+          <a:fontRef idx="minor">
+            <a:schemeClr val="lt1"/>
+          </a:fontRef>
+        </p:style>
+        <p:txBody>
+          <a:bodyPr rtlCol="0" anchor="t" wrap="square" lIns="45720" rIns="45720" tIns="18288" bIns="18288"/>
+          <a:lstStyle/>
+          <a:p>
+            <a:pPr algn="l">
+              <a:defRPr sz="1200" b="0" i="0">
+                <a:solidFill>
+                  <a:srgbClr val="3A3A3A"/>
+                </a:solidFill>
+                <a:latin typeface="Calibri"/>
+              </a:defRPr>
+            </a:pPr>
+            <a:r>
+              <a:t>Experiments &amp; analysis</a:t>
+            </a:r>
+          </a:p>
+        </p:txBody>
+      </p:sp>
+      <p:sp>
+        <p:nvSpPr>
+          <p:cNvPr id="26" name="Rectangle 25"/>
+          <p:cNvSpPr/>
+          <p:nvPr/>
+        </p:nvSpPr>
+        <p:spPr>
+          <a:xfrm>
+            <a:off x="8961120" y="4407408"/>
+            <a:ext cx="2743200" cy="45720"/>
+          </a:xfrm>
+          <a:prstGeom prst="rect">
+            <a:avLst/>
+          </a:prstGeom>
+          <a:solidFill>
+            <a:srgbClr val="5D2A42"/>
+          </a:solidFill>
+          <a:ln>
+            <a:noFill/>
+          </a:ln>
+          <a:effectLst/>
+        </p:spPr>
+        <p:style>
+          <a:lnRef idx="1">
+            <a:schemeClr val="accent1"/>
+          </a:lnRef>
+          <a:fillRef idx="3">
+            <a:schemeClr val="accent1"/>
+          </a:fillRef>
+          <a:effectRef idx="2">
+            <a:schemeClr val="accent1"/>
+          </a:effectRef>
+          <a:fontRef idx="minor">
+            <a:schemeClr val="lt1"/>
+          </a:fontRef>
+        </p:style>
+        <p:txBody>
+          <a:bodyPr rtlCol="0" anchor="ctr"/>
+          <a:lstStyle/>
+          <a:p>
+            <a:pPr algn="ctr"/>
+          </a:p>
+        </p:txBody>
+      </p:sp>
+      <p:sp>
+        <p:nvSpPr>
+          <p:cNvPr id="27" name="Rectangle 26"/>
+          <p:cNvSpPr/>
+          <p:nvPr/>
+        </p:nvSpPr>
+        <p:spPr>
+          <a:xfrm>
+            <a:off x="8961120" y="4544568"/>
+            <a:ext cx="2560320" cy="329184"/>
+          </a:xfrm>
+          <a:prstGeom prst="rect">
+            <a:avLst/>
+          </a:prstGeom>
+          <a:noFill/>
+          <a:ln>
+            <a:noFill/>
+          </a:ln>
+          <a:effectLst/>
+        </p:spPr>
+        <p:style>
+          <a:lnRef idx="1">
+            <a:schemeClr val="accent1"/>
+          </a:lnRef>
+          <a:fillRef idx="3">
+            <a:schemeClr val="accent1"/>
+          </a:fillRef>
+          <a:effectRef idx="2">
+            <a:schemeClr val="accent1"/>
+          </a:effectRef>
+          <a:fontRef idx="minor">
+            <a:schemeClr val="lt1"/>
+          </a:fontRef>
+        </p:style>
+        <p:txBody>
+          <a:bodyPr rtlCol="0" anchor="t" wrap="square" lIns="45720" rIns="45720" tIns="18288" bIns="18288"/>
+          <a:lstStyle/>
+          <a:p>
+            <a:pPr algn="l">
+              <a:defRPr sz="1400" b="1" i="0">
+                <a:solidFill>
+                  <a:srgbClr val="5D2A42"/>
+                </a:solidFill>
+                <a:latin typeface="Calibri"/>
+              </a:defRPr>
+            </a:pPr>
+            <a:r>
+              <a:t>Jun 2026</a:t>
+            </a:r>
+          </a:p>
+        </p:txBody>
+      </p:sp>
+      <p:sp>
+        <p:nvSpPr>
+          <p:cNvPr id="28" name="Rectangle 27"/>
+          <p:cNvSpPr/>
+          <p:nvPr/>
+        </p:nvSpPr>
+        <p:spPr>
+          <a:xfrm>
+            <a:off x="8961120" y="4910328"/>
+            <a:ext cx="2560320" cy="731520"/>
+          </a:xfrm>
+          <a:prstGeom prst="rect">
+            <a:avLst/>
+          </a:prstGeom>
+          <a:noFill/>
+          <a:ln>
+            <a:noFill/>
+          </a:ln>
+          <a:effectLst/>
+        </p:spPr>
+        <p:style>
+          <a:lnRef idx="1">
+            <a:schemeClr val="accent1"/>
+          </a:lnRef>
+          <a:fillRef idx="3">
+            <a:schemeClr val="accent1"/>
+          </a:fillRef>
+          <a:effectRef idx="2">
+            <a:schemeClr val="accent1"/>
+          </a:effectRef>
+          <a:fontRef idx="minor">
+            <a:schemeClr val="lt1"/>
+          </a:fontRef>
+        </p:style>
+        <p:txBody>
+          <a:bodyPr rtlCol="0" anchor="t" wrap="square" lIns="45720" rIns="45720" tIns="18288" bIns="18288"/>
+          <a:lstStyle/>
+          <a:p>
+            <a:pPr algn="l">
+              <a:defRPr sz="1200" b="0" i="0">
+                <a:solidFill>
+                  <a:srgbClr val="3A3A3A"/>
+                </a:solidFill>
+                <a:latin typeface="Calibri"/>
+              </a:defRPr>
+            </a:pPr>
+            <a:r>
+              <a:t>Thesis writing &amp; defense prep</a:t>
             </a:r>
           </a:p>
         </p:txBody>
@@ -33551,8 +34369,8 @@
         </p:nvSpPr>
         <p:spPr>
           <a:xfrm>
-            <a:off x="457200" y="1207008"/>
-            <a:ext cx="11277295" cy="292608"/>
+            <a:off x="512064" y="1344168"/>
+            <a:ext cx="2633472" cy="310896"/>
           </a:xfrm>
           <a:prstGeom prst="rect">
             <a:avLst/>
@@ -33582,15 +34400,15 @@
           <a:lstStyle/>
           <a:p>
             <a:pPr algn="l">
-              <a:defRPr sz="1200" b="0" i="1">
-                <a:solidFill>
-                  <a:srgbClr val="3A3A3A"/>
-                </a:solidFill>
-                <a:latin typeface="Calibri"/>
-              </a:defRPr>
-            </a:pPr>
-            <a:r>
-              <a:t>Key literature informing the methodology</a:t>
+              <a:defRPr sz="1300" b="1" i="0">
+                <a:solidFill>
+                  <a:srgbClr val="1A1A1A"/>
+                </a:solidFill>
+                <a:latin typeface="Calibri"/>
+              </a:defRPr>
+            </a:pPr>
+            <a:r>
+              <a:t>Topic</a:t>
             </a:r>
           </a:p>
         </p:txBody>
@@ -33603,8 +34421,112 @@
         </p:nvSpPr>
         <p:spPr>
           <a:xfrm>
-            <a:off x="457200" y="1554480"/>
-            <a:ext cx="2834640" cy="347472"/>
+            <a:off x="3255264" y="1344168"/>
+            <a:ext cx="3182112" cy="310896"/>
+          </a:xfrm>
+          <a:prstGeom prst="rect">
+            <a:avLst/>
+          </a:prstGeom>
+          <a:noFill/>
+          <a:ln>
+            <a:noFill/>
+          </a:ln>
+          <a:effectLst/>
+        </p:spPr>
+        <p:style>
+          <a:lnRef idx="1">
+            <a:schemeClr val="accent1"/>
+          </a:lnRef>
+          <a:fillRef idx="3">
+            <a:schemeClr val="accent1"/>
+          </a:fillRef>
+          <a:effectRef idx="2">
+            <a:schemeClr val="accent1"/>
+          </a:effectRef>
+          <a:fontRef idx="minor">
+            <a:schemeClr val="lt1"/>
+          </a:fontRef>
+        </p:style>
+        <p:txBody>
+          <a:bodyPr rtlCol="0" anchor="t" wrap="square" lIns="45720" rIns="45720" tIns="18288" bIns="18288"/>
+          <a:lstStyle/>
+          <a:p>
+            <a:pPr algn="l">
+              <a:defRPr sz="1300" b="1" i="0">
+                <a:solidFill>
+                  <a:srgbClr val="1A1A1A"/>
+                </a:solidFill>
+                <a:latin typeface="Calibri"/>
+              </a:defRPr>
+            </a:pPr>
+            <a:r>
+              <a:t>Key authors</a:t>
+            </a:r>
+          </a:p>
+        </p:txBody>
+      </p:sp>
+      <p:sp>
+        <p:nvSpPr>
+          <p:cNvPr id="9" name="Rectangle 8"/>
+          <p:cNvSpPr/>
+          <p:nvPr/>
+        </p:nvSpPr>
+        <p:spPr>
+          <a:xfrm>
+            <a:off x="6547104" y="1344168"/>
+            <a:ext cx="5102352" cy="310896"/>
+          </a:xfrm>
+          <a:prstGeom prst="rect">
+            <a:avLst/>
+          </a:prstGeom>
+          <a:noFill/>
+          <a:ln>
+            <a:noFill/>
+          </a:ln>
+          <a:effectLst/>
+        </p:spPr>
+        <p:style>
+          <a:lnRef idx="1">
+            <a:schemeClr val="accent1"/>
+          </a:lnRef>
+          <a:fillRef idx="3">
+            <a:schemeClr val="accent1"/>
+          </a:fillRef>
+          <a:effectRef idx="2">
+            <a:schemeClr val="accent1"/>
+          </a:effectRef>
+          <a:fontRef idx="minor">
+            <a:schemeClr val="lt1"/>
+          </a:fontRef>
+        </p:style>
+        <p:txBody>
+          <a:bodyPr rtlCol="0" anchor="t" wrap="square" lIns="45720" rIns="45720" tIns="18288" bIns="18288"/>
+          <a:lstStyle/>
+          <a:p>
+            <a:pPr algn="l">
+              <a:defRPr sz="1300" b="1" i="0">
+                <a:solidFill>
+                  <a:srgbClr val="1A1A1A"/>
+                </a:solidFill>
+                <a:latin typeface="Calibri"/>
+              </a:defRPr>
+            </a:pPr>
+            <a:r>
+              <a:t>Contribution</a:t>
+            </a:r>
+          </a:p>
+        </p:txBody>
+      </p:sp>
+      <p:sp>
+        <p:nvSpPr>
+          <p:cNvPr id="10" name="Rectangle 9"/>
+          <p:cNvSpPr/>
+          <p:nvPr/>
+        </p:nvSpPr>
+        <p:spPr>
+          <a:xfrm>
+            <a:off x="457200" y="1673352"/>
+            <a:ext cx="11247120" cy="22860"/>
           </a:xfrm>
           <a:prstGeom prst="rect">
             <a:avLst/>
@@ -33641,14 +34563,58 @@
       </p:sp>
       <p:sp>
         <p:nvSpPr>
-          <p:cNvPr id="9" name="Rectangle 8"/>
-          <p:cNvSpPr/>
-          <p:nvPr/>
-        </p:nvSpPr>
-        <p:spPr>
-          <a:xfrm>
-            <a:off x="512064" y="1600200"/>
-            <a:ext cx="2724912" cy="256032"/>
+          <p:cNvPr id="11" name="Rectangle 10"/>
+          <p:cNvSpPr/>
+          <p:nvPr/>
+        </p:nvSpPr>
+        <p:spPr>
+          <a:xfrm>
+            <a:off x="457200" y="1746504"/>
+            <a:ext cx="11247120" cy="777240"/>
+          </a:xfrm>
+          <a:prstGeom prst="rect">
+            <a:avLst/>
+          </a:prstGeom>
+          <a:solidFill>
+            <a:srgbClr val="F7F5F6"/>
+          </a:solidFill>
+          <a:ln>
+            <a:noFill/>
+          </a:ln>
+          <a:effectLst/>
+        </p:spPr>
+        <p:style>
+          <a:lnRef idx="1">
+            <a:schemeClr val="accent1"/>
+          </a:lnRef>
+          <a:fillRef idx="3">
+            <a:schemeClr val="accent1"/>
+          </a:fillRef>
+          <a:effectRef idx="2">
+            <a:schemeClr val="accent1"/>
+          </a:effectRef>
+          <a:fontRef idx="minor">
+            <a:schemeClr val="lt1"/>
+          </a:fontRef>
+        </p:style>
+        <p:txBody>
+          <a:bodyPr rtlCol="0" anchor="ctr"/>
+          <a:lstStyle/>
+          <a:p>
+            <a:pPr algn="ctr"/>
+          </a:p>
+        </p:txBody>
+      </p:sp>
+      <p:sp>
+        <p:nvSpPr>
+          <p:cNvPr id="12" name="Rectangle 11"/>
+          <p:cNvSpPr/>
+          <p:nvPr/>
+        </p:nvSpPr>
+        <p:spPr>
+          <a:xfrm>
+            <a:off x="512064" y="1783080"/>
+            <a:ext cx="2633472" cy="704088"/>
           </a:xfrm>
           <a:prstGeom prst="rect">
             <a:avLst/>
@@ -33678,35 +34644,295 @@
           <a:lstStyle/>
           <a:p>
             <a:pPr algn="l">
-              <a:defRPr sz="1200" b="1" i="0">
-                <a:solidFill>
-                  <a:srgbClr val="FFFFFF"/>
-                </a:solidFill>
-                <a:latin typeface="Calibri"/>
-              </a:defRPr>
-            </a:pPr>
-            <a:r>
-              <a:t>Topic</a:t>
-            </a:r>
-          </a:p>
-        </p:txBody>
-      </p:sp>
-      <p:sp>
-        <p:nvSpPr>
-          <p:cNvPr id="10" name="Rectangle 9"/>
-          <p:cNvSpPr/>
-          <p:nvPr/>
-        </p:nvSpPr>
-        <p:spPr>
-          <a:xfrm>
-            <a:off x="3337560" y="1554480"/>
-            <a:ext cx="3200400" cy="347472"/>
+              <a:defRPr sz="1300" b="0" i="0">
+                <a:solidFill>
+                  <a:srgbClr val="1A1A1A"/>
+                </a:solidFill>
+                <a:latin typeface="Calibri"/>
+              </a:defRPr>
+            </a:pPr>
+            <a:r>
+              <a:t>Bandits in healthcare</a:t>
+            </a:r>
+          </a:p>
+        </p:txBody>
+      </p:sp>
+      <p:sp>
+        <p:nvSpPr>
+          <p:cNvPr id="13" name="Rectangle 12"/>
+          <p:cNvSpPr/>
+          <p:nvPr/>
+        </p:nvSpPr>
+        <p:spPr>
+          <a:xfrm>
+            <a:off x="3255264" y="1783080"/>
+            <a:ext cx="3182112" cy="704088"/>
+          </a:xfrm>
+          <a:prstGeom prst="rect">
+            <a:avLst/>
+          </a:prstGeom>
+          <a:noFill/>
+          <a:ln>
+            <a:noFill/>
+          </a:ln>
+          <a:effectLst/>
+        </p:spPr>
+        <p:style>
+          <a:lnRef idx="1">
+            <a:schemeClr val="accent1"/>
+          </a:lnRef>
+          <a:fillRef idx="3">
+            <a:schemeClr val="accent1"/>
+          </a:fillRef>
+          <a:effectRef idx="2">
+            <a:schemeClr val="accent1"/>
+          </a:effectRef>
+          <a:fontRef idx="minor">
+            <a:schemeClr val="lt1"/>
+          </a:fontRef>
+        </p:style>
+        <p:txBody>
+          <a:bodyPr rtlCol="0" anchor="t" wrap="square" lIns="45720" rIns="45720" tIns="18288" bIns="18288"/>
+          <a:lstStyle/>
+          <a:p>
+            <a:pPr algn="l">
+              <a:defRPr sz="1300" b="0" i="0">
+                <a:solidFill>
+                  <a:srgbClr val="1A1A1A"/>
+                </a:solidFill>
+                <a:latin typeface="Calibri"/>
+              </a:defRPr>
+            </a:pPr>
+            <a:r>
+              <a:t>Bouneffouf et al. (2017)</a:t>
+            </a:r>
+          </a:p>
+        </p:txBody>
+      </p:sp>
+      <p:sp>
+        <p:nvSpPr>
+          <p:cNvPr id="14" name="Rectangle 13"/>
+          <p:cNvSpPr/>
+          <p:nvPr/>
+        </p:nvSpPr>
+        <p:spPr>
+          <a:xfrm>
+            <a:off x="6547104" y="1783080"/>
+            <a:ext cx="5102352" cy="704088"/>
+          </a:xfrm>
+          <a:prstGeom prst="rect">
+            <a:avLst/>
+          </a:prstGeom>
+          <a:noFill/>
+          <a:ln>
+            <a:noFill/>
+          </a:ln>
+          <a:effectLst/>
+        </p:spPr>
+        <p:style>
+          <a:lnRef idx="1">
+            <a:schemeClr val="accent1"/>
+          </a:lnRef>
+          <a:fillRef idx="3">
+            <a:schemeClr val="accent1"/>
+          </a:fillRef>
+          <a:effectRef idx="2">
+            <a:schemeClr val="accent1"/>
+          </a:effectRef>
+          <a:fontRef idx="minor">
+            <a:schemeClr val="lt1"/>
+          </a:fontRef>
+        </p:style>
+        <p:txBody>
+          <a:bodyPr rtlCol="0" anchor="t" wrap="square" lIns="45720" rIns="45720" tIns="18288" bIns="18288"/>
+          <a:lstStyle/>
+          <a:p>
+            <a:pPr algn="l">
+              <a:defRPr sz="1300" b="0" i="0">
+                <a:solidFill>
+                  <a:srgbClr val="1A1A1A"/>
+                </a:solidFill>
+                <a:latin typeface="Calibri"/>
+              </a:defRPr>
+            </a:pPr>
+            <a:r>
+              <a:t>Clinical decision support via LinUCB; reward = patient outcome</a:t>
+            </a:r>
+          </a:p>
+        </p:txBody>
+      </p:sp>
+      <p:sp>
+        <p:nvSpPr>
+          <p:cNvPr id="15" name="Rectangle 14"/>
+          <p:cNvSpPr/>
+          <p:nvPr/>
+        </p:nvSpPr>
+        <p:spPr>
+          <a:xfrm>
+            <a:off x="512064" y="2560320"/>
+            <a:ext cx="2633472" cy="704088"/>
+          </a:xfrm>
+          <a:prstGeom prst="rect">
+            <a:avLst/>
+          </a:prstGeom>
+          <a:noFill/>
+          <a:ln>
+            <a:noFill/>
+          </a:ln>
+          <a:effectLst/>
+        </p:spPr>
+        <p:style>
+          <a:lnRef idx="1">
+            <a:schemeClr val="accent1"/>
+          </a:lnRef>
+          <a:fillRef idx="3">
+            <a:schemeClr val="accent1"/>
+          </a:fillRef>
+          <a:effectRef idx="2">
+            <a:schemeClr val="accent1"/>
+          </a:effectRef>
+          <a:fontRef idx="minor">
+            <a:schemeClr val="lt1"/>
+          </a:fontRef>
+        </p:style>
+        <p:txBody>
+          <a:bodyPr rtlCol="0" anchor="t" wrap="square" lIns="45720" rIns="45720" tIns="18288" bIns="18288"/>
+          <a:lstStyle/>
+          <a:p>
+            <a:pPr algn="l">
+              <a:defRPr sz="1300" b="0" i="0">
+                <a:solidFill>
+                  <a:srgbClr val="1A1A1A"/>
+                </a:solidFill>
+                <a:latin typeface="Calibri"/>
+              </a:defRPr>
+            </a:pPr>
+            <a:r>
+              <a:t>Linear bandit theory</a:t>
+            </a:r>
+          </a:p>
+        </p:txBody>
+      </p:sp>
+      <p:sp>
+        <p:nvSpPr>
+          <p:cNvPr id="16" name="Rectangle 15"/>
+          <p:cNvSpPr/>
+          <p:nvPr/>
+        </p:nvSpPr>
+        <p:spPr>
+          <a:xfrm>
+            <a:off x="3255264" y="2560320"/>
+            <a:ext cx="3182112" cy="704088"/>
+          </a:xfrm>
+          <a:prstGeom prst="rect">
+            <a:avLst/>
+          </a:prstGeom>
+          <a:noFill/>
+          <a:ln>
+            <a:noFill/>
+          </a:ln>
+          <a:effectLst/>
+        </p:spPr>
+        <p:style>
+          <a:lnRef idx="1">
+            <a:schemeClr val="accent1"/>
+          </a:lnRef>
+          <a:fillRef idx="3">
+            <a:schemeClr val="accent1"/>
+          </a:fillRef>
+          <a:effectRef idx="2">
+            <a:schemeClr val="accent1"/>
+          </a:effectRef>
+          <a:fontRef idx="minor">
+            <a:schemeClr val="lt1"/>
+          </a:fontRef>
+        </p:style>
+        <p:txBody>
+          <a:bodyPr rtlCol="0" anchor="t" wrap="square" lIns="45720" rIns="45720" tIns="18288" bIns="18288"/>
+          <a:lstStyle/>
+          <a:p>
+            <a:pPr algn="l">
+              <a:defRPr sz="1300" b="0" i="0">
+                <a:solidFill>
+                  <a:srgbClr val="1A1A1A"/>
+                </a:solidFill>
+                <a:latin typeface="Calibri"/>
+              </a:defRPr>
+            </a:pPr>
+            <a:r>
+              <a:t>Li et al. (2010); Agrawal &amp; Goyal (2013)</a:t>
+            </a:r>
+          </a:p>
+        </p:txBody>
+      </p:sp>
+      <p:sp>
+        <p:nvSpPr>
+          <p:cNvPr id="17" name="Rectangle 16"/>
+          <p:cNvSpPr/>
+          <p:nvPr/>
+        </p:nvSpPr>
+        <p:spPr>
+          <a:xfrm>
+            <a:off x="6547104" y="2560320"/>
+            <a:ext cx="5102352" cy="704088"/>
+          </a:xfrm>
+          <a:prstGeom prst="rect">
+            <a:avLst/>
+          </a:prstGeom>
+          <a:noFill/>
+          <a:ln>
+            <a:noFill/>
+          </a:ln>
+          <a:effectLst/>
+        </p:spPr>
+        <p:style>
+          <a:lnRef idx="1">
+            <a:schemeClr val="accent1"/>
+          </a:lnRef>
+          <a:fillRef idx="3">
+            <a:schemeClr val="accent1"/>
+          </a:fillRef>
+          <a:effectRef idx="2">
+            <a:schemeClr val="accent1"/>
+          </a:effectRef>
+          <a:fontRef idx="minor">
+            <a:schemeClr val="lt1"/>
+          </a:fontRef>
+        </p:style>
+        <p:txBody>
+          <a:bodyPr rtlCol="0" anchor="t" wrap="square" lIns="45720" rIns="45720" tIns="18288" bIns="18288"/>
+          <a:lstStyle/>
+          <a:p>
+            <a:pPr algn="l">
+              <a:defRPr sz="1300" b="0" i="0">
+                <a:solidFill>
+                  <a:srgbClr val="1A1A1A"/>
+                </a:solidFill>
+                <a:latin typeface="Calibri"/>
+              </a:defRPr>
+            </a:pPr>
+            <a:r>
+              <a:t>LinUCB O(sqrt(T) d log T) regret; LinTS posterior sampling, near-optimal</a:t>
+            </a:r>
+          </a:p>
+        </p:txBody>
+      </p:sp>
+      <p:sp>
+        <p:nvSpPr>
+          <p:cNvPr id="18" name="Rectangle 17"/>
+          <p:cNvSpPr/>
+          <p:nvPr/>
+        </p:nvSpPr>
+        <p:spPr>
+          <a:xfrm>
+            <a:off x="457200" y="3300984"/>
+            <a:ext cx="11247120" cy="777240"/>
           </a:xfrm>
           <a:prstGeom prst="rect">
             <a:avLst/>
           </a:prstGeom>
           <a:solidFill>
-            <a:srgbClr val="5D2A42"/>
+            <a:srgbClr val="F7F5F6"/>
           </a:solidFill>
           <a:ln>
             <a:noFill/>
@@ -33737,14 +34963,14 @@
       </p:sp>
       <p:sp>
         <p:nvSpPr>
-          <p:cNvPr id="11" name="Rectangle 10"/>
-          <p:cNvSpPr/>
-          <p:nvPr/>
-        </p:nvSpPr>
-        <p:spPr>
-          <a:xfrm>
-            <a:off x="3392424" y="1600200"/>
-            <a:ext cx="3090672" cy="256032"/>
+          <p:cNvPr id="19" name="Rectangle 18"/>
+          <p:cNvSpPr/>
+          <p:nvPr/>
+        </p:nvSpPr>
+        <p:spPr>
+          <a:xfrm>
+            <a:off x="512064" y="3337560"/>
+            <a:ext cx="2633472" cy="704088"/>
           </a:xfrm>
           <a:prstGeom prst="rect">
             <a:avLst/>
@@ -33774,35 +35000,295 @@
           <a:lstStyle/>
           <a:p>
             <a:pPr algn="l">
-              <a:defRPr sz="1200" b="1" i="0">
-                <a:solidFill>
-                  <a:srgbClr val="FFFFFF"/>
-                </a:solidFill>
-                <a:latin typeface="Calibri"/>
-              </a:defRPr>
-            </a:pPr>
-            <a:r>
-              <a:t>Key Authors</a:t>
-            </a:r>
-          </a:p>
-        </p:txBody>
-      </p:sp>
-      <p:sp>
-        <p:nvSpPr>
-          <p:cNvPr id="12" name="Rectangle 11"/>
-          <p:cNvSpPr/>
-          <p:nvPr/>
-        </p:nvSpPr>
-        <p:spPr>
-          <a:xfrm>
-            <a:off x="6583680" y="1554480"/>
-            <a:ext cx="5120640" cy="347472"/>
+              <a:defRPr sz="1300" b="0" i="0">
+                <a:solidFill>
+                  <a:srgbClr val="1A1A1A"/>
+                </a:solidFill>
+                <a:latin typeface="Calibri"/>
+              </a:defRPr>
+            </a:pPr>
+            <a:r>
+              <a:t>Fairness in insurance ML</a:t>
+            </a:r>
+          </a:p>
+        </p:txBody>
+      </p:sp>
+      <p:sp>
+        <p:nvSpPr>
+          <p:cNvPr id="20" name="Rectangle 19"/>
+          <p:cNvSpPr/>
+          <p:nvPr/>
+        </p:nvSpPr>
+        <p:spPr>
+          <a:xfrm>
+            <a:off x="3255264" y="3337560"/>
+            <a:ext cx="3182112" cy="704088"/>
+          </a:xfrm>
+          <a:prstGeom prst="rect">
+            <a:avLst/>
+          </a:prstGeom>
+          <a:noFill/>
+          <a:ln>
+            <a:noFill/>
+          </a:ln>
+          <a:effectLst/>
+        </p:spPr>
+        <p:style>
+          <a:lnRef idx="1">
+            <a:schemeClr val="accent1"/>
+          </a:lnRef>
+          <a:fillRef idx="3">
+            <a:schemeClr val="accent1"/>
+          </a:fillRef>
+          <a:effectRef idx="2">
+            <a:schemeClr val="accent1"/>
+          </a:effectRef>
+          <a:fontRef idx="minor">
+            <a:schemeClr val="lt1"/>
+          </a:fontRef>
+        </p:style>
+        <p:txBody>
+          <a:bodyPr rtlCol="0" anchor="t" wrap="square" lIns="45720" rIns="45720" tIns="18288" bIns="18288"/>
+          <a:lstStyle/>
+          <a:p>
+            <a:pPr algn="l">
+              <a:defRPr sz="1300" b="0" i="0">
+                <a:solidFill>
+                  <a:srgbClr val="1A1A1A"/>
+                </a:solidFill>
+                <a:latin typeface="Calibri"/>
+              </a:defRPr>
+            </a:pPr>
+            <a:r>
+              <a:t>Frees et al. (2014); Kusner et al. (2017)</a:t>
+            </a:r>
+          </a:p>
+        </p:txBody>
+      </p:sp>
+      <p:sp>
+        <p:nvSpPr>
+          <p:cNvPr id="21" name="Rectangle 20"/>
+          <p:cNvSpPr/>
+          <p:nvPr/>
+        </p:nvSpPr>
+        <p:spPr>
+          <a:xfrm>
+            <a:off x="6547104" y="3337560"/>
+            <a:ext cx="5102352" cy="704088"/>
+          </a:xfrm>
+          <a:prstGeom prst="rect">
+            <a:avLst/>
+          </a:prstGeom>
+          <a:noFill/>
+          <a:ln>
+            <a:noFill/>
+          </a:ln>
+          <a:effectLst/>
+        </p:spPr>
+        <p:style>
+          <a:lnRef idx="1">
+            <a:schemeClr val="accent1"/>
+          </a:lnRef>
+          <a:fillRef idx="3">
+            <a:schemeClr val="accent1"/>
+          </a:fillRef>
+          <a:effectRef idx="2">
+            <a:schemeClr val="accent1"/>
+          </a:effectRef>
+          <a:fontRef idx="minor">
+            <a:schemeClr val="lt1"/>
+          </a:fontRef>
+        </p:style>
+        <p:txBody>
+          <a:bodyPr rtlCol="0" anchor="t" wrap="square" lIns="45720" rIns="45720" tIns="18288" bIns="18288"/>
+          <a:lstStyle/>
+          <a:p>
+            <a:pPr algn="l">
+              <a:defRPr sz="1300" b="0" i="0">
+                <a:solidFill>
+                  <a:srgbClr val="1A1A1A"/>
+                </a:solidFill>
+                <a:latin typeface="Calibri"/>
+              </a:defRPr>
+            </a:pPr>
+            <a:r>
+              <a:t>Regulatory constraints on protected attributes; counterfactual fairness</a:t>
+            </a:r>
+          </a:p>
+        </p:txBody>
+      </p:sp>
+      <p:sp>
+        <p:nvSpPr>
+          <p:cNvPr id="22" name="Rectangle 21"/>
+          <p:cNvSpPr/>
+          <p:nvPr/>
+        </p:nvSpPr>
+        <p:spPr>
+          <a:xfrm>
+            <a:off x="512064" y="4114800"/>
+            <a:ext cx="2633472" cy="704088"/>
+          </a:xfrm>
+          <a:prstGeom prst="rect">
+            <a:avLst/>
+          </a:prstGeom>
+          <a:noFill/>
+          <a:ln>
+            <a:noFill/>
+          </a:ln>
+          <a:effectLst/>
+        </p:spPr>
+        <p:style>
+          <a:lnRef idx="1">
+            <a:schemeClr val="accent1"/>
+          </a:lnRef>
+          <a:fillRef idx="3">
+            <a:schemeClr val="accent1"/>
+          </a:fillRef>
+          <a:effectRef idx="2">
+            <a:schemeClr val="accent1"/>
+          </a:effectRef>
+          <a:fontRef idx="minor">
+            <a:schemeClr val="lt1"/>
+          </a:fontRef>
+        </p:style>
+        <p:txBody>
+          <a:bodyPr rtlCol="0" anchor="t" wrap="square" lIns="45720" rIns="45720" tIns="18288" bIns="18288"/>
+          <a:lstStyle/>
+          <a:p>
+            <a:pPr algn="l">
+              <a:defRPr sz="1300" b="0" i="0">
+                <a:solidFill>
+                  <a:srgbClr val="1A1A1A"/>
+                </a:solidFill>
+                <a:latin typeface="Calibri"/>
+              </a:defRPr>
+            </a:pPr>
+            <a:r>
+              <a:t>PSI model monitoring</a:t>
+            </a:r>
+          </a:p>
+        </p:txBody>
+      </p:sp>
+      <p:sp>
+        <p:nvSpPr>
+          <p:cNvPr id="23" name="Rectangle 22"/>
+          <p:cNvSpPr/>
+          <p:nvPr/>
+        </p:nvSpPr>
+        <p:spPr>
+          <a:xfrm>
+            <a:off x="3255264" y="4114800"/>
+            <a:ext cx="3182112" cy="704088"/>
+          </a:xfrm>
+          <a:prstGeom prst="rect">
+            <a:avLst/>
+          </a:prstGeom>
+          <a:noFill/>
+          <a:ln>
+            <a:noFill/>
+          </a:ln>
+          <a:effectLst/>
+        </p:spPr>
+        <p:style>
+          <a:lnRef idx="1">
+            <a:schemeClr val="accent1"/>
+          </a:lnRef>
+          <a:fillRef idx="3">
+            <a:schemeClr val="accent1"/>
+          </a:fillRef>
+          <a:effectRef idx="2">
+            <a:schemeClr val="accent1"/>
+          </a:effectRef>
+          <a:fontRef idx="minor">
+            <a:schemeClr val="lt1"/>
+          </a:fontRef>
+        </p:style>
+        <p:txBody>
+          <a:bodyPr rtlCol="0" anchor="t" wrap="square" lIns="45720" rIns="45720" tIns="18288" bIns="18288"/>
+          <a:lstStyle/>
+          <a:p>
+            <a:pPr algn="l">
+              <a:defRPr sz="1300" b="0" i="0">
+                <a:solidFill>
+                  <a:srgbClr val="1A1A1A"/>
+                </a:solidFill>
+                <a:latin typeface="Calibri"/>
+              </a:defRPr>
+            </a:pPr>
+            <a:r>
+              <a:t>Yurdakul (2018)</a:t>
+            </a:r>
+          </a:p>
+        </p:txBody>
+      </p:sp>
+      <p:sp>
+        <p:nvSpPr>
+          <p:cNvPr id="24" name="Rectangle 23"/>
+          <p:cNvSpPr/>
+          <p:nvPr/>
+        </p:nvSpPr>
+        <p:spPr>
+          <a:xfrm>
+            <a:off x="6547104" y="4114800"/>
+            <a:ext cx="5102352" cy="704088"/>
+          </a:xfrm>
+          <a:prstGeom prst="rect">
+            <a:avLst/>
+          </a:prstGeom>
+          <a:noFill/>
+          <a:ln>
+            <a:noFill/>
+          </a:ln>
+          <a:effectLst/>
+        </p:spPr>
+        <p:style>
+          <a:lnRef idx="1">
+            <a:schemeClr val="accent1"/>
+          </a:lnRef>
+          <a:fillRef idx="3">
+            <a:schemeClr val="accent1"/>
+          </a:fillRef>
+          <a:effectRef idx="2">
+            <a:schemeClr val="accent1"/>
+          </a:effectRef>
+          <a:fontRef idx="minor">
+            <a:schemeClr val="lt1"/>
+          </a:fontRef>
+        </p:style>
+        <p:txBody>
+          <a:bodyPr rtlCol="0" anchor="t" wrap="square" lIns="45720" rIns="45720" tIns="18288" bIns="18288"/>
+          <a:lstStyle/>
+          <a:p>
+            <a:pPr algn="l">
+              <a:defRPr sz="1300" b="0" i="0">
+                <a:solidFill>
+                  <a:srgbClr val="1A1A1A"/>
+                </a:solidFill>
+                <a:latin typeface="Calibri"/>
+              </a:defRPr>
+            </a:pPr>
+            <a:r>
+              <a:t>Population Stability Index drift zones (GREEN / AMBER / RED)</a:t>
+            </a:r>
+          </a:p>
+        </p:txBody>
+      </p:sp>
+      <p:sp>
+        <p:nvSpPr>
+          <p:cNvPr id="25" name="Rectangle 24"/>
+          <p:cNvSpPr/>
+          <p:nvPr/>
+        </p:nvSpPr>
+        <p:spPr>
+          <a:xfrm>
+            <a:off x="457200" y="4855464"/>
+            <a:ext cx="11247120" cy="777240"/>
           </a:xfrm>
           <a:prstGeom prst="rect">
             <a:avLst/>
           </a:prstGeom>
           <a:solidFill>
-            <a:srgbClr val="5D2A42"/>
+            <a:srgbClr val="F7F5F6"/>
           </a:solidFill>
           <a:ln>
             <a:noFill/>
@@ -33833,14 +35319,14 @@
       </p:sp>
       <p:sp>
         <p:nvSpPr>
-          <p:cNvPr id="13" name="Rectangle 12"/>
-          <p:cNvSpPr/>
-          <p:nvPr/>
-        </p:nvSpPr>
-        <p:spPr>
-          <a:xfrm>
-            <a:off x="6638544" y="1600200"/>
-            <a:ext cx="5010912" cy="256032"/>
+          <p:cNvPr id="26" name="Rectangle 25"/>
+          <p:cNvSpPr/>
+          <p:nvPr/>
+        </p:nvSpPr>
+        <p:spPr>
+          <a:xfrm>
+            <a:off x="512064" y="4892040"/>
+            <a:ext cx="2633472" cy="704088"/>
           </a:xfrm>
           <a:prstGeom prst="rect">
             <a:avLst/>
@@ -33870,161 +35356,29 @@
           <a:lstStyle/>
           <a:p>
             <a:pPr algn="l">
-              <a:defRPr sz="1200" b="1" i="0">
-                <a:solidFill>
-                  <a:srgbClr val="FFFFFF"/>
-                </a:solidFill>
-                <a:latin typeface="Calibri"/>
-              </a:defRPr>
-            </a:pPr>
-            <a:r>
-              <a:t>Contribution</a:t>
-            </a:r>
-          </a:p>
-        </p:txBody>
-      </p:sp>
-      <p:sp>
-        <p:nvSpPr>
-          <p:cNvPr id="14" name="Rectangle 13"/>
-          <p:cNvSpPr/>
-          <p:nvPr/>
-        </p:nvSpPr>
-        <p:spPr>
-          <a:xfrm>
-            <a:off x="457200" y="1938528"/>
-            <a:ext cx="2834640" cy="722376"/>
-          </a:xfrm>
-          <a:prstGeom prst="rect">
-            <a:avLst/>
-          </a:prstGeom>
-          <a:solidFill>
-            <a:srgbClr val="F2EEEF"/>
-          </a:solidFill>
-          <a:ln>
-            <a:noFill/>
-          </a:ln>
-          <a:effectLst/>
-        </p:spPr>
-        <p:style>
-          <a:lnRef idx="1">
-            <a:schemeClr val="accent1"/>
-          </a:lnRef>
-          <a:fillRef idx="3">
-            <a:schemeClr val="accent1"/>
-          </a:fillRef>
-          <a:effectRef idx="2">
-            <a:schemeClr val="accent1"/>
-          </a:effectRef>
-          <a:fontRef idx="minor">
-            <a:schemeClr val="lt1"/>
-          </a:fontRef>
-        </p:style>
-        <p:txBody>
-          <a:bodyPr rtlCol="0" anchor="ctr"/>
-          <a:lstStyle/>
-          <a:p>
-            <a:pPr algn="ctr"/>
-          </a:p>
-        </p:txBody>
-      </p:sp>
-      <p:sp>
-        <p:nvSpPr>
-          <p:cNvPr id="15" name="Rectangle 14"/>
-          <p:cNvSpPr/>
-          <p:nvPr/>
-        </p:nvSpPr>
-        <p:spPr>
-          <a:xfrm>
-            <a:off x="3337560" y="1938528"/>
-            <a:ext cx="3200400" cy="722376"/>
-          </a:xfrm>
-          <a:prstGeom prst="rect">
-            <a:avLst/>
-          </a:prstGeom>
-          <a:solidFill>
-            <a:srgbClr val="F2EEEF"/>
-          </a:solidFill>
-          <a:ln>
-            <a:noFill/>
-          </a:ln>
-          <a:effectLst/>
-        </p:spPr>
-        <p:style>
-          <a:lnRef idx="1">
-            <a:schemeClr val="accent1"/>
-          </a:lnRef>
-          <a:fillRef idx="3">
-            <a:schemeClr val="accent1"/>
-          </a:fillRef>
-          <a:effectRef idx="2">
-            <a:schemeClr val="accent1"/>
-          </a:effectRef>
-          <a:fontRef idx="minor">
-            <a:schemeClr val="lt1"/>
-          </a:fontRef>
-        </p:style>
-        <p:txBody>
-          <a:bodyPr rtlCol="0" anchor="ctr"/>
-          <a:lstStyle/>
-          <a:p>
-            <a:pPr algn="ctr"/>
-          </a:p>
-        </p:txBody>
-      </p:sp>
-      <p:sp>
-        <p:nvSpPr>
-          <p:cNvPr id="16" name="Rectangle 15"/>
-          <p:cNvSpPr/>
-          <p:nvPr/>
-        </p:nvSpPr>
-        <p:spPr>
-          <a:xfrm>
-            <a:off x="6583680" y="1938528"/>
-            <a:ext cx="5120640" cy="722376"/>
-          </a:xfrm>
-          <a:prstGeom prst="rect">
-            <a:avLst/>
-          </a:prstGeom>
-          <a:solidFill>
-            <a:srgbClr val="F2EEEF"/>
-          </a:solidFill>
-          <a:ln>
-            <a:noFill/>
-          </a:ln>
-          <a:effectLst/>
-        </p:spPr>
-        <p:style>
-          <a:lnRef idx="1">
-            <a:schemeClr val="accent1"/>
-          </a:lnRef>
-          <a:fillRef idx="3">
-            <a:schemeClr val="accent1"/>
-          </a:fillRef>
-          <a:effectRef idx="2">
-            <a:schemeClr val="accent1"/>
-          </a:effectRef>
-          <a:fontRef idx="minor">
-            <a:schemeClr val="lt1"/>
-          </a:fontRef>
-        </p:style>
-        <p:txBody>
-          <a:bodyPr rtlCol="0" anchor="ctr"/>
-          <a:lstStyle/>
-          <a:p>
-            <a:pPr algn="ctr"/>
-          </a:p>
-        </p:txBody>
-      </p:sp>
-      <p:sp>
-        <p:nvSpPr>
-          <p:cNvPr id="17" name="Rectangle 16"/>
-          <p:cNvSpPr/>
-          <p:nvPr/>
-        </p:nvSpPr>
-        <p:spPr>
-          <a:xfrm>
-            <a:off x="512064" y="1993392"/>
-            <a:ext cx="2724912" cy="630936"/>
+              <a:defRPr sz="1300" b="0" i="0">
+                <a:solidFill>
+                  <a:srgbClr val="1A1A1A"/>
+                </a:solidFill>
+                <a:latin typeface="Calibri"/>
+              </a:defRPr>
+            </a:pPr>
+            <a:r>
+              <a:t>Human-in-the-loop RL</a:t>
+            </a:r>
+          </a:p>
+        </p:txBody>
+      </p:sp>
+      <p:sp>
+        <p:nvSpPr>
+          <p:cNvPr id="27" name="Rectangle 26"/>
+          <p:cNvSpPr/>
+          <p:nvPr/>
+        </p:nvSpPr>
+        <p:spPr>
+          <a:xfrm>
+            <a:off x="3255264" y="4892040"/>
+            <a:ext cx="3182112" cy="704088"/>
           </a:xfrm>
           <a:prstGeom prst="rect">
             <a:avLst/>
@@ -34054,7 +35408,7 @@
           <a:lstStyle/>
           <a:p>
             <a:pPr algn="l">
-              <a:defRPr sz="1100" b="0" i="0">
+              <a:defRPr sz="1300" b="0" i="0">
                 <a:solidFill>
                   <a:srgbClr val="1A1A1A"/>
                 </a:solidFill>
@@ -34062,25 +35416,21 @@
               </a:defRPr>
             </a:pPr>
             <a:r>
-              <a:t>Contextual Bandits</a:t>
-            </a:r>
-            <a:br/>
-            <a:r>
-              <a:t>in Healthcare</a:t>
-            </a:r>
-          </a:p>
-        </p:txBody>
-      </p:sp>
-      <p:sp>
-        <p:nvSpPr>
-          <p:cNvPr id="18" name="Rectangle 17"/>
-          <p:cNvSpPr/>
-          <p:nvPr/>
-        </p:nvSpPr>
-        <p:spPr>
-          <a:xfrm>
-            <a:off x="3392424" y="1993392"/>
-            <a:ext cx="3090672" cy="630936"/>
+              <a:t>Christiano et al. (2017)</a:t>
+            </a:r>
+          </a:p>
+        </p:txBody>
+      </p:sp>
+      <p:sp>
+        <p:nvSpPr>
+          <p:cNvPr id="28" name="Rectangle 27"/>
+          <p:cNvSpPr/>
+          <p:nvPr/>
+        </p:nvSpPr>
+        <p:spPr>
+          <a:xfrm>
+            <a:off x="6547104" y="4892040"/>
+            <a:ext cx="5102352" cy="704088"/>
           </a:xfrm>
           <a:prstGeom prst="rect">
             <a:avLst/>
@@ -34110,7 +35460,7 @@
           <a:lstStyle/>
           <a:p>
             <a:pPr algn="l">
-              <a:defRPr sz="1100" b="0" i="0">
+              <a:defRPr sz="1300" b="0" i="0">
                 <a:solidFill>
                   <a:srgbClr val="1A1A1A"/>
                 </a:solidFill>
@@ -34118,25 +35468,21 @@
               </a:defRPr>
             </a:pPr>
             <a:r>
-              <a:t>Bouneffouf et al.</a:t>
-            </a:r>
-            <a:br/>
-            <a:r>
-              <a:t>(2017)</a:t>
-            </a:r>
-          </a:p>
-        </p:txBody>
-      </p:sp>
-      <p:sp>
-        <p:nvSpPr>
-          <p:cNvPr id="19" name="Rectangle 18"/>
-          <p:cNvSpPr/>
-          <p:nvPr/>
-        </p:nvSpPr>
-        <p:spPr>
-          <a:xfrm>
-            <a:off x="6638544" y="1993392"/>
-            <a:ext cx="5010912" cy="630936"/>
+              <a:t>Expert overrides improve alignment; cost-benefit of referral</a:t>
+            </a:r>
+          </a:p>
+        </p:txBody>
+      </p:sp>
+      <p:sp>
+        <p:nvSpPr>
+          <p:cNvPr id="29" name="Rectangle 28"/>
+          <p:cNvSpPr/>
+          <p:nvPr/>
+        </p:nvSpPr>
+        <p:spPr>
+          <a:xfrm>
+            <a:off x="457200" y="6272784"/>
+            <a:ext cx="11277295" cy="329184"/>
           </a:xfrm>
           <a:prstGeom prst="rect">
             <a:avLst/>
@@ -34166,1475 +35512,15 @@
           <a:lstStyle/>
           <a:p>
             <a:pPr algn="l">
-              <a:defRPr sz="1100" b="0" i="0">
-                <a:solidFill>
-                  <a:srgbClr val="1A1A1A"/>
-                </a:solidFill>
-                <a:latin typeface="Calibri"/>
-              </a:defRPr>
-            </a:pPr>
-            <a:r>
-              <a:t>Clinical decision support via LinUCB; reward = patient outcome</a:t>
-            </a:r>
-          </a:p>
-        </p:txBody>
-      </p:sp>
-      <p:sp>
-        <p:nvSpPr>
-          <p:cNvPr id="20" name="Rectangle 19"/>
-          <p:cNvSpPr/>
-          <p:nvPr/>
-        </p:nvSpPr>
-        <p:spPr>
-          <a:xfrm>
-            <a:off x="457200" y="2660904"/>
-            <a:ext cx="2834640" cy="722376"/>
-          </a:xfrm>
-          <a:prstGeom prst="rect">
-            <a:avLst/>
-          </a:prstGeom>
-          <a:solidFill>
-            <a:srgbClr val="FFFFFF"/>
-          </a:solidFill>
-          <a:ln>
-            <a:noFill/>
-          </a:ln>
-          <a:effectLst/>
-        </p:spPr>
-        <p:style>
-          <a:lnRef idx="1">
-            <a:schemeClr val="accent1"/>
-          </a:lnRef>
-          <a:fillRef idx="3">
-            <a:schemeClr val="accent1"/>
-          </a:fillRef>
-          <a:effectRef idx="2">
-            <a:schemeClr val="accent1"/>
-          </a:effectRef>
-          <a:fontRef idx="minor">
-            <a:schemeClr val="lt1"/>
-          </a:fontRef>
-        </p:style>
-        <p:txBody>
-          <a:bodyPr rtlCol="0" anchor="ctr"/>
-          <a:lstStyle/>
-          <a:p>
-            <a:pPr algn="ctr"/>
-          </a:p>
-        </p:txBody>
-      </p:sp>
-      <p:sp>
-        <p:nvSpPr>
-          <p:cNvPr id="21" name="Rectangle 20"/>
-          <p:cNvSpPr/>
-          <p:nvPr/>
-        </p:nvSpPr>
-        <p:spPr>
-          <a:xfrm>
-            <a:off x="3337560" y="2660904"/>
-            <a:ext cx="3200400" cy="722376"/>
-          </a:xfrm>
-          <a:prstGeom prst="rect">
-            <a:avLst/>
-          </a:prstGeom>
-          <a:solidFill>
-            <a:srgbClr val="FFFFFF"/>
-          </a:solidFill>
-          <a:ln>
-            <a:noFill/>
-          </a:ln>
-          <a:effectLst/>
-        </p:spPr>
-        <p:style>
-          <a:lnRef idx="1">
-            <a:schemeClr val="accent1"/>
-          </a:lnRef>
-          <a:fillRef idx="3">
-            <a:schemeClr val="accent1"/>
-          </a:fillRef>
-          <a:effectRef idx="2">
-            <a:schemeClr val="accent1"/>
-          </a:effectRef>
-          <a:fontRef idx="minor">
-            <a:schemeClr val="lt1"/>
-          </a:fontRef>
-        </p:style>
-        <p:txBody>
-          <a:bodyPr rtlCol="0" anchor="ctr"/>
-          <a:lstStyle/>
-          <a:p>
-            <a:pPr algn="ctr"/>
-          </a:p>
-        </p:txBody>
-      </p:sp>
-      <p:sp>
-        <p:nvSpPr>
-          <p:cNvPr id="22" name="Rectangle 21"/>
-          <p:cNvSpPr/>
-          <p:nvPr/>
-        </p:nvSpPr>
-        <p:spPr>
-          <a:xfrm>
-            <a:off x="6583680" y="2660904"/>
-            <a:ext cx="5120640" cy="722376"/>
-          </a:xfrm>
-          <a:prstGeom prst="rect">
-            <a:avLst/>
-          </a:prstGeom>
-          <a:solidFill>
-            <a:srgbClr val="FFFFFF"/>
-          </a:solidFill>
-          <a:ln>
-            <a:noFill/>
-          </a:ln>
-          <a:effectLst/>
-        </p:spPr>
-        <p:style>
-          <a:lnRef idx="1">
-            <a:schemeClr val="accent1"/>
-          </a:lnRef>
-          <a:fillRef idx="3">
-            <a:schemeClr val="accent1"/>
-          </a:fillRef>
-          <a:effectRef idx="2">
-            <a:schemeClr val="accent1"/>
-          </a:effectRef>
-          <a:fontRef idx="minor">
-            <a:schemeClr val="lt1"/>
-          </a:fontRef>
-        </p:style>
-        <p:txBody>
-          <a:bodyPr rtlCol="0" anchor="ctr"/>
-          <a:lstStyle/>
-          <a:p>
-            <a:pPr algn="ctr"/>
-          </a:p>
-        </p:txBody>
-      </p:sp>
-      <p:sp>
-        <p:nvSpPr>
-          <p:cNvPr id="23" name="Rectangle 22"/>
-          <p:cNvSpPr/>
-          <p:nvPr/>
-        </p:nvSpPr>
-        <p:spPr>
-          <a:xfrm>
-            <a:off x="512064" y="2715768"/>
-            <a:ext cx="2724912" cy="630936"/>
-          </a:xfrm>
-          <a:prstGeom prst="rect">
-            <a:avLst/>
-          </a:prstGeom>
-          <a:noFill/>
-          <a:ln>
-            <a:noFill/>
-          </a:ln>
-          <a:effectLst/>
-        </p:spPr>
-        <p:style>
-          <a:lnRef idx="1">
-            <a:schemeClr val="accent1"/>
-          </a:lnRef>
-          <a:fillRef idx="3">
-            <a:schemeClr val="accent1"/>
-          </a:fillRef>
-          <a:effectRef idx="2">
-            <a:schemeClr val="accent1"/>
-          </a:effectRef>
-          <a:fontRef idx="minor">
-            <a:schemeClr val="lt1"/>
-          </a:fontRef>
-        </p:style>
-        <p:txBody>
-          <a:bodyPr rtlCol="0" anchor="t" wrap="square" lIns="45720" rIns="45720" tIns="18288" bIns="18288"/>
-          <a:lstStyle/>
-          <a:p>
-            <a:pPr algn="l">
-              <a:defRPr sz="1100" b="0" i="0">
-                <a:solidFill>
-                  <a:srgbClr val="1A1A1A"/>
-                </a:solidFill>
-                <a:latin typeface="Calibri"/>
-              </a:defRPr>
-            </a:pPr>
-            <a:r>
-              <a:t>LinUCB Theory</a:t>
-            </a:r>
-          </a:p>
-        </p:txBody>
-      </p:sp>
-      <p:sp>
-        <p:nvSpPr>
-          <p:cNvPr id="24" name="Rectangle 23"/>
-          <p:cNvSpPr/>
-          <p:nvPr/>
-        </p:nvSpPr>
-        <p:spPr>
-          <a:xfrm>
-            <a:off x="3392424" y="2715768"/>
-            <a:ext cx="3090672" cy="630936"/>
-          </a:xfrm>
-          <a:prstGeom prst="rect">
-            <a:avLst/>
-          </a:prstGeom>
-          <a:noFill/>
-          <a:ln>
-            <a:noFill/>
-          </a:ln>
-          <a:effectLst/>
-        </p:spPr>
-        <p:style>
-          <a:lnRef idx="1">
-            <a:schemeClr val="accent1"/>
-          </a:lnRef>
-          <a:fillRef idx="3">
-            <a:schemeClr val="accent1"/>
-          </a:fillRef>
-          <a:effectRef idx="2">
-            <a:schemeClr val="accent1"/>
-          </a:effectRef>
-          <a:fontRef idx="minor">
-            <a:schemeClr val="lt1"/>
-          </a:fontRef>
-        </p:style>
-        <p:txBody>
-          <a:bodyPr rtlCol="0" anchor="t" wrap="square" lIns="45720" rIns="45720" tIns="18288" bIns="18288"/>
-          <a:lstStyle/>
-          <a:p>
-            <a:pPr algn="l">
-              <a:defRPr sz="1100" b="0" i="0">
-                <a:solidFill>
-                  <a:srgbClr val="1A1A1A"/>
-                </a:solidFill>
-                <a:latin typeface="Calibri"/>
-              </a:defRPr>
-            </a:pPr>
-            <a:r>
-              <a:t>Li et al. (2010)</a:t>
-            </a:r>
-          </a:p>
-        </p:txBody>
-      </p:sp>
-      <p:sp>
-        <p:nvSpPr>
-          <p:cNvPr id="25" name="Rectangle 24"/>
-          <p:cNvSpPr/>
-          <p:nvPr/>
-        </p:nvSpPr>
-        <p:spPr>
-          <a:xfrm>
-            <a:off x="6638544" y="2715768"/>
-            <a:ext cx="5010912" cy="630936"/>
-          </a:xfrm>
-          <a:prstGeom prst="rect">
-            <a:avLst/>
-          </a:prstGeom>
-          <a:noFill/>
-          <a:ln>
-            <a:noFill/>
-          </a:ln>
-          <a:effectLst/>
-        </p:spPr>
-        <p:style>
-          <a:lnRef idx="1">
-            <a:schemeClr val="accent1"/>
-          </a:lnRef>
-          <a:fillRef idx="3">
-            <a:schemeClr val="accent1"/>
-          </a:fillRef>
-          <a:effectRef idx="2">
-            <a:schemeClr val="accent1"/>
-          </a:effectRef>
-          <a:fontRef idx="minor">
-            <a:schemeClr val="lt1"/>
-          </a:fontRef>
-        </p:style>
-        <p:txBody>
-          <a:bodyPr rtlCol="0" anchor="t" wrap="square" lIns="45720" rIns="45720" tIns="18288" bIns="18288"/>
-          <a:lstStyle/>
-          <a:p>
-            <a:pPr algn="l">
-              <a:defRPr sz="1100" b="0" i="0">
-                <a:solidFill>
-                  <a:srgbClr val="1A1A1A"/>
-                </a:solidFill>
-                <a:latin typeface="Calibri"/>
-              </a:defRPr>
-            </a:pPr>
-            <a:r>
-              <a:t>UCB exploration over linear model; O(√T·d·log T) regret bound</a:t>
-            </a:r>
-          </a:p>
-        </p:txBody>
-      </p:sp>
-      <p:sp>
-        <p:nvSpPr>
-          <p:cNvPr id="26" name="Rectangle 25"/>
-          <p:cNvSpPr/>
-          <p:nvPr/>
-        </p:nvSpPr>
-        <p:spPr>
-          <a:xfrm>
-            <a:off x="457200" y="3383280"/>
-            <a:ext cx="2834640" cy="722376"/>
-          </a:xfrm>
-          <a:prstGeom prst="rect">
-            <a:avLst/>
-          </a:prstGeom>
-          <a:solidFill>
-            <a:srgbClr val="F2EEEF"/>
-          </a:solidFill>
-          <a:ln>
-            <a:noFill/>
-          </a:ln>
-          <a:effectLst/>
-        </p:spPr>
-        <p:style>
-          <a:lnRef idx="1">
-            <a:schemeClr val="accent1"/>
-          </a:lnRef>
-          <a:fillRef idx="3">
-            <a:schemeClr val="accent1"/>
-          </a:fillRef>
-          <a:effectRef idx="2">
-            <a:schemeClr val="accent1"/>
-          </a:effectRef>
-          <a:fontRef idx="minor">
-            <a:schemeClr val="lt1"/>
-          </a:fontRef>
-        </p:style>
-        <p:txBody>
-          <a:bodyPr rtlCol="0" anchor="ctr"/>
-          <a:lstStyle/>
-          <a:p>
-            <a:pPr algn="ctr"/>
-          </a:p>
-        </p:txBody>
-      </p:sp>
-      <p:sp>
-        <p:nvSpPr>
-          <p:cNvPr id="27" name="Rectangle 26"/>
-          <p:cNvSpPr/>
-          <p:nvPr/>
-        </p:nvSpPr>
-        <p:spPr>
-          <a:xfrm>
-            <a:off x="3337560" y="3383280"/>
-            <a:ext cx="3200400" cy="722376"/>
-          </a:xfrm>
-          <a:prstGeom prst="rect">
-            <a:avLst/>
-          </a:prstGeom>
-          <a:solidFill>
-            <a:srgbClr val="F2EEEF"/>
-          </a:solidFill>
-          <a:ln>
-            <a:noFill/>
-          </a:ln>
-          <a:effectLst/>
-        </p:spPr>
-        <p:style>
-          <a:lnRef idx="1">
-            <a:schemeClr val="accent1"/>
-          </a:lnRef>
-          <a:fillRef idx="3">
-            <a:schemeClr val="accent1"/>
-          </a:fillRef>
-          <a:effectRef idx="2">
-            <a:schemeClr val="accent1"/>
-          </a:effectRef>
-          <a:fontRef idx="minor">
-            <a:schemeClr val="lt1"/>
-          </a:fontRef>
-        </p:style>
-        <p:txBody>
-          <a:bodyPr rtlCol="0" anchor="ctr"/>
-          <a:lstStyle/>
-          <a:p>
-            <a:pPr algn="ctr"/>
-          </a:p>
-        </p:txBody>
-      </p:sp>
-      <p:sp>
-        <p:nvSpPr>
-          <p:cNvPr id="28" name="Rectangle 27"/>
-          <p:cNvSpPr/>
-          <p:nvPr/>
-        </p:nvSpPr>
-        <p:spPr>
-          <a:xfrm>
-            <a:off x="6583680" y="3383280"/>
-            <a:ext cx="5120640" cy="722376"/>
-          </a:xfrm>
-          <a:prstGeom prst="rect">
-            <a:avLst/>
-          </a:prstGeom>
-          <a:solidFill>
-            <a:srgbClr val="F2EEEF"/>
-          </a:solidFill>
-          <a:ln>
-            <a:noFill/>
-          </a:ln>
-          <a:effectLst/>
-        </p:spPr>
-        <p:style>
-          <a:lnRef idx="1">
-            <a:schemeClr val="accent1"/>
-          </a:lnRef>
-          <a:fillRef idx="3">
-            <a:schemeClr val="accent1"/>
-          </a:fillRef>
-          <a:effectRef idx="2">
-            <a:schemeClr val="accent1"/>
-          </a:effectRef>
-          <a:fontRef idx="minor">
-            <a:schemeClr val="lt1"/>
-          </a:fontRef>
-        </p:style>
-        <p:txBody>
-          <a:bodyPr rtlCol="0" anchor="ctr"/>
-          <a:lstStyle/>
-          <a:p>
-            <a:pPr algn="ctr"/>
-          </a:p>
-        </p:txBody>
-      </p:sp>
-      <p:sp>
-        <p:nvSpPr>
-          <p:cNvPr id="29" name="Rectangle 28"/>
-          <p:cNvSpPr/>
-          <p:nvPr/>
-        </p:nvSpPr>
-        <p:spPr>
-          <a:xfrm>
-            <a:off x="512064" y="3438144"/>
-            <a:ext cx="2724912" cy="630936"/>
-          </a:xfrm>
-          <a:prstGeom prst="rect">
-            <a:avLst/>
-          </a:prstGeom>
-          <a:noFill/>
-          <a:ln>
-            <a:noFill/>
-          </a:ln>
-          <a:effectLst/>
-        </p:spPr>
-        <p:style>
-          <a:lnRef idx="1">
-            <a:schemeClr val="accent1"/>
-          </a:lnRef>
-          <a:fillRef idx="3">
-            <a:schemeClr val="accent1"/>
-          </a:fillRef>
-          <a:effectRef idx="2">
-            <a:schemeClr val="accent1"/>
-          </a:effectRef>
-          <a:fontRef idx="minor">
-            <a:schemeClr val="lt1"/>
-          </a:fontRef>
-        </p:style>
-        <p:txBody>
-          <a:bodyPr rtlCol="0" anchor="t" wrap="square" lIns="45720" rIns="45720" tIns="18288" bIns="18288"/>
-          <a:lstStyle/>
-          <a:p>
-            <a:pPr algn="l">
-              <a:defRPr sz="1100" b="0" i="0">
-                <a:solidFill>
-                  <a:srgbClr val="1A1A1A"/>
-                </a:solidFill>
-                <a:latin typeface="Calibri"/>
-              </a:defRPr>
-            </a:pPr>
-            <a:r>
-              <a:t>LinTS</a:t>
-            </a:r>
-            <a:br/>
-            <a:r>
-              <a:t>(Thompson Sampling)</a:t>
-            </a:r>
-          </a:p>
-        </p:txBody>
-      </p:sp>
-      <p:sp>
-        <p:nvSpPr>
-          <p:cNvPr id="30" name="Rectangle 29"/>
-          <p:cNvSpPr/>
-          <p:nvPr/>
-        </p:nvSpPr>
-        <p:spPr>
-          <a:xfrm>
-            <a:off x="3392424" y="3438144"/>
-            <a:ext cx="3090672" cy="630936"/>
-          </a:xfrm>
-          <a:prstGeom prst="rect">
-            <a:avLst/>
-          </a:prstGeom>
-          <a:noFill/>
-          <a:ln>
-            <a:noFill/>
-          </a:ln>
-          <a:effectLst/>
-        </p:spPr>
-        <p:style>
-          <a:lnRef idx="1">
-            <a:schemeClr val="accent1"/>
-          </a:lnRef>
-          <a:fillRef idx="3">
-            <a:schemeClr val="accent1"/>
-          </a:fillRef>
-          <a:effectRef idx="2">
-            <a:schemeClr val="accent1"/>
-          </a:effectRef>
-          <a:fontRef idx="minor">
-            <a:schemeClr val="lt1"/>
-          </a:fontRef>
-        </p:style>
-        <p:txBody>
-          <a:bodyPr rtlCol="0" anchor="t" wrap="square" lIns="45720" rIns="45720" tIns="18288" bIns="18288"/>
-          <a:lstStyle/>
-          <a:p>
-            <a:pPr algn="l">
-              <a:defRPr sz="1100" b="0" i="0">
-                <a:solidFill>
-                  <a:srgbClr val="1A1A1A"/>
-                </a:solidFill>
-                <a:latin typeface="Calibri"/>
-              </a:defRPr>
-            </a:pPr>
-            <a:r>
-              <a:t>Agrawal &amp; Goyal</a:t>
-            </a:r>
-            <a:br/>
-            <a:r>
-              <a:t>(2013)</a:t>
-            </a:r>
-          </a:p>
-        </p:txBody>
-      </p:sp>
-      <p:sp>
-        <p:nvSpPr>
-          <p:cNvPr id="31" name="Rectangle 30"/>
-          <p:cNvSpPr/>
-          <p:nvPr/>
-        </p:nvSpPr>
-        <p:spPr>
-          <a:xfrm>
-            <a:off x="6638544" y="3438144"/>
-            <a:ext cx="5010912" cy="630936"/>
-          </a:xfrm>
-          <a:prstGeom prst="rect">
-            <a:avLst/>
-          </a:prstGeom>
-          <a:noFill/>
-          <a:ln>
-            <a:noFill/>
-          </a:ln>
-          <a:effectLst/>
-        </p:spPr>
-        <p:style>
-          <a:lnRef idx="1">
-            <a:schemeClr val="accent1"/>
-          </a:lnRef>
-          <a:fillRef idx="3">
-            <a:schemeClr val="accent1"/>
-          </a:fillRef>
-          <a:effectRef idx="2">
-            <a:schemeClr val="accent1"/>
-          </a:effectRef>
-          <a:fontRef idx="minor">
-            <a:schemeClr val="lt1"/>
-          </a:fontRef>
-        </p:style>
-        <p:txBody>
-          <a:bodyPr rtlCol="0" anchor="t" wrap="square" lIns="45720" rIns="45720" tIns="18288" bIns="18288"/>
-          <a:lstStyle/>
-          <a:p>
-            <a:pPr algn="l">
-              <a:defRPr sz="1100" b="0" i="0">
-                <a:solidFill>
-                  <a:srgbClr val="1A1A1A"/>
-                </a:solidFill>
-                <a:latin typeface="Calibri"/>
-              </a:defRPr>
-            </a:pPr>
-            <a:r>
-              <a:t>Posterior sampling achieves near-optimal regret; robust exploration</a:t>
-            </a:r>
-          </a:p>
-        </p:txBody>
-      </p:sp>
-      <p:sp>
-        <p:nvSpPr>
-          <p:cNvPr id="32" name="Rectangle 31"/>
-          <p:cNvSpPr/>
-          <p:nvPr/>
-        </p:nvSpPr>
-        <p:spPr>
-          <a:xfrm>
-            <a:off x="457200" y="4105656"/>
-            <a:ext cx="2834640" cy="722376"/>
-          </a:xfrm>
-          <a:prstGeom prst="rect">
-            <a:avLst/>
-          </a:prstGeom>
-          <a:solidFill>
-            <a:srgbClr val="FFFFFF"/>
-          </a:solidFill>
-          <a:ln>
-            <a:noFill/>
-          </a:ln>
-          <a:effectLst/>
-        </p:spPr>
-        <p:style>
-          <a:lnRef idx="1">
-            <a:schemeClr val="accent1"/>
-          </a:lnRef>
-          <a:fillRef idx="3">
-            <a:schemeClr val="accent1"/>
-          </a:fillRef>
-          <a:effectRef idx="2">
-            <a:schemeClr val="accent1"/>
-          </a:effectRef>
-          <a:fontRef idx="minor">
-            <a:schemeClr val="lt1"/>
-          </a:fontRef>
-        </p:style>
-        <p:txBody>
-          <a:bodyPr rtlCol="0" anchor="ctr"/>
-          <a:lstStyle/>
-          <a:p>
-            <a:pPr algn="ctr"/>
-          </a:p>
-        </p:txBody>
-      </p:sp>
-      <p:sp>
-        <p:nvSpPr>
-          <p:cNvPr id="33" name="Rectangle 32"/>
-          <p:cNvSpPr/>
-          <p:nvPr/>
-        </p:nvSpPr>
-        <p:spPr>
-          <a:xfrm>
-            <a:off x="3337560" y="4105656"/>
-            <a:ext cx="3200400" cy="722376"/>
-          </a:xfrm>
-          <a:prstGeom prst="rect">
-            <a:avLst/>
-          </a:prstGeom>
-          <a:solidFill>
-            <a:srgbClr val="FFFFFF"/>
-          </a:solidFill>
-          <a:ln>
-            <a:noFill/>
-          </a:ln>
-          <a:effectLst/>
-        </p:spPr>
-        <p:style>
-          <a:lnRef idx="1">
-            <a:schemeClr val="accent1"/>
-          </a:lnRef>
-          <a:fillRef idx="3">
-            <a:schemeClr val="accent1"/>
-          </a:fillRef>
-          <a:effectRef idx="2">
-            <a:schemeClr val="accent1"/>
-          </a:effectRef>
-          <a:fontRef idx="minor">
-            <a:schemeClr val="lt1"/>
-          </a:fontRef>
-        </p:style>
-        <p:txBody>
-          <a:bodyPr rtlCol="0" anchor="ctr"/>
-          <a:lstStyle/>
-          <a:p>
-            <a:pPr algn="ctr"/>
-          </a:p>
-        </p:txBody>
-      </p:sp>
-      <p:sp>
-        <p:nvSpPr>
-          <p:cNvPr id="34" name="Rectangle 33"/>
-          <p:cNvSpPr/>
-          <p:nvPr/>
-        </p:nvSpPr>
-        <p:spPr>
-          <a:xfrm>
-            <a:off x="6583680" y="4105656"/>
-            <a:ext cx="5120640" cy="722376"/>
-          </a:xfrm>
-          <a:prstGeom prst="rect">
-            <a:avLst/>
-          </a:prstGeom>
-          <a:solidFill>
-            <a:srgbClr val="FFFFFF"/>
-          </a:solidFill>
-          <a:ln>
-            <a:noFill/>
-          </a:ln>
-          <a:effectLst/>
-        </p:spPr>
-        <p:style>
-          <a:lnRef idx="1">
-            <a:schemeClr val="accent1"/>
-          </a:lnRef>
-          <a:fillRef idx="3">
-            <a:schemeClr val="accent1"/>
-          </a:fillRef>
-          <a:effectRef idx="2">
-            <a:schemeClr val="accent1"/>
-          </a:effectRef>
-          <a:fontRef idx="minor">
-            <a:schemeClr val="lt1"/>
-          </a:fontRef>
-        </p:style>
-        <p:txBody>
-          <a:bodyPr rtlCol="0" anchor="ctr"/>
-          <a:lstStyle/>
-          <a:p>
-            <a:pPr algn="ctr"/>
-          </a:p>
-        </p:txBody>
-      </p:sp>
-      <p:sp>
-        <p:nvSpPr>
-          <p:cNvPr id="35" name="Rectangle 34"/>
-          <p:cNvSpPr/>
-          <p:nvPr/>
-        </p:nvSpPr>
-        <p:spPr>
-          <a:xfrm>
-            <a:off x="512064" y="4160520"/>
-            <a:ext cx="2724912" cy="630936"/>
-          </a:xfrm>
-          <a:prstGeom prst="rect">
-            <a:avLst/>
-          </a:prstGeom>
-          <a:noFill/>
-          <a:ln>
-            <a:noFill/>
-          </a:ln>
-          <a:effectLst/>
-        </p:spPr>
-        <p:style>
-          <a:lnRef idx="1">
-            <a:schemeClr val="accent1"/>
-          </a:lnRef>
-          <a:fillRef idx="3">
-            <a:schemeClr val="accent1"/>
-          </a:fillRef>
-          <a:effectRef idx="2">
-            <a:schemeClr val="accent1"/>
-          </a:effectRef>
-          <a:fontRef idx="minor">
-            <a:schemeClr val="lt1"/>
-          </a:fontRef>
-        </p:style>
-        <p:txBody>
-          <a:bodyPr rtlCol="0" anchor="t" wrap="square" lIns="45720" rIns="45720" tIns="18288" bIns="18288"/>
-          <a:lstStyle/>
-          <a:p>
-            <a:pPr algn="l">
-              <a:defRPr sz="1100" b="0" i="0">
-                <a:solidFill>
-                  <a:srgbClr val="1A1A1A"/>
-                </a:solidFill>
-                <a:latin typeface="Calibri"/>
-              </a:defRPr>
-            </a:pPr>
-            <a:r>
-              <a:t>Fairness in</a:t>
-            </a:r>
-            <a:br/>
-            <a:r>
-              <a:t>Insurance ML</a:t>
-            </a:r>
-          </a:p>
-        </p:txBody>
-      </p:sp>
-      <p:sp>
-        <p:nvSpPr>
-          <p:cNvPr id="36" name="Rectangle 35"/>
-          <p:cNvSpPr/>
-          <p:nvPr/>
-        </p:nvSpPr>
-        <p:spPr>
-          <a:xfrm>
-            <a:off x="3392424" y="4160520"/>
-            <a:ext cx="3090672" cy="630936"/>
-          </a:xfrm>
-          <a:prstGeom prst="rect">
-            <a:avLst/>
-          </a:prstGeom>
-          <a:noFill/>
-          <a:ln>
-            <a:noFill/>
-          </a:ln>
-          <a:effectLst/>
-        </p:spPr>
-        <p:style>
-          <a:lnRef idx="1">
-            <a:schemeClr val="accent1"/>
-          </a:lnRef>
-          <a:fillRef idx="3">
-            <a:schemeClr val="accent1"/>
-          </a:fillRef>
-          <a:effectRef idx="2">
-            <a:schemeClr val="accent1"/>
-          </a:effectRef>
-          <a:fontRef idx="minor">
-            <a:schemeClr val="lt1"/>
-          </a:fontRef>
-        </p:style>
-        <p:txBody>
-          <a:bodyPr rtlCol="0" anchor="t" wrap="square" lIns="45720" rIns="45720" tIns="18288" bIns="18288"/>
-          <a:lstStyle/>
-          <a:p>
-            <a:pPr algn="l">
-              <a:defRPr sz="1100" b="0" i="0">
-                <a:solidFill>
-                  <a:srgbClr val="1A1A1A"/>
-                </a:solidFill>
-                <a:latin typeface="Calibri"/>
-              </a:defRPr>
-            </a:pPr>
-            <a:r>
-              <a:t>Frees et al. (2014);</a:t>
-            </a:r>
-            <a:br/>
-            <a:r>
-              <a:t>Kusner et al. (2017)</a:t>
-            </a:r>
-          </a:p>
-        </p:txBody>
-      </p:sp>
-      <p:sp>
-        <p:nvSpPr>
-          <p:cNvPr id="37" name="Rectangle 36"/>
-          <p:cNvSpPr/>
-          <p:nvPr/>
-        </p:nvSpPr>
-        <p:spPr>
-          <a:xfrm>
-            <a:off x="6638544" y="4160520"/>
-            <a:ext cx="5010912" cy="630936"/>
-          </a:xfrm>
-          <a:prstGeom prst="rect">
-            <a:avLst/>
-          </a:prstGeom>
-          <a:noFill/>
-          <a:ln>
-            <a:noFill/>
-          </a:ln>
-          <a:effectLst/>
-        </p:spPr>
-        <p:style>
-          <a:lnRef idx="1">
-            <a:schemeClr val="accent1"/>
-          </a:lnRef>
-          <a:fillRef idx="3">
-            <a:schemeClr val="accent1"/>
-          </a:fillRef>
-          <a:effectRef idx="2">
-            <a:schemeClr val="accent1"/>
-          </a:effectRef>
-          <a:fontRef idx="minor">
-            <a:schemeClr val="lt1"/>
-          </a:fontRef>
-        </p:style>
-        <p:txBody>
-          <a:bodyPr rtlCol="0" anchor="t" wrap="square" lIns="45720" rIns="45720" tIns="18288" bIns="18288"/>
-          <a:lstStyle/>
-          <a:p>
-            <a:pPr algn="l">
-              <a:defRPr sz="1100" b="0" i="0">
-                <a:solidFill>
-                  <a:srgbClr val="1A1A1A"/>
-                </a:solidFill>
-                <a:latin typeface="Calibri"/>
-              </a:defRPr>
-            </a:pPr>
-            <a:r>
-              <a:t>Regulatory constraints on protected attributes; counterfactual fairness</a:t>
-            </a:r>
-          </a:p>
-        </p:txBody>
-      </p:sp>
-      <p:sp>
-        <p:nvSpPr>
-          <p:cNvPr id="38" name="Rectangle 37"/>
-          <p:cNvSpPr/>
-          <p:nvPr/>
-        </p:nvSpPr>
-        <p:spPr>
-          <a:xfrm>
-            <a:off x="457200" y="4828032"/>
-            <a:ext cx="2834640" cy="722376"/>
-          </a:xfrm>
-          <a:prstGeom prst="rect">
-            <a:avLst/>
-          </a:prstGeom>
-          <a:solidFill>
-            <a:srgbClr val="F2EEEF"/>
-          </a:solidFill>
-          <a:ln>
-            <a:noFill/>
-          </a:ln>
-          <a:effectLst/>
-        </p:spPr>
-        <p:style>
-          <a:lnRef idx="1">
-            <a:schemeClr val="accent1"/>
-          </a:lnRef>
-          <a:fillRef idx="3">
-            <a:schemeClr val="accent1"/>
-          </a:fillRef>
-          <a:effectRef idx="2">
-            <a:schemeClr val="accent1"/>
-          </a:effectRef>
-          <a:fontRef idx="minor">
-            <a:schemeClr val="lt1"/>
-          </a:fontRef>
-        </p:style>
-        <p:txBody>
-          <a:bodyPr rtlCol="0" anchor="ctr"/>
-          <a:lstStyle/>
-          <a:p>
-            <a:pPr algn="ctr"/>
-          </a:p>
-        </p:txBody>
-      </p:sp>
-      <p:sp>
-        <p:nvSpPr>
-          <p:cNvPr id="39" name="Rectangle 38"/>
-          <p:cNvSpPr/>
-          <p:nvPr/>
-        </p:nvSpPr>
-        <p:spPr>
-          <a:xfrm>
-            <a:off x="3337560" y="4828032"/>
-            <a:ext cx="3200400" cy="722376"/>
-          </a:xfrm>
-          <a:prstGeom prst="rect">
-            <a:avLst/>
-          </a:prstGeom>
-          <a:solidFill>
-            <a:srgbClr val="F2EEEF"/>
-          </a:solidFill>
-          <a:ln>
-            <a:noFill/>
-          </a:ln>
-          <a:effectLst/>
-        </p:spPr>
-        <p:style>
-          <a:lnRef idx="1">
-            <a:schemeClr val="accent1"/>
-          </a:lnRef>
-          <a:fillRef idx="3">
-            <a:schemeClr val="accent1"/>
-          </a:fillRef>
-          <a:effectRef idx="2">
-            <a:schemeClr val="accent1"/>
-          </a:effectRef>
-          <a:fontRef idx="minor">
-            <a:schemeClr val="lt1"/>
-          </a:fontRef>
-        </p:style>
-        <p:txBody>
-          <a:bodyPr rtlCol="0" anchor="ctr"/>
-          <a:lstStyle/>
-          <a:p>
-            <a:pPr algn="ctr"/>
-          </a:p>
-        </p:txBody>
-      </p:sp>
-      <p:sp>
-        <p:nvSpPr>
-          <p:cNvPr id="40" name="Rectangle 39"/>
-          <p:cNvSpPr/>
-          <p:nvPr/>
-        </p:nvSpPr>
-        <p:spPr>
-          <a:xfrm>
-            <a:off x="6583680" y="4828032"/>
-            <a:ext cx="5120640" cy="722376"/>
-          </a:xfrm>
-          <a:prstGeom prst="rect">
-            <a:avLst/>
-          </a:prstGeom>
-          <a:solidFill>
-            <a:srgbClr val="F2EEEF"/>
-          </a:solidFill>
-          <a:ln>
-            <a:noFill/>
-          </a:ln>
-          <a:effectLst/>
-        </p:spPr>
-        <p:style>
-          <a:lnRef idx="1">
-            <a:schemeClr val="accent1"/>
-          </a:lnRef>
-          <a:fillRef idx="3">
-            <a:schemeClr val="accent1"/>
-          </a:fillRef>
-          <a:effectRef idx="2">
-            <a:schemeClr val="accent1"/>
-          </a:effectRef>
-          <a:fontRef idx="minor">
-            <a:schemeClr val="lt1"/>
-          </a:fontRef>
-        </p:style>
-        <p:txBody>
-          <a:bodyPr rtlCol="0" anchor="ctr"/>
-          <a:lstStyle/>
-          <a:p>
-            <a:pPr algn="ctr"/>
-          </a:p>
-        </p:txBody>
-      </p:sp>
-      <p:sp>
-        <p:nvSpPr>
-          <p:cNvPr id="41" name="Rectangle 40"/>
-          <p:cNvSpPr/>
-          <p:nvPr/>
-        </p:nvSpPr>
-        <p:spPr>
-          <a:xfrm>
-            <a:off x="512064" y="4882896"/>
-            <a:ext cx="2724912" cy="630936"/>
-          </a:xfrm>
-          <a:prstGeom prst="rect">
-            <a:avLst/>
-          </a:prstGeom>
-          <a:noFill/>
-          <a:ln>
-            <a:noFill/>
-          </a:ln>
-          <a:effectLst/>
-        </p:spPr>
-        <p:style>
-          <a:lnRef idx="1">
-            <a:schemeClr val="accent1"/>
-          </a:lnRef>
-          <a:fillRef idx="3">
-            <a:schemeClr val="accent1"/>
-          </a:fillRef>
-          <a:effectRef idx="2">
-            <a:schemeClr val="accent1"/>
-          </a:effectRef>
-          <a:fontRef idx="minor">
-            <a:schemeClr val="lt1"/>
-          </a:fontRef>
-        </p:style>
-        <p:txBody>
-          <a:bodyPr rtlCol="0" anchor="t" wrap="square" lIns="45720" rIns="45720" tIns="18288" bIns="18288"/>
-          <a:lstStyle/>
-          <a:p>
-            <a:pPr algn="l">
-              <a:defRPr sz="1100" b="0" i="0">
-                <a:solidFill>
-                  <a:srgbClr val="1A1A1A"/>
-                </a:solidFill>
-                <a:latin typeface="Calibri"/>
-              </a:defRPr>
-            </a:pPr>
-            <a:r>
-              <a:t>PSI Model Monitoring</a:t>
-            </a:r>
-          </a:p>
-        </p:txBody>
-      </p:sp>
-      <p:sp>
-        <p:nvSpPr>
-          <p:cNvPr id="42" name="Rectangle 41"/>
-          <p:cNvSpPr/>
-          <p:nvPr/>
-        </p:nvSpPr>
-        <p:spPr>
-          <a:xfrm>
-            <a:off x="3392424" y="4882896"/>
-            <a:ext cx="3090672" cy="630936"/>
-          </a:xfrm>
-          <a:prstGeom prst="rect">
-            <a:avLst/>
-          </a:prstGeom>
-          <a:noFill/>
-          <a:ln>
-            <a:noFill/>
-          </a:ln>
-          <a:effectLst/>
-        </p:spPr>
-        <p:style>
-          <a:lnRef idx="1">
-            <a:schemeClr val="accent1"/>
-          </a:lnRef>
-          <a:fillRef idx="3">
-            <a:schemeClr val="accent1"/>
-          </a:fillRef>
-          <a:effectRef idx="2">
-            <a:schemeClr val="accent1"/>
-          </a:effectRef>
-          <a:fontRef idx="minor">
-            <a:schemeClr val="lt1"/>
-          </a:fontRef>
-        </p:style>
-        <p:txBody>
-          <a:bodyPr rtlCol="0" anchor="t" wrap="square" lIns="45720" rIns="45720" tIns="18288" bIns="18288"/>
-          <a:lstStyle/>
-          <a:p>
-            <a:pPr algn="l">
-              <a:defRPr sz="1100" b="0" i="0">
-                <a:solidFill>
-                  <a:srgbClr val="1A1A1A"/>
-                </a:solidFill>
-                <a:latin typeface="Calibri"/>
-              </a:defRPr>
-            </a:pPr>
-            <a:r>
-              <a:t>Yurdakul (2018)</a:t>
-            </a:r>
-          </a:p>
-        </p:txBody>
-      </p:sp>
-      <p:sp>
-        <p:nvSpPr>
-          <p:cNvPr id="43" name="Rectangle 42"/>
-          <p:cNvSpPr/>
-          <p:nvPr/>
-        </p:nvSpPr>
-        <p:spPr>
-          <a:xfrm>
-            <a:off x="6638544" y="4882896"/>
-            <a:ext cx="5010912" cy="630936"/>
-          </a:xfrm>
-          <a:prstGeom prst="rect">
-            <a:avLst/>
-          </a:prstGeom>
-          <a:noFill/>
-          <a:ln>
-            <a:noFill/>
-          </a:ln>
-          <a:effectLst/>
-        </p:spPr>
-        <p:style>
-          <a:lnRef idx="1">
-            <a:schemeClr val="accent1"/>
-          </a:lnRef>
-          <a:fillRef idx="3">
-            <a:schemeClr val="accent1"/>
-          </a:fillRef>
-          <a:effectRef idx="2">
-            <a:schemeClr val="accent1"/>
-          </a:effectRef>
-          <a:fontRef idx="minor">
-            <a:schemeClr val="lt1"/>
-          </a:fontRef>
-        </p:style>
-        <p:txBody>
-          <a:bodyPr rtlCol="0" anchor="t" wrap="square" lIns="45720" rIns="45720" tIns="18288" bIns="18288"/>
-          <a:lstStyle/>
-          <a:p>
-            <a:pPr algn="l">
-              <a:defRPr sz="1100" b="0" i="0">
-                <a:solidFill>
-                  <a:srgbClr val="1A1A1A"/>
-                </a:solidFill>
-                <a:latin typeface="Calibri"/>
-              </a:defRPr>
-            </a:pPr>
-            <a:r>
-              <a:t>Population Stability Index detects distribution shift; GREEN/AMBER/RED zones</a:t>
-            </a:r>
-          </a:p>
-        </p:txBody>
-      </p:sp>
-      <p:sp>
-        <p:nvSpPr>
-          <p:cNvPr id="44" name="Rectangle 43"/>
-          <p:cNvSpPr/>
-          <p:nvPr/>
-        </p:nvSpPr>
-        <p:spPr>
-          <a:xfrm>
-            <a:off x="457200" y="5550408"/>
-            <a:ext cx="2834640" cy="722376"/>
-          </a:xfrm>
-          <a:prstGeom prst="rect">
-            <a:avLst/>
-          </a:prstGeom>
-          <a:solidFill>
-            <a:srgbClr val="FFFFFF"/>
-          </a:solidFill>
-          <a:ln>
-            <a:noFill/>
-          </a:ln>
-          <a:effectLst/>
-        </p:spPr>
-        <p:style>
-          <a:lnRef idx="1">
-            <a:schemeClr val="accent1"/>
-          </a:lnRef>
-          <a:fillRef idx="3">
-            <a:schemeClr val="accent1"/>
-          </a:fillRef>
-          <a:effectRef idx="2">
-            <a:schemeClr val="accent1"/>
-          </a:effectRef>
-          <a:fontRef idx="minor">
-            <a:schemeClr val="lt1"/>
-          </a:fontRef>
-        </p:style>
-        <p:txBody>
-          <a:bodyPr rtlCol="0" anchor="ctr"/>
-          <a:lstStyle/>
-          <a:p>
-            <a:pPr algn="ctr"/>
-          </a:p>
-        </p:txBody>
-      </p:sp>
-      <p:sp>
-        <p:nvSpPr>
-          <p:cNvPr id="45" name="Rectangle 44"/>
-          <p:cNvSpPr/>
-          <p:nvPr/>
-        </p:nvSpPr>
-        <p:spPr>
-          <a:xfrm>
-            <a:off x="3337560" y="5550408"/>
-            <a:ext cx="3200400" cy="722376"/>
-          </a:xfrm>
-          <a:prstGeom prst="rect">
-            <a:avLst/>
-          </a:prstGeom>
-          <a:solidFill>
-            <a:srgbClr val="FFFFFF"/>
-          </a:solidFill>
-          <a:ln>
-            <a:noFill/>
-          </a:ln>
-          <a:effectLst/>
-        </p:spPr>
-        <p:style>
-          <a:lnRef idx="1">
-            <a:schemeClr val="accent1"/>
-          </a:lnRef>
-          <a:fillRef idx="3">
-            <a:schemeClr val="accent1"/>
-          </a:fillRef>
-          <a:effectRef idx="2">
-            <a:schemeClr val="accent1"/>
-          </a:effectRef>
-          <a:fontRef idx="minor">
-            <a:schemeClr val="lt1"/>
-          </a:fontRef>
-        </p:style>
-        <p:txBody>
-          <a:bodyPr rtlCol="0" anchor="ctr"/>
-          <a:lstStyle/>
-          <a:p>
-            <a:pPr algn="ctr"/>
-          </a:p>
-        </p:txBody>
-      </p:sp>
-      <p:sp>
-        <p:nvSpPr>
-          <p:cNvPr id="46" name="Rectangle 45"/>
-          <p:cNvSpPr/>
-          <p:nvPr/>
-        </p:nvSpPr>
-        <p:spPr>
-          <a:xfrm>
-            <a:off x="6583680" y="5550408"/>
-            <a:ext cx="5120640" cy="722376"/>
-          </a:xfrm>
-          <a:prstGeom prst="rect">
-            <a:avLst/>
-          </a:prstGeom>
-          <a:solidFill>
-            <a:srgbClr val="FFFFFF"/>
-          </a:solidFill>
-          <a:ln>
-            <a:noFill/>
-          </a:ln>
-          <a:effectLst/>
-        </p:spPr>
-        <p:style>
-          <a:lnRef idx="1">
-            <a:schemeClr val="accent1"/>
-          </a:lnRef>
-          <a:fillRef idx="3">
-            <a:schemeClr val="accent1"/>
-          </a:fillRef>
-          <a:effectRef idx="2">
-            <a:schemeClr val="accent1"/>
-          </a:effectRef>
-          <a:fontRef idx="minor">
-            <a:schemeClr val="lt1"/>
-          </a:fontRef>
-        </p:style>
-        <p:txBody>
-          <a:bodyPr rtlCol="0" anchor="ctr"/>
-          <a:lstStyle/>
-          <a:p>
-            <a:pPr algn="ctr"/>
-          </a:p>
-        </p:txBody>
-      </p:sp>
-      <p:sp>
-        <p:nvSpPr>
-          <p:cNvPr id="47" name="Rectangle 46"/>
-          <p:cNvSpPr/>
-          <p:nvPr/>
-        </p:nvSpPr>
-        <p:spPr>
-          <a:xfrm>
-            <a:off x="512064" y="5605272"/>
-            <a:ext cx="2724912" cy="630936"/>
-          </a:xfrm>
-          <a:prstGeom prst="rect">
-            <a:avLst/>
-          </a:prstGeom>
-          <a:noFill/>
-          <a:ln>
-            <a:noFill/>
-          </a:ln>
-          <a:effectLst/>
-        </p:spPr>
-        <p:style>
-          <a:lnRef idx="1">
-            <a:schemeClr val="accent1"/>
-          </a:lnRef>
-          <a:fillRef idx="3">
-            <a:schemeClr val="accent1"/>
-          </a:fillRef>
-          <a:effectRef idx="2">
-            <a:schemeClr val="accent1"/>
-          </a:effectRef>
-          <a:fontRef idx="minor">
-            <a:schemeClr val="lt1"/>
-          </a:fontRef>
-        </p:style>
-        <p:txBody>
-          <a:bodyPr rtlCol="0" anchor="t" wrap="square" lIns="45720" rIns="45720" tIns="18288" bIns="18288"/>
-          <a:lstStyle/>
-          <a:p>
-            <a:pPr algn="l">
-              <a:defRPr sz="1100" b="0" i="0">
-                <a:solidFill>
-                  <a:srgbClr val="1A1A1A"/>
-                </a:solidFill>
-                <a:latin typeface="Calibri"/>
-              </a:defRPr>
-            </a:pPr>
-            <a:r>
-              <a:t>Human-in-the-loop RL</a:t>
-            </a:r>
-          </a:p>
-        </p:txBody>
-      </p:sp>
-      <p:sp>
-        <p:nvSpPr>
-          <p:cNvPr id="48" name="Rectangle 47"/>
-          <p:cNvSpPr/>
-          <p:nvPr/>
-        </p:nvSpPr>
-        <p:spPr>
-          <a:xfrm>
-            <a:off x="3392424" y="5605272"/>
-            <a:ext cx="3090672" cy="630936"/>
-          </a:xfrm>
-          <a:prstGeom prst="rect">
-            <a:avLst/>
-          </a:prstGeom>
-          <a:noFill/>
-          <a:ln>
-            <a:noFill/>
-          </a:ln>
-          <a:effectLst/>
-        </p:spPr>
-        <p:style>
-          <a:lnRef idx="1">
-            <a:schemeClr val="accent1"/>
-          </a:lnRef>
-          <a:fillRef idx="3">
-            <a:schemeClr val="accent1"/>
-          </a:fillRef>
-          <a:effectRef idx="2">
-            <a:schemeClr val="accent1"/>
-          </a:effectRef>
-          <a:fontRef idx="minor">
-            <a:schemeClr val="lt1"/>
-          </a:fontRef>
-        </p:style>
-        <p:txBody>
-          <a:bodyPr rtlCol="0" anchor="t" wrap="square" lIns="45720" rIns="45720" tIns="18288" bIns="18288"/>
-          <a:lstStyle/>
-          <a:p>
-            <a:pPr algn="l">
-              <a:defRPr sz="1100" b="0" i="0">
-                <a:solidFill>
-                  <a:srgbClr val="1A1A1A"/>
-                </a:solidFill>
-                <a:latin typeface="Calibri"/>
-              </a:defRPr>
-            </a:pPr>
-            <a:r>
-              <a:t>Christiano et al.</a:t>
-            </a:r>
-            <a:br/>
-            <a:r>
-              <a:t>(2017)</a:t>
-            </a:r>
-          </a:p>
-        </p:txBody>
-      </p:sp>
-      <p:sp>
-        <p:nvSpPr>
-          <p:cNvPr id="49" name="Rectangle 48"/>
-          <p:cNvSpPr/>
-          <p:nvPr/>
-        </p:nvSpPr>
-        <p:spPr>
-          <a:xfrm>
-            <a:off x="6638544" y="5605272"/>
-            <a:ext cx="5010912" cy="630936"/>
-          </a:xfrm>
-          <a:prstGeom prst="rect">
-            <a:avLst/>
-          </a:prstGeom>
-          <a:noFill/>
-          <a:ln>
-            <a:noFill/>
-          </a:ln>
-          <a:effectLst/>
-        </p:spPr>
-        <p:style>
-          <a:lnRef idx="1">
-            <a:schemeClr val="accent1"/>
-          </a:lnRef>
-          <a:fillRef idx="3">
-            <a:schemeClr val="accent1"/>
-          </a:fillRef>
-          <a:effectRef idx="2">
-            <a:schemeClr val="accent1"/>
-          </a:effectRef>
-          <a:fontRef idx="minor">
-            <a:schemeClr val="lt1"/>
-          </a:fontRef>
-        </p:style>
-        <p:txBody>
-          <a:bodyPr rtlCol="0" anchor="t" wrap="square" lIns="45720" rIns="45720" tIns="18288" bIns="18288"/>
-          <a:lstStyle/>
-          <a:p>
-            <a:pPr algn="l">
-              <a:defRPr sz="1100" b="0" i="0">
-                <a:solidFill>
-                  <a:srgbClr val="1A1A1A"/>
-                </a:solidFill>
-                <a:latin typeface="Calibri"/>
-              </a:defRPr>
-            </a:pPr>
-            <a:r>
-              <a:t>Expert overrides improve alignment; cost-benefit of human referral</a:t>
+              <a:defRPr sz="1050" b="0" i="1">
+                <a:solidFill>
+                  <a:srgbClr val="777777"/>
+                </a:solidFill>
+                <a:latin typeface="Calibri"/>
+              </a:defRPr>
+            </a:pPr>
+            <a:r>
+              <a:t>Full review: thesis Chapter III (30+ sources).</a:t>
             </a:r>
           </a:p>
         </p:txBody>

--- a/thesis/health_rl/burgundy_defense_presentation.pptx
+++ b/thesis/health_rl/burgundy_defense_presentation.pptx
@@ -558,6 +558,146 @@
 </p:notes>
 </file>
 
+<file path=ppt/notesSlides/notesSlide10.xml><?xml version="1.0" encoding="utf-8"?>
+<p:notes xmlns:a="http://schemas.openxmlformats.org/drawingml/2006/main" xmlns:p="http://schemas.openxmlformats.org/presentationml/2006/main" xmlns:r="http://schemas.openxmlformats.org/officeDocument/2006/relationships">
+  <p:cSld>
+    <p:spTree>
+      <p:nvGrpSpPr>
+        <p:cNvPr id="1" name=""/>
+        <p:cNvGrpSpPr/>
+        <p:nvPr/>
+      </p:nvGrpSpPr>
+      <p:grpSpPr>
+        <a:xfrm>
+          <a:off x="0" y="0"/>
+          <a:ext cx="0" cy="0"/>
+          <a:chOff x="0" y="0"/>
+          <a:chExt cx="0" cy="0"/>
+        </a:xfrm>
+      </p:grpSpPr>
+      <p:sp>
+        <p:nvSpPr>
+          <p:cNvPr id="2" name="Slide Image Placeholder 1"/>
+          <p:cNvSpPr>
+            <a:spLocks noGrp="1"/>
+          </p:cNvSpPr>
+          <p:nvPr>
+            <p:ph type="sldImg" idx="2"/>
+          </p:nvPr>
+        </p:nvSpPr>
+        <p:spPr/>
+      </p:sp>
+      <p:sp>
+        <p:nvSpPr>
+          <p:cNvPr id="3" name="Notes Placeholder 2"/>
+          <p:cNvSpPr>
+            <a:spLocks noGrp="1"/>
+          </p:cNvSpPr>
+          <p:nvPr>
+            <p:ph type="body" idx="3" sz="quarter"/>
+          </p:nvPr>
+        </p:nvSpPr>
+        <p:spPr/>
+        <p:txBody>
+          <a:bodyPr/>
+          <a:lstStyle/>
+          <a:p>
+            <a:r>
+              <a:t>Two safety layers. The PSI guardrail computes the Population Stability Index on region and occupation over a rolling 500-round window: GREEN below 0.10, AMBER to 0.25, RED above. It detects concentration; it does not constrain the policy - enforcement is future work, stated honestly. The HITL wrapper REFERs an applicant to the actuary whenever predicted uncertainty exceeds the conservatism threshold kappa, tested at 0.3, 0.5, 0.7; the human's decision is final and its observed reward still updates the bandit. Design target: keep review cost under two percent of gross reward.</a:t>
+            </a:r>
+          </a:p>
+        </p:txBody>
+      </p:sp>
+      <p:sp>
+        <p:nvSpPr>
+          <p:cNvPr id="4" name="Slide Number Placeholder 3"/>
+          <p:cNvSpPr>
+            <a:spLocks noGrp="1"/>
+          </p:cNvSpPr>
+          <p:nvPr>
+            <p:ph type="sldNum" idx="5" sz="quarter"/>
+          </p:nvPr>
+        </p:nvSpPr>
+        <p:spPr/>
+      </p:sp>
+    </p:spTree>
+  </p:cSld>
+  <p:clrMapOvr>
+    <a:masterClrMapping/>
+  </p:clrMapOvr>
+</p:notes>
+</file>
+
+<file path=ppt/notesSlides/notesSlide11.xml><?xml version="1.0" encoding="utf-8"?>
+<p:notes xmlns:a="http://schemas.openxmlformats.org/drawingml/2006/main" xmlns:p="http://schemas.openxmlformats.org/presentationml/2006/main" xmlns:r="http://schemas.openxmlformats.org/officeDocument/2006/relationships">
+  <p:cSld>
+    <p:spTree>
+      <p:nvGrpSpPr>
+        <p:cNvPr id="1" name=""/>
+        <p:cNvGrpSpPr/>
+        <p:nvPr/>
+      </p:nvGrpSpPr>
+      <p:grpSpPr>
+        <a:xfrm>
+          <a:off x="0" y="0"/>
+          <a:ext cx="0" cy="0"/>
+          <a:chOff x="0" y="0"/>
+          <a:chExt cx="0" cy="0"/>
+        </a:xfrm>
+      </p:grpSpPr>
+      <p:sp>
+        <p:nvSpPr>
+          <p:cNvPr id="2" name="Slide Image Placeholder 1"/>
+          <p:cNvSpPr>
+            <a:spLocks noGrp="1"/>
+          </p:cNvSpPr>
+          <p:nvPr>
+            <p:ph type="sldImg" idx="2"/>
+          </p:nvPr>
+        </p:nvSpPr>
+        <p:spPr/>
+      </p:sp>
+      <p:sp>
+        <p:nvSpPr>
+          <p:cNvPr id="3" name="Notes Placeholder 2"/>
+          <p:cNvSpPr>
+            <a:spLocks noGrp="1"/>
+          </p:cNvSpPr>
+          <p:nvPr>
+            <p:ph type="body" idx="3" sz="quarter"/>
+          </p:nvPr>
+        </p:nvSpPr>
+        <p:spPr/>
+        <p:txBody>
+          <a:bodyPr/>
+          <a:lstStyle/>
+          <a:p>
+            <a:r>
+              <a:t>Switch to the browser. Walk one applicant through scoring, show the arm the bandit picks and the uncertainty-driven REFER, then the PSI monitor staying GREEN/AMBER, and finally the HITL queue with per-referral cost. If anything breaks, jump to appendix slides A6-A8 and narrate over the screenshots.</a:t>
+            </a:r>
+          </a:p>
+        </p:txBody>
+      </p:sp>
+      <p:sp>
+        <p:nvSpPr>
+          <p:cNvPr id="4" name="Slide Number Placeholder 3"/>
+          <p:cNvSpPr>
+            <a:spLocks noGrp="1"/>
+          </p:cNvSpPr>
+          <p:nvPr>
+            <p:ph type="sldNum" idx="5" sz="quarter"/>
+          </p:nvPr>
+        </p:nvSpPr>
+        <p:spPr/>
+      </p:sp>
+    </p:spTree>
+  </p:cSld>
+  <p:clrMapOvr>
+    <a:masterClrMapping/>
+  </p:clrMapOvr>
+</p:notes>
+</file>
+
 <file path=ppt/notesSlides/notesSlide2.xml><?xml version="1.0" encoding="utf-8"?>
 <p:notes xmlns:a="http://schemas.openxmlformats.org/drawingml/2006/main" xmlns:p="http://schemas.openxmlformats.org/presentationml/2006/main" xmlns:r="http://schemas.openxmlformats.org/officeDocument/2006/relationships">
   <p:cSld>
@@ -883,7 +1023,217 @@
           <a:lstStyle/>
           <a:p>
             <a:r>
-              <a:t>Switch to the browser. Walk one applicant through scoring, show the arm the bandit picks and the uncertainty-driven REFER, then the PSI monitor staying GREEN/AMBER, and finally the HITL queue with per-referral cost. If anything breaks, jump to appendix slides A6-A8 and narrate over the screenshots.</a:t>
+              <a:t>Architecture in three layers. The browser SPA hosts four panels: applicant simulator, premium optimiser, bandit arena, PSI monitor. Each maps to a FastAPI endpoint, backed by the Python core: the actuarial reward simulator, the pricing engine, the bandit algorithms LinUCB and LinTS, and the PSI computation. Everything is fed by the 2,000-applicant synthetic Cambodia dataset, with the static XGBoost mortality model as the incumbent baseline. This same stack powers the live demo later.</a:t>
+            </a:r>
+          </a:p>
+        </p:txBody>
+      </p:sp>
+      <p:sp>
+        <p:nvSpPr>
+          <p:cNvPr id="4" name="Slide Number Placeholder 3"/>
+          <p:cNvSpPr>
+            <a:spLocks noGrp="1"/>
+          </p:cNvSpPr>
+          <p:nvPr>
+            <p:ph type="sldNum" idx="5" sz="quarter"/>
+          </p:nvPr>
+        </p:nvSpPr>
+        <p:spPr/>
+      </p:sp>
+    </p:spTree>
+  </p:cSld>
+  <p:clrMapOvr>
+    <a:masterClrMapping/>
+  </p:clrMapOvr>
+</p:notes>
+</file>
+
+<file path=ppt/notesSlides/notesSlide7.xml><?xml version="1.0" encoding="utf-8"?>
+<p:notes xmlns:a="http://schemas.openxmlformats.org/drawingml/2006/main" xmlns:p="http://schemas.openxmlformats.org/presentationml/2006/main" xmlns:r="http://schemas.openxmlformats.org/officeDocument/2006/relationships">
+  <p:cSld>
+    <p:spTree>
+      <p:nvGrpSpPr>
+        <p:cNvPr id="1" name=""/>
+        <p:cNvGrpSpPr/>
+        <p:nvPr/>
+      </p:nvGrpSpPr>
+      <p:grpSpPr>
+        <a:xfrm>
+          <a:off x="0" y="0"/>
+          <a:ext cx="0" cy="0"/>
+          <a:chOff x="0" y="0"/>
+          <a:chExt cx="0" cy="0"/>
+        </a:xfrm>
+      </p:grpSpPr>
+      <p:sp>
+        <p:nvSpPr>
+          <p:cNvPr id="2" name="Slide Image Placeholder 1"/>
+          <p:cNvSpPr>
+            <a:spLocks noGrp="1"/>
+          </p:cNvSpPr>
+          <p:nvPr>
+            <p:ph type="sldImg" idx="2"/>
+          </p:nvPr>
+        </p:nvSpPr>
+        <p:spPr/>
+      </p:sp>
+      <p:sp>
+        <p:nvSpPr>
+          <p:cNvPr id="3" name="Notes Placeholder 2"/>
+          <p:cNvSpPr>
+            <a:spLocks noGrp="1"/>
+          </p:cNvSpPr>
+          <p:nvPr>
+            <p:ph type="body" idx="3" sz="quarter"/>
+          </p:nvPr>
+        </p:nvSpPr>
+        <p:spPr/>
+        <p:txBody>
+          <a:bodyPr/>
+          <a:lstStyle/>
+          <a:p>
+            <a:r>
+              <a:t>The dataset is 2,000 synthetic applicants with five features: age, sex, region, occupation, BMI. Distributions are anchored on CDHS 2021-22 and STEPS 2021; income on ILO labour-force surveys; claim probabilities calibrated from WHO SEARO health-expenditure data. Adverse-selection factor 1.35 and price-elasticity slope 3.5 come from DAC actuarial priors. Four arms: RATED accepts with a 25 percent loading, STANDARD accepts at standard rate, DECLINE rejects, REFER escalates to a human. No real applicant data is used anywhere.</a:t>
+            </a:r>
+          </a:p>
+        </p:txBody>
+      </p:sp>
+      <p:sp>
+        <p:nvSpPr>
+          <p:cNvPr id="4" name="Slide Number Placeholder 3"/>
+          <p:cNvSpPr>
+            <a:spLocks noGrp="1"/>
+          </p:cNvSpPr>
+          <p:nvPr>
+            <p:ph type="sldNum" idx="5" sz="quarter"/>
+          </p:nvPr>
+        </p:nvSpPr>
+        <p:spPr/>
+      </p:sp>
+    </p:spTree>
+  </p:cSld>
+  <p:clrMapOvr>
+    <a:masterClrMapping/>
+  </p:clrMapOvr>
+</p:notes>
+</file>
+
+<file path=ppt/notesSlides/notesSlide8.xml><?xml version="1.0" encoding="utf-8"?>
+<p:notes xmlns:a="http://schemas.openxmlformats.org/drawingml/2006/main" xmlns:p="http://schemas.openxmlformats.org/presentationml/2006/main" xmlns:r="http://schemas.openxmlformats.org/officeDocument/2006/relationships">
+  <p:cSld>
+    <p:spTree>
+      <p:nvGrpSpPr>
+        <p:cNvPr id="1" name=""/>
+        <p:cNvGrpSpPr/>
+        <p:nvPr/>
+      </p:nvGrpSpPr>
+      <p:grpSpPr>
+        <a:xfrm>
+          <a:off x="0" y="0"/>
+          <a:ext cx="0" cy="0"/>
+          <a:chOff x="0" y="0"/>
+          <a:chExt cx="0" cy="0"/>
+        </a:xfrm>
+      </p:grpSpPr>
+      <p:sp>
+        <p:nvSpPr>
+          <p:cNvPr id="2" name="Slide Image Placeholder 1"/>
+          <p:cNvSpPr>
+            <a:spLocks noGrp="1"/>
+          </p:cNvSpPr>
+          <p:nvPr>
+            <p:ph type="sldImg" idx="2"/>
+          </p:nvPr>
+        </p:nvSpPr>
+        <p:spPr/>
+      </p:sp>
+      <p:sp>
+        <p:nvSpPr>
+          <p:cNvPr id="3" name="Notes Placeholder 2"/>
+          <p:cNvSpPr>
+            <a:spLocks noGrp="1"/>
+          </p:cNvSpPr>
+          <p:nvPr>
+            <p:ph type="body" idx="3" sz="quarter"/>
+          </p:nvPr>
+        </p:nvSpPr>
+        <p:spPr/>
+        <p:txBody>
+          <a:bodyPr/>
+          <a:lstStyle/>
+          <a:p>
+            <a:r>
+              <a:t>Formally: at each round the context is the standardised five-feature applicant vector, the action is one of four arms, and the reward is revenue minus claims from the actuarial simulator, with adverse selection penalising premium-heavy arms on low-risk applicants. The objective is cumulative reward over T rounds subject to the PSI guardrail. The table sketches the reward structure: for a high-risk applicant DECLINE avoids a loss; for a low-risk one it forfeits revenue; REFER nets the human decision either way.</a:t>
+            </a:r>
+          </a:p>
+        </p:txBody>
+      </p:sp>
+      <p:sp>
+        <p:nvSpPr>
+          <p:cNvPr id="4" name="Slide Number Placeholder 3"/>
+          <p:cNvSpPr>
+            <a:spLocks noGrp="1"/>
+          </p:cNvSpPr>
+          <p:nvPr>
+            <p:ph type="sldNum" idx="5" sz="quarter"/>
+          </p:nvPr>
+        </p:nvSpPr>
+        <p:spPr/>
+      </p:sp>
+    </p:spTree>
+  </p:cSld>
+  <p:clrMapOvr>
+    <a:masterClrMapping/>
+  </p:clrMapOvr>
+</p:notes>
+</file>
+
+<file path=ppt/notesSlides/notesSlide9.xml><?xml version="1.0" encoding="utf-8"?>
+<p:notes xmlns:a="http://schemas.openxmlformats.org/drawingml/2006/main" xmlns:p="http://schemas.openxmlformats.org/presentationml/2006/main" xmlns:r="http://schemas.openxmlformats.org/officeDocument/2006/relationships">
+  <p:cSld>
+    <p:spTree>
+      <p:nvGrpSpPr>
+        <p:cNvPr id="1" name=""/>
+        <p:cNvGrpSpPr/>
+        <p:nvPr/>
+      </p:nvGrpSpPr>
+      <p:grpSpPr>
+        <a:xfrm>
+          <a:off x="0" y="0"/>
+          <a:ext cx="0" cy="0"/>
+          <a:chOff x="0" y="0"/>
+          <a:chExt cx="0" cy="0"/>
+        </a:xfrm>
+      </p:grpSpPr>
+      <p:sp>
+        <p:nvSpPr>
+          <p:cNvPr id="2" name="Slide Image Placeholder 1"/>
+          <p:cNvSpPr>
+            <a:spLocks noGrp="1"/>
+          </p:cNvSpPr>
+          <p:nvPr>
+            <p:ph type="sldImg" idx="2"/>
+          </p:nvPr>
+        </p:nvSpPr>
+        <p:spPr/>
+      </p:sp>
+      <p:sp>
+        <p:nvSpPr>
+          <p:cNvPr id="3" name="Notes Placeholder 2"/>
+          <p:cNvSpPr>
+            <a:spLocks noGrp="1"/>
+          </p:cNvSpPr>
+          <p:nvPr>
+            <p:ph type="body" idx="3" sz="quarter"/>
+          </p:nvPr>
+        </p:nvSpPr>
+        <p:spPr/>
+        <p:txBody>
+          <a:bodyPr/>
+          <a:lstStyle/>
+          <a:p>
+            <a:r>
+              <a:t>Two proposed policies and three reference points. LinUCB plays optimism in the face of uncertainty over a linear reward model with the square-root-T regret bound; LinTS samples from the posterior and is near-optimal with naturally calibrated uncertainty. Epsilon-greedy is the naive explorer with provably worse T-to-the-two-thirds regret. Static XGB is the train-once incumbent. AlwaysRATED rates everyone at +25 percent loading - it scores highest but is neither commercially nor regulatorily viable, which is exactly the admissibility distinction in section 5.0.1 and the dedicated limitation slide 6.2.</a:t>
             </a:r>
           </a:p>
         </p:txBody>
@@ -4851,8 +5201,8 @@
         </p:nvSpPr>
         <p:spPr>
           <a:xfrm>
-            <a:off x="457200" y="1207008"/>
-            <a:ext cx="5486400" cy="329184"/>
+            <a:off x="457200" y="1344168"/>
+            <a:ext cx="2651760" cy="411480"/>
           </a:xfrm>
           <a:prstGeom prst="rect">
             <a:avLst/>
@@ -4882,7 +5232,7 @@
           <a:lstStyle/>
           <a:p>
             <a:pPr algn="l">
-              <a:defRPr sz="1400" b="1" i="0">
+              <a:defRPr sz="1600" b="1" i="0">
                 <a:solidFill>
                   <a:srgbClr val="5D2A42"/>
                 </a:solidFill>
@@ -4890,7 +5240,7 @@
               </a:defRPr>
             </a:pPr>
             <a:r>
-              <a:t>Problem setup</a:t>
+              <a:t>Context  x_t ∈ R^5</a:t>
             </a:r>
           </a:p>
         </p:txBody>
@@ -4903,145 +5253,46 @@
         </p:nvSpPr>
         <p:spPr>
           <a:xfrm>
-            <a:off x="457200" y="1591056"/>
-            <a:ext cx="5486400" cy="2514600"/>
-          </a:xfrm>
-          <a:prstGeom prst="rect">
-            <a:avLst/>
-          </a:prstGeom>
-          <a:noFill/>
-          <a:ln>
-            <a:noFill/>
-          </a:ln>
-          <a:effectLst/>
-        </p:spPr>
-        <p:style>
-          <a:lnRef idx="1">
-            <a:schemeClr val="accent1"/>
-          </a:lnRef>
-          <a:fillRef idx="3">
-            <a:schemeClr val="accent1"/>
-          </a:fillRef>
-          <a:effectRef idx="2">
-            <a:schemeClr val="accent1"/>
-          </a:effectRef>
-          <a:fontRef idx="minor">
-            <a:schemeClr val="lt1"/>
-          </a:fontRef>
-        </p:style>
-        <p:txBody>
-          <a:bodyPr rtlCol="0" anchor="ctr" wrap="square"/>
-          <a:lstStyle/>
-          <a:p>
-            <a:pPr algn="ctr">
-              <a:spcAft>
-                <a:spcPts val="400"/>
-              </a:spcAft>
-              <a:defRPr sz="1300" b="1">
-                <a:solidFill>
-                  <a:srgbClr val="1A1A1A"/>
-                </a:solidFill>
-                <a:latin typeface="Calibri"/>
-              </a:defRPr>
-            </a:pPr>
-            <a:r>
-              <a:t>• Context  x_t ∈ ℝ⁵:</a:t>
-            </a:r>
-          </a:p>
-          <a:p>
-            <a:pPr>
-              <a:spcAft>
-                <a:spcPts val="400"/>
-              </a:spcAft>
-              <a:defRPr sz="1300" b="0">
-                <a:solidFill>
-                  <a:srgbClr val="1A1A1A"/>
-                </a:solidFill>
-                <a:latin typeface="Calibri"/>
-              </a:defRPr>
-            </a:pPr>
-            <a:r>
-              <a:t>• Age, sex, region, occupation, BMI -- standardised at application time</a:t>
-            </a:r>
-          </a:p>
-          <a:p>
-            <a:pPr>
-              <a:spcAft>
-                <a:spcPts val="400"/>
-              </a:spcAft>
-              <a:defRPr sz="1300" b="1">
-                <a:solidFill>
-                  <a:srgbClr val="1A1A1A"/>
-                </a:solidFill>
-                <a:latin typeface="Calibri"/>
-              </a:defRPr>
-            </a:pPr>
-            <a:r>
-              <a:t>• Action  a_t ∈ {RATED, STANDARD, DECLINE, REFER}:</a:t>
-            </a:r>
-          </a:p>
-          <a:p>
-            <a:pPr>
-              <a:spcAft>
-                <a:spcPts val="400"/>
-              </a:spcAft>
-              <a:defRPr sz="1300" b="0">
-                <a:solidFill>
-                  <a:srgbClr val="1A1A1A"/>
-                </a:solidFill>
-                <a:latin typeface="Calibri"/>
-              </a:defRPr>
-            </a:pPr>
-            <a:r>
-              <a:t>• Policy selects one arm per applicant per round</a:t>
-            </a:r>
-          </a:p>
-          <a:p>
-            <a:pPr>
-              <a:spcAft>
-                <a:spcPts val="400"/>
-              </a:spcAft>
-              <a:defRPr sz="1300" b="1">
-                <a:solidFill>
-                  <a:srgbClr val="1A1A1A"/>
-                </a:solidFill>
-                <a:latin typeface="Calibri"/>
-              </a:defRPr>
-            </a:pPr>
-            <a:r>
-              <a:t>• Reward  r_t:</a:t>
-            </a:r>
-          </a:p>
-          <a:p>
-            <a:pPr>
-              <a:spcAft>
-                <a:spcPts val="400"/>
-              </a:spcAft>
-              <a:defRPr sz="1300" b="0">
-                <a:solidFill>
-                  <a:srgbClr val="1A1A1A"/>
-                </a:solidFill>
-                <a:latin typeface="Calibri"/>
-              </a:defRPr>
-            </a:pPr>
-            <a:r>
-              <a:t>• Revenue-minus-claims actuarial simulator</a:t>
-            </a:r>
-          </a:p>
-          <a:p>
-            <a:pPr>
-              <a:spcAft>
-                <a:spcPts val="400"/>
-              </a:spcAft>
-              <a:defRPr sz="1300" b="0">
-                <a:solidFill>
-                  <a:srgbClr val="1A1A1A"/>
-                </a:solidFill>
-                <a:latin typeface="Calibri"/>
-              </a:defRPr>
-            </a:pPr>
-            <a:r>
-              <a:t>• Adverse-selection penalises premium-heavy arms for low-risk applicants</a:t>
+            <a:off x="457200" y="1728216"/>
+            <a:ext cx="5394960" cy="365760"/>
+          </a:xfrm>
+          <a:prstGeom prst="rect">
+            <a:avLst/>
+          </a:prstGeom>
+          <a:noFill/>
+          <a:ln>
+            <a:noFill/>
+          </a:ln>
+          <a:effectLst/>
+        </p:spPr>
+        <p:style>
+          <a:lnRef idx="1">
+            <a:schemeClr val="accent1"/>
+          </a:lnRef>
+          <a:fillRef idx="3">
+            <a:schemeClr val="accent1"/>
+          </a:fillRef>
+          <a:effectRef idx="2">
+            <a:schemeClr val="accent1"/>
+          </a:effectRef>
+          <a:fontRef idx="minor">
+            <a:schemeClr val="lt1"/>
+          </a:fontRef>
+        </p:style>
+        <p:txBody>
+          <a:bodyPr rtlCol="0" anchor="t" wrap="square" lIns="45720" rIns="45720" tIns="18288" bIns="18288"/>
+          <a:lstStyle/>
+          <a:p>
+            <a:pPr algn="l">
+              <a:defRPr sz="1300" b="0" i="0">
+                <a:solidFill>
+                  <a:srgbClr val="3A3A3A"/>
+                </a:solidFill>
+                <a:latin typeface="Calibri"/>
+              </a:defRPr>
+            </a:pPr>
+            <a:r>
+              <a:t>age, sex, region, occupation, BMI -- standardised</a:t>
             </a:r>
           </a:p>
         </p:txBody>
@@ -5054,8 +5305,8 @@
         </p:nvSpPr>
         <p:spPr>
           <a:xfrm>
-            <a:off x="457200" y="4270248"/>
-            <a:ext cx="5486400" cy="329184"/>
+            <a:off x="457200" y="2212848"/>
+            <a:ext cx="2651760" cy="411480"/>
           </a:xfrm>
           <a:prstGeom prst="rect">
             <a:avLst/>
@@ -5085,7 +5336,7 @@
           <a:lstStyle/>
           <a:p>
             <a:pPr algn="l">
-              <a:defRPr sz="1400" b="1" i="0">
+              <a:defRPr sz="1600" b="1" i="0">
                 <a:solidFill>
                   <a:srgbClr val="5D2A42"/>
                 </a:solidFill>
@@ -5093,7 +5344,7 @@
               </a:defRPr>
             </a:pPr>
             <a:r>
-              <a:t>Objective</a:t>
+              <a:t>Action  a_t</a:t>
             </a:r>
           </a:p>
         </p:txBody>
@@ -5106,8 +5357,164 @@
         </p:nvSpPr>
         <p:spPr>
           <a:xfrm>
-            <a:off x="457200" y="4663440"/>
-            <a:ext cx="5486400" cy="777240"/>
+            <a:off x="457200" y="2596896"/>
+            <a:ext cx="5394960" cy="365760"/>
+          </a:xfrm>
+          <a:prstGeom prst="rect">
+            <a:avLst/>
+          </a:prstGeom>
+          <a:noFill/>
+          <a:ln>
+            <a:noFill/>
+          </a:ln>
+          <a:effectLst/>
+        </p:spPr>
+        <p:style>
+          <a:lnRef idx="1">
+            <a:schemeClr val="accent1"/>
+          </a:lnRef>
+          <a:fillRef idx="3">
+            <a:schemeClr val="accent1"/>
+          </a:fillRef>
+          <a:effectRef idx="2">
+            <a:schemeClr val="accent1"/>
+          </a:effectRef>
+          <a:fontRef idx="minor">
+            <a:schemeClr val="lt1"/>
+          </a:fontRef>
+        </p:style>
+        <p:txBody>
+          <a:bodyPr rtlCol="0" anchor="t" wrap="square" lIns="45720" rIns="45720" tIns="18288" bIns="18288"/>
+          <a:lstStyle/>
+          <a:p>
+            <a:pPr algn="l">
+              <a:defRPr sz="1300" b="0" i="0">
+                <a:solidFill>
+                  <a:srgbClr val="3A3A3A"/>
+                </a:solidFill>
+                <a:latin typeface="Calibri"/>
+              </a:defRPr>
+            </a:pPr>
+            <a:r>
+              <a:t>one of RATED / STANDARD / DECLINE / REFER</a:t>
+            </a:r>
+          </a:p>
+        </p:txBody>
+      </p:sp>
+      <p:sp>
+        <p:nvSpPr>
+          <p:cNvPr id="11" name="Rectangle 10"/>
+          <p:cNvSpPr/>
+          <p:nvPr/>
+        </p:nvSpPr>
+        <p:spPr>
+          <a:xfrm>
+            <a:off x="457200" y="3081528"/>
+            <a:ext cx="2651760" cy="411480"/>
+          </a:xfrm>
+          <a:prstGeom prst="rect">
+            <a:avLst/>
+          </a:prstGeom>
+          <a:noFill/>
+          <a:ln>
+            <a:noFill/>
+          </a:ln>
+          <a:effectLst/>
+        </p:spPr>
+        <p:style>
+          <a:lnRef idx="1">
+            <a:schemeClr val="accent1"/>
+          </a:lnRef>
+          <a:fillRef idx="3">
+            <a:schemeClr val="accent1"/>
+          </a:fillRef>
+          <a:effectRef idx="2">
+            <a:schemeClr val="accent1"/>
+          </a:effectRef>
+          <a:fontRef idx="minor">
+            <a:schemeClr val="lt1"/>
+          </a:fontRef>
+        </p:style>
+        <p:txBody>
+          <a:bodyPr rtlCol="0" anchor="t" wrap="square" lIns="45720" rIns="45720" tIns="18288" bIns="18288"/>
+          <a:lstStyle/>
+          <a:p>
+            <a:pPr algn="l">
+              <a:defRPr sz="1600" b="1" i="0">
+                <a:solidFill>
+                  <a:srgbClr val="5D2A42"/>
+                </a:solidFill>
+                <a:latin typeface="Calibri"/>
+              </a:defRPr>
+            </a:pPr>
+            <a:r>
+              <a:t>Reward  r_t</a:t>
+            </a:r>
+          </a:p>
+        </p:txBody>
+      </p:sp>
+      <p:sp>
+        <p:nvSpPr>
+          <p:cNvPr id="12" name="Rectangle 11"/>
+          <p:cNvSpPr/>
+          <p:nvPr/>
+        </p:nvSpPr>
+        <p:spPr>
+          <a:xfrm>
+            <a:off x="457200" y="3465576"/>
+            <a:ext cx="5394960" cy="365760"/>
+          </a:xfrm>
+          <a:prstGeom prst="rect">
+            <a:avLst/>
+          </a:prstGeom>
+          <a:noFill/>
+          <a:ln>
+            <a:noFill/>
+          </a:ln>
+          <a:effectLst/>
+        </p:spPr>
+        <p:style>
+          <a:lnRef idx="1">
+            <a:schemeClr val="accent1"/>
+          </a:lnRef>
+          <a:fillRef idx="3">
+            <a:schemeClr val="accent1"/>
+          </a:fillRef>
+          <a:effectRef idx="2">
+            <a:schemeClr val="accent1"/>
+          </a:effectRef>
+          <a:fontRef idx="minor">
+            <a:schemeClr val="lt1"/>
+          </a:fontRef>
+        </p:style>
+        <p:txBody>
+          <a:bodyPr rtlCol="0" anchor="t" wrap="square" lIns="45720" rIns="45720" tIns="18288" bIns="18288"/>
+          <a:lstStyle/>
+          <a:p>
+            <a:pPr algn="l">
+              <a:defRPr sz="1300" b="0" i="0">
+                <a:solidFill>
+                  <a:srgbClr val="3A3A3A"/>
+                </a:solidFill>
+                <a:latin typeface="Calibri"/>
+              </a:defRPr>
+            </a:pPr>
+            <a:r>
+              <a:t>revenue minus claims, actuarial simulator</a:t>
+            </a:r>
+          </a:p>
+        </p:txBody>
+      </p:sp>
+      <p:sp>
+        <p:nvSpPr>
+          <p:cNvPr id="13" name="Rectangle 12"/>
+          <p:cNvSpPr/>
+          <p:nvPr/>
+        </p:nvSpPr>
+        <p:spPr>
+          <a:xfrm>
+            <a:off x="457200" y="4133088"/>
+            <a:ext cx="5394960" cy="914400"/>
           </a:xfrm>
           <a:prstGeom prst="rect">
             <a:avLst/>
@@ -5139,7 +5546,7 @@
           <a:lstStyle/>
           <a:p>
             <a:pPr algn="l">
-              <a:defRPr sz="1300" b="0">
+              <a:defRPr sz="1400" b="1">
                 <a:solidFill>
                   <a:srgbClr val="1A1A1A"/>
                 </a:solidFill>
@@ -5147,21 +5554,21 @@
               </a:defRPr>
             </a:pPr>
             <a:r>
-              <a:t>Maximise cumulative reward Σ r_t over T rounds, subject to demographic PSI guardrails.</a:t>
-            </a:r>
-          </a:p>
-        </p:txBody>
-      </p:sp>
-      <p:sp>
-        <p:nvSpPr>
-          <p:cNvPr id="11" name="Rectangle 10"/>
-          <p:cNvSpPr/>
-          <p:nvPr/>
-        </p:nvSpPr>
-        <p:spPr>
-          <a:xfrm>
-            <a:off x="6400800" y="1207008"/>
-            <a:ext cx="5303520" cy="329184"/>
+              <a:t>Objective: maximise cumulative reward Σ r_t over T rounds, subject to demographic PSI guardrails.</a:t>
+            </a:r>
+          </a:p>
+        </p:txBody>
+      </p:sp>
+      <p:sp>
+        <p:nvSpPr>
+          <p:cNvPr id="14" name="Rectangle 13"/>
+          <p:cNvSpPr/>
+          <p:nvPr/>
+        </p:nvSpPr>
+        <p:spPr>
+          <a:xfrm>
+            <a:off x="6455664" y="1344168"/>
+            <a:ext cx="1444752" cy="310896"/>
           </a:xfrm>
           <a:prstGeom prst="rect">
             <a:avLst/>
@@ -5191,29 +5598,133 @@
           <a:lstStyle/>
           <a:p>
             <a:pPr algn="l">
-              <a:defRPr sz="1400" b="1" i="0">
-                <a:solidFill>
-                  <a:srgbClr val="5D2A42"/>
-                </a:solidFill>
-                <a:latin typeface="Calibri"/>
-              </a:defRPr>
-            </a:pPr>
-            <a:r>
-              <a:t>Reward structure (illustrative)</a:t>
-            </a:r>
-          </a:p>
-        </p:txBody>
-      </p:sp>
-      <p:sp>
-        <p:nvSpPr>
-          <p:cNvPr id="12" name="Rectangle 11"/>
-          <p:cNvSpPr/>
-          <p:nvPr/>
-        </p:nvSpPr>
-        <p:spPr>
-          <a:xfrm>
-            <a:off x="6400800" y="1609344"/>
-            <a:ext cx="5303520" cy="758952"/>
+              <a:defRPr sz="1200" b="1" i="0">
+                <a:solidFill>
+                  <a:srgbClr val="1A1A1A"/>
+                </a:solidFill>
+                <a:latin typeface="Calibri"/>
+              </a:defRPr>
+            </a:pPr>
+            <a:r>
+              <a:t>Action</a:t>
+            </a:r>
+          </a:p>
+        </p:txBody>
+      </p:sp>
+      <p:sp>
+        <p:nvSpPr>
+          <p:cNvPr id="15" name="Rectangle 14"/>
+          <p:cNvSpPr/>
+          <p:nvPr/>
+        </p:nvSpPr>
+        <p:spPr>
+          <a:xfrm>
+            <a:off x="8010144" y="1344168"/>
+            <a:ext cx="1810512" cy="310896"/>
+          </a:xfrm>
+          <a:prstGeom prst="rect">
+            <a:avLst/>
+          </a:prstGeom>
+          <a:noFill/>
+          <a:ln>
+            <a:noFill/>
+          </a:ln>
+          <a:effectLst/>
+        </p:spPr>
+        <p:style>
+          <a:lnRef idx="1">
+            <a:schemeClr val="accent1"/>
+          </a:lnRef>
+          <a:fillRef idx="3">
+            <a:schemeClr val="accent1"/>
+          </a:fillRef>
+          <a:effectRef idx="2">
+            <a:schemeClr val="accent1"/>
+          </a:effectRef>
+          <a:fontRef idx="minor">
+            <a:schemeClr val="lt1"/>
+          </a:fontRef>
+        </p:style>
+        <p:txBody>
+          <a:bodyPr rtlCol="0" anchor="t" wrap="square" lIns="45720" rIns="45720" tIns="18288" bIns="18288"/>
+          <a:lstStyle/>
+          <a:p>
+            <a:pPr algn="l">
+              <a:defRPr sz="1200" b="1" i="0">
+                <a:solidFill>
+                  <a:srgbClr val="1A1A1A"/>
+                </a:solidFill>
+                <a:latin typeface="Calibri"/>
+              </a:defRPr>
+            </a:pPr>
+            <a:r>
+              <a:t>High-risk</a:t>
+            </a:r>
+          </a:p>
+        </p:txBody>
+      </p:sp>
+      <p:sp>
+        <p:nvSpPr>
+          <p:cNvPr id="16" name="Rectangle 15"/>
+          <p:cNvSpPr/>
+          <p:nvPr/>
+        </p:nvSpPr>
+        <p:spPr>
+          <a:xfrm>
+            <a:off x="9930384" y="1344168"/>
+            <a:ext cx="1719072" cy="310896"/>
+          </a:xfrm>
+          <a:prstGeom prst="rect">
+            <a:avLst/>
+          </a:prstGeom>
+          <a:noFill/>
+          <a:ln>
+            <a:noFill/>
+          </a:ln>
+          <a:effectLst/>
+        </p:spPr>
+        <p:style>
+          <a:lnRef idx="1">
+            <a:schemeClr val="accent1"/>
+          </a:lnRef>
+          <a:fillRef idx="3">
+            <a:schemeClr val="accent1"/>
+          </a:fillRef>
+          <a:effectRef idx="2">
+            <a:schemeClr val="accent1"/>
+          </a:effectRef>
+          <a:fontRef idx="minor">
+            <a:schemeClr val="lt1"/>
+          </a:fontRef>
+        </p:style>
+        <p:txBody>
+          <a:bodyPr rtlCol="0" anchor="t" wrap="square" lIns="45720" rIns="45720" tIns="18288" bIns="18288"/>
+          <a:lstStyle/>
+          <a:p>
+            <a:pPr algn="l">
+              <a:defRPr sz="1200" b="1" i="0">
+                <a:solidFill>
+                  <a:srgbClr val="1A1A1A"/>
+                </a:solidFill>
+                <a:latin typeface="Calibri"/>
+              </a:defRPr>
+            </a:pPr>
+            <a:r>
+              <a:t>Low-risk</a:t>
+            </a:r>
+          </a:p>
+        </p:txBody>
+      </p:sp>
+      <p:sp>
+        <p:nvSpPr>
+          <p:cNvPr id="17" name="Rectangle 16"/>
+          <p:cNvSpPr/>
+          <p:nvPr/>
+        </p:nvSpPr>
+        <p:spPr>
+          <a:xfrm>
+            <a:off x="6400800" y="1673352"/>
+            <a:ext cx="5303520" cy="22860"/>
           </a:xfrm>
           <a:prstGeom prst="rect">
             <a:avLst/>
@@ -5250,176 +5761,376 @@
       </p:sp>
       <p:sp>
         <p:nvSpPr>
-          <p:cNvPr id="13" name="Rectangle 12"/>
-          <p:cNvSpPr/>
-          <p:nvPr/>
-        </p:nvSpPr>
-        <p:spPr>
-          <a:xfrm>
-            <a:off x="6446520" y="1682496"/>
-            <a:ext cx="1325880" cy="612648"/>
-          </a:xfrm>
-          <a:prstGeom prst="rect">
-            <a:avLst/>
-          </a:prstGeom>
-          <a:noFill/>
-          <a:ln>
-            <a:noFill/>
-          </a:ln>
-          <a:effectLst/>
-        </p:spPr>
-        <p:style>
-          <a:lnRef idx="1">
-            <a:schemeClr val="accent1"/>
-          </a:lnRef>
-          <a:fillRef idx="3">
-            <a:schemeClr val="accent1"/>
-          </a:fillRef>
-          <a:effectRef idx="2">
-            <a:schemeClr val="accent1"/>
-          </a:effectRef>
-          <a:fontRef idx="minor">
-            <a:schemeClr val="lt1"/>
-          </a:fontRef>
-        </p:style>
-        <p:txBody>
-          <a:bodyPr rtlCol="0" anchor="ctr" wrap="square" lIns="45720" rIns="45720" tIns="18288" bIns="18288"/>
+          <p:cNvPr id="18" name="Rectangle 17"/>
+          <p:cNvSpPr/>
+          <p:nvPr/>
+        </p:nvSpPr>
+        <p:spPr>
+          <a:xfrm>
+            <a:off x="6400800" y="1746504"/>
+            <a:ext cx="5303520" cy="658368"/>
+          </a:xfrm>
+          <a:prstGeom prst="rect">
+            <a:avLst/>
+          </a:prstGeom>
+          <a:solidFill>
+            <a:srgbClr val="F7F5F6"/>
+          </a:solidFill>
+          <a:ln>
+            <a:noFill/>
+          </a:ln>
+          <a:effectLst/>
+        </p:spPr>
+        <p:style>
+          <a:lnRef idx="1">
+            <a:schemeClr val="accent1"/>
+          </a:lnRef>
+          <a:fillRef idx="3">
+            <a:schemeClr val="accent1"/>
+          </a:fillRef>
+          <a:effectRef idx="2">
+            <a:schemeClr val="accent1"/>
+          </a:effectRef>
+          <a:fontRef idx="minor">
+            <a:schemeClr val="lt1"/>
+          </a:fontRef>
+        </p:style>
+        <p:txBody>
+          <a:bodyPr rtlCol="0" anchor="ctr"/>
+          <a:lstStyle/>
+          <a:p>
+            <a:pPr algn="ctr"/>
+          </a:p>
+        </p:txBody>
+      </p:sp>
+      <p:sp>
+        <p:nvSpPr>
+          <p:cNvPr id="19" name="Rectangle 18"/>
+          <p:cNvSpPr/>
+          <p:nvPr/>
+        </p:nvSpPr>
+        <p:spPr>
+          <a:xfrm>
+            <a:off x="6455664" y="1783080"/>
+            <a:ext cx="1444752" cy="585216"/>
+          </a:xfrm>
+          <a:prstGeom prst="rect">
+            <a:avLst/>
+          </a:prstGeom>
+          <a:noFill/>
+          <a:ln>
+            <a:noFill/>
+          </a:ln>
+          <a:effectLst/>
+        </p:spPr>
+        <p:style>
+          <a:lnRef idx="1">
+            <a:schemeClr val="accent1"/>
+          </a:lnRef>
+          <a:fillRef idx="3">
+            <a:schemeClr val="accent1"/>
+          </a:fillRef>
+          <a:effectRef idx="2">
+            <a:schemeClr val="accent1"/>
+          </a:effectRef>
+          <a:fontRef idx="minor">
+            <a:schemeClr val="lt1"/>
+          </a:fontRef>
+        </p:style>
+        <p:txBody>
+          <a:bodyPr rtlCol="0" anchor="t" wrap="square" lIns="45720" rIns="45720" tIns="18288" bIns="18288"/>
           <a:lstStyle/>
           <a:p>
             <a:pPr algn="l">
-              <a:defRPr sz="1100" b="1" i="0">
-                <a:solidFill>
-                  <a:srgbClr val="FFFFFF"/>
-                </a:solidFill>
-                <a:latin typeface="Calibri"/>
-              </a:defRPr>
-            </a:pPr>
-            <a:r>
-              <a:t>Action</a:t>
-            </a:r>
-          </a:p>
-        </p:txBody>
-      </p:sp>
-      <p:sp>
-        <p:nvSpPr>
-          <p:cNvPr id="14" name="Rectangle 13"/>
-          <p:cNvSpPr/>
-          <p:nvPr/>
-        </p:nvSpPr>
-        <p:spPr>
-          <a:xfrm>
-            <a:off x="7909560" y="1682496"/>
-            <a:ext cx="1828800" cy="612648"/>
-          </a:xfrm>
-          <a:prstGeom prst="rect">
-            <a:avLst/>
-          </a:prstGeom>
-          <a:noFill/>
-          <a:ln>
-            <a:noFill/>
-          </a:ln>
-          <a:effectLst/>
-        </p:spPr>
-        <p:style>
-          <a:lnRef idx="1">
-            <a:schemeClr val="accent1"/>
-          </a:lnRef>
-          <a:fillRef idx="3">
-            <a:schemeClr val="accent1"/>
-          </a:fillRef>
-          <a:effectRef idx="2">
-            <a:schemeClr val="accent1"/>
-          </a:effectRef>
-          <a:fontRef idx="minor">
-            <a:schemeClr val="lt1"/>
-          </a:fontRef>
-        </p:style>
-        <p:txBody>
-          <a:bodyPr rtlCol="0" anchor="ctr" wrap="square" lIns="45720" rIns="45720" tIns="18288" bIns="18288"/>
+              <a:defRPr sz="1200" b="0" i="0">
+                <a:solidFill>
+                  <a:srgbClr val="1A1A1A"/>
+                </a:solidFill>
+                <a:latin typeface="Calibri"/>
+              </a:defRPr>
+            </a:pPr>
+            <a:r>
+              <a:t>RATED</a:t>
+            </a:r>
+          </a:p>
+        </p:txBody>
+      </p:sp>
+      <p:sp>
+        <p:nvSpPr>
+          <p:cNvPr id="20" name="Rectangle 19"/>
+          <p:cNvSpPr/>
+          <p:nvPr/>
+        </p:nvSpPr>
+        <p:spPr>
+          <a:xfrm>
+            <a:off x="8010144" y="1783080"/>
+            <a:ext cx="1810512" cy="585216"/>
+          </a:xfrm>
+          <a:prstGeom prst="rect">
+            <a:avLst/>
+          </a:prstGeom>
+          <a:noFill/>
+          <a:ln>
+            <a:noFill/>
+          </a:ln>
+          <a:effectLst/>
+        </p:spPr>
+        <p:style>
+          <a:lnRef idx="1">
+            <a:schemeClr val="accent1"/>
+          </a:lnRef>
+          <a:fillRef idx="3">
+            <a:schemeClr val="accent1"/>
+          </a:fillRef>
+          <a:effectRef idx="2">
+            <a:schemeClr val="accent1"/>
+          </a:effectRef>
+          <a:fontRef idx="minor">
+            <a:schemeClr val="lt1"/>
+          </a:fontRef>
+        </p:style>
+        <p:txBody>
+          <a:bodyPr rtlCol="0" anchor="t" wrap="square" lIns="45720" rIns="45720" tIns="18288" bIns="18288"/>
           <a:lstStyle/>
           <a:p>
             <a:pPr algn="l">
-              <a:defRPr sz="1100" b="1" i="0">
-                <a:solidFill>
-                  <a:srgbClr val="FFFFFF"/>
-                </a:solidFill>
-                <a:latin typeface="Calibri"/>
-              </a:defRPr>
-            </a:pPr>
-            <a:r>
-              <a:t>High-risk applicant</a:t>
-            </a:r>
-          </a:p>
-        </p:txBody>
-      </p:sp>
-      <p:sp>
-        <p:nvSpPr>
-          <p:cNvPr id="15" name="Rectangle 14"/>
-          <p:cNvSpPr/>
-          <p:nvPr/>
-        </p:nvSpPr>
-        <p:spPr>
-          <a:xfrm>
-            <a:off x="9875520" y="1682496"/>
-            <a:ext cx="1737360" cy="612648"/>
-          </a:xfrm>
-          <a:prstGeom prst="rect">
-            <a:avLst/>
-          </a:prstGeom>
-          <a:noFill/>
-          <a:ln>
-            <a:noFill/>
-          </a:ln>
-          <a:effectLst/>
-        </p:spPr>
-        <p:style>
-          <a:lnRef idx="1">
-            <a:schemeClr val="accent1"/>
-          </a:lnRef>
-          <a:fillRef idx="3">
-            <a:schemeClr val="accent1"/>
-          </a:fillRef>
-          <a:effectRef idx="2">
-            <a:schemeClr val="accent1"/>
-          </a:effectRef>
-          <a:fontRef idx="minor">
-            <a:schemeClr val="lt1"/>
-          </a:fontRef>
-        </p:style>
-        <p:txBody>
-          <a:bodyPr rtlCol="0" anchor="ctr" wrap="square" lIns="45720" rIns="45720" tIns="18288" bIns="18288"/>
+              <a:defRPr sz="1200" b="0" i="0">
+                <a:solidFill>
+                  <a:srgbClr val="1A1A1A"/>
+                </a:solidFill>
+                <a:latin typeface="Calibri"/>
+              </a:defRPr>
+            </a:pPr>
+            <a:r>
+              <a:t>+premium − claims</a:t>
+            </a:r>
+          </a:p>
+        </p:txBody>
+      </p:sp>
+      <p:sp>
+        <p:nvSpPr>
+          <p:cNvPr id="21" name="Rectangle 20"/>
+          <p:cNvSpPr/>
+          <p:nvPr/>
+        </p:nvSpPr>
+        <p:spPr>
+          <a:xfrm>
+            <a:off x="9930384" y="1783080"/>
+            <a:ext cx="1719072" cy="585216"/>
+          </a:xfrm>
+          <a:prstGeom prst="rect">
+            <a:avLst/>
+          </a:prstGeom>
+          <a:noFill/>
+          <a:ln>
+            <a:noFill/>
+          </a:ln>
+          <a:effectLst/>
+        </p:spPr>
+        <p:style>
+          <a:lnRef idx="1">
+            <a:schemeClr val="accent1"/>
+          </a:lnRef>
+          <a:fillRef idx="3">
+            <a:schemeClr val="accent1"/>
+          </a:fillRef>
+          <a:effectRef idx="2">
+            <a:schemeClr val="accent1"/>
+          </a:effectRef>
+          <a:fontRef idx="minor">
+            <a:schemeClr val="lt1"/>
+          </a:fontRef>
+        </p:style>
+        <p:txBody>
+          <a:bodyPr rtlCol="0" anchor="t" wrap="square" lIns="45720" rIns="45720" tIns="18288" bIns="18288"/>
           <a:lstStyle/>
           <a:p>
             <a:pPr algn="l">
-              <a:defRPr sz="1100" b="1" i="0">
-                <a:solidFill>
-                  <a:srgbClr val="FFFFFF"/>
-                </a:solidFill>
-                <a:latin typeface="Calibri"/>
-              </a:defRPr>
-            </a:pPr>
-            <a:r>
-              <a:t>Low-risk applicant</a:t>
-            </a:r>
-          </a:p>
-        </p:txBody>
-      </p:sp>
-      <p:sp>
-        <p:nvSpPr>
-          <p:cNvPr id="16" name="Rectangle 15"/>
-          <p:cNvSpPr/>
-          <p:nvPr/>
-        </p:nvSpPr>
-        <p:spPr>
-          <a:xfrm>
-            <a:off x="6400800" y="2404872"/>
-            <a:ext cx="5303520" cy="758952"/>
+              <a:defRPr sz="1200" b="0" i="0">
+                <a:solidFill>
+                  <a:srgbClr val="1A1A1A"/>
+                </a:solidFill>
+                <a:latin typeface="Calibri"/>
+              </a:defRPr>
+            </a:pPr>
+            <a:r>
+              <a:t>− adverse-sel. penalty</a:t>
+            </a:r>
+          </a:p>
+        </p:txBody>
+      </p:sp>
+      <p:sp>
+        <p:nvSpPr>
+          <p:cNvPr id="22" name="Rectangle 21"/>
+          <p:cNvSpPr/>
+          <p:nvPr/>
+        </p:nvSpPr>
+        <p:spPr>
+          <a:xfrm>
+            <a:off x="6455664" y="2441448"/>
+            <a:ext cx="1444752" cy="585216"/>
+          </a:xfrm>
+          <a:prstGeom prst="rect">
+            <a:avLst/>
+          </a:prstGeom>
+          <a:noFill/>
+          <a:ln>
+            <a:noFill/>
+          </a:ln>
+          <a:effectLst/>
+        </p:spPr>
+        <p:style>
+          <a:lnRef idx="1">
+            <a:schemeClr val="accent1"/>
+          </a:lnRef>
+          <a:fillRef idx="3">
+            <a:schemeClr val="accent1"/>
+          </a:fillRef>
+          <a:effectRef idx="2">
+            <a:schemeClr val="accent1"/>
+          </a:effectRef>
+          <a:fontRef idx="minor">
+            <a:schemeClr val="lt1"/>
+          </a:fontRef>
+        </p:style>
+        <p:txBody>
+          <a:bodyPr rtlCol="0" anchor="t" wrap="square" lIns="45720" rIns="45720" tIns="18288" bIns="18288"/>
+          <a:lstStyle/>
+          <a:p>
+            <a:pPr algn="l">
+              <a:defRPr sz="1200" b="0" i="0">
+                <a:solidFill>
+                  <a:srgbClr val="1A1A1A"/>
+                </a:solidFill>
+                <a:latin typeface="Calibri"/>
+              </a:defRPr>
+            </a:pPr>
+            <a:r>
+              <a:t>STANDARD</a:t>
+            </a:r>
+          </a:p>
+        </p:txBody>
+      </p:sp>
+      <p:sp>
+        <p:nvSpPr>
+          <p:cNvPr id="23" name="Rectangle 22"/>
+          <p:cNvSpPr/>
+          <p:nvPr/>
+        </p:nvSpPr>
+        <p:spPr>
+          <a:xfrm>
+            <a:off x="8010144" y="2441448"/>
+            <a:ext cx="1810512" cy="585216"/>
+          </a:xfrm>
+          <a:prstGeom prst="rect">
+            <a:avLst/>
+          </a:prstGeom>
+          <a:noFill/>
+          <a:ln>
+            <a:noFill/>
+          </a:ln>
+          <a:effectLst/>
+        </p:spPr>
+        <p:style>
+          <a:lnRef idx="1">
+            <a:schemeClr val="accent1"/>
+          </a:lnRef>
+          <a:fillRef idx="3">
+            <a:schemeClr val="accent1"/>
+          </a:fillRef>
+          <a:effectRef idx="2">
+            <a:schemeClr val="accent1"/>
+          </a:effectRef>
+          <a:fontRef idx="minor">
+            <a:schemeClr val="lt1"/>
+          </a:fontRef>
+        </p:style>
+        <p:txBody>
+          <a:bodyPr rtlCol="0" anchor="t" wrap="square" lIns="45720" rIns="45720" tIns="18288" bIns="18288"/>
+          <a:lstStyle/>
+          <a:p>
+            <a:pPr algn="l">
+              <a:defRPr sz="1200" b="0" i="0">
+                <a:solidFill>
+                  <a:srgbClr val="1A1A1A"/>
+                </a:solidFill>
+                <a:latin typeface="Calibri"/>
+              </a:defRPr>
+            </a:pPr>
+            <a:r>
+              <a:t>+premium − claims</a:t>
+            </a:r>
+          </a:p>
+        </p:txBody>
+      </p:sp>
+      <p:sp>
+        <p:nvSpPr>
+          <p:cNvPr id="24" name="Rectangle 23"/>
+          <p:cNvSpPr/>
+          <p:nvPr/>
+        </p:nvSpPr>
+        <p:spPr>
+          <a:xfrm>
+            <a:off x="9930384" y="2441448"/>
+            <a:ext cx="1719072" cy="585216"/>
+          </a:xfrm>
+          <a:prstGeom prst="rect">
+            <a:avLst/>
+          </a:prstGeom>
+          <a:noFill/>
+          <a:ln>
+            <a:noFill/>
+          </a:ln>
+          <a:effectLst/>
+        </p:spPr>
+        <p:style>
+          <a:lnRef idx="1">
+            <a:schemeClr val="accent1"/>
+          </a:lnRef>
+          <a:fillRef idx="3">
+            <a:schemeClr val="accent1"/>
+          </a:fillRef>
+          <a:effectRef idx="2">
+            <a:schemeClr val="accent1"/>
+          </a:effectRef>
+          <a:fontRef idx="minor">
+            <a:schemeClr val="lt1"/>
+          </a:fontRef>
+        </p:style>
+        <p:txBody>
+          <a:bodyPr rtlCol="0" anchor="t" wrap="square" lIns="45720" rIns="45720" tIns="18288" bIns="18288"/>
+          <a:lstStyle/>
+          <a:p>
+            <a:pPr algn="l">
+              <a:defRPr sz="1200" b="0" i="0">
+                <a:solidFill>
+                  <a:srgbClr val="1A1A1A"/>
+                </a:solidFill>
+                <a:latin typeface="Calibri"/>
+              </a:defRPr>
+            </a:pPr>
+            <a:r>
+              <a:t>+optimal margin</a:t>
+            </a:r>
+          </a:p>
+        </p:txBody>
+      </p:sp>
+      <p:sp>
+        <p:nvSpPr>
+          <p:cNvPr id="25" name="Rectangle 24"/>
+          <p:cNvSpPr/>
+          <p:nvPr/>
+        </p:nvSpPr>
+        <p:spPr>
+          <a:xfrm>
+            <a:off x="6400800" y="3063240"/>
+            <a:ext cx="5303520" cy="658368"/>
           </a:xfrm>
           <a:prstGeom prst="rect">
             <a:avLst/>
           </a:prstGeom>
           <a:solidFill>
-            <a:srgbClr val="F2EEEF"/>
+            <a:srgbClr val="F7F5F6"/>
           </a:solidFill>
           <a:ln>
             <a:noFill/>
@@ -5450,44 +6161,44 @@
       </p:sp>
       <p:sp>
         <p:nvSpPr>
-          <p:cNvPr id="17" name="Rectangle 16"/>
-          <p:cNvSpPr/>
-          <p:nvPr/>
-        </p:nvSpPr>
-        <p:spPr>
-          <a:xfrm>
-            <a:off x="6446520" y="2478024"/>
-            <a:ext cx="1325880" cy="612648"/>
-          </a:xfrm>
-          <a:prstGeom prst="rect">
-            <a:avLst/>
-          </a:prstGeom>
-          <a:noFill/>
-          <a:ln>
-            <a:noFill/>
-          </a:ln>
-          <a:effectLst/>
-        </p:spPr>
-        <p:style>
-          <a:lnRef idx="1">
-            <a:schemeClr val="accent1"/>
-          </a:lnRef>
-          <a:fillRef idx="3">
-            <a:schemeClr val="accent1"/>
-          </a:fillRef>
-          <a:effectRef idx="2">
-            <a:schemeClr val="accent1"/>
-          </a:effectRef>
-          <a:fontRef idx="minor">
-            <a:schemeClr val="lt1"/>
-          </a:fontRef>
-        </p:style>
-        <p:txBody>
-          <a:bodyPr rtlCol="0" anchor="ctr" wrap="square" lIns="45720" rIns="45720" tIns="18288" bIns="18288"/>
+          <p:cNvPr id="26" name="Rectangle 25"/>
+          <p:cNvSpPr/>
+          <p:nvPr/>
+        </p:nvSpPr>
+        <p:spPr>
+          <a:xfrm>
+            <a:off x="6455664" y="3099816"/>
+            <a:ext cx="1444752" cy="585216"/>
+          </a:xfrm>
+          <a:prstGeom prst="rect">
+            <a:avLst/>
+          </a:prstGeom>
+          <a:noFill/>
+          <a:ln>
+            <a:noFill/>
+          </a:ln>
+          <a:effectLst/>
+        </p:spPr>
+        <p:style>
+          <a:lnRef idx="1">
+            <a:schemeClr val="accent1"/>
+          </a:lnRef>
+          <a:fillRef idx="3">
+            <a:schemeClr val="accent1"/>
+          </a:fillRef>
+          <a:effectRef idx="2">
+            <a:schemeClr val="accent1"/>
+          </a:effectRef>
+          <a:fontRef idx="minor">
+            <a:schemeClr val="lt1"/>
+          </a:fontRef>
+        </p:style>
+        <p:txBody>
+          <a:bodyPr rtlCol="0" anchor="t" wrap="square" lIns="45720" rIns="45720" tIns="18288" bIns="18288"/>
           <a:lstStyle/>
           <a:p>
             <a:pPr algn="l">
-              <a:defRPr sz="1100" b="0" i="0">
+              <a:defRPr sz="1200" b="0" i="0">
                 <a:solidFill>
                   <a:srgbClr val="1A1A1A"/>
                 </a:solidFill>
@@ -5495,51 +6206,51 @@
               </a:defRPr>
             </a:pPr>
             <a:r>
-              <a:t>RATED</a:t>
-            </a:r>
-          </a:p>
-        </p:txBody>
-      </p:sp>
-      <p:sp>
-        <p:nvSpPr>
-          <p:cNvPr id="18" name="Rectangle 17"/>
-          <p:cNvSpPr/>
-          <p:nvPr/>
-        </p:nvSpPr>
-        <p:spPr>
-          <a:xfrm>
-            <a:off x="7909560" y="2478024"/>
-            <a:ext cx="1828800" cy="612648"/>
-          </a:xfrm>
-          <a:prstGeom prst="rect">
-            <a:avLst/>
-          </a:prstGeom>
-          <a:noFill/>
-          <a:ln>
-            <a:noFill/>
-          </a:ln>
-          <a:effectLst/>
-        </p:spPr>
-        <p:style>
-          <a:lnRef idx="1">
-            <a:schemeClr val="accent1"/>
-          </a:lnRef>
-          <a:fillRef idx="3">
-            <a:schemeClr val="accent1"/>
-          </a:fillRef>
-          <a:effectRef idx="2">
-            <a:schemeClr val="accent1"/>
-          </a:effectRef>
-          <a:fontRef idx="minor">
-            <a:schemeClr val="lt1"/>
-          </a:fontRef>
-        </p:style>
-        <p:txBody>
-          <a:bodyPr rtlCol="0" anchor="ctr" wrap="square" lIns="45720" rIns="45720" tIns="18288" bIns="18288"/>
+              <a:t>DECLINE</a:t>
+            </a:r>
+          </a:p>
+        </p:txBody>
+      </p:sp>
+      <p:sp>
+        <p:nvSpPr>
+          <p:cNvPr id="27" name="Rectangle 26"/>
+          <p:cNvSpPr/>
+          <p:nvPr/>
+        </p:nvSpPr>
+        <p:spPr>
+          <a:xfrm>
+            <a:off x="8010144" y="3099816"/>
+            <a:ext cx="1810512" cy="585216"/>
+          </a:xfrm>
+          <a:prstGeom prst="rect">
+            <a:avLst/>
+          </a:prstGeom>
+          <a:noFill/>
+          <a:ln>
+            <a:noFill/>
+          </a:ln>
+          <a:effectLst/>
+        </p:spPr>
+        <p:style>
+          <a:lnRef idx="1">
+            <a:schemeClr val="accent1"/>
+          </a:lnRef>
+          <a:fillRef idx="3">
+            <a:schemeClr val="accent1"/>
+          </a:fillRef>
+          <a:effectRef idx="2">
+            <a:schemeClr val="accent1"/>
+          </a:effectRef>
+          <a:fontRef idx="minor">
+            <a:schemeClr val="lt1"/>
+          </a:fontRef>
+        </p:style>
+        <p:txBody>
+          <a:bodyPr rtlCol="0" anchor="t" wrap="square" lIns="45720" rIns="45720" tIns="18288" bIns="18288"/>
           <a:lstStyle/>
           <a:p>
             <a:pPr algn="l">
-              <a:defRPr sz="1100" b="0" i="0">
+              <a:defRPr sz="1200" b="0" i="0">
                 <a:solidFill>
                   <a:srgbClr val="1A1A1A"/>
                 </a:solidFill>
@@ -5547,51 +6258,51 @@
               </a:defRPr>
             </a:pPr>
             <a:r>
-              <a:t>+premium − claims</a:t>
-            </a:r>
-          </a:p>
-        </p:txBody>
-      </p:sp>
-      <p:sp>
-        <p:nvSpPr>
-          <p:cNvPr id="19" name="Rectangle 18"/>
-          <p:cNvSpPr/>
-          <p:nvPr/>
-        </p:nvSpPr>
-        <p:spPr>
-          <a:xfrm>
-            <a:off x="9875520" y="2478024"/>
-            <a:ext cx="1737360" cy="612648"/>
-          </a:xfrm>
-          <a:prstGeom prst="rect">
-            <a:avLst/>
-          </a:prstGeom>
-          <a:noFill/>
-          <a:ln>
-            <a:noFill/>
-          </a:ln>
-          <a:effectLst/>
-        </p:spPr>
-        <p:style>
-          <a:lnRef idx="1">
-            <a:schemeClr val="accent1"/>
-          </a:lnRef>
-          <a:fillRef idx="3">
-            <a:schemeClr val="accent1"/>
-          </a:fillRef>
-          <a:effectRef idx="2">
-            <a:schemeClr val="accent1"/>
-          </a:effectRef>
-          <a:fontRef idx="minor">
-            <a:schemeClr val="lt1"/>
-          </a:fontRef>
-        </p:style>
-        <p:txBody>
-          <a:bodyPr rtlCol="0" anchor="ctr" wrap="square" lIns="45720" rIns="45720" tIns="18288" bIns="18288"/>
+              <a:t>0 (avoided loss)</a:t>
+            </a:r>
+          </a:p>
+        </p:txBody>
+      </p:sp>
+      <p:sp>
+        <p:nvSpPr>
+          <p:cNvPr id="28" name="Rectangle 27"/>
+          <p:cNvSpPr/>
+          <p:nvPr/>
+        </p:nvSpPr>
+        <p:spPr>
+          <a:xfrm>
+            <a:off x="9930384" y="3099816"/>
+            <a:ext cx="1719072" cy="585216"/>
+          </a:xfrm>
+          <a:prstGeom prst="rect">
+            <a:avLst/>
+          </a:prstGeom>
+          <a:noFill/>
+          <a:ln>
+            <a:noFill/>
+          </a:ln>
+          <a:effectLst/>
+        </p:spPr>
+        <p:style>
+          <a:lnRef idx="1">
+            <a:schemeClr val="accent1"/>
+          </a:lnRef>
+          <a:fillRef idx="3">
+            <a:schemeClr val="accent1"/>
+          </a:fillRef>
+          <a:effectRef idx="2">
+            <a:schemeClr val="accent1"/>
+          </a:effectRef>
+          <a:fontRef idx="minor">
+            <a:schemeClr val="lt1"/>
+          </a:fontRef>
+        </p:style>
+        <p:txBody>
+          <a:bodyPr rtlCol="0" anchor="t" wrap="square" lIns="45720" rIns="45720" tIns="18288" bIns="18288"/>
           <a:lstStyle/>
           <a:p>
             <a:pPr algn="l">
-              <a:defRPr sz="1100" b="0" i="0">
+              <a:defRPr sz="1200" b="0" i="0">
                 <a:solidFill>
                   <a:srgbClr val="1A1A1A"/>
                 </a:solidFill>
@@ -5599,95 +6310,51 @@
               </a:defRPr>
             </a:pPr>
             <a:r>
-              <a:t>− adverse-sel. penalty</a:t>
-            </a:r>
-          </a:p>
-        </p:txBody>
-      </p:sp>
-      <p:sp>
-        <p:nvSpPr>
-          <p:cNvPr id="20" name="Rectangle 19"/>
-          <p:cNvSpPr/>
-          <p:nvPr/>
-        </p:nvSpPr>
-        <p:spPr>
-          <a:xfrm>
-            <a:off x="6400800" y="3200400"/>
-            <a:ext cx="5303520" cy="758952"/>
-          </a:xfrm>
-          <a:prstGeom prst="rect">
-            <a:avLst/>
-          </a:prstGeom>
-          <a:solidFill>
-            <a:srgbClr val="FFFFFF"/>
-          </a:solidFill>
-          <a:ln>
-            <a:noFill/>
-          </a:ln>
-          <a:effectLst/>
-        </p:spPr>
-        <p:style>
-          <a:lnRef idx="1">
-            <a:schemeClr val="accent1"/>
-          </a:lnRef>
-          <a:fillRef idx="3">
-            <a:schemeClr val="accent1"/>
-          </a:fillRef>
-          <a:effectRef idx="2">
-            <a:schemeClr val="accent1"/>
-          </a:effectRef>
-          <a:fontRef idx="minor">
-            <a:schemeClr val="lt1"/>
-          </a:fontRef>
-        </p:style>
-        <p:txBody>
-          <a:bodyPr rtlCol="0" anchor="ctr"/>
-          <a:lstStyle/>
-          <a:p>
-            <a:pPr algn="ctr"/>
-          </a:p>
-        </p:txBody>
-      </p:sp>
-      <p:sp>
-        <p:nvSpPr>
-          <p:cNvPr id="21" name="Rectangle 20"/>
-          <p:cNvSpPr/>
-          <p:nvPr/>
-        </p:nvSpPr>
-        <p:spPr>
-          <a:xfrm>
-            <a:off x="6446520" y="3273552"/>
-            <a:ext cx="1325880" cy="612648"/>
-          </a:xfrm>
-          <a:prstGeom prst="rect">
-            <a:avLst/>
-          </a:prstGeom>
-          <a:noFill/>
-          <a:ln>
-            <a:noFill/>
-          </a:ln>
-          <a:effectLst/>
-        </p:spPr>
-        <p:style>
-          <a:lnRef idx="1">
-            <a:schemeClr val="accent1"/>
-          </a:lnRef>
-          <a:fillRef idx="3">
-            <a:schemeClr val="accent1"/>
-          </a:fillRef>
-          <a:effectRef idx="2">
-            <a:schemeClr val="accent1"/>
-          </a:effectRef>
-          <a:fontRef idx="minor">
-            <a:schemeClr val="lt1"/>
-          </a:fontRef>
-        </p:style>
-        <p:txBody>
-          <a:bodyPr rtlCol="0" anchor="ctr" wrap="square" lIns="45720" rIns="45720" tIns="18288" bIns="18288"/>
+              <a:t>− missed revenue</a:t>
+            </a:r>
+          </a:p>
+        </p:txBody>
+      </p:sp>
+      <p:sp>
+        <p:nvSpPr>
+          <p:cNvPr id="29" name="Rectangle 28"/>
+          <p:cNvSpPr/>
+          <p:nvPr/>
+        </p:nvSpPr>
+        <p:spPr>
+          <a:xfrm>
+            <a:off x="6455664" y="3758184"/>
+            <a:ext cx="1444752" cy="585216"/>
+          </a:xfrm>
+          <a:prstGeom prst="rect">
+            <a:avLst/>
+          </a:prstGeom>
+          <a:noFill/>
+          <a:ln>
+            <a:noFill/>
+          </a:ln>
+          <a:effectLst/>
+        </p:spPr>
+        <p:style>
+          <a:lnRef idx="1">
+            <a:schemeClr val="accent1"/>
+          </a:lnRef>
+          <a:fillRef idx="3">
+            <a:schemeClr val="accent1"/>
+          </a:fillRef>
+          <a:effectRef idx="2">
+            <a:schemeClr val="accent1"/>
+          </a:effectRef>
+          <a:fontRef idx="minor">
+            <a:schemeClr val="lt1"/>
+          </a:fontRef>
+        </p:style>
+        <p:txBody>
+          <a:bodyPr rtlCol="0" anchor="t" wrap="square" lIns="45720" rIns="45720" tIns="18288" bIns="18288"/>
           <a:lstStyle/>
           <a:p>
             <a:pPr algn="l">
-              <a:defRPr sz="1100" b="0" i="0">
+              <a:defRPr sz="1200" b="0" i="0">
                 <a:solidFill>
                   <a:srgbClr val="1A1A1A"/>
                 </a:solidFill>
@@ -5695,51 +6362,51 @@
               </a:defRPr>
             </a:pPr>
             <a:r>
-              <a:t>STANDARD</a:t>
-            </a:r>
-          </a:p>
-        </p:txBody>
-      </p:sp>
-      <p:sp>
-        <p:nvSpPr>
-          <p:cNvPr id="22" name="Rectangle 21"/>
-          <p:cNvSpPr/>
-          <p:nvPr/>
-        </p:nvSpPr>
-        <p:spPr>
-          <a:xfrm>
-            <a:off x="7909560" y="3273552"/>
-            <a:ext cx="1828800" cy="612648"/>
-          </a:xfrm>
-          <a:prstGeom prst="rect">
-            <a:avLst/>
-          </a:prstGeom>
-          <a:noFill/>
-          <a:ln>
-            <a:noFill/>
-          </a:ln>
-          <a:effectLst/>
-        </p:spPr>
-        <p:style>
-          <a:lnRef idx="1">
-            <a:schemeClr val="accent1"/>
-          </a:lnRef>
-          <a:fillRef idx="3">
-            <a:schemeClr val="accent1"/>
-          </a:fillRef>
-          <a:effectRef idx="2">
-            <a:schemeClr val="accent1"/>
-          </a:effectRef>
-          <a:fontRef idx="minor">
-            <a:schemeClr val="lt1"/>
-          </a:fontRef>
-        </p:style>
-        <p:txBody>
-          <a:bodyPr rtlCol="0" anchor="ctr" wrap="square" lIns="45720" rIns="45720" tIns="18288" bIns="18288"/>
+              <a:t>REFER</a:t>
+            </a:r>
+          </a:p>
+        </p:txBody>
+      </p:sp>
+      <p:sp>
+        <p:nvSpPr>
+          <p:cNvPr id="30" name="Rectangle 29"/>
+          <p:cNvSpPr/>
+          <p:nvPr/>
+        </p:nvSpPr>
+        <p:spPr>
+          <a:xfrm>
+            <a:off x="8010144" y="3758184"/>
+            <a:ext cx="1810512" cy="585216"/>
+          </a:xfrm>
+          <a:prstGeom prst="rect">
+            <a:avLst/>
+          </a:prstGeom>
+          <a:noFill/>
+          <a:ln>
+            <a:noFill/>
+          </a:ln>
+          <a:effectLst/>
+        </p:spPr>
+        <p:style>
+          <a:lnRef idx="1">
+            <a:schemeClr val="accent1"/>
+          </a:lnRef>
+          <a:fillRef idx="3">
+            <a:schemeClr val="accent1"/>
+          </a:fillRef>
+          <a:effectRef idx="2">
+            <a:schemeClr val="accent1"/>
+          </a:effectRef>
+          <a:fontRef idx="minor">
+            <a:schemeClr val="lt1"/>
+          </a:fontRef>
+        </p:style>
+        <p:txBody>
+          <a:bodyPr rtlCol="0" anchor="t" wrap="square" lIns="45720" rIns="45720" tIns="18288" bIns="18288"/>
           <a:lstStyle/>
           <a:p>
             <a:pPr algn="l">
-              <a:defRPr sz="1100" b="0" i="0">
+              <a:defRPr sz="1200" b="0" i="0">
                 <a:solidFill>
                   <a:srgbClr val="1A1A1A"/>
                 </a:solidFill>
@@ -5747,451 +6414,51 @@
               </a:defRPr>
             </a:pPr>
             <a:r>
-              <a:t>+premium − claims</a:t>
-            </a:r>
-          </a:p>
-        </p:txBody>
-      </p:sp>
-      <p:sp>
-        <p:nvSpPr>
-          <p:cNvPr id="23" name="Rectangle 22"/>
-          <p:cNvSpPr/>
-          <p:nvPr/>
-        </p:nvSpPr>
-        <p:spPr>
-          <a:xfrm>
-            <a:off x="9875520" y="3273552"/>
-            <a:ext cx="1737360" cy="612648"/>
-          </a:xfrm>
-          <a:prstGeom prst="rect">
-            <a:avLst/>
-          </a:prstGeom>
-          <a:noFill/>
-          <a:ln>
-            <a:noFill/>
-          </a:ln>
-          <a:effectLst/>
-        </p:spPr>
-        <p:style>
-          <a:lnRef idx="1">
-            <a:schemeClr val="accent1"/>
-          </a:lnRef>
-          <a:fillRef idx="3">
-            <a:schemeClr val="accent1"/>
-          </a:fillRef>
-          <a:effectRef idx="2">
-            <a:schemeClr val="accent1"/>
-          </a:effectRef>
-          <a:fontRef idx="minor">
-            <a:schemeClr val="lt1"/>
-          </a:fontRef>
-        </p:style>
-        <p:txBody>
-          <a:bodyPr rtlCol="0" anchor="ctr" wrap="square" lIns="45720" rIns="45720" tIns="18288" bIns="18288"/>
+              <a:t>+human decision net</a:t>
+            </a:r>
+          </a:p>
+        </p:txBody>
+      </p:sp>
+      <p:sp>
+        <p:nvSpPr>
+          <p:cNvPr id="31" name="Rectangle 30"/>
+          <p:cNvSpPr/>
+          <p:nvPr/>
+        </p:nvSpPr>
+        <p:spPr>
+          <a:xfrm>
+            <a:off x="9930384" y="3758184"/>
+            <a:ext cx="1719072" cy="585216"/>
+          </a:xfrm>
+          <a:prstGeom prst="rect">
+            <a:avLst/>
+          </a:prstGeom>
+          <a:noFill/>
+          <a:ln>
+            <a:noFill/>
+          </a:ln>
+          <a:effectLst/>
+        </p:spPr>
+        <p:style>
+          <a:lnRef idx="1">
+            <a:schemeClr val="accent1"/>
+          </a:lnRef>
+          <a:fillRef idx="3">
+            <a:schemeClr val="accent1"/>
+          </a:fillRef>
+          <a:effectRef idx="2">
+            <a:schemeClr val="accent1"/>
+          </a:effectRef>
+          <a:fontRef idx="minor">
+            <a:schemeClr val="lt1"/>
+          </a:fontRef>
+        </p:style>
+        <p:txBody>
+          <a:bodyPr rtlCol="0" anchor="t" wrap="square" lIns="45720" rIns="45720" tIns="18288" bIns="18288"/>
           <a:lstStyle/>
           <a:p>
             <a:pPr algn="l">
-              <a:defRPr sz="1100" b="0" i="0">
-                <a:solidFill>
-                  <a:srgbClr val="1A1A1A"/>
-                </a:solidFill>
-                <a:latin typeface="Calibri"/>
-              </a:defRPr>
-            </a:pPr>
-            <a:r>
-              <a:t>+optimal margin</a:t>
-            </a:r>
-          </a:p>
-        </p:txBody>
-      </p:sp>
-      <p:sp>
-        <p:nvSpPr>
-          <p:cNvPr id="24" name="Rectangle 23"/>
-          <p:cNvSpPr/>
-          <p:nvPr/>
-        </p:nvSpPr>
-        <p:spPr>
-          <a:xfrm>
-            <a:off x="6400800" y="3995928"/>
-            <a:ext cx="5303520" cy="758952"/>
-          </a:xfrm>
-          <a:prstGeom prst="rect">
-            <a:avLst/>
-          </a:prstGeom>
-          <a:solidFill>
-            <a:srgbClr val="F2EEEF"/>
-          </a:solidFill>
-          <a:ln>
-            <a:noFill/>
-          </a:ln>
-          <a:effectLst/>
-        </p:spPr>
-        <p:style>
-          <a:lnRef idx="1">
-            <a:schemeClr val="accent1"/>
-          </a:lnRef>
-          <a:fillRef idx="3">
-            <a:schemeClr val="accent1"/>
-          </a:fillRef>
-          <a:effectRef idx="2">
-            <a:schemeClr val="accent1"/>
-          </a:effectRef>
-          <a:fontRef idx="minor">
-            <a:schemeClr val="lt1"/>
-          </a:fontRef>
-        </p:style>
-        <p:txBody>
-          <a:bodyPr rtlCol="0" anchor="ctr"/>
-          <a:lstStyle/>
-          <a:p>
-            <a:pPr algn="ctr"/>
-          </a:p>
-        </p:txBody>
-      </p:sp>
-      <p:sp>
-        <p:nvSpPr>
-          <p:cNvPr id="25" name="Rectangle 24"/>
-          <p:cNvSpPr/>
-          <p:nvPr/>
-        </p:nvSpPr>
-        <p:spPr>
-          <a:xfrm>
-            <a:off x="6446520" y="4069080"/>
-            <a:ext cx="1325880" cy="612648"/>
-          </a:xfrm>
-          <a:prstGeom prst="rect">
-            <a:avLst/>
-          </a:prstGeom>
-          <a:noFill/>
-          <a:ln>
-            <a:noFill/>
-          </a:ln>
-          <a:effectLst/>
-        </p:spPr>
-        <p:style>
-          <a:lnRef idx="1">
-            <a:schemeClr val="accent1"/>
-          </a:lnRef>
-          <a:fillRef idx="3">
-            <a:schemeClr val="accent1"/>
-          </a:fillRef>
-          <a:effectRef idx="2">
-            <a:schemeClr val="accent1"/>
-          </a:effectRef>
-          <a:fontRef idx="minor">
-            <a:schemeClr val="lt1"/>
-          </a:fontRef>
-        </p:style>
-        <p:txBody>
-          <a:bodyPr rtlCol="0" anchor="ctr" wrap="square" lIns="45720" rIns="45720" tIns="18288" bIns="18288"/>
-          <a:lstStyle/>
-          <a:p>
-            <a:pPr algn="l">
-              <a:defRPr sz="1100" b="0" i="0">
-                <a:solidFill>
-                  <a:srgbClr val="1A1A1A"/>
-                </a:solidFill>
-                <a:latin typeface="Calibri"/>
-              </a:defRPr>
-            </a:pPr>
-            <a:r>
-              <a:t>DECLINE</a:t>
-            </a:r>
-          </a:p>
-        </p:txBody>
-      </p:sp>
-      <p:sp>
-        <p:nvSpPr>
-          <p:cNvPr id="26" name="Rectangle 25"/>
-          <p:cNvSpPr/>
-          <p:nvPr/>
-        </p:nvSpPr>
-        <p:spPr>
-          <a:xfrm>
-            <a:off x="7909560" y="4069080"/>
-            <a:ext cx="1828800" cy="612648"/>
-          </a:xfrm>
-          <a:prstGeom prst="rect">
-            <a:avLst/>
-          </a:prstGeom>
-          <a:noFill/>
-          <a:ln>
-            <a:noFill/>
-          </a:ln>
-          <a:effectLst/>
-        </p:spPr>
-        <p:style>
-          <a:lnRef idx="1">
-            <a:schemeClr val="accent1"/>
-          </a:lnRef>
-          <a:fillRef idx="3">
-            <a:schemeClr val="accent1"/>
-          </a:fillRef>
-          <a:effectRef idx="2">
-            <a:schemeClr val="accent1"/>
-          </a:effectRef>
-          <a:fontRef idx="minor">
-            <a:schemeClr val="lt1"/>
-          </a:fontRef>
-        </p:style>
-        <p:txBody>
-          <a:bodyPr rtlCol="0" anchor="ctr" wrap="square" lIns="45720" rIns="45720" tIns="18288" bIns="18288"/>
-          <a:lstStyle/>
-          <a:p>
-            <a:pPr algn="l">
-              <a:defRPr sz="1100" b="0" i="0">
-                <a:solidFill>
-                  <a:srgbClr val="1A1A1A"/>
-                </a:solidFill>
-                <a:latin typeface="Calibri"/>
-              </a:defRPr>
-            </a:pPr>
-            <a:r>
-              <a:t>0 (avoided loss)</a:t>
-            </a:r>
-          </a:p>
-        </p:txBody>
-      </p:sp>
-      <p:sp>
-        <p:nvSpPr>
-          <p:cNvPr id="27" name="Rectangle 26"/>
-          <p:cNvSpPr/>
-          <p:nvPr/>
-        </p:nvSpPr>
-        <p:spPr>
-          <a:xfrm>
-            <a:off x="9875520" y="4069080"/>
-            <a:ext cx="1737360" cy="612648"/>
-          </a:xfrm>
-          <a:prstGeom prst="rect">
-            <a:avLst/>
-          </a:prstGeom>
-          <a:noFill/>
-          <a:ln>
-            <a:noFill/>
-          </a:ln>
-          <a:effectLst/>
-        </p:spPr>
-        <p:style>
-          <a:lnRef idx="1">
-            <a:schemeClr val="accent1"/>
-          </a:lnRef>
-          <a:fillRef idx="3">
-            <a:schemeClr val="accent1"/>
-          </a:fillRef>
-          <a:effectRef idx="2">
-            <a:schemeClr val="accent1"/>
-          </a:effectRef>
-          <a:fontRef idx="minor">
-            <a:schemeClr val="lt1"/>
-          </a:fontRef>
-        </p:style>
-        <p:txBody>
-          <a:bodyPr rtlCol="0" anchor="ctr" wrap="square" lIns="45720" rIns="45720" tIns="18288" bIns="18288"/>
-          <a:lstStyle/>
-          <a:p>
-            <a:pPr algn="l">
-              <a:defRPr sz="1100" b="0" i="0">
-                <a:solidFill>
-                  <a:srgbClr val="1A1A1A"/>
-                </a:solidFill>
-                <a:latin typeface="Calibri"/>
-              </a:defRPr>
-            </a:pPr>
-            <a:r>
-              <a:t>− missed revenue</a:t>
-            </a:r>
-          </a:p>
-        </p:txBody>
-      </p:sp>
-      <p:sp>
-        <p:nvSpPr>
-          <p:cNvPr id="28" name="Rectangle 27"/>
-          <p:cNvSpPr/>
-          <p:nvPr/>
-        </p:nvSpPr>
-        <p:spPr>
-          <a:xfrm>
-            <a:off x="6400800" y="4791456"/>
-            <a:ext cx="5303520" cy="758952"/>
-          </a:xfrm>
-          <a:prstGeom prst="rect">
-            <a:avLst/>
-          </a:prstGeom>
-          <a:solidFill>
-            <a:srgbClr val="FFFFFF"/>
-          </a:solidFill>
-          <a:ln>
-            <a:noFill/>
-          </a:ln>
-          <a:effectLst/>
-        </p:spPr>
-        <p:style>
-          <a:lnRef idx="1">
-            <a:schemeClr val="accent1"/>
-          </a:lnRef>
-          <a:fillRef idx="3">
-            <a:schemeClr val="accent1"/>
-          </a:fillRef>
-          <a:effectRef idx="2">
-            <a:schemeClr val="accent1"/>
-          </a:effectRef>
-          <a:fontRef idx="minor">
-            <a:schemeClr val="lt1"/>
-          </a:fontRef>
-        </p:style>
-        <p:txBody>
-          <a:bodyPr rtlCol="0" anchor="ctr"/>
-          <a:lstStyle/>
-          <a:p>
-            <a:pPr algn="ctr"/>
-          </a:p>
-        </p:txBody>
-      </p:sp>
-      <p:sp>
-        <p:nvSpPr>
-          <p:cNvPr id="29" name="Rectangle 28"/>
-          <p:cNvSpPr/>
-          <p:nvPr/>
-        </p:nvSpPr>
-        <p:spPr>
-          <a:xfrm>
-            <a:off x="6446520" y="4864608"/>
-            <a:ext cx="1325880" cy="612648"/>
-          </a:xfrm>
-          <a:prstGeom prst="rect">
-            <a:avLst/>
-          </a:prstGeom>
-          <a:noFill/>
-          <a:ln>
-            <a:noFill/>
-          </a:ln>
-          <a:effectLst/>
-        </p:spPr>
-        <p:style>
-          <a:lnRef idx="1">
-            <a:schemeClr val="accent1"/>
-          </a:lnRef>
-          <a:fillRef idx="3">
-            <a:schemeClr val="accent1"/>
-          </a:fillRef>
-          <a:effectRef idx="2">
-            <a:schemeClr val="accent1"/>
-          </a:effectRef>
-          <a:fontRef idx="minor">
-            <a:schemeClr val="lt1"/>
-          </a:fontRef>
-        </p:style>
-        <p:txBody>
-          <a:bodyPr rtlCol="0" anchor="ctr" wrap="square" lIns="45720" rIns="45720" tIns="18288" bIns="18288"/>
-          <a:lstStyle/>
-          <a:p>
-            <a:pPr algn="l">
-              <a:defRPr sz="1100" b="0" i="0">
-                <a:solidFill>
-                  <a:srgbClr val="1A1A1A"/>
-                </a:solidFill>
-                <a:latin typeface="Calibri"/>
-              </a:defRPr>
-            </a:pPr>
-            <a:r>
-              <a:t>REFER</a:t>
-            </a:r>
-          </a:p>
-        </p:txBody>
-      </p:sp>
-      <p:sp>
-        <p:nvSpPr>
-          <p:cNvPr id="30" name="Rectangle 29"/>
-          <p:cNvSpPr/>
-          <p:nvPr/>
-        </p:nvSpPr>
-        <p:spPr>
-          <a:xfrm>
-            <a:off x="7909560" y="4864608"/>
-            <a:ext cx="1828800" cy="612648"/>
-          </a:xfrm>
-          <a:prstGeom prst="rect">
-            <a:avLst/>
-          </a:prstGeom>
-          <a:noFill/>
-          <a:ln>
-            <a:noFill/>
-          </a:ln>
-          <a:effectLst/>
-        </p:spPr>
-        <p:style>
-          <a:lnRef idx="1">
-            <a:schemeClr val="accent1"/>
-          </a:lnRef>
-          <a:fillRef idx="3">
-            <a:schemeClr val="accent1"/>
-          </a:fillRef>
-          <a:effectRef idx="2">
-            <a:schemeClr val="accent1"/>
-          </a:effectRef>
-          <a:fontRef idx="minor">
-            <a:schemeClr val="lt1"/>
-          </a:fontRef>
-        </p:style>
-        <p:txBody>
-          <a:bodyPr rtlCol="0" anchor="ctr" wrap="square" lIns="45720" rIns="45720" tIns="18288" bIns="18288"/>
-          <a:lstStyle/>
-          <a:p>
-            <a:pPr algn="l">
-              <a:defRPr sz="1100" b="0" i="0">
-                <a:solidFill>
-                  <a:srgbClr val="1A1A1A"/>
-                </a:solidFill>
-                <a:latin typeface="Calibri"/>
-              </a:defRPr>
-            </a:pPr>
-            <a:r>
-              <a:t>+human decision net</a:t>
-            </a:r>
-          </a:p>
-        </p:txBody>
-      </p:sp>
-      <p:sp>
-        <p:nvSpPr>
-          <p:cNvPr id="31" name="Rectangle 30"/>
-          <p:cNvSpPr/>
-          <p:nvPr/>
-        </p:nvSpPr>
-        <p:spPr>
-          <a:xfrm>
-            <a:off x="9875520" y="4864608"/>
-            <a:ext cx="1737360" cy="612648"/>
-          </a:xfrm>
-          <a:prstGeom prst="rect">
-            <a:avLst/>
-          </a:prstGeom>
-          <a:noFill/>
-          <a:ln>
-            <a:noFill/>
-          </a:ln>
-          <a:effectLst/>
-        </p:spPr>
-        <p:style>
-          <a:lnRef idx="1">
-            <a:schemeClr val="accent1"/>
-          </a:lnRef>
-          <a:fillRef idx="3">
-            <a:schemeClr val="accent1"/>
-          </a:fillRef>
-          <a:effectRef idx="2">
-            <a:schemeClr val="accent1"/>
-          </a:effectRef>
-          <a:fontRef idx="minor">
-            <a:schemeClr val="lt1"/>
-          </a:fontRef>
-        </p:style>
-        <p:txBody>
-          <a:bodyPr rtlCol="0" anchor="ctr" wrap="square" lIns="45720" rIns="45720" tIns="18288" bIns="18288"/>
-          <a:lstStyle/>
-          <a:p>
-            <a:pPr algn="l">
-              <a:defRPr sz="1100" b="0" i="0">
+              <a:defRPr sz="1200" b="0" i="0">
                 <a:solidFill>
                   <a:srgbClr val="1A1A1A"/>
                 </a:solidFill>
@@ -6483,60 +6750,8 @@
         </p:nvSpPr>
         <p:spPr>
           <a:xfrm>
-            <a:off x="457200" y="1207008"/>
-            <a:ext cx="11277295" cy="329184"/>
-          </a:xfrm>
-          <a:prstGeom prst="rect">
-            <a:avLst/>
-          </a:prstGeom>
-          <a:noFill/>
-          <a:ln>
-            <a:noFill/>
-          </a:ln>
-          <a:effectLst/>
-        </p:spPr>
-        <p:style>
-          <a:lnRef idx="1">
-            <a:schemeClr val="accent1"/>
-          </a:lnRef>
-          <a:fillRef idx="3">
-            <a:schemeClr val="accent1"/>
-          </a:fillRef>
-          <a:effectRef idx="2">
-            <a:schemeClr val="accent1"/>
-          </a:effectRef>
-          <a:fontRef idx="minor">
-            <a:schemeClr val="lt1"/>
-          </a:fontRef>
-        </p:style>
-        <p:txBody>
-          <a:bodyPr rtlCol="0" anchor="t" wrap="square" lIns="45720" rIns="45720" tIns="18288" bIns="18288"/>
-          <a:lstStyle/>
-          <a:p>
-            <a:pPr algn="l">
-              <a:defRPr sz="1400" b="1" i="0">
-                <a:solidFill>
-                  <a:srgbClr val="5D2A42"/>
-                </a:solidFill>
-                <a:latin typeface="Calibri"/>
-              </a:defRPr>
-            </a:pPr>
-            <a:r>
-              <a:t>Proposed policies (ranked by admissibility)</a:t>
-            </a:r>
-          </a:p>
-        </p:txBody>
-      </p:sp>
-      <p:sp>
-        <p:nvSpPr>
-          <p:cNvPr id="8" name="Rectangle 7"/>
-          <p:cNvSpPr/>
-          <p:nvPr/>
-        </p:nvSpPr>
-        <p:spPr>
-          <a:xfrm>
-            <a:off x="457200" y="1682496"/>
-            <a:ext cx="201168" cy="438912"/>
+            <a:off x="457200" y="1490472"/>
+            <a:ext cx="146304" cy="457200"/>
           </a:xfrm>
           <a:prstGeom prst="rect">
             <a:avLst/>
@@ -6573,14 +6788,66 @@
       </p:sp>
       <p:sp>
         <p:nvSpPr>
+          <p:cNvPr id="8" name="Rectangle 7"/>
+          <p:cNvSpPr/>
+          <p:nvPr/>
+        </p:nvSpPr>
+        <p:spPr>
+          <a:xfrm>
+            <a:off x="822960" y="1435608"/>
+            <a:ext cx="2377440" cy="457200"/>
+          </a:xfrm>
+          <a:prstGeom prst="rect">
+            <a:avLst/>
+          </a:prstGeom>
+          <a:noFill/>
+          <a:ln>
+            <a:noFill/>
+          </a:ln>
+          <a:effectLst/>
+        </p:spPr>
+        <p:style>
+          <a:lnRef idx="1">
+            <a:schemeClr val="accent1"/>
+          </a:lnRef>
+          <a:fillRef idx="3">
+            <a:schemeClr val="accent1"/>
+          </a:fillRef>
+          <a:effectRef idx="2">
+            <a:schemeClr val="accent1"/>
+          </a:effectRef>
+          <a:fontRef idx="minor">
+            <a:schemeClr val="lt1"/>
+          </a:fontRef>
+        </p:style>
+        <p:txBody>
+          <a:bodyPr rtlCol="0" anchor="t" wrap="square" lIns="45720" rIns="45720" tIns="18288" bIns="18288"/>
+          <a:lstStyle/>
+          <a:p>
+            <a:pPr algn="l">
+              <a:defRPr sz="1800" b="1" i="0">
+                <a:solidFill>
+                  <a:srgbClr val="1A1A1A"/>
+                </a:solidFill>
+                <a:latin typeface="Calibri"/>
+              </a:defRPr>
+            </a:pPr>
+            <a:r>
+              <a:t>LinUCB</a:t>
+            </a:r>
+          </a:p>
+        </p:txBody>
+      </p:sp>
+      <p:sp>
+        <p:nvSpPr>
           <p:cNvPr id="9" name="Rectangle 8"/>
           <p:cNvSpPr/>
           <p:nvPr/>
         </p:nvSpPr>
         <p:spPr>
           <a:xfrm>
-            <a:off x="749808" y="1618488"/>
-            <a:ext cx="1691640" cy="566928"/>
+            <a:off x="3383280" y="1481328"/>
+            <a:ext cx="8412480" cy="457200"/>
           </a:xfrm>
           <a:prstGeom prst="rect">
             <a:avLst/>
@@ -6610,15 +6877,15 @@
           <a:lstStyle/>
           <a:p>
             <a:pPr algn="l">
-              <a:defRPr sz="1400" b="1" i="0">
-                <a:solidFill>
-                  <a:srgbClr val="1A1A1A"/>
-                </a:solidFill>
-                <a:latin typeface="Calibri"/>
-              </a:defRPr>
-            </a:pPr>
-            <a:r>
-              <a:t>LinUCB</a:t>
+              <a:defRPr sz="1500" b="0" i="0">
+                <a:solidFill>
+                  <a:srgbClr val="3A3A3A"/>
+                </a:solidFill>
+                <a:latin typeface="Calibri"/>
+              </a:defRPr>
+            </a:pPr>
+            <a:r>
+              <a:t>Optimism under uncertainty -- O(sqrt(T) d log T) regret</a:t>
             </a:r>
           </a:p>
         </p:txBody>
@@ -6631,60 +6898,8 @@
         </p:nvSpPr>
         <p:spPr>
           <a:xfrm>
-            <a:off x="2514600" y="1618488"/>
-            <a:ext cx="9235440" cy="566928"/>
-          </a:xfrm>
-          <a:prstGeom prst="rect">
-            <a:avLst/>
-          </a:prstGeom>
-          <a:noFill/>
-          <a:ln>
-            <a:noFill/>
-          </a:ln>
-          <a:effectLst/>
-        </p:spPr>
-        <p:style>
-          <a:lnRef idx="1">
-            <a:schemeClr val="accent1"/>
-          </a:lnRef>
-          <a:fillRef idx="3">
-            <a:schemeClr val="accent1"/>
-          </a:fillRef>
-          <a:effectRef idx="2">
-            <a:schemeClr val="accent1"/>
-          </a:effectRef>
-          <a:fontRef idx="minor">
-            <a:schemeClr val="lt1"/>
-          </a:fontRef>
-        </p:style>
-        <p:txBody>
-          <a:bodyPr rtlCol="0" anchor="t" wrap="square" lIns="45720" rIns="45720" tIns="18288" bIns="18288"/>
-          <a:lstStyle/>
-          <a:p>
-            <a:pPr algn="l">
-              <a:defRPr sz="1200" b="0" i="0">
-                <a:solidFill>
-                  <a:srgbClr val="3A3A3A"/>
-                </a:solidFill>
-                <a:latin typeface="Calibri"/>
-              </a:defRPr>
-            </a:pPr>
-            <a:r>
-              <a:t>Upper Confidence Bound over a linear reward model. Optimism in the face of uncertainty; O(√T·d·log T) regret.</a:t>
-            </a:r>
-          </a:p>
-        </p:txBody>
-      </p:sp>
-      <p:sp>
-        <p:nvSpPr>
-          <p:cNvPr id="11" name="Rectangle 10"/>
-          <p:cNvSpPr/>
-          <p:nvPr/>
-        </p:nvSpPr>
-        <p:spPr>
-          <a:xfrm>
-            <a:off x="457200" y="2304288"/>
-            <a:ext cx="201168" cy="438912"/>
+            <a:off x="457200" y="2267712"/>
+            <a:ext cx="146304" cy="457200"/>
           </a:xfrm>
           <a:prstGeom prst="rect">
             <a:avLst/>
@@ -6721,14 +6936,66 @@
       </p:sp>
       <p:sp>
         <p:nvSpPr>
+          <p:cNvPr id="11" name="Rectangle 10"/>
+          <p:cNvSpPr/>
+          <p:nvPr/>
+        </p:nvSpPr>
+        <p:spPr>
+          <a:xfrm>
+            <a:off x="822960" y="2212848"/>
+            <a:ext cx="2377440" cy="457200"/>
+          </a:xfrm>
+          <a:prstGeom prst="rect">
+            <a:avLst/>
+          </a:prstGeom>
+          <a:noFill/>
+          <a:ln>
+            <a:noFill/>
+          </a:ln>
+          <a:effectLst/>
+        </p:spPr>
+        <p:style>
+          <a:lnRef idx="1">
+            <a:schemeClr val="accent1"/>
+          </a:lnRef>
+          <a:fillRef idx="3">
+            <a:schemeClr val="accent1"/>
+          </a:fillRef>
+          <a:effectRef idx="2">
+            <a:schemeClr val="accent1"/>
+          </a:effectRef>
+          <a:fontRef idx="minor">
+            <a:schemeClr val="lt1"/>
+          </a:fontRef>
+        </p:style>
+        <p:txBody>
+          <a:bodyPr rtlCol="0" anchor="t" wrap="square" lIns="45720" rIns="45720" tIns="18288" bIns="18288"/>
+          <a:lstStyle/>
+          <a:p>
+            <a:pPr algn="l">
+              <a:defRPr sz="1800" b="1" i="0">
+                <a:solidFill>
+                  <a:srgbClr val="1A1A1A"/>
+                </a:solidFill>
+                <a:latin typeface="Calibri"/>
+              </a:defRPr>
+            </a:pPr>
+            <a:r>
+              <a:t>LinTS</a:t>
+            </a:r>
+          </a:p>
+        </p:txBody>
+      </p:sp>
+      <p:sp>
+        <p:nvSpPr>
           <p:cNvPr id="12" name="Rectangle 11"/>
           <p:cNvSpPr/>
           <p:nvPr/>
         </p:nvSpPr>
         <p:spPr>
           <a:xfrm>
-            <a:off x="749808" y="2240280"/>
-            <a:ext cx="1691640" cy="566928"/>
+            <a:off x="3383280" y="2258568"/>
+            <a:ext cx="8412480" cy="457200"/>
           </a:xfrm>
           <a:prstGeom prst="rect">
             <a:avLst/>
@@ -6758,15 +7025,15 @@
           <a:lstStyle/>
           <a:p>
             <a:pPr algn="l">
-              <a:defRPr sz="1400" b="1" i="0">
-                <a:solidFill>
-                  <a:srgbClr val="1A1A1A"/>
-                </a:solidFill>
-                <a:latin typeface="Calibri"/>
-              </a:defRPr>
-            </a:pPr>
-            <a:r>
-              <a:t>LinTS</a:t>
+              <a:defRPr sz="1500" b="0" i="0">
+                <a:solidFill>
+                  <a:srgbClr val="3A3A3A"/>
+                </a:solidFill>
+                <a:latin typeface="Calibri"/>
+              </a:defRPr>
+            </a:pPr>
+            <a:r>
+              <a:t>Posterior sampling -- near-optimal regret</a:t>
             </a:r>
           </a:p>
         </p:txBody>
@@ -6779,47 +7046,39 @@
         </p:nvSpPr>
         <p:spPr>
           <a:xfrm>
-            <a:off x="2514600" y="2240280"/>
-            <a:ext cx="9235440" cy="566928"/>
-          </a:xfrm>
-          <a:prstGeom prst="rect">
-            <a:avLst/>
-          </a:prstGeom>
-          <a:noFill/>
-          <a:ln>
-            <a:noFill/>
-          </a:ln>
-          <a:effectLst/>
-        </p:spPr>
-        <p:style>
-          <a:lnRef idx="1">
-            <a:schemeClr val="accent1"/>
-          </a:lnRef>
-          <a:fillRef idx="3">
-            <a:schemeClr val="accent1"/>
-          </a:fillRef>
-          <a:effectRef idx="2">
-            <a:schemeClr val="accent1"/>
-          </a:effectRef>
-          <a:fontRef idx="minor">
-            <a:schemeClr val="lt1"/>
-          </a:fontRef>
-        </p:style>
-        <p:txBody>
-          <a:bodyPr rtlCol="0" anchor="t" wrap="square" lIns="45720" rIns="45720" tIns="18288" bIns="18288"/>
-          <a:lstStyle/>
-          <a:p>
-            <a:pPr algn="l">
-              <a:defRPr sz="1200" b="0" i="0">
-                <a:solidFill>
-                  <a:srgbClr val="3A3A3A"/>
-                </a:solidFill>
-                <a:latin typeface="Calibri"/>
-              </a:defRPr>
-            </a:pPr>
-            <a:r>
-              <a:t>Thompson Sampling from posterior over reward parameters. Near-optimal regret; naturally calibrated uncertainty.</a:t>
-            </a:r>
+            <a:off x="457200" y="2057400"/>
+            <a:ext cx="11277295" cy="10972"/>
+          </a:xfrm>
+          <a:prstGeom prst="rect">
+            <a:avLst/>
+          </a:prstGeom>
+          <a:solidFill>
+            <a:srgbClr val="DDDDDD"/>
+          </a:solidFill>
+          <a:ln>
+            <a:noFill/>
+          </a:ln>
+          <a:effectLst/>
+        </p:spPr>
+        <p:style>
+          <a:lnRef idx="1">
+            <a:schemeClr val="accent1"/>
+          </a:lnRef>
+          <a:fillRef idx="3">
+            <a:schemeClr val="accent1"/>
+          </a:fillRef>
+          <a:effectRef idx="2">
+            <a:schemeClr val="accent1"/>
+          </a:effectRef>
+          <a:fontRef idx="minor">
+            <a:schemeClr val="lt1"/>
+          </a:fontRef>
+        </p:style>
+        <p:txBody>
+          <a:bodyPr rtlCol="0" anchor="ctr"/>
+          <a:lstStyle/>
+          <a:p>
+            <a:pPr algn="ctr"/>
           </a:p>
         </p:txBody>
       </p:sp>
@@ -6831,8 +7090,8 @@
         </p:nvSpPr>
         <p:spPr>
           <a:xfrm>
-            <a:off x="457200" y="2926080"/>
-            <a:ext cx="201168" cy="438912"/>
+            <a:off x="457200" y="3044952"/>
+            <a:ext cx="146304" cy="457200"/>
           </a:xfrm>
           <a:prstGeom prst="rect">
             <a:avLst/>
@@ -6875,8 +7134,8 @@
         </p:nvSpPr>
         <p:spPr>
           <a:xfrm>
-            <a:off x="749808" y="2862072"/>
-            <a:ext cx="1691640" cy="566928"/>
+            <a:off x="822960" y="2990088"/>
+            <a:ext cx="2377440" cy="457200"/>
           </a:xfrm>
           <a:prstGeom prst="rect">
             <a:avLst/>
@@ -6906,7 +7165,7 @@
           <a:lstStyle/>
           <a:p>
             <a:pPr algn="l">
-              <a:defRPr sz="1400" b="1" i="0">
+              <a:defRPr sz="1800" b="1" i="0">
                 <a:solidFill>
                   <a:srgbClr val="1A1A1A"/>
                 </a:solidFill>
@@ -6927,8 +7186,8 @@
         </p:nvSpPr>
         <p:spPr>
           <a:xfrm>
-            <a:off x="2514600" y="2862072"/>
-            <a:ext cx="9235440" cy="566928"/>
+            <a:off x="3383280" y="3035808"/>
+            <a:ext cx="8412480" cy="457200"/>
           </a:xfrm>
           <a:prstGeom prst="rect">
             <a:avLst/>
@@ -6958,7 +7217,7 @@
           <a:lstStyle/>
           <a:p>
             <a:pPr algn="l">
-              <a:defRPr sz="1200" b="0" i="0">
+              <a:defRPr sz="1500" b="0" i="0">
                 <a:solidFill>
                   <a:srgbClr val="3A3A3A"/>
                 </a:solidFill>
@@ -6966,7 +7225,7 @@
               </a:defRPr>
             </a:pPr>
             <a:r>
-              <a:t>Uniform exploration with probability ε. Simple baseline; suboptimal O(T^{2/3}) regret asymptotics.</a:t>
+              <a:t>Uniform exploration -- suboptimal O(T^2/3)</a:t>
             </a:r>
           </a:p>
         </p:txBody>
@@ -6979,8 +7238,52 @@
         </p:nvSpPr>
         <p:spPr>
           <a:xfrm>
-            <a:off x="457200" y="3547872"/>
-            <a:ext cx="201168" cy="438912"/>
+            <a:off x="457200" y="2834640"/>
+            <a:ext cx="11277295" cy="10972"/>
+          </a:xfrm>
+          <a:prstGeom prst="rect">
+            <a:avLst/>
+          </a:prstGeom>
+          <a:solidFill>
+            <a:srgbClr val="DDDDDD"/>
+          </a:solidFill>
+          <a:ln>
+            <a:noFill/>
+          </a:ln>
+          <a:effectLst/>
+        </p:spPr>
+        <p:style>
+          <a:lnRef idx="1">
+            <a:schemeClr val="accent1"/>
+          </a:lnRef>
+          <a:fillRef idx="3">
+            <a:schemeClr val="accent1"/>
+          </a:fillRef>
+          <a:effectRef idx="2">
+            <a:schemeClr val="accent1"/>
+          </a:effectRef>
+          <a:fontRef idx="minor">
+            <a:schemeClr val="lt1"/>
+          </a:fontRef>
+        </p:style>
+        <p:txBody>
+          <a:bodyPr rtlCol="0" anchor="ctr"/>
+          <a:lstStyle/>
+          <a:p>
+            <a:pPr algn="ctr"/>
+          </a:p>
+        </p:txBody>
+      </p:sp>
+      <p:sp>
+        <p:nvSpPr>
+          <p:cNvPr id="18" name="Rectangle 17"/>
+          <p:cNvSpPr/>
+          <p:nvPr/>
+        </p:nvSpPr>
+        <p:spPr>
+          <a:xfrm>
+            <a:off x="457200" y="3822192"/>
+            <a:ext cx="146304" cy="457200"/>
           </a:xfrm>
           <a:prstGeom prst="rect">
             <a:avLst/>
@@ -7017,14 +7320,14 @@
       </p:sp>
       <p:sp>
         <p:nvSpPr>
-          <p:cNvPr id="18" name="Rectangle 17"/>
-          <p:cNvSpPr/>
-          <p:nvPr/>
-        </p:nvSpPr>
-        <p:spPr>
-          <a:xfrm>
-            <a:off x="749808" y="3483864"/>
-            <a:ext cx="1691640" cy="566928"/>
+          <p:cNvPr id="19" name="Rectangle 18"/>
+          <p:cNvSpPr/>
+          <p:nvPr/>
+        </p:nvSpPr>
+        <p:spPr>
+          <a:xfrm>
+            <a:off x="822960" y="3767328"/>
+            <a:ext cx="2377440" cy="457200"/>
           </a:xfrm>
           <a:prstGeom prst="rect">
             <a:avLst/>
@@ -7054,7 +7357,7 @@
           <a:lstStyle/>
           <a:p>
             <a:pPr algn="l">
-              <a:defRPr sz="1400" b="1" i="0">
+              <a:defRPr sz="1800" b="1" i="0">
                 <a:solidFill>
                   <a:srgbClr val="1A1A1A"/>
                 </a:solidFill>
@@ -7069,14 +7372,14 @@
       </p:sp>
       <p:sp>
         <p:nvSpPr>
-          <p:cNvPr id="19" name="Rectangle 18"/>
-          <p:cNvSpPr/>
-          <p:nvPr/>
-        </p:nvSpPr>
-        <p:spPr>
-          <a:xfrm>
-            <a:off x="2514600" y="3483864"/>
-            <a:ext cx="9235440" cy="566928"/>
+          <p:cNvPr id="20" name="Rectangle 19"/>
+          <p:cNvSpPr/>
+          <p:nvPr/>
+        </p:nvSpPr>
+        <p:spPr>
+          <a:xfrm>
+            <a:off x="3383280" y="3813048"/>
+            <a:ext cx="8412480" cy="457200"/>
           </a:xfrm>
           <a:prstGeom prst="rect">
             <a:avLst/>
@@ -7106,7 +7409,7 @@
           <a:lstStyle/>
           <a:p>
             <a:pPr algn="l">
-              <a:defRPr sz="1200" b="0" i="0">
+              <a:defRPr sz="1500" b="0" i="0">
                 <a:solidFill>
                   <a:srgbClr val="3A3A3A"/>
                 </a:solidFill>
@@ -7114,21 +7417,65 @@
               </a:defRPr>
             </a:pPr>
             <a:r>
-              <a:t>XGBoost trained once on a historical snapshot. Incumbent production baseline.</a:t>
-            </a:r>
-          </a:p>
-        </p:txBody>
-      </p:sp>
-      <p:sp>
-        <p:nvSpPr>
-          <p:cNvPr id="20" name="Rectangle 19"/>
-          <p:cNvSpPr/>
-          <p:nvPr/>
-        </p:nvSpPr>
-        <p:spPr>
-          <a:xfrm>
-            <a:off x="457200" y="4169664"/>
-            <a:ext cx="201168" cy="438912"/>
+              <a:t>Train-once incumbent baseline</a:t>
+            </a:r>
+          </a:p>
+        </p:txBody>
+      </p:sp>
+      <p:sp>
+        <p:nvSpPr>
+          <p:cNvPr id="21" name="Rectangle 20"/>
+          <p:cNvSpPr/>
+          <p:nvPr/>
+        </p:nvSpPr>
+        <p:spPr>
+          <a:xfrm>
+            <a:off x="457200" y="3611880"/>
+            <a:ext cx="11277295" cy="10972"/>
+          </a:xfrm>
+          <a:prstGeom prst="rect">
+            <a:avLst/>
+          </a:prstGeom>
+          <a:solidFill>
+            <a:srgbClr val="DDDDDD"/>
+          </a:solidFill>
+          <a:ln>
+            <a:noFill/>
+          </a:ln>
+          <a:effectLst/>
+        </p:spPr>
+        <p:style>
+          <a:lnRef idx="1">
+            <a:schemeClr val="accent1"/>
+          </a:lnRef>
+          <a:fillRef idx="3">
+            <a:schemeClr val="accent1"/>
+          </a:fillRef>
+          <a:effectRef idx="2">
+            <a:schemeClr val="accent1"/>
+          </a:effectRef>
+          <a:fontRef idx="minor">
+            <a:schemeClr val="lt1"/>
+          </a:fontRef>
+        </p:style>
+        <p:txBody>
+          <a:bodyPr rtlCol="0" anchor="ctr"/>
+          <a:lstStyle/>
+          <a:p>
+            <a:pPr algn="ctr"/>
+          </a:p>
+        </p:txBody>
+      </p:sp>
+      <p:sp>
+        <p:nvSpPr>
+          <p:cNvPr id="22" name="Rectangle 21"/>
+          <p:cNvSpPr/>
+          <p:nvPr/>
+        </p:nvSpPr>
+        <p:spPr>
+          <a:xfrm>
+            <a:off x="457200" y="4599432"/>
+            <a:ext cx="146304" cy="457200"/>
           </a:xfrm>
           <a:prstGeom prst="rect">
             <a:avLst/>
@@ -7165,14 +7512,14 @@
       </p:sp>
       <p:sp>
         <p:nvSpPr>
-          <p:cNvPr id="21" name="Rectangle 20"/>
-          <p:cNvSpPr/>
-          <p:nvPr/>
-        </p:nvSpPr>
-        <p:spPr>
-          <a:xfrm>
-            <a:off x="749808" y="4105656"/>
-            <a:ext cx="1691640" cy="566928"/>
+          <p:cNvPr id="23" name="Rectangle 22"/>
+          <p:cNvSpPr/>
+          <p:nvPr/>
+        </p:nvSpPr>
+        <p:spPr>
+          <a:xfrm>
+            <a:off x="822960" y="4544568"/>
+            <a:ext cx="2377440" cy="457200"/>
           </a:xfrm>
           <a:prstGeom prst="rect">
             <a:avLst/>
@@ -7202,7 +7549,7 @@
           <a:lstStyle/>
           <a:p>
             <a:pPr algn="l">
-              <a:defRPr sz="1400" b="1" i="0">
+              <a:defRPr sz="1800" b="1" i="0">
                 <a:solidFill>
                   <a:srgbClr val="1A1A1A"/>
                 </a:solidFill>
@@ -7217,14 +7564,14 @@
       </p:sp>
       <p:sp>
         <p:nvSpPr>
-          <p:cNvPr id="22" name="Rectangle 21"/>
-          <p:cNvSpPr/>
-          <p:nvPr/>
-        </p:nvSpPr>
-        <p:spPr>
-          <a:xfrm>
-            <a:off x="2514600" y="4105656"/>
-            <a:ext cx="9235440" cy="566928"/>
+          <p:cNvPr id="24" name="Rectangle 23"/>
+          <p:cNvSpPr/>
+          <p:nvPr/>
+        </p:nvSpPr>
+        <p:spPr>
+          <a:xfrm>
+            <a:off x="3383280" y="4590288"/>
+            <a:ext cx="8412480" cy="457200"/>
           </a:xfrm>
           <a:prstGeom prst="rect">
             <a:avLst/>
@@ -7254,7 +7601,7 @@
           <a:lstStyle/>
           <a:p>
             <a:pPr algn="l">
-              <a:defRPr sz="1200" b="0" i="0">
+              <a:defRPr sz="1500" b="0" i="0">
                 <a:solidFill>
                   <a:srgbClr val="3A3A3A"/>
                 </a:solidFill>
@@ -7262,27 +7609,27 @@
               </a:defRPr>
             </a:pPr>
             <a:r>
-              <a:t>Constant: rate 100% of applicants at +25% loading. Inadmissible ceiling (not commercially/regulatorily viable -- §5.0.1 / §6.2).</a:t>
-            </a:r>
-          </a:p>
-        </p:txBody>
-      </p:sp>
-      <p:sp>
-        <p:nvSpPr>
-          <p:cNvPr id="23" name="Rectangle 22"/>
-          <p:cNvSpPr/>
-          <p:nvPr/>
-        </p:nvSpPr>
-        <p:spPr>
-          <a:xfrm>
-            <a:off x="457200" y="4800600"/>
-            <a:ext cx="11277295" cy="27432"/>
+              <a:t>Constant +25% loading -- inadmissible ceiling</a:t>
+            </a:r>
+          </a:p>
+        </p:txBody>
+      </p:sp>
+      <p:sp>
+        <p:nvSpPr>
+          <p:cNvPr id="25" name="Rectangle 24"/>
+          <p:cNvSpPr/>
+          <p:nvPr/>
+        </p:nvSpPr>
+        <p:spPr>
+          <a:xfrm>
+            <a:off x="457200" y="4389120"/>
+            <a:ext cx="11277295" cy="10972"/>
           </a:xfrm>
           <a:prstGeom prst="rect">
             <a:avLst/>
           </a:prstGeom>
           <a:solidFill>
-            <a:srgbClr val="808080"/>
+            <a:srgbClr val="DDDDDD"/>
           </a:solidFill>
           <a:ln>
             <a:noFill/>
@@ -7313,14 +7660,14 @@
       </p:sp>
       <p:sp>
         <p:nvSpPr>
-          <p:cNvPr id="24" name="Rectangle 23"/>
-          <p:cNvSpPr/>
-          <p:nvPr/>
-        </p:nvSpPr>
-        <p:spPr>
-          <a:xfrm>
-            <a:off x="457200" y="4892040"/>
-            <a:ext cx="11277295" cy="320040"/>
+          <p:cNvPr id="26" name="Rectangle 25"/>
+          <p:cNvSpPr/>
+          <p:nvPr/>
+        </p:nvSpPr>
+        <p:spPr>
+          <a:xfrm>
+            <a:off x="457200" y="6272784"/>
+            <a:ext cx="11277295" cy="329184"/>
           </a:xfrm>
           <a:prstGeom prst="rect">
             <a:avLst/>
@@ -7350,69 +7697,15 @@
           <a:lstStyle/>
           <a:p>
             <a:pPr algn="l">
-              <a:defRPr sz="1100" b="0" i="1">
-                <a:solidFill>
-                  <a:srgbClr val="3A3A3A"/>
-                </a:solidFill>
-                <a:latin typeface="Calibri"/>
-              </a:defRPr>
-            </a:pPr>
-            <a:r>
-              <a:t>Other constants (inadmissible floor/ceiling): AlwaysSTANDARD, AlwaysDECLINE, Random  |  Not deployable: LogisticOracle, Oracle</a:t>
-            </a:r>
-          </a:p>
-        </p:txBody>
-      </p:sp>
-      <p:sp>
-        <p:nvSpPr>
-          <p:cNvPr id="25" name="Rectangle 24"/>
-          <p:cNvSpPr/>
-          <p:nvPr/>
-        </p:nvSpPr>
-        <p:spPr>
-          <a:xfrm>
-            <a:off x="457200" y="5321808"/>
-            <a:ext cx="11277295" cy="731520"/>
-          </a:xfrm>
-          <a:prstGeom prst="rect">
-            <a:avLst/>
-          </a:prstGeom>
-          <a:solidFill>
-            <a:srgbClr val="F7F5F6"/>
-          </a:solidFill>
-          <a:ln>
-            <a:noFill/>
-          </a:ln>
-          <a:effectLst/>
-        </p:spPr>
-        <p:style>
-          <a:lnRef idx="1">
-            <a:schemeClr val="accent1"/>
-          </a:lnRef>
-          <a:fillRef idx="3">
-            <a:schemeClr val="accent1"/>
-          </a:fillRef>
-          <a:effectRef idx="2">
-            <a:schemeClr val="accent1"/>
-          </a:effectRef>
-          <a:fontRef idx="minor">
-            <a:schemeClr val="lt1"/>
-          </a:fontRef>
-        </p:style>
-        <p:txBody>
-          <a:bodyPr rtlCol="0" anchor="ctr" wrap="square" lIns="164592" rIns="164592"/>
-          <a:lstStyle/>
-          <a:p>
-            <a:pPr algn="l">
-              <a:defRPr sz="1200" b="0">
-                <a:solidFill>
-                  <a:srgbClr val="1A1A1A"/>
-                </a:solidFill>
-                <a:latin typeface="Calibri"/>
-              </a:defRPr>
-            </a:pPr>
-            <a:r>
-              <a:t>Admissibility (§5.0.1): a policy is admissible if it is both deployable (uses only observable features) AND commercially/regulatorily viable as an underwriting rule. LinUCB and LinTS are the top-2 admissible policies.</a:t>
+              <a:defRPr sz="1050" b="0" i="1">
+                <a:solidFill>
+                  <a:srgbClr val="777777"/>
+                </a:solidFill>
+                <a:latin typeface="Calibri"/>
+              </a:defRPr>
+            </a:pPr>
+            <a:r>
+              <a:t>Admissibility (§5.0.1): deployable AND commercially/regulatorily viable. LinUCB and LinTS are the top-2 admissible policies. Other reference policies: AlwaysSTANDARD, AlwaysDECLINE, Random, LogisticOracle, Oracle.</a:t>
             </a:r>
           </a:p>
         </p:txBody>
@@ -7697,7 +7990,7 @@
         <p:spPr>
           <a:xfrm>
             <a:off x="457200" y="1207008"/>
-            <a:ext cx="5486400" cy="329184"/>
+            <a:ext cx="5394960" cy="292608"/>
           </a:xfrm>
           <a:prstGeom prst="rect">
             <a:avLst/>
@@ -7727,7 +8020,7 @@
           <a:lstStyle/>
           <a:p>
             <a:pPr algn="l">
-              <a:defRPr sz="1400" b="1" i="0">
+              <a:defRPr sz="1100" b="1" i="0">
                 <a:solidFill>
                   <a:srgbClr val="5D2A42"/>
                 </a:solidFill>
@@ -7735,7 +8028,8 @@
               </a:defRPr>
             </a:pPr>
             <a:r>
-              <a:t>PSI Demographic Guardrail</a:t>
+              <a:rPr spc="120"/>
+              <a:t>PSI DEMOGRAPHIC GUARDRAIL</a:t>
             </a:r>
           </a:p>
         </p:txBody>
@@ -7748,60 +8042,8 @@
         </p:nvSpPr>
         <p:spPr>
           <a:xfrm>
-            <a:off x="457200" y="1591056"/>
-            <a:ext cx="5486400" cy="502920"/>
-          </a:xfrm>
-          <a:prstGeom prst="rect">
-            <a:avLst/>
-          </a:prstGeom>
-          <a:noFill/>
-          <a:ln>
-            <a:noFill/>
-          </a:ln>
-          <a:effectLst/>
-        </p:spPr>
-        <p:style>
-          <a:lnRef idx="1">
-            <a:schemeClr val="accent1"/>
-          </a:lnRef>
-          <a:fillRef idx="3">
-            <a:schemeClr val="accent1"/>
-          </a:fillRef>
-          <a:effectRef idx="2">
-            <a:schemeClr val="accent1"/>
-          </a:effectRef>
-          <a:fontRef idx="minor">
-            <a:schemeClr val="lt1"/>
-          </a:fontRef>
-        </p:style>
-        <p:txBody>
-          <a:bodyPr rtlCol="0" anchor="t" wrap="square" lIns="45720" rIns="45720" tIns="18288" bIns="18288"/>
-          <a:lstStyle/>
-          <a:p>
-            <a:pPr algn="l">
-              <a:defRPr sz="1300" b="0" i="0">
-                <a:solidFill>
-                  <a:srgbClr val="1A1A1A"/>
-                </a:solidFill>
-                <a:latin typeface="Calibri"/>
-              </a:defRPr>
-            </a:pPr>
-            <a:r>
-              <a:t>Population Stability Index computed on region and occupation in a rolling 500-round window.</a:t>
-            </a:r>
-          </a:p>
-        </p:txBody>
-      </p:sp>
-      <p:sp>
-        <p:nvSpPr>
-          <p:cNvPr id="9" name="Rectangle 8"/>
-          <p:cNvSpPr/>
-          <p:nvPr/>
-        </p:nvSpPr>
-        <p:spPr>
-          <a:xfrm>
-            <a:off x="457200" y="2167128"/>
-            <a:ext cx="1051560" cy="502920"/>
+            <a:off x="457200" y="1664208"/>
+            <a:ext cx="146304" cy="457200"/>
           </a:xfrm>
           <a:prstGeom prst="rect">
             <a:avLst/>
@@ -7838,14 +8080,66 @@
       </p:sp>
       <p:sp>
         <p:nvSpPr>
+          <p:cNvPr id="9" name="Rectangle 8"/>
+          <p:cNvSpPr/>
+          <p:nvPr/>
+        </p:nvSpPr>
+        <p:spPr>
+          <a:xfrm>
+            <a:off x="822960" y="1664208"/>
+            <a:ext cx="1371600" cy="457200"/>
+          </a:xfrm>
+          <a:prstGeom prst="rect">
+            <a:avLst/>
+          </a:prstGeom>
+          <a:noFill/>
+          <a:ln>
+            <a:noFill/>
+          </a:ln>
+          <a:effectLst/>
+        </p:spPr>
+        <p:style>
+          <a:lnRef idx="1">
+            <a:schemeClr val="accent1"/>
+          </a:lnRef>
+          <a:fillRef idx="3">
+            <a:schemeClr val="accent1"/>
+          </a:fillRef>
+          <a:effectRef idx="2">
+            <a:schemeClr val="accent1"/>
+          </a:effectRef>
+          <a:fontRef idx="minor">
+            <a:schemeClr val="lt1"/>
+          </a:fontRef>
+        </p:style>
+        <p:txBody>
+          <a:bodyPr rtlCol="0" anchor="t" wrap="square" lIns="45720" rIns="45720" tIns="18288" bIns="18288"/>
+          <a:lstStyle/>
+          <a:p>
+            <a:pPr algn="l">
+              <a:defRPr sz="1600" b="1" i="0">
+                <a:solidFill>
+                  <a:srgbClr val="1A1A1A"/>
+                </a:solidFill>
+                <a:latin typeface="Calibri"/>
+              </a:defRPr>
+            </a:pPr>
+            <a:r>
+              <a:t>GREEN</a:t>
+            </a:r>
+          </a:p>
+        </p:txBody>
+      </p:sp>
+      <p:sp>
+        <p:nvSpPr>
           <p:cNvPr id="10" name="Rectangle 9"/>
           <p:cNvSpPr/>
           <p:nvPr/>
         </p:nvSpPr>
         <p:spPr>
           <a:xfrm>
-            <a:off x="512064" y="2258568"/>
-            <a:ext cx="941832" cy="347472"/>
+            <a:off x="2286000" y="1700784"/>
+            <a:ext cx="1920240" cy="411480"/>
           </a:xfrm>
           <a:prstGeom prst="rect">
             <a:avLst/>
@@ -7874,16 +8168,16 @@
           <a:bodyPr rtlCol="0" anchor="t" wrap="square" lIns="45720" rIns="45720" tIns="18288" bIns="18288"/>
           <a:lstStyle/>
           <a:p>
-            <a:pPr algn="ctr">
-              <a:defRPr sz="1300" b="1" i="0">
-                <a:solidFill>
-                  <a:srgbClr val="FFFFFF"/>
-                </a:solidFill>
-                <a:latin typeface="Calibri"/>
-              </a:defRPr>
-            </a:pPr>
-            <a:r>
-              <a:t>GREEN</a:t>
+            <a:pPr algn="l">
+              <a:defRPr sz="1400" b="0" i="0">
+                <a:solidFill>
+                  <a:srgbClr val="1A1A1A"/>
+                </a:solidFill>
+                <a:latin typeface="Calibri"/>
+              </a:defRPr>
+            </a:pPr>
+            <a:r>
+              <a:t>PSI &lt; 0.10</a:t>
             </a:r>
           </a:p>
         </p:txBody>
@@ -7896,8 +8190,8 @@
         </p:nvSpPr>
         <p:spPr>
           <a:xfrm>
-            <a:off x="1645920" y="2167128"/>
-            <a:ext cx="1920240" cy="502920"/>
+            <a:off x="4297680" y="1700784"/>
+            <a:ext cx="1554480" cy="411480"/>
           </a:xfrm>
           <a:prstGeom prst="rect">
             <a:avLst/>
@@ -7927,15 +8221,15 @@
           <a:lstStyle/>
           <a:p>
             <a:pPr algn="l">
-              <a:defRPr sz="1300" b="1" i="0">
-                <a:solidFill>
-                  <a:srgbClr val="1A1A1A"/>
-                </a:solidFill>
-                <a:latin typeface="Calibri"/>
-              </a:defRPr>
-            </a:pPr>
-            <a:r>
-              <a:t>PSI &lt; 0.10</a:t>
+              <a:defRPr sz="1400" b="0" i="0">
+                <a:solidFill>
+                  <a:srgbClr val="3A3A3A"/>
+                </a:solidFill>
+                <a:latin typeface="Calibri"/>
+              </a:defRPr>
+            </a:pPr>
+            <a:r>
+              <a:t>stable</a:t>
             </a:r>
           </a:p>
         </p:txBody>
@@ -7948,60 +8242,8 @@
         </p:nvSpPr>
         <p:spPr>
           <a:xfrm>
-            <a:off x="3657600" y="2167128"/>
-            <a:ext cx="2194560" cy="502920"/>
-          </a:xfrm>
-          <a:prstGeom prst="rect">
-            <a:avLst/>
-          </a:prstGeom>
-          <a:noFill/>
-          <a:ln>
-            <a:noFill/>
-          </a:ln>
-          <a:effectLst/>
-        </p:spPr>
-        <p:style>
-          <a:lnRef idx="1">
-            <a:schemeClr val="accent1"/>
-          </a:lnRef>
-          <a:fillRef idx="3">
-            <a:schemeClr val="accent1"/>
-          </a:fillRef>
-          <a:effectRef idx="2">
-            <a:schemeClr val="accent1"/>
-          </a:effectRef>
-          <a:fontRef idx="minor">
-            <a:schemeClr val="lt1"/>
-          </a:fontRef>
-        </p:style>
-        <p:txBody>
-          <a:bodyPr rtlCol="0" anchor="t" wrap="square" lIns="45720" rIns="45720" tIns="18288" bIns="18288"/>
-          <a:lstStyle/>
-          <a:p>
-            <a:pPr algn="l">
-              <a:defRPr sz="1300" b="0" i="0">
-                <a:solidFill>
-                  <a:srgbClr val="3A3A3A"/>
-                </a:solidFill>
-                <a:latin typeface="Calibri"/>
-              </a:defRPr>
-            </a:pPr>
-            <a:r>
-              <a:t>Stable -- no action</a:t>
-            </a:r>
-          </a:p>
-        </p:txBody>
-      </p:sp>
-      <p:sp>
-        <p:nvSpPr>
-          <p:cNvPr id="13" name="Rectangle 12"/>
-          <p:cNvSpPr/>
-          <p:nvPr/>
-        </p:nvSpPr>
-        <p:spPr>
-          <a:xfrm>
-            <a:off x="457200" y="2761488"/>
-            <a:ext cx="1051560" cy="502920"/>
+            <a:off x="457200" y="2322576"/>
+            <a:ext cx="146304" cy="457200"/>
           </a:xfrm>
           <a:prstGeom prst="rect">
             <a:avLst/>
@@ -8038,14 +8280,66 @@
       </p:sp>
       <p:sp>
         <p:nvSpPr>
+          <p:cNvPr id="13" name="Rectangle 12"/>
+          <p:cNvSpPr/>
+          <p:nvPr/>
+        </p:nvSpPr>
+        <p:spPr>
+          <a:xfrm>
+            <a:off x="822960" y="2322576"/>
+            <a:ext cx="1371600" cy="457200"/>
+          </a:xfrm>
+          <a:prstGeom prst="rect">
+            <a:avLst/>
+          </a:prstGeom>
+          <a:noFill/>
+          <a:ln>
+            <a:noFill/>
+          </a:ln>
+          <a:effectLst/>
+        </p:spPr>
+        <p:style>
+          <a:lnRef idx="1">
+            <a:schemeClr val="accent1"/>
+          </a:lnRef>
+          <a:fillRef idx="3">
+            <a:schemeClr val="accent1"/>
+          </a:fillRef>
+          <a:effectRef idx="2">
+            <a:schemeClr val="accent1"/>
+          </a:effectRef>
+          <a:fontRef idx="minor">
+            <a:schemeClr val="lt1"/>
+          </a:fontRef>
+        </p:style>
+        <p:txBody>
+          <a:bodyPr rtlCol="0" anchor="t" wrap="square" lIns="45720" rIns="45720" tIns="18288" bIns="18288"/>
+          <a:lstStyle/>
+          <a:p>
+            <a:pPr algn="l">
+              <a:defRPr sz="1600" b="1" i="0">
+                <a:solidFill>
+                  <a:srgbClr val="1A1A1A"/>
+                </a:solidFill>
+                <a:latin typeface="Calibri"/>
+              </a:defRPr>
+            </a:pPr>
+            <a:r>
+              <a:t>AMBER</a:t>
+            </a:r>
+          </a:p>
+        </p:txBody>
+      </p:sp>
+      <p:sp>
+        <p:nvSpPr>
           <p:cNvPr id="14" name="Rectangle 13"/>
           <p:cNvSpPr/>
           <p:nvPr/>
         </p:nvSpPr>
         <p:spPr>
           <a:xfrm>
-            <a:off x="512064" y="2852928"/>
-            <a:ext cx="941832" cy="347472"/>
+            <a:off x="2286000" y="2359152"/>
+            <a:ext cx="1920240" cy="411480"/>
           </a:xfrm>
           <a:prstGeom prst="rect">
             <a:avLst/>
@@ -8074,16 +8368,16 @@
           <a:bodyPr rtlCol="0" anchor="t" wrap="square" lIns="45720" rIns="45720" tIns="18288" bIns="18288"/>
           <a:lstStyle/>
           <a:p>
-            <a:pPr algn="ctr">
-              <a:defRPr sz="1300" b="1" i="0">
-                <a:solidFill>
-                  <a:srgbClr val="FFFFFF"/>
-                </a:solidFill>
-                <a:latin typeface="Calibri"/>
-              </a:defRPr>
-            </a:pPr>
-            <a:r>
-              <a:t>AMBER</a:t>
+            <a:pPr algn="l">
+              <a:defRPr sz="1400" b="0" i="0">
+                <a:solidFill>
+                  <a:srgbClr val="1A1A1A"/>
+                </a:solidFill>
+                <a:latin typeface="Calibri"/>
+              </a:defRPr>
+            </a:pPr>
+            <a:r>
+              <a:t>0.10-0.25</a:t>
             </a:r>
           </a:p>
         </p:txBody>
@@ -8096,8 +8390,8 @@
         </p:nvSpPr>
         <p:spPr>
           <a:xfrm>
-            <a:off x="1645920" y="2761488"/>
-            <a:ext cx="1920240" cy="502920"/>
+            <a:off x="4297680" y="2359152"/>
+            <a:ext cx="1554480" cy="411480"/>
           </a:xfrm>
           <a:prstGeom prst="rect">
             <a:avLst/>
@@ -8127,15 +8421,15 @@
           <a:lstStyle/>
           <a:p>
             <a:pPr algn="l">
-              <a:defRPr sz="1300" b="1" i="0">
-                <a:solidFill>
-                  <a:srgbClr val="1A1A1A"/>
-                </a:solidFill>
-                <a:latin typeface="Calibri"/>
-              </a:defRPr>
-            </a:pPr>
-            <a:r>
-              <a:t>0.10 ≤ PSI &lt; 0.25</a:t>
+              <a:defRPr sz="1400" b="0" i="0">
+                <a:solidFill>
+                  <a:srgbClr val="3A3A3A"/>
+                </a:solidFill>
+                <a:latin typeface="Calibri"/>
+              </a:defRPr>
+            </a:pPr>
+            <a:r>
+              <a:t>monitor</a:t>
             </a:r>
           </a:p>
         </p:txBody>
@@ -8148,60 +8442,8 @@
         </p:nvSpPr>
         <p:spPr>
           <a:xfrm>
-            <a:off x="3657600" y="2761488"/>
-            <a:ext cx="2194560" cy="502920"/>
-          </a:xfrm>
-          <a:prstGeom prst="rect">
-            <a:avLst/>
-          </a:prstGeom>
-          <a:noFill/>
-          <a:ln>
-            <a:noFill/>
-          </a:ln>
-          <a:effectLst/>
-        </p:spPr>
-        <p:style>
-          <a:lnRef idx="1">
-            <a:schemeClr val="accent1"/>
-          </a:lnRef>
-          <a:fillRef idx="3">
-            <a:schemeClr val="accent1"/>
-          </a:fillRef>
-          <a:effectRef idx="2">
-            <a:schemeClr val="accent1"/>
-          </a:effectRef>
-          <a:fontRef idx="minor">
-            <a:schemeClr val="lt1"/>
-          </a:fontRef>
-        </p:style>
-        <p:txBody>
-          <a:bodyPr rtlCol="0" anchor="t" wrap="square" lIns="45720" rIns="45720" tIns="18288" bIns="18288"/>
-          <a:lstStyle/>
-          <a:p>
-            <a:pPr algn="l">
-              <a:defRPr sz="1300" b="0" i="0">
-                <a:solidFill>
-                  <a:srgbClr val="3A3A3A"/>
-                </a:solidFill>
-                <a:latin typeface="Calibri"/>
-              </a:defRPr>
-            </a:pPr>
-            <a:r>
-              <a:t>Monitor closely</a:t>
-            </a:r>
-          </a:p>
-        </p:txBody>
-      </p:sp>
-      <p:sp>
-        <p:nvSpPr>
-          <p:cNvPr id="17" name="Rectangle 16"/>
-          <p:cNvSpPr/>
-          <p:nvPr/>
-        </p:nvSpPr>
-        <p:spPr>
-          <a:xfrm>
-            <a:off x="457200" y="3355848"/>
-            <a:ext cx="1051560" cy="502920"/>
+            <a:off x="457200" y="2980944"/>
+            <a:ext cx="146304" cy="457200"/>
           </a:xfrm>
           <a:prstGeom prst="rect">
             <a:avLst/>
@@ -8238,14 +8480,66 @@
       </p:sp>
       <p:sp>
         <p:nvSpPr>
+          <p:cNvPr id="17" name="Rectangle 16"/>
+          <p:cNvSpPr/>
+          <p:nvPr/>
+        </p:nvSpPr>
+        <p:spPr>
+          <a:xfrm>
+            <a:off x="822960" y="2980944"/>
+            <a:ext cx="1371600" cy="457200"/>
+          </a:xfrm>
+          <a:prstGeom prst="rect">
+            <a:avLst/>
+          </a:prstGeom>
+          <a:noFill/>
+          <a:ln>
+            <a:noFill/>
+          </a:ln>
+          <a:effectLst/>
+        </p:spPr>
+        <p:style>
+          <a:lnRef idx="1">
+            <a:schemeClr val="accent1"/>
+          </a:lnRef>
+          <a:fillRef idx="3">
+            <a:schemeClr val="accent1"/>
+          </a:fillRef>
+          <a:effectRef idx="2">
+            <a:schemeClr val="accent1"/>
+          </a:effectRef>
+          <a:fontRef idx="minor">
+            <a:schemeClr val="lt1"/>
+          </a:fontRef>
+        </p:style>
+        <p:txBody>
+          <a:bodyPr rtlCol="0" anchor="t" wrap="square" lIns="45720" rIns="45720" tIns="18288" bIns="18288"/>
+          <a:lstStyle/>
+          <a:p>
+            <a:pPr algn="l">
+              <a:defRPr sz="1600" b="1" i="0">
+                <a:solidFill>
+                  <a:srgbClr val="1A1A1A"/>
+                </a:solidFill>
+                <a:latin typeface="Calibri"/>
+              </a:defRPr>
+            </a:pPr>
+            <a:r>
+              <a:t>RED</a:t>
+            </a:r>
+          </a:p>
+        </p:txBody>
+      </p:sp>
+      <p:sp>
+        <p:nvSpPr>
           <p:cNvPr id="18" name="Rectangle 17"/>
           <p:cNvSpPr/>
           <p:nvPr/>
         </p:nvSpPr>
         <p:spPr>
           <a:xfrm>
-            <a:off x="512064" y="3447288"/>
-            <a:ext cx="941832" cy="347472"/>
+            <a:off x="2286000" y="3017520"/>
+            <a:ext cx="1920240" cy="411480"/>
           </a:xfrm>
           <a:prstGeom prst="rect">
             <a:avLst/>
@@ -8274,16 +8568,16 @@
           <a:bodyPr rtlCol="0" anchor="t" wrap="square" lIns="45720" rIns="45720" tIns="18288" bIns="18288"/>
           <a:lstStyle/>
           <a:p>
-            <a:pPr algn="ctr">
-              <a:defRPr sz="1300" b="1" i="0">
-                <a:solidFill>
-                  <a:srgbClr val="FFFFFF"/>
-                </a:solidFill>
-                <a:latin typeface="Calibri"/>
-              </a:defRPr>
-            </a:pPr>
-            <a:r>
-              <a:t>RED</a:t>
+            <a:pPr algn="l">
+              <a:defRPr sz="1400" b="0" i="0">
+                <a:solidFill>
+                  <a:srgbClr val="1A1A1A"/>
+                </a:solidFill>
+                <a:latin typeface="Calibri"/>
+              </a:defRPr>
+            </a:pPr>
+            <a:r>
+              <a:t>PSI ≥ 0.25</a:t>
             </a:r>
           </a:p>
         </p:txBody>
@@ -8296,8 +8590,8 @@
         </p:nvSpPr>
         <p:spPr>
           <a:xfrm>
-            <a:off x="1645920" y="3355848"/>
-            <a:ext cx="1920240" cy="502920"/>
+            <a:off x="4297680" y="3017520"/>
+            <a:ext cx="1554480" cy="411480"/>
           </a:xfrm>
           <a:prstGeom prst="rect">
             <a:avLst/>
@@ -8327,15 +8621,15 @@
           <a:lstStyle/>
           <a:p>
             <a:pPr algn="l">
-              <a:defRPr sz="1300" b="1" i="0">
-                <a:solidFill>
-                  <a:srgbClr val="1A1A1A"/>
-                </a:solidFill>
-                <a:latin typeface="Calibri"/>
-              </a:defRPr>
-            </a:pPr>
-            <a:r>
-              <a:t>PSI ≥ 0.25</a:t>
+              <a:defRPr sz="1400" b="0" i="0">
+                <a:solidFill>
+                  <a:srgbClr val="3A3A3A"/>
+                </a:solidFill>
+                <a:latin typeface="Calibri"/>
+              </a:defRPr>
+            </a:pPr>
+            <a:r>
+              <a:t>review</a:t>
             </a:r>
           </a:p>
         </p:txBody>
@@ -8348,8 +8642,8 @@
         </p:nvSpPr>
         <p:spPr>
           <a:xfrm>
-            <a:off x="3657600" y="3355848"/>
-            <a:ext cx="2194560" cy="502920"/>
+            <a:off x="457200" y="3730752"/>
+            <a:ext cx="5394960" cy="640080"/>
           </a:xfrm>
           <a:prstGeom prst="rect">
             <a:avLst/>
@@ -8387,7 +8681,7 @@
               </a:defRPr>
             </a:pPr>
             <a:r>
-              <a:t>Trigger review</a:t>
+              <a:t>Computed on region &amp; occupation, rolling 500-round window.</a:t>
             </a:r>
           </a:p>
         </p:txBody>
@@ -8400,8 +8694,8 @@
         </p:nvSpPr>
         <p:spPr>
           <a:xfrm>
-            <a:off x="457200" y="4059936"/>
-            <a:ext cx="5486400" cy="411480"/>
+            <a:off x="6492240" y="1207008"/>
+            <a:ext cx="5212080" cy="292608"/>
           </a:xfrm>
           <a:prstGeom prst="rect">
             <a:avLst/>
@@ -8431,15 +8725,16 @@
           <a:lstStyle/>
           <a:p>
             <a:pPr algn="l">
-              <a:defRPr sz="1100" b="0" i="1">
-                <a:solidFill>
-                  <a:srgbClr val="3A3A3A"/>
-                </a:solidFill>
-                <a:latin typeface="Calibri"/>
-              </a:defRPr>
-            </a:pPr>
-            <a:r>
-              <a:t>Note: PSI is a MONITOR, not an enforcer. Constrained-action enforcement is deferred to future work.</a:t>
+              <a:defRPr sz="1100" b="1" i="0">
+                <a:solidFill>
+                  <a:srgbClr val="5D2A42"/>
+                </a:solidFill>
+                <a:latin typeface="Calibri"/>
+              </a:defRPr>
+            </a:pPr>
+            <a:r>
+              <a:rPr spc="120"/>
+              <a:t>HUMAN-IN-THE-LOOP WRAPPER</a:t>
             </a:r>
           </a:p>
         </p:txBody>
@@ -8452,8 +8747,52 @@
         </p:nvSpPr>
         <p:spPr>
           <a:xfrm>
-            <a:off x="6492240" y="1207008"/>
-            <a:ext cx="5212080" cy="329184"/>
+            <a:off x="6492240" y="1773936"/>
+            <a:ext cx="91440" cy="91440"/>
+          </a:xfrm>
+          <a:prstGeom prst="rect">
+            <a:avLst/>
+          </a:prstGeom>
+          <a:solidFill>
+            <a:srgbClr val="5D2A42"/>
+          </a:solidFill>
+          <a:ln>
+            <a:noFill/>
+          </a:ln>
+          <a:effectLst/>
+        </p:spPr>
+        <p:style>
+          <a:lnRef idx="1">
+            <a:schemeClr val="accent1"/>
+          </a:lnRef>
+          <a:fillRef idx="3">
+            <a:schemeClr val="accent1"/>
+          </a:fillRef>
+          <a:effectRef idx="2">
+            <a:schemeClr val="accent1"/>
+          </a:effectRef>
+          <a:fontRef idx="minor">
+            <a:schemeClr val="lt1"/>
+          </a:fontRef>
+        </p:style>
+        <p:txBody>
+          <a:bodyPr rtlCol="0" anchor="ctr"/>
+          <a:lstStyle/>
+          <a:p>
+            <a:pPr algn="ctr"/>
+          </a:p>
+        </p:txBody>
+      </p:sp>
+      <p:sp>
+        <p:nvSpPr>
+          <p:cNvPr id="23" name="Rectangle 22"/>
+          <p:cNvSpPr/>
+          <p:nvPr/>
+        </p:nvSpPr>
+        <p:spPr>
+          <a:xfrm>
+            <a:off x="6748272" y="1664208"/>
+            <a:ext cx="4956048" cy="566928"/>
           </a:xfrm>
           <a:prstGeom prst="rect">
             <a:avLst/>
@@ -8483,62 +8822,7 @@
           <a:lstStyle/>
           <a:p>
             <a:pPr algn="l">
-              <a:defRPr sz="1400" b="1" i="0">
-                <a:solidFill>
-                  <a:srgbClr val="5D2A42"/>
-                </a:solidFill>
-                <a:latin typeface="Calibri"/>
-              </a:defRPr>
-            </a:pPr>
-            <a:r>
-              <a:t>Human-in-the-loop Wrapper</a:t>
-            </a:r>
-          </a:p>
-        </p:txBody>
-      </p:sp>
-      <p:sp>
-        <p:nvSpPr>
-          <p:cNvPr id="23" name="Rectangle 22"/>
-          <p:cNvSpPr/>
-          <p:nvPr/>
-        </p:nvSpPr>
-        <p:spPr>
-          <a:xfrm>
-            <a:off x="6492240" y="1591056"/>
-            <a:ext cx="5212080" cy="2743200"/>
-          </a:xfrm>
-          <a:prstGeom prst="rect">
-            <a:avLst/>
-          </a:prstGeom>
-          <a:noFill/>
-          <a:ln>
-            <a:noFill/>
-          </a:ln>
-          <a:effectLst/>
-        </p:spPr>
-        <p:style>
-          <a:lnRef idx="1">
-            <a:schemeClr val="accent1"/>
-          </a:lnRef>
-          <a:fillRef idx="3">
-            <a:schemeClr val="accent1"/>
-          </a:fillRef>
-          <a:effectRef idx="2">
-            <a:schemeClr val="accent1"/>
-          </a:effectRef>
-          <a:fontRef idx="minor">
-            <a:schemeClr val="lt1"/>
-          </a:fontRef>
-        </p:style>
-        <p:txBody>
-          <a:bodyPr rtlCol="0" anchor="ctr" wrap="square"/>
-          <a:lstStyle/>
-          <a:p>
-            <a:pPr algn="ctr">
-              <a:spcAft>
-                <a:spcPts val="400"/>
-              </a:spcAft>
-              <a:defRPr sz="1300" b="0">
+              <a:defRPr sz="1500" b="0" i="0">
                 <a:solidFill>
                   <a:srgbClr val="1A1A1A"/>
                 </a:solidFill>
@@ -8546,15 +8830,95 @@
               </a:defRPr>
             </a:pPr>
             <a:r>
-              <a:t>• Bandit selects arm; if predicted uncertainty &gt; κ threshold → REFER to actuary</a:t>
-            </a:r>
-          </a:p>
-          <a:p>
-            <a:pPr>
-              <a:spcAft>
-                <a:spcPts val="400"/>
-              </a:spcAft>
-              <a:defRPr sz="1300" b="0">
+              <a:t>Uncertainty &gt; κ  →  REFER to actuary</a:t>
+            </a:r>
+          </a:p>
+        </p:txBody>
+      </p:sp>
+      <p:sp>
+        <p:nvSpPr>
+          <p:cNvPr id="24" name="Rectangle 23"/>
+          <p:cNvSpPr/>
+          <p:nvPr/>
+        </p:nvSpPr>
+        <p:spPr>
+          <a:xfrm>
+            <a:off x="6492240" y="2340864"/>
+            <a:ext cx="91440" cy="91440"/>
+          </a:xfrm>
+          <a:prstGeom prst="rect">
+            <a:avLst/>
+          </a:prstGeom>
+          <a:solidFill>
+            <a:srgbClr val="5D2A42"/>
+          </a:solidFill>
+          <a:ln>
+            <a:noFill/>
+          </a:ln>
+          <a:effectLst/>
+        </p:spPr>
+        <p:style>
+          <a:lnRef idx="1">
+            <a:schemeClr val="accent1"/>
+          </a:lnRef>
+          <a:fillRef idx="3">
+            <a:schemeClr val="accent1"/>
+          </a:fillRef>
+          <a:effectRef idx="2">
+            <a:schemeClr val="accent1"/>
+          </a:effectRef>
+          <a:fontRef idx="minor">
+            <a:schemeClr val="lt1"/>
+          </a:fontRef>
+        </p:style>
+        <p:txBody>
+          <a:bodyPr rtlCol="0" anchor="ctr"/>
+          <a:lstStyle/>
+          <a:p>
+            <a:pPr algn="ctr"/>
+          </a:p>
+        </p:txBody>
+      </p:sp>
+      <p:sp>
+        <p:nvSpPr>
+          <p:cNvPr id="25" name="Rectangle 24"/>
+          <p:cNvSpPr/>
+          <p:nvPr/>
+        </p:nvSpPr>
+        <p:spPr>
+          <a:xfrm>
+            <a:off x="6748272" y="2231136"/>
+            <a:ext cx="4956048" cy="566928"/>
+          </a:xfrm>
+          <a:prstGeom prst="rect">
+            <a:avLst/>
+          </a:prstGeom>
+          <a:noFill/>
+          <a:ln>
+            <a:noFill/>
+          </a:ln>
+          <a:effectLst/>
+        </p:spPr>
+        <p:style>
+          <a:lnRef idx="1">
+            <a:schemeClr val="accent1"/>
+          </a:lnRef>
+          <a:fillRef idx="3">
+            <a:schemeClr val="accent1"/>
+          </a:fillRef>
+          <a:effectRef idx="2">
+            <a:schemeClr val="accent1"/>
+          </a:effectRef>
+          <a:fontRef idx="minor">
+            <a:schemeClr val="lt1"/>
+          </a:fontRef>
+        </p:style>
+        <p:txBody>
+          <a:bodyPr rtlCol="0" anchor="t" wrap="square" lIns="45720" rIns="45720" tIns="18288" bIns="18288"/>
+          <a:lstStyle/>
+          <a:p>
+            <a:pPr algn="l">
+              <a:defRPr sz="1500" b="0" i="0">
                 <a:solidFill>
                   <a:srgbClr val="1A1A1A"/>
                 </a:solidFill>
@@ -8562,15 +8926,95 @@
               </a:defRPr>
             </a:pPr>
             <a:r>
-              <a:t>• Conservatism κ ∈ {0.3, 0.5, 0.7} controls referral rate</a:t>
-            </a:r>
-          </a:p>
-          <a:p>
-            <a:pPr>
-              <a:spcAft>
-                <a:spcPts val="400"/>
-              </a:spcAft>
-              <a:defRPr sz="1300" b="0">
+              <a:t>Conservatism κ ∈ {0.3, 0.5, 0.7}</a:t>
+            </a:r>
+          </a:p>
+        </p:txBody>
+      </p:sp>
+      <p:sp>
+        <p:nvSpPr>
+          <p:cNvPr id="26" name="Rectangle 25"/>
+          <p:cNvSpPr/>
+          <p:nvPr/>
+        </p:nvSpPr>
+        <p:spPr>
+          <a:xfrm>
+            <a:off x="6492240" y="2907792"/>
+            <a:ext cx="91440" cy="91440"/>
+          </a:xfrm>
+          <a:prstGeom prst="rect">
+            <a:avLst/>
+          </a:prstGeom>
+          <a:solidFill>
+            <a:srgbClr val="5D2A42"/>
+          </a:solidFill>
+          <a:ln>
+            <a:noFill/>
+          </a:ln>
+          <a:effectLst/>
+        </p:spPr>
+        <p:style>
+          <a:lnRef idx="1">
+            <a:schemeClr val="accent1"/>
+          </a:lnRef>
+          <a:fillRef idx="3">
+            <a:schemeClr val="accent1"/>
+          </a:fillRef>
+          <a:effectRef idx="2">
+            <a:schemeClr val="accent1"/>
+          </a:effectRef>
+          <a:fontRef idx="minor">
+            <a:schemeClr val="lt1"/>
+          </a:fontRef>
+        </p:style>
+        <p:txBody>
+          <a:bodyPr rtlCol="0" anchor="ctr"/>
+          <a:lstStyle/>
+          <a:p>
+            <a:pPr algn="ctr"/>
+          </a:p>
+        </p:txBody>
+      </p:sp>
+      <p:sp>
+        <p:nvSpPr>
+          <p:cNvPr id="27" name="Rectangle 26"/>
+          <p:cNvSpPr/>
+          <p:nvPr/>
+        </p:nvSpPr>
+        <p:spPr>
+          <a:xfrm>
+            <a:off x="6748272" y="2798064"/>
+            <a:ext cx="4956048" cy="566928"/>
+          </a:xfrm>
+          <a:prstGeom prst="rect">
+            <a:avLst/>
+          </a:prstGeom>
+          <a:noFill/>
+          <a:ln>
+            <a:noFill/>
+          </a:ln>
+          <a:effectLst/>
+        </p:spPr>
+        <p:style>
+          <a:lnRef idx="1">
+            <a:schemeClr val="accent1"/>
+          </a:lnRef>
+          <a:fillRef idx="3">
+            <a:schemeClr val="accent1"/>
+          </a:fillRef>
+          <a:effectRef idx="2">
+            <a:schemeClr val="accent1"/>
+          </a:effectRef>
+          <a:fontRef idx="minor">
+            <a:schemeClr val="lt1"/>
+          </a:fontRef>
+        </p:style>
+        <p:txBody>
+          <a:bodyPr rtlCol="0" anchor="t" wrap="square" lIns="45720" rIns="45720" tIns="18288" bIns="18288"/>
+          <a:lstStyle/>
+          <a:p>
+            <a:pPr algn="l">
+              <a:defRPr sz="1500" b="0" i="0">
                 <a:solidFill>
                   <a:srgbClr val="1A1A1A"/>
                 </a:solidFill>
@@ -8578,15 +9022,95 @@
               </a:defRPr>
             </a:pPr>
             <a:r>
-              <a:t>• Human overrides bandit action; outcome reward used for bandit update</a:t>
-            </a:r>
-          </a:p>
-          <a:p>
-            <a:pPr>
-              <a:spcAft>
-                <a:spcPts val="400"/>
-              </a:spcAft>
-              <a:defRPr sz="1300" b="0">
+              <a:t>Human decides; reward still trains bandit</a:t>
+            </a:r>
+          </a:p>
+        </p:txBody>
+      </p:sp>
+      <p:sp>
+        <p:nvSpPr>
+          <p:cNvPr id="28" name="Rectangle 27"/>
+          <p:cNvSpPr/>
+          <p:nvPr/>
+        </p:nvSpPr>
+        <p:spPr>
+          <a:xfrm>
+            <a:off x="6492240" y="3474720"/>
+            <a:ext cx="91440" cy="91440"/>
+          </a:xfrm>
+          <a:prstGeom prst="rect">
+            <a:avLst/>
+          </a:prstGeom>
+          <a:solidFill>
+            <a:srgbClr val="5D2A42"/>
+          </a:solidFill>
+          <a:ln>
+            <a:noFill/>
+          </a:ln>
+          <a:effectLst/>
+        </p:spPr>
+        <p:style>
+          <a:lnRef idx="1">
+            <a:schemeClr val="accent1"/>
+          </a:lnRef>
+          <a:fillRef idx="3">
+            <a:schemeClr val="accent1"/>
+          </a:fillRef>
+          <a:effectRef idx="2">
+            <a:schemeClr val="accent1"/>
+          </a:effectRef>
+          <a:fontRef idx="minor">
+            <a:schemeClr val="lt1"/>
+          </a:fontRef>
+        </p:style>
+        <p:txBody>
+          <a:bodyPr rtlCol="0" anchor="ctr"/>
+          <a:lstStyle/>
+          <a:p>
+            <a:pPr algn="ctr"/>
+          </a:p>
+        </p:txBody>
+      </p:sp>
+      <p:sp>
+        <p:nvSpPr>
+          <p:cNvPr id="29" name="Rectangle 28"/>
+          <p:cNvSpPr/>
+          <p:nvPr/>
+        </p:nvSpPr>
+        <p:spPr>
+          <a:xfrm>
+            <a:off x="6748272" y="3364992"/>
+            <a:ext cx="4956048" cy="566928"/>
+          </a:xfrm>
+          <a:prstGeom prst="rect">
+            <a:avLst/>
+          </a:prstGeom>
+          <a:noFill/>
+          <a:ln>
+            <a:noFill/>
+          </a:ln>
+          <a:effectLst/>
+        </p:spPr>
+        <p:style>
+          <a:lnRef idx="1">
+            <a:schemeClr val="accent1"/>
+          </a:lnRef>
+          <a:fillRef idx="3">
+            <a:schemeClr val="accent1"/>
+          </a:fillRef>
+          <a:effectRef idx="2">
+            <a:schemeClr val="accent1"/>
+          </a:effectRef>
+          <a:fontRef idx="minor">
+            <a:schemeClr val="lt1"/>
+          </a:fontRef>
+        </p:style>
+        <p:txBody>
+          <a:bodyPr rtlCol="0" anchor="t" wrap="square" lIns="45720" rIns="45720" tIns="18288" bIns="18288"/>
+          <a:lstStyle/>
+          <a:p>
+            <a:pPr algn="l">
+              <a:defRPr sz="1500" b="0" i="0">
                 <a:solidFill>
                   <a:srgbClr val="1A1A1A"/>
                 </a:solidFill>
@@ -8594,77 +9118,59 @@
               </a:defRPr>
             </a:pPr>
             <a:r>
-              <a:t>• Alignment rate: 60% of overrides agree with bandit (κ=0.7)</a:t>
-            </a:r>
-          </a:p>
-          <a:p>
-            <a:pPr>
-              <a:spcAft>
-                <a:spcPts val="400"/>
-              </a:spcAft>
-              <a:defRPr sz="1300" b="0">
-                <a:solidFill>
-                  <a:srgbClr val="1A1A1A"/>
-                </a:solidFill>
-                <a:latin typeface="Calibri"/>
-              </a:defRPr>
-            </a:pPr>
-            <a:r>
-              <a:t>• Review cost charged per referral; net benefit computed over N=5,000 rounds</a:t>
-            </a:r>
-          </a:p>
-        </p:txBody>
-      </p:sp>
-      <p:sp>
-        <p:nvSpPr>
-          <p:cNvPr id="24" name="Rectangle 23"/>
-          <p:cNvSpPr/>
-          <p:nvPr/>
-        </p:nvSpPr>
-        <p:spPr>
-          <a:xfrm>
-            <a:off x="6492240" y="4453128"/>
-            <a:ext cx="5212080" cy="868680"/>
-          </a:xfrm>
-          <a:prstGeom prst="rect">
-            <a:avLst/>
-          </a:prstGeom>
-          <a:solidFill>
-            <a:srgbClr val="F7F5F6"/>
-          </a:solidFill>
-          <a:ln>
-            <a:noFill/>
-          </a:ln>
-          <a:effectLst/>
-        </p:spPr>
-        <p:style>
-          <a:lnRef idx="1">
-            <a:schemeClr val="accent1"/>
-          </a:lnRef>
-          <a:fillRef idx="3">
-            <a:schemeClr val="accent1"/>
-          </a:fillRef>
-          <a:effectRef idx="2">
-            <a:schemeClr val="accent1"/>
-          </a:effectRef>
-          <a:fontRef idx="minor">
-            <a:schemeClr val="lt1"/>
-          </a:fontRef>
-        </p:style>
-        <p:txBody>
-          <a:bodyPr rtlCol="0" anchor="ctr" wrap="square" lIns="164592" rIns="164592"/>
+              <a:t>Target: review cost &lt; 2% of reward</a:t>
+            </a:r>
+          </a:p>
+        </p:txBody>
+      </p:sp>
+      <p:sp>
+        <p:nvSpPr>
+          <p:cNvPr id="30" name="Rectangle 29"/>
+          <p:cNvSpPr/>
+          <p:nvPr/>
+        </p:nvSpPr>
+        <p:spPr>
+          <a:xfrm>
+            <a:off x="457200" y="6272784"/>
+            <a:ext cx="11277295" cy="329184"/>
+          </a:xfrm>
+          <a:prstGeom prst="rect">
+            <a:avLst/>
+          </a:prstGeom>
+          <a:noFill/>
+          <a:ln>
+            <a:noFill/>
+          </a:ln>
+          <a:effectLst/>
+        </p:spPr>
+        <p:style>
+          <a:lnRef idx="1">
+            <a:schemeClr val="accent1"/>
+          </a:lnRef>
+          <a:fillRef idx="3">
+            <a:schemeClr val="accent1"/>
+          </a:fillRef>
+          <a:effectRef idx="2">
+            <a:schemeClr val="accent1"/>
+          </a:effectRef>
+          <a:fontRef idx="minor">
+            <a:schemeClr val="lt1"/>
+          </a:fontRef>
+        </p:style>
+        <p:txBody>
+          <a:bodyPr rtlCol="0" anchor="t" wrap="square" lIns="45720" rIns="45720" tIns="18288" bIns="18288"/>
           <a:lstStyle/>
           <a:p>
             <a:pPr algn="l">
-              <a:defRPr sz="1200" b="0">
-                <a:solidFill>
-                  <a:srgbClr val="1A1A1A"/>
-                </a:solidFill>
-                <a:latin typeface="Calibri"/>
-              </a:defRPr>
-            </a:pPr>
-            <a:r>
-              <a:t>Design target: reduce worst-case regret via human expertise while keeping review cost below 2% of gross reward.</a:t>
+              <a:defRPr sz="1050" b="0" i="1">
+                <a:solidFill>
+                  <a:srgbClr val="777777"/>
+                </a:solidFill>
+                <a:latin typeface="Calibri"/>
+              </a:defRPr>
+            </a:pPr>
+            <a:r>
+              <a:t>PSI is a monitor, not an enforcer -- constrained-action enforcement is future work.</a:t>
             </a:r>
           </a:p>
         </p:txBody>
@@ -35796,31 +36302,1889 @@
           </a:p>
         </p:txBody>
       </p:sp>
-      <p:pic>
-        <p:nvPicPr>
-          <p:cNvPr id="7" name="Picture 6" descr="fig_ch4_architecture.png"/>
-          <p:cNvPicPr>
-            <a:picLocks noChangeAspect="1"/>
-          </p:cNvPicPr>
-          <p:nvPr/>
-        </p:nvPicPr>
-        <p:blipFill>
-          <a:blip r:embed="rId2"/>
-          <a:stretch>
-            <a:fillRect/>
-          </a:stretch>
-        </p:blipFill>
-        <p:spPr>
-          <a:xfrm>
-            <a:off x="1906201" y="1207008"/>
-            <a:ext cx="8379292" cy="5312664"/>
-          </a:xfrm>
-          <a:prstGeom prst="rect">
-            <a:avLst/>
-          </a:prstGeom>
-          <a:effectLst/>
-        </p:spPr>
-      </p:pic>
+      <p:sp>
+        <p:nvSpPr>
+          <p:cNvPr id="7" name="Rectangle 6"/>
+          <p:cNvSpPr/>
+          <p:nvPr/>
+        </p:nvSpPr>
+        <p:spPr>
+          <a:xfrm>
+            <a:off x="457200" y="1636776"/>
+            <a:ext cx="1554480" cy="365760"/>
+          </a:xfrm>
+          <a:prstGeom prst="rect">
+            <a:avLst/>
+          </a:prstGeom>
+          <a:noFill/>
+          <a:ln>
+            <a:noFill/>
+          </a:ln>
+          <a:effectLst/>
+        </p:spPr>
+        <p:style>
+          <a:lnRef idx="1">
+            <a:schemeClr val="accent1"/>
+          </a:lnRef>
+          <a:fillRef idx="3">
+            <a:schemeClr val="accent1"/>
+          </a:fillRef>
+          <a:effectRef idx="2">
+            <a:schemeClr val="accent1"/>
+          </a:effectRef>
+          <a:fontRef idx="minor">
+            <a:schemeClr val="lt1"/>
+          </a:fontRef>
+        </p:style>
+        <p:txBody>
+          <a:bodyPr rtlCol="0" anchor="t" wrap="square" lIns="45720" rIns="45720" tIns="18288" bIns="18288"/>
+          <a:lstStyle/>
+          <a:p>
+            <a:pPr algn="l">
+              <a:defRPr sz="1000" b="1" i="0">
+                <a:solidFill>
+                  <a:srgbClr val="5D2A42"/>
+                </a:solidFill>
+                <a:latin typeface="Calibri"/>
+              </a:defRPr>
+            </a:pPr>
+            <a:r>
+              <a:rPr spc="80"/>
+              <a:t>BROWSER (SPA)</a:t>
+            </a:r>
+          </a:p>
+        </p:txBody>
+      </p:sp>
+      <p:sp>
+        <p:nvSpPr>
+          <p:cNvPr id="8" name="Rectangle 7"/>
+          <p:cNvSpPr/>
+          <p:nvPr/>
+        </p:nvSpPr>
+        <p:spPr>
+          <a:xfrm>
+            <a:off x="2011680" y="1435608"/>
+            <a:ext cx="2331720" cy="713232"/>
+          </a:xfrm>
+          <a:prstGeom prst="rect">
+            <a:avLst/>
+          </a:prstGeom>
+          <a:solidFill>
+            <a:srgbClr val="F7F5F6"/>
+          </a:solidFill>
+          <a:ln w="12700">
+            <a:solidFill>
+              <a:srgbClr val="DDDDDD"/>
+            </a:solidFill>
+          </a:ln>
+          <a:effectLst/>
+        </p:spPr>
+        <p:style>
+          <a:lnRef idx="1">
+            <a:schemeClr val="accent1"/>
+          </a:lnRef>
+          <a:fillRef idx="3">
+            <a:schemeClr val="accent1"/>
+          </a:fillRef>
+          <a:effectRef idx="2">
+            <a:schemeClr val="accent1"/>
+          </a:effectRef>
+          <a:fontRef idx="minor">
+            <a:schemeClr val="lt1"/>
+          </a:fontRef>
+        </p:style>
+        <p:txBody>
+          <a:bodyPr rtlCol="0" anchor="ctr"/>
+          <a:lstStyle/>
+          <a:p>
+            <a:pPr algn="ctr"/>
+          </a:p>
+        </p:txBody>
+      </p:sp>
+      <p:sp>
+        <p:nvSpPr>
+          <p:cNvPr id="9" name="Rectangle 8"/>
+          <p:cNvSpPr/>
+          <p:nvPr/>
+        </p:nvSpPr>
+        <p:spPr>
+          <a:xfrm>
+            <a:off x="2084832" y="1435608"/>
+            <a:ext cx="2185416" cy="713232"/>
+          </a:xfrm>
+          <a:prstGeom prst="rect">
+            <a:avLst/>
+          </a:prstGeom>
+          <a:noFill/>
+          <a:ln>
+            <a:noFill/>
+          </a:ln>
+          <a:effectLst/>
+        </p:spPr>
+        <p:style>
+          <a:lnRef idx="1">
+            <a:schemeClr val="accent1"/>
+          </a:lnRef>
+          <a:fillRef idx="3">
+            <a:schemeClr val="accent1"/>
+          </a:fillRef>
+          <a:effectRef idx="2">
+            <a:schemeClr val="accent1"/>
+          </a:effectRef>
+          <a:fontRef idx="minor">
+            <a:schemeClr val="lt1"/>
+          </a:fontRef>
+        </p:style>
+        <p:txBody>
+          <a:bodyPr rtlCol="0" anchor="ctr" wrap="square" lIns="45720" rIns="45720" tIns="18288" bIns="18288"/>
+          <a:lstStyle/>
+          <a:p>
+            <a:pPr algn="ctr">
+              <a:defRPr sz="1200" b="0" i="0">
+                <a:solidFill>
+                  <a:srgbClr val="1A1A1A"/>
+                </a:solidFill>
+                <a:latin typeface="Calibri"/>
+              </a:defRPr>
+            </a:pPr>
+            <a:r>
+              <a:t>Applicant Simulator</a:t>
+            </a:r>
+          </a:p>
+        </p:txBody>
+      </p:sp>
+      <p:sp>
+        <p:nvSpPr>
+          <p:cNvPr id="10" name="Rectangle 9"/>
+          <p:cNvSpPr/>
+          <p:nvPr/>
+        </p:nvSpPr>
+        <p:spPr>
+          <a:xfrm>
+            <a:off x="3177540" y="2148840"/>
+            <a:ext cx="16459" cy="612648"/>
+          </a:xfrm>
+          <a:prstGeom prst="rect">
+            <a:avLst/>
+          </a:prstGeom>
+          <a:solidFill>
+            <a:srgbClr val="5D2A42"/>
+          </a:solidFill>
+          <a:ln>
+            <a:noFill/>
+          </a:ln>
+          <a:effectLst/>
+        </p:spPr>
+        <p:style>
+          <a:lnRef idx="1">
+            <a:schemeClr val="accent1"/>
+          </a:lnRef>
+          <a:fillRef idx="3">
+            <a:schemeClr val="accent1"/>
+          </a:fillRef>
+          <a:effectRef idx="2">
+            <a:schemeClr val="accent1"/>
+          </a:effectRef>
+          <a:fontRef idx="minor">
+            <a:schemeClr val="lt1"/>
+          </a:fontRef>
+        </p:style>
+        <p:txBody>
+          <a:bodyPr rtlCol="0" anchor="ctr"/>
+          <a:lstStyle/>
+          <a:p>
+            <a:pPr algn="ctr"/>
+          </a:p>
+        </p:txBody>
+      </p:sp>
+      <p:sp>
+        <p:nvSpPr>
+          <p:cNvPr id="11" name="Rectangle 10"/>
+          <p:cNvSpPr/>
+          <p:nvPr/>
+        </p:nvSpPr>
+        <p:spPr>
+          <a:xfrm>
+            <a:off x="4507992" y="1435608"/>
+            <a:ext cx="2331720" cy="713232"/>
+          </a:xfrm>
+          <a:prstGeom prst="rect">
+            <a:avLst/>
+          </a:prstGeom>
+          <a:solidFill>
+            <a:srgbClr val="F7F5F6"/>
+          </a:solidFill>
+          <a:ln w="12700">
+            <a:solidFill>
+              <a:srgbClr val="DDDDDD"/>
+            </a:solidFill>
+          </a:ln>
+          <a:effectLst/>
+        </p:spPr>
+        <p:style>
+          <a:lnRef idx="1">
+            <a:schemeClr val="accent1"/>
+          </a:lnRef>
+          <a:fillRef idx="3">
+            <a:schemeClr val="accent1"/>
+          </a:fillRef>
+          <a:effectRef idx="2">
+            <a:schemeClr val="accent1"/>
+          </a:effectRef>
+          <a:fontRef idx="minor">
+            <a:schemeClr val="lt1"/>
+          </a:fontRef>
+        </p:style>
+        <p:txBody>
+          <a:bodyPr rtlCol="0" anchor="ctr"/>
+          <a:lstStyle/>
+          <a:p>
+            <a:pPr algn="ctr"/>
+          </a:p>
+        </p:txBody>
+      </p:sp>
+      <p:sp>
+        <p:nvSpPr>
+          <p:cNvPr id="12" name="Rectangle 11"/>
+          <p:cNvSpPr/>
+          <p:nvPr/>
+        </p:nvSpPr>
+        <p:spPr>
+          <a:xfrm>
+            <a:off x="4581144" y="1435608"/>
+            <a:ext cx="2185416" cy="713232"/>
+          </a:xfrm>
+          <a:prstGeom prst="rect">
+            <a:avLst/>
+          </a:prstGeom>
+          <a:noFill/>
+          <a:ln>
+            <a:noFill/>
+          </a:ln>
+          <a:effectLst/>
+        </p:spPr>
+        <p:style>
+          <a:lnRef idx="1">
+            <a:schemeClr val="accent1"/>
+          </a:lnRef>
+          <a:fillRef idx="3">
+            <a:schemeClr val="accent1"/>
+          </a:fillRef>
+          <a:effectRef idx="2">
+            <a:schemeClr val="accent1"/>
+          </a:effectRef>
+          <a:fontRef idx="minor">
+            <a:schemeClr val="lt1"/>
+          </a:fontRef>
+        </p:style>
+        <p:txBody>
+          <a:bodyPr rtlCol="0" anchor="ctr" wrap="square" lIns="45720" rIns="45720" tIns="18288" bIns="18288"/>
+          <a:lstStyle/>
+          <a:p>
+            <a:pPr algn="ctr">
+              <a:defRPr sz="1200" b="0" i="0">
+                <a:solidFill>
+                  <a:srgbClr val="1A1A1A"/>
+                </a:solidFill>
+                <a:latin typeface="Calibri"/>
+              </a:defRPr>
+            </a:pPr>
+            <a:r>
+              <a:t>Premium Optimiser</a:t>
+            </a:r>
+          </a:p>
+        </p:txBody>
+      </p:sp>
+      <p:sp>
+        <p:nvSpPr>
+          <p:cNvPr id="13" name="Rectangle 12"/>
+          <p:cNvSpPr/>
+          <p:nvPr/>
+        </p:nvSpPr>
+        <p:spPr>
+          <a:xfrm>
+            <a:off x="5673852" y="2148840"/>
+            <a:ext cx="16459" cy="612648"/>
+          </a:xfrm>
+          <a:prstGeom prst="rect">
+            <a:avLst/>
+          </a:prstGeom>
+          <a:solidFill>
+            <a:srgbClr val="5D2A42"/>
+          </a:solidFill>
+          <a:ln>
+            <a:noFill/>
+          </a:ln>
+          <a:effectLst/>
+        </p:spPr>
+        <p:style>
+          <a:lnRef idx="1">
+            <a:schemeClr val="accent1"/>
+          </a:lnRef>
+          <a:fillRef idx="3">
+            <a:schemeClr val="accent1"/>
+          </a:fillRef>
+          <a:effectRef idx="2">
+            <a:schemeClr val="accent1"/>
+          </a:effectRef>
+          <a:fontRef idx="minor">
+            <a:schemeClr val="lt1"/>
+          </a:fontRef>
+        </p:style>
+        <p:txBody>
+          <a:bodyPr rtlCol="0" anchor="ctr"/>
+          <a:lstStyle/>
+          <a:p>
+            <a:pPr algn="ctr"/>
+          </a:p>
+        </p:txBody>
+      </p:sp>
+      <p:sp>
+        <p:nvSpPr>
+          <p:cNvPr id="14" name="Rectangle 13"/>
+          <p:cNvSpPr/>
+          <p:nvPr/>
+        </p:nvSpPr>
+        <p:spPr>
+          <a:xfrm>
+            <a:off x="7004304" y="1435608"/>
+            <a:ext cx="2331720" cy="713232"/>
+          </a:xfrm>
+          <a:prstGeom prst="rect">
+            <a:avLst/>
+          </a:prstGeom>
+          <a:solidFill>
+            <a:srgbClr val="F7F5F6"/>
+          </a:solidFill>
+          <a:ln w="12700">
+            <a:solidFill>
+              <a:srgbClr val="DDDDDD"/>
+            </a:solidFill>
+          </a:ln>
+          <a:effectLst/>
+        </p:spPr>
+        <p:style>
+          <a:lnRef idx="1">
+            <a:schemeClr val="accent1"/>
+          </a:lnRef>
+          <a:fillRef idx="3">
+            <a:schemeClr val="accent1"/>
+          </a:fillRef>
+          <a:effectRef idx="2">
+            <a:schemeClr val="accent1"/>
+          </a:effectRef>
+          <a:fontRef idx="minor">
+            <a:schemeClr val="lt1"/>
+          </a:fontRef>
+        </p:style>
+        <p:txBody>
+          <a:bodyPr rtlCol="0" anchor="ctr"/>
+          <a:lstStyle/>
+          <a:p>
+            <a:pPr algn="ctr"/>
+          </a:p>
+        </p:txBody>
+      </p:sp>
+      <p:sp>
+        <p:nvSpPr>
+          <p:cNvPr id="15" name="Rectangle 14"/>
+          <p:cNvSpPr/>
+          <p:nvPr/>
+        </p:nvSpPr>
+        <p:spPr>
+          <a:xfrm>
+            <a:off x="7077456" y="1435608"/>
+            <a:ext cx="2185416" cy="713232"/>
+          </a:xfrm>
+          <a:prstGeom prst="rect">
+            <a:avLst/>
+          </a:prstGeom>
+          <a:noFill/>
+          <a:ln>
+            <a:noFill/>
+          </a:ln>
+          <a:effectLst/>
+        </p:spPr>
+        <p:style>
+          <a:lnRef idx="1">
+            <a:schemeClr val="accent1"/>
+          </a:lnRef>
+          <a:fillRef idx="3">
+            <a:schemeClr val="accent1"/>
+          </a:fillRef>
+          <a:effectRef idx="2">
+            <a:schemeClr val="accent1"/>
+          </a:effectRef>
+          <a:fontRef idx="minor">
+            <a:schemeClr val="lt1"/>
+          </a:fontRef>
+        </p:style>
+        <p:txBody>
+          <a:bodyPr rtlCol="0" anchor="ctr" wrap="square" lIns="45720" rIns="45720" tIns="18288" bIns="18288"/>
+          <a:lstStyle/>
+          <a:p>
+            <a:pPr algn="ctr">
+              <a:defRPr sz="1200" b="0" i="0">
+                <a:solidFill>
+                  <a:srgbClr val="1A1A1A"/>
+                </a:solidFill>
+                <a:latin typeface="Calibri"/>
+              </a:defRPr>
+            </a:pPr>
+            <a:r>
+              <a:t>Bandit Arena</a:t>
+            </a:r>
+          </a:p>
+        </p:txBody>
+      </p:sp>
+      <p:sp>
+        <p:nvSpPr>
+          <p:cNvPr id="16" name="Rectangle 15"/>
+          <p:cNvSpPr/>
+          <p:nvPr/>
+        </p:nvSpPr>
+        <p:spPr>
+          <a:xfrm>
+            <a:off x="8170164" y="2148840"/>
+            <a:ext cx="16459" cy="612648"/>
+          </a:xfrm>
+          <a:prstGeom prst="rect">
+            <a:avLst/>
+          </a:prstGeom>
+          <a:solidFill>
+            <a:srgbClr val="5D2A42"/>
+          </a:solidFill>
+          <a:ln>
+            <a:noFill/>
+          </a:ln>
+          <a:effectLst/>
+        </p:spPr>
+        <p:style>
+          <a:lnRef idx="1">
+            <a:schemeClr val="accent1"/>
+          </a:lnRef>
+          <a:fillRef idx="3">
+            <a:schemeClr val="accent1"/>
+          </a:fillRef>
+          <a:effectRef idx="2">
+            <a:schemeClr val="accent1"/>
+          </a:effectRef>
+          <a:fontRef idx="minor">
+            <a:schemeClr val="lt1"/>
+          </a:fontRef>
+        </p:style>
+        <p:txBody>
+          <a:bodyPr rtlCol="0" anchor="ctr"/>
+          <a:lstStyle/>
+          <a:p>
+            <a:pPr algn="ctr"/>
+          </a:p>
+        </p:txBody>
+      </p:sp>
+      <p:sp>
+        <p:nvSpPr>
+          <p:cNvPr id="17" name="Rectangle 16"/>
+          <p:cNvSpPr/>
+          <p:nvPr/>
+        </p:nvSpPr>
+        <p:spPr>
+          <a:xfrm>
+            <a:off x="9500616" y="1435608"/>
+            <a:ext cx="2331720" cy="713232"/>
+          </a:xfrm>
+          <a:prstGeom prst="rect">
+            <a:avLst/>
+          </a:prstGeom>
+          <a:solidFill>
+            <a:srgbClr val="F7F5F6"/>
+          </a:solidFill>
+          <a:ln w="12700">
+            <a:solidFill>
+              <a:srgbClr val="DDDDDD"/>
+            </a:solidFill>
+          </a:ln>
+          <a:effectLst/>
+        </p:spPr>
+        <p:style>
+          <a:lnRef idx="1">
+            <a:schemeClr val="accent1"/>
+          </a:lnRef>
+          <a:fillRef idx="3">
+            <a:schemeClr val="accent1"/>
+          </a:fillRef>
+          <a:effectRef idx="2">
+            <a:schemeClr val="accent1"/>
+          </a:effectRef>
+          <a:fontRef idx="minor">
+            <a:schemeClr val="lt1"/>
+          </a:fontRef>
+        </p:style>
+        <p:txBody>
+          <a:bodyPr rtlCol="0" anchor="ctr"/>
+          <a:lstStyle/>
+          <a:p>
+            <a:pPr algn="ctr"/>
+          </a:p>
+        </p:txBody>
+      </p:sp>
+      <p:sp>
+        <p:nvSpPr>
+          <p:cNvPr id="18" name="Rectangle 17"/>
+          <p:cNvSpPr/>
+          <p:nvPr/>
+        </p:nvSpPr>
+        <p:spPr>
+          <a:xfrm>
+            <a:off x="9573768" y="1435608"/>
+            <a:ext cx="2185416" cy="713232"/>
+          </a:xfrm>
+          <a:prstGeom prst="rect">
+            <a:avLst/>
+          </a:prstGeom>
+          <a:noFill/>
+          <a:ln>
+            <a:noFill/>
+          </a:ln>
+          <a:effectLst/>
+        </p:spPr>
+        <p:style>
+          <a:lnRef idx="1">
+            <a:schemeClr val="accent1"/>
+          </a:lnRef>
+          <a:fillRef idx="3">
+            <a:schemeClr val="accent1"/>
+          </a:fillRef>
+          <a:effectRef idx="2">
+            <a:schemeClr val="accent1"/>
+          </a:effectRef>
+          <a:fontRef idx="minor">
+            <a:schemeClr val="lt1"/>
+          </a:fontRef>
+        </p:style>
+        <p:txBody>
+          <a:bodyPr rtlCol="0" anchor="ctr" wrap="square" lIns="45720" rIns="45720" tIns="18288" bIns="18288"/>
+          <a:lstStyle/>
+          <a:p>
+            <a:pPr algn="ctr">
+              <a:defRPr sz="1200" b="0" i="0">
+                <a:solidFill>
+                  <a:srgbClr val="1A1A1A"/>
+                </a:solidFill>
+                <a:latin typeface="Calibri"/>
+              </a:defRPr>
+            </a:pPr>
+            <a:r>
+              <a:t>PSI Monitor</a:t>
+            </a:r>
+          </a:p>
+        </p:txBody>
+      </p:sp>
+      <p:sp>
+        <p:nvSpPr>
+          <p:cNvPr id="19" name="Rectangle 18"/>
+          <p:cNvSpPr/>
+          <p:nvPr/>
+        </p:nvSpPr>
+        <p:spPr>
+          <a:xfrm>
+            <a:off x="10666476" y="2148840"/>
+            <a:ext cx="16459" cy="612648"/>
+          </a:xfrm>
+          <a:prstGeom prst="rect">
+            <a:avLst/>
+          </a:prstGeom>
+          <a:solidFill>
+            <a:srgbClr val="5D2A42"/>
+          </a:solidFill>
+          <a:ln>
+            <a:noFill/>
+          </a:ln>
+          <a:effectLst/>
+        </p:spPr>
+        <p:style>
+          <a:lnRef idx="1">
+            <a:schemeClr val="accent1"/>
+          </a:lnRef>
+          <a:fillRef idx="3">
+            <a:schemeClr val="accent1"/>
+          </a:fillRef>
+          <a:effectRef idx="2">
+            <a:schemeClr val="accent1"/>
+          </a:effectRef>
+          <a:fontRef idx="minor">
+            <a:schemeClr val="lt1"/>
+          </a:fontRef>
+        </p:style>
+        <p:txBody>
+          <a:bodyPr rtlCol="0" anchor="ctr"/>
+          <a:lstStyle/>
+          <a:p>
+            <a:pPr algn="ctr"/>
+          </a:p>
+        </p:txBody>
+      </p:sp>
+      <p:sp>
+        <p:nvSpPr>
+          <p:cNvPr id="20" name="Rectangle 19"/>
+          <p:cNvSpPr/>
+          <p:nvPr/>
+        </p:nvSpPr>
+        <p:spPr>
+          <a:xfrm>
+            <a:off x="457200" y="2962656"/>
+            <a:ext cx="1554480" cy="365760"/>
+          </a:xfrm>
+          <a:prstGeom prst="rect">
+            <a:avLst/>
+          </a:prstGeom>
+          <a:noFill/>
+          <a:ln>
+            <a:noFill/>
+          </a:ln>
+          <a:effectLst/>
+        </p:spPr>
+        <p:style>
+          <a:lnRef idx="1">
+            <a:schemeClr val="accent1"/>
+          </a:lnRef>
+          <a:fillRef idx="3">
+            <a:schemeClr val="accent1"/>
+          </a:fillRef>
+          <a:effectRef idx="2">
+            <a:schemeClr val="accent1"/>
+          </a:effectRef>
+          <a:fontRef idx="minor">
+            <a:schemeClr val="lt1"/>
+          </a:fontRef>
+        </p:style>
+        <p:txBody>
+          <a:bodyPr rtlCol="0" anchor="t" wrap="square" lIns="45720" rIns="45720" tIns="18288" bIns="18288"/>
+          <a:lstStyle/>
+          <a:p>
+            <a:pPr algn="l">
+              <a:defRPr sz="1000" b="1" i="0">
+                <a:solidFill>
+                  <a:srgbClr val="5D2A42"/>
+                </a:solidFill>
+                <a:latin typeface="Calibri"/>
+              </a:defRPr>
+            </a:pPr>
+            <a:r>
+              <a:rPr spc="80"/>
+              <a:t>FASTAPI REST</a:t>
+            </a:r>
+          </a:p>
+        </p:txBody>
+      </p:sp>
+      <p:sp>
+        <p:nvSpPr>
+          <p:cNvPr id="21" name="Rectangle 20"/>
+          <p:cNvSpPr/>
+          <p:nvPr/>
+        </p:nvSpPr>
+        <p:spPr>
+          <a:xfrm>
+            <a:off x="2011680" y="2761488"/>
+            <a:ext cx="2331720" cy="713232"/>
+          </a:xfrm>
+          <a:prstGeom prst="rect">
+            <a:avLst/>
+          </a:prstGeom>
+          <a:solidFill>
+            <a:srgbClr val="F7F5F6"/>
+          </a:solidFill>
+          <a:ln w="12700">
+            <a:solidFill>
+              <a:srgbClr val="DDDDDD"/>
+            </a:solidFill>
+          </a:ln>
+          <a:effectLst/>
+        </p:spPr>
+        <p:style>
+          <a:lnRef idx="1">
+            <a:schemeClr val="accent1"/>
+          </a:lnRef>
+          <a:fillRef idx="3">
+            <a:schemeClr val="accent1"/>
+          </a:fillRef>
+          <a:effectRef idx="2">
+            <a:schemeClr val="accent1"/>
+          </a:effectRef>
+          <a:fontRef idx="minor">
+            <a:schemeClr val="lt1"/>
+          </a:fontRef>
+        </p:style>
+        <p:txBody>
+          <a:bodyPr rtlCol="0" anchor="ctr"/>
+          <a:lstStyle/>
+          <a:p>
+            <a:pPr algn="ctr"/>
+          </a:p>
+        </p:txBody>
+      </p:sp>
+      <p:sp>
+        <p:nvSpPr>
+          <p:cNvPr id="22" name="Rectangle 21"/>
+          <p:cNvSpPr/>
+          <p:nvPr/>
+        </p:nvSpPr>
+        <p:spPr>
+          <a:xfrm>
+            <a:off x="2084832" y="2761488"/>
+            <a:ext cx="2185416" cy="713232"/>
+          </a:xfrm>
+          <a:prstGeom prst="rect">
+            <a:avLst/>
+          </a:prstGeom>
+          <a:noFill/>
+          <a:ln>
+            <a:noFill/>
+          </a:ln>
+          <a:effectLst/>
+        </p:spPr>
+        <p:style>
+          <a:lnRef idx="1">
+            <a:schemeClr val="accent1"/>
+          </a:lnRef>
+          <a:fillRef idx="3">
+            <a:schemeClr val="accent1"/>
+          </a:fillRef>
+          <a:effectRef idx="2">
+            <a:schemeClr val="accent1"/>
+          </a:effectRef>
+          <a:fontRef idx="minor">
+            <a:schemeClr val="lt1"/>
+          </a:fontRef>
+        </p:style>
+        <p:txBody>
+          <a:bodyPr rtlCol="0" anchor="ctr" wrap="square" lIns="45720" rIns="45720" tIns="18288" bIns="18288"/>
+          <a:lstStyle/>
+          <a:p>
+            <a:pPr algn="ctr">
+              <a:defRPr sz="1200" b="0" i="0">
+                <a:solidFill>
+                  <a:srgbClr val="1A1A1A"/>
+                </a:solidFill>
+                <a:latin typeface="Calibri"/>
+              </a:defRPr>
+            </a:pPr>
+            <a:r>
+              <a:t>/api/simulate</a:t>
+            </a:r>
+          </a:p>
+        </p:txBody>
+      </p:sp>
+      <p:sp>
+        <p:nvSpPr>
+          <p:cNvPr id="23" name="Rectangle 22"/>
+          <p:cNvSpPr/>
+          <p:nvPr/>
+        </p:nvSpPr>
+        <p:spPr>
+          <a:xfrm>
+            <a:off x="3177540" y="3474720"/>
+            <a:ext cx="16459" cy="612648"/>
+          </a:xfrm>
+          <a:prstGeom prst="rect">
+            <a:avLst/>
+          </a:prstGeom>
+          <a:solidFill>
+            <a:srgbClr val="5D2A42"/>
+          </a:solidFill>
+          <a:ln>
+            <a:noFill/>
+          </a:ln>
+          <a:effectLst/>
+        </p:spPr>
+        <p:style>
+          <a:lnRef idx="1">
+            <a:schemeClr val="accent1"/>
+          </a:lnRef>
+          <a:fillRef idx="3">
+            <a:schemeClr val="accent1"/>
+          </a:fillRef>
+          <a:effectRef idx="2">
+            <a:schemeClr val="accent1"/>
+          </a:effectRef>
+          <a:fontRef idx="minor">
+            <a:schemeClr val="lt1"/>
+          </a:fontRef>
+        </p:style>
+        <p:txBody>
+          <a:bodyPr rtlCol="0" anchor="ctr"/>
+          <a:lstStyle/>
+          <a:p>
+            <a:pPr algn="ctr"/>
+          </a:p>
+        </p:txBody>
+      </p:sp>
+      <p:sp>
+        <p:nvSpPr>
+          <p:cNvPr id="24" name="Rectangle 23"/>
+          <p:cNvSpPr/>
+          <p:nvPr/>
+        </p:nvSpPr>
+        <p:spPr>
+          <a:xfrm>
+            <a:off x="4507992" y="2761488"/>
+            <a:ext cx="2331720" cy="713232"/>
+          </a:xfrm>
+          <a:prstGeom prst="rect">
+            <a:avLst/>
+          </a:prstGeom>
+          <a:solidFill>
+            <a:srgbClr val="F7F5F6"/>
+          </a:solidFill>
+          <a:ln w="12700">
+            <a:solidFill>
+              <a:srgbClr val="DDDDDD"/>
+            </a:solidFill>
+          </a:ln>
+          <a:effectLst/>
+        </p:spPr>
+        <p:style>
+          <a:lnRef idx="1">
+            <a:schemeClr val="accent1"/>
+          </a:lnRef>
+          <a:fillRef idx="3">
+            <a:schemeClr val="accent1"/>
+          </a:fillRef>
+          <a:effectRef idx="2">
+            <a:schemeClr val="accent1"/>
+          </a:effectRef>
+          <a:fontRef idx="minor">
+            <a:schemeClr val="lt1"/>
+          </a:fontRef>
+        </p:style>
+        <p:txBody>
+          <a:bodyPr rtlCol="0" anchor="ctr"/>
+          <a:lstStyle/>
+          <a:p>
+            <a:pPr algn="ctr"/>
+          </a:p>
+        </p:txBody>
+      </p:sp>
+      <p:sp>
+        <p:nvSpPr>
+          <p:cNvPr id="25" name="Rectangle 24"/>
+          <p:cNvSpPr/>
+          <p:nvPr/>
+        </p:nvSpPr>
+        <p:spPr>
+          <a:xfrm>
+            <a:off x="4581144" y="2761488"/>
+            <a:ext cx="2185416" cy="713232"/>
+          </a:xfrm>
+          <a:prstGeom prst="rect">
+            <a:avLst/>
+          </a:prstGeom>
+          <a:noFill/>
+          <a:ln>
+            <a:noFill/>
+          </a:ln>
+          <a:effectLst/>
+        </p:spPr>
+        <p:style>
+          <a:lnRef idx="1">
+            <a:schemeClr val="accent1"/>
+          </a:lnRef>
+          <a:fillRef idx="3">
+            <a:schemeClr val="accent1"/>
+          </a:fillRef>
+          <a:effectRef idx="2">
+            <a:schemeClr val="accent1"/>
+          </a:effectRef>
+          <a:fontRef idx="minor">
+            <a:schemeClr val="lt1"/>
+          </a:fontRef>
+        </p:style>
+        <p:txBody>
+          <a:bodyPr rtlCol="0" anchor="ctr" wrap="square" lIns="45720" rIns="45720" tIns="18288" bIns="18288"/>
+          <a:lstStyle/>
+          <a:p>
+            <a:pPr algn="ctr">
+              <a:defRPr sz="1200" b="0" i="0">
+                <a:solidFill>
+                  <a:srgbClr val="1A1A1A"/>
+                </a:solidFill>
+                <a:latin typeface="Calibri"/>
+              </a:defRPr>
+            </a:pPr>
+            <a:r>
+              <a:t>/api/pricing/optimize</a:t>
+            </a:r>
+          </a:p>
+        </p:txBody>
+      </p:sp>
+      <p:sp>
+        <p:nvSpPr>
+          <p:cNvPr id="26" name="Rectangle 25"/>
+          <p:cNvSpPr/>
+          <p:nvPr/>
+        </p:nvSpPr>
+        <p:spPr>
+          <a:xfrm>
+            <a:off x="5673852" y="3474720"/>
+            <a:ext cx="16459" cy="612648"/>
+          </a:xfrm>
+          <a:prstGeom prst="rect">
+            <a:avLst/>
+          </a:prstGeom>
+          <a:solidFill>
+            <a:srgbClr val="5D2A42"/>
+          </a:solidFill>
+          <a:ln>
+            <a:noFill/>
+          </a:ln>
+          <a:effectLst/>
+        </p:spPr>
+        <p:style>
+          <a:lnRef idx="1">
+            <a:schemeClr val="accent1"/>
+          </a:lnRef>
+          <a:fillRef idx="3">
+            <a:schemeClr val="accent1"/>
+          </a:fillRef>
+          <a:effectRef idx="2">
+            <a:schemeClr val="accent1"/>
+          </a:effectRef>
+          <a:fontRef idx="minor">
+            <a:schemeClr val="lt1"/>
+          </a:fontRef>
+        </p:style>
+        <p:txBody>
+          <a:bodyPr rtlCol="0" anchor="ctr"/>
+          <a:lstStyle/>
+          <a:p>
+            <a:pPr algn="ctr"/>
+          </a:p>
+        </p:txBody>
+      </p:sp>
+      <p:sp>
+        <p:nvSpPr>
+          <p:cNvPr id="27" name="Rectangle 26"/>
+          <p:cNvSpPr/>
+          <p:nvPr/>
+        </p:nvSpPr>
+        <p:spPr>
+          <a:xfrm>
+            <a:off x="7004304" y="2761488"/>
+            <a:ext cx="2331720" cy="713232"/>
+          </a:xfrm>
+          <a:prstGeom prst="rect">
+            <a:avLst/>
+          </a:prstGeom>
+          <a:solidFill>
+            <a:srgbClr val="F7F5F6"/>
+          </a:solidFill>
+          <a:ln w="12700">
+            <a:solidFill>
+              <a:srgbClr val="DDDDDD"/>
+            </a:solidFill>
+          </a:ln>
+          <a:effectLst/>
+        </p:spPr>
+        <p:style>
+          <a:lnRef idx="1">
+            <a:schemeClr val="accent1"/>
+          </a:lnRef>
+          <a:fillRef idx="3">
+            <a:schemeClr val="accent1"/>
+          </a:fillRef>
+          <a:effectRef idx="2">
+            <a:schemeClr val="accent1"/>
+          </a:effectRef>
+          <a:fontRef idx="minor">
+            <a:schemeClr val="lt1"/>
+          </a:fontRef>
+        </p:style>
+        <p:txBody>
+          <a:bodyPr rtlCol="0" anchor="ctr"/>
+          <a:lstStyle/>
+          <a:p>
+            <a:pPr algn="ctr"/>
+          </a:p>
+        </p:txBody>
+      </p:sp>
+      <p:sp>
+        <p:nvSpPr>
+          <p:cNvPr id="28" name="Rectangle 27"/>
+          <p:cNvSpPr/>
+          <p:nvPr/>
+        </p:nvSpPr>
+        <p:spPr>
+          <a:xfrm>
+            <a:off x="7077456" y="2761488"/>
+            <a:ext cx="2185416" cy="713232"/>
+          </a:xfrm>
+          <a:prstGeom prst="rect">
+            <a:avLst/>
+          </a:prstGeom>
+          <a:noFill/>
+          <a:ln>
+            <a:noFill/>
+          </a:ln>
+          <a:effectLst/>
+        </p:spPr>
+        <p:style>
+          <a:lnRef idx="1">
+            <a:schemeClr val="accent1"/>
+          </a:lnRef>
+          <a:fillRef idx="3">
+            <a:schemeClr val="accent1"/>
+          </a:fillRef>
+          <a:effectRef idx="2">
+            <a:schemeClr val="accent1"/>
+          </a:effectRef>
+          <a:fontRef idx="minor">
+            <a:schemeClr val="lt1"/>
+          </a:fontRef>
+        </p:style>
+        <p:txBody>
+          <a:bodyPr rtlCol="0" anchor="ctr" wrap="square" lIns="45720" rIns="45720" tIns="18288" bIns="18288"/>
+          <a:lstStyle/>
+          <a:p>
+            <a:pPr algn="ctr">
+              <a:defRPr sz="1200" b="0" i="0">
+                <a:solidFill>
+                  <a:srgbClr val="1A1A1A"/>
+                </a:solidFill>
+                <a:latin typeface="Calibri"/>
+              </a:defRPr>
+            </a:pPr>
+            <a:r>
+              <a:t>/api/bandit/run</a:t>
+            </a:r>
+          </a:p>
+        </p:txBody>
+      </p:sp>
+      <p:sp>
+        <p:nvSpPr>
+          <p:cNvPr id="29" name="Rectangle 28"/>
+          <p:cNvSpPr/>
+          <p:nvPr/>
+        </p:nvSpPr>
+        <p:spPr>
+          <a:xfrm>
+            <a:off x="8170164" y="3474720"/>
+            <a:ext cx="16459" cy="612648"/>
+          </a:xfrm>
+          <a:prstGeom prst="rect">
+            <a:avLst/>
+          </a:prstGeom>
+          <a:solidFill>
+            <a:srgbClr val="5D2A42"/>
+          </a:solidFill>
+          <a:ln>
+            <a:noFill/>
+          </a:ln>
+          <a:effectLst/>
+        </p:spPr>
+        <p:style>
+          <a:lnRef idx="1">
+            <a:schemeClr val="accent1"/>
+          </a:lnRef>
+          <a:fillRef idx="3">
+            <a:schemeClr val="accent1"/>
+          </a:fillRef>
+          <a:effectRef idx="2">
+            <a:schemeClr val="accent1"/>
+          </a:effectRef>
+          <a:fontRef idx="minor">
+            <a:schemeClr val="lt1"/>
+          </a:fontRef>
+        </p:style>
+        <p:txBody>
+          <a:bodyPr rtlCol="0" anchor="ctr"/>
+          <a:lstStyle/>
+          <a:p>
+            <a:pPr algn="ctr"/>
+          </a:p>
+        </p:txBody>
+      </p:sp>
+      <p:sp>
+        <p:nvSpPr>
+          <p:cNvPr id="30" name="Rectangle 29"/>
+          <p:cNvSpPr/>
+          <p:nvPr/>
+        </p:nvSpPr>
+        <p:spPr>
+          <a:xfrm>
+            <a:off x="9500616" y="2761488"/>
+            <a:ext cx="2331720" cy="713232"/>
+          </a:xfrm>
+          <a:prstGeom prst="rect">
+            <a:avLst/>
+          </a:prstGeom>
+          <a:solidFill>
+            <a:srgbClr val="F7F5F6"/>
+          </a:solidFill>
+          <a:ln w="12700">
+            <a:solidFill>
+              <a:srgbClr val="DDDDDD"/>
+            </a:solidFill>
+          </a:ln>
+          <a:effectLst/>
+        </p:spPr>
+        <p:style>
+          <a:lnRef idx="1">
+            <a:schemeClr val="accent1"/>
+          </a:lnRef>
+          <a:fillRef idx="3">
+            <a:schemeClr val="accent1"/>
+          </a:fillRef>
+          <a:effectRef idx="2">
+            <a:schemeClr val="accent1"/>
+          </a:effectRef>
+          <a:fontRef idx="minor">
+            <a:schemeClr val="lt1"/>
+          </a:fontRef>
+        </p:style>
+        <p:txBody>
+          <a:bodyPr rtlCol="0" anchor="ctr"/>
+          <a:lstStyle/>
+          <a:p>
+            <a:pPr algn="ctr"/>
+          </a:p>
+        </p:txBody>
+      </p:sp>
+      <p:sp>
+        <p:nvSpPr>
+          <p:cNvPr id="31" name="Rectangle 30"/>
+          <p:cNvSpPr/>
+          <p:nvPr/>
+        </p:nvSpPr>
+        <p:spPr>
+          <a:xfrm>
+            <a:off x="9573768" y="2761488"/>
+            <a:ext cx="2185416" cy="713232"/>
+          </a:xfrm>
+          <a:prstGeom prst="rect">
+            <a:avLst/>
+          </a:prstGeom>
+          <a:noFill/>
+          <a:ln>
+            <a:noFill/>
+          </a:ln>
+          <a:effectLst/>
+        </p:spPr>
+        <p:style>
+          <a:lnRef idx="1">
+            <a:schemeClr val="accent1"/>
+          </a:lnRef>
+          <a:fillRef idx="3">
+            <a:schemeClr val="accent1"/>
+          </a:fillRef>
+          <a:effectRef idx="2">
+            <a:schemeClr val="accent1"/>
+          </a:effectRef>
+          <a:fontRef idx="minor">
+            <a:schemeClr val="lt1"/>
+          </a:fontRef>
+        </p:style>
+        <p:txBody>
+          <a:bodyPr rtlCol="0" anchor="ctr" wrap="square" lIns="45720" rIns="45720" tIns="18288" bIns="18288"/>
+          <a:lstStyle/>
+          <a:p>
+            <a:pPr algn="ctr">
+              <a:defRPr sz="1200" b="0" i="0">
+                <a:solidFill>
+                  <a:srgbClr val="1A1A1A"/>
+                </a:solidFill>
+                <a:latin typeface="Calibri"/>
+              </a:defRPr>
+            </a:pPr>
+            <a:r>
+              <a:t>/api/psi/audit</a:t>
+            </a:r>
+          </a:p>
+        </p:txBody>
+      </p:sp>
+      <p:sp>
+        <p:nvSpPr>
+          <p:cNvPr id="32" name="Rectangle 31"/>
+          <p:cNvSpPr/>
+          <p:nvPr/>
+        </p:nvSpPr>
+        <p:spPr>
+          <a:xfrm>
+            <a:off x="10666476" y="3474720"/>
+            <a:ext cx="16459" cy="612648"/>
+          </a:xfrm>
+          <a:prstGeom prst="rect">
+            <a:avLst/>
+          </a:prstGeom>
+          <a:solidFill>
+            <a:srgbClr val="5D2A42"/>
+          </a:solidFill>
+          <a:ln>
+            <a:noFill/>
+          </a:ln>
+          <a:effectLst/>
+        </p:spPr>
+        <p:style>
+          <a:lnRef idx="1">
+            <a:schemeClr val="accent1"/>
+          </a:lnRef>
+          <a:fillRef idx="3">
+            <a:schemeClr val="accent1"/>
+          </a:fillRef>
+          <a:effectRef idx="2">
+            <a:schemeClr val="accent1"/>
+          </a:effectRef>
+          <a:fontRef idx="minor">
+            <a:schemeClr val="lt1"/>
+          </a:fontRef>
+        </p:style>
+        <p:txBody>
+          <a:bodyPr rtlCol="0" anchor="ctr"/>
+          <a:lstStyle/>
+          <a:p>
+            <a:pPr algn="ctr"/>
+          </a:p>
+        </p:txBody>
+      </p:sp>
+      <p:sp>
+        <p:nvSpPr>
+          <p:cNvPr id="33" name="Rectangle 32"/>
+          <p:cNvSpPr/>
+          <p:nvPr/>
+        </p:nvSpPr>
+        <p:spPr>
+          <a:xfrm>
+            <a:off x="457200" y="4288536"/>
+            <a:ext cx="1554480" cy="365760"/>
+          </a:xfrm>
+          <a:prstGeom prst="rect">
+            <a:avLst/>
+          </a:prstGeom>
+          <a:noFill/>
+          <a:ln>
+            <a:noFill/>
+          </a:ln>
+          <a:effectLst/>
+        </p:spPr>
+        <p:style>
+          <a:lnRef idx="1">
+            <a:schemeClr val="accent1"/>
+          </a:lnRef>
+          <a:fillRef idx="3">
+            <a:schemeClr val="accent1"/>
+          </a:fillRef>
+          <a:effectRef idx="2">
+            <a:schemeClr val="accent1"/>
+          </a:effectRef>
+          <a:fontRef idx="minor">
+            <a:schemeClr val="lt1"/>
+          </a:fontRef>
+        </p:style>
+        <p:txBody>
+          <a:bodyPr rtlCol="0" anchor="t" wrap="square" lIns="45720" rIns="45720" tIns="18288" bIns="18288"/>
+          <a:lstStyle/>
+          <a:p>
+            <a:pPr algn="l">
+              <a:defRPr sz="1000" b="1" i="0">
+                <a:solidFill>
+                  <a:srgbClr val="5D2A42"/>
+                </a:solidFill>
+                <a:latin typeface="Calibri"/>
+              </a:defRPr>
+            </a:pPr>
+            <a:r>
+              <a:rPr spc="80"/>
+              <a:t>PYTHON BACKEND</a:t>
+            </a:r>
+          </a:p>
+        </p:txBody>
+      </p:sp>
+      <p:sp>
+        <p:nvSpPr>
+          <p:cNvPr id="34" name="Rectangle 33"/>
+          <p:cNvSpPr/>
+          <p:nvPr/>
+        </p:nvSpPr>
+        <p:spPr>
+          <a:xfrm>
+            <a:off x="2011680" y="4087368"/>
+            <a:ext cx="2331720" cy="713232"/>
+          </a:xfrm>
+          <a:prstGeom prst="rect">
+            <a:avLst/>
+          </a:prstGeom>
+          <a:solidFill>
+            <a:srgbClr val="F7F5F6"/>
+          </a:solidFill>
+          <a:ln w="12700">
+            <a:solidFill>
+              <a:srgbClr val="DDDDDD"/>
+            </a:solidFill>
+          </a:ln>
+          <a:effectLst/>
+        </p:spPr>
+        <p:style>
+          <a:lnRef idx="1">
+            <a:schemeClr val="accent1"/>
+          </a:lnRef>
+          <a:fillRef idx="3">
+            <a:schemeClr val="accent1"/>
+          </a:fillRef>
+          <a:effectRef idx="2">
+            <a:schemeClr val="accent1"/>
+          </a:effectRef>
+          <a:fontRef idx="minor">
+            <a:schemeClr val="lt1"/>
+          </a:fontRef>
+        </p:style>
+        <p:txBody>
+          <a:bodyPr rtlCol="0" anchor="ctr"/>
+          <a:lstStyle/>
+          <a:p>
+            <a:pPr algn="ctr"/>
+          </a:p>
+        </p:txBody>
+      </p:sp>
+      <p:sp>
+        <p:nvSpPr>
+          <p:cNvPr id="35" name="Rectangle 34"/>
+          <p:cNvSpPr/>
+          <p:nvPr/>
+        </p:nvSpPr>
+        <p:spPr>
+          <a:xfrm>
+            <a:off x="2084832" y="4087368"/>
+            <a:ext cx="2185416" cy="713232"/>
+          </a:xfrm>
+          <a:prstGeom prst="rect">
+            <a:avLst/>
+          </a:prstGeom>
+          <a:noFill/>
+          <a:ln>
+            <a:noFill/>
+          </a:ln>
+          <a:effectLst/>
+        </p:spPr>
+        <p:style>
+          <a:lnRef idx="1">
+            <a:schemeClr val="accent1"/>
+          </a:lnRef>
+          <a:fillRef idx="3">
+            <a:schemeClr val="accent1"/>
+          </a:fillRef>
+          <a:effectRef idx="2">
+            <a:schemeClr val="accent1"/>
+          </a:effectRef>
+          <a:fontRef idx="minor">
+            <a:schemeClr val="lt1"/>
+          </a:fontRef>
+        </p:style>
+        <p:txBody>
+          <a:bodyPr rtlCol="0" anchor="ctr" wrap="square" lIns="45720" rIns="45720" tIns="18288" bIns="18288"/>
+          <a:lstStyle/>
+          <a:p>
+            <a:pPr algn="ctr">
+              <a:defRPr sz="1200" b="1" i="0">
+                <a:solidFill>
+                  <a:srgbClr val="1A1A1A"/>
+                </a:solidFill>
+                <a:latin typeface="Calibri"/>
+              </a:defRPr>
+            </a:pPr>
+            <a:r>
+              <a:t>Actuarial Reward Sim</a:t>
+            </a:r>
+          </a:p>
+        </p:txBody>
+      </p:sp>
+      <p:sp>
+        <p:nvSpPr>
+          <p:cNvPr id="36" name="Rectangle 35"/>
+          <p:cNvSpPr/>
+          <p:nvPr/>
+        </p:nvSpPr>
+        <p:spPr>
+          <a:xfrm>
+            <a:off x="4507992" y="4087368"/>
+            <a:ext cx="2331720" cy="713232"/>
+          </a:xfrm>
+          <a:prstGeom prst="rect">
+            <a:avLst/>
+          </a:prstGeom>
+          <a:solidFill>
+            <a:srgbClr val="F7F5F6"/>
+          </a:solidFill>
+          <a:ln w="12700">
+            <a:solidFill>
+              <a:srgbClr val="DDDDDD"/>
+            </a:solidFill>
+          </a:ln>
+          <a:effectLst/>
+        </p:spPr>
+        <p:style>
+          <a:lnRef idx="1">
+            <a:schemeClr val="accent1"/>
+          </a:lnRef>
+          <a:fillRef idx="3">
+            <a:schemeClr val="accent1"/>
+          </a:fillRef>
+          <a:effectRef idx="2">
+            <a:schemeClr val="accent1"/>
+          </a:effectRef>
+          <a:fontRef idx="minor">
+            <a:schemeClr val="lt1"/>
+          </a:fontRef>
+        </p:style>
+        <p:txBody>
+          <a:bodyPr rtlCol="0" anchor="ctr"/>
+          <a:lstStyle/>
+          <a:p>
+            <a:pPr algn="ctr"/>
+          </a:p>
+        </p:txBody>
+      </p:sp>
+      <p:sp>
+        <p:nvSpPr>
+          <p:cNvPr id="37" name="Rectangle 36"/>
+          <p:cNvSpPr/>
+          <p:nvPr/>
+        </p:nvSpPr>
+        <p:spPr>
+          <a:xfrm>
+            <a:off x="4581144" y="4087368"/>
+            <a:ext cx="2185416" cy="713232"/>
+          </a:xfrm>
+          <a:prstGeom prst="rect">
+            <a:avLst/>
+          </a:prstGeom>
+          <a:noFill/>
+          <a:ln>
+            <a:noFill/>
+          </a:ln>
+          <a:effectLst/>
+        </p:spPr>
+        <p:style>
+          <a:lnRef idx="1">
+            <a:schemeClr val="accent1"/>
+          </a:lnRef>
+          <a:fillRef idx="3">
+            <a:schemeClr val="accent1"/>
+          </a:fillRef>
+          <a:effectRef idx="2">
+            <a:schemeClr val="accent1"/>
+          </a:effectRef>
+          <a:fontRef idx="minor">
+            <a:schemeClr val="lt1"/>
+          </a:fontRef>
+        </p:style>
+        <p:txBody>
+          <a:bodyPr rtlCol="0" anchor="ctr" wrap="square" lIns="45720" rIns="45720" tIns="18288" bIns="18288"/>
+          <a:lstStyle/>
+          <a:p>
+            <a:pPr algn="ctr">
+              <a:defRPr sz="1200" b="1" i="0">
+                <a:solidFill>
+                  <a:srgbClr val="1A1A1A"/>
+                </a:solidFill>
+                <a:latin typeface="Calibri"/>
+              </a:defRPr>
+            </a:pPr>
+            <a:r>
+              <a:t>Pricing Engine</a:t>
+            </a:r>
+          </a:p>
+        </p:txBody>
+      </p:sp>
+      <p:sp>
+        <p:nvSpPr>
+          <p:cNvPr id="38" name="Rectangle 37"/>
+          <p:cNvSpPr/>
+          <p:nvPr/>
+        </p:nvSpPr>
+        <p:spPr>
+          <a:xfrm>
+            <a:off x="7004304" y="4087368"/>
+            <a:ext cx="2331720" cy="713232"/>
+          </a:xfrm>
+          <a:prstGeom prst="rect">
+            <a:avLst/>
+          </a:prstGeom>
+          <a:solidFill>
+            <a:srgbClr val="F7F5F6"/>
+          </a:solidFill>
+          <a:ln w="12700">
+            <a:solidFill>
+              <a:srgbClr val="DDDDDD"/>
+            </a:solidFill>
+          </a:ln>
+          <a:effectLst/>
+        </p:spPr>
+        <p:style>
+          <a:lnRef idx="1">
+            <a:schemeClr val="accent1"/>
+          </a:lnRef>
+          <a:fillRef idx="3">
+            <a:schemeClr val="accent1"/>
+          </a:fillRef>
+          <a:effectRef idx="2">
+            <a:schemeClr val="accent1"/>
+          </a:effectRef>
+          <a:fontRef idx="minor">
+            <a:schemeClr val="lt1"/>
+          </a:fontRef>
+        </p:style>
+        <p:txBody>
+          <a:bodyPr rtlCol="0" anchor="ctr"/>
+          <a:lstStyle/>
+          <a:p>
+            <a:pPr algn="ctr"/>
+          </a:p>
+        </p:txBody>
+      </p:sp>
+      <p:sp>
+        <p:nvSpPr>
+          <p:cNvPr id="39" name="Rectangle 38"/>
+          <p:cNvSpPr/>
+          <p:nvPr/>
+        </p:nvSpPr>
+        <p:spPr>
+          <a:xfrm>
+            <a:off x="7077456" y="4087368"/>
+            <a:ext cx="2185416" cy="713232"/>
+          </a:xfrm>
+          <a:prstGeom prst="rect">
+            <a:avLst/>
+          </a:prstGeom>
+          <a:noFill/>
+          <a:ln>
+            <a:noFill/>
+          </a:ln>
+          <a:effectLst/>
+        </p:spPr>
+        <p:style>
+          <a:lnRef idx="1">
+            <a:schemeClr val="accent1"/>
+          </a:lnRef>
+          <a:fillRef idx="3">
+            <a:schemeClr val="accent1"/>
+          </a:fillRef>
+          <a:effectRef idx="2">
+            <a:schemeClr val="accent1"/>
+          </a:effectRef>
+          <a:fontRef idx="minor">
+            <a:schemeClr val="lt1"/>
+          </a:fontRef>
+        </p:style>
+        <p:txBody>
+          <a:bodyPr rtlCol="0" anchor="ctr" wrap="square" lIns="45720" rIns="45720" tIns="18288" bIns="18288"/>
+          <a:lstStyle/>
+          <a:p>
+            <a:pPr algn="ctr">
+              <a:defRPr sz="1200" b="1" i="0">
+                <a:solidFill>
+                  <a:srgbClr val="1A1A1A"/>
+                </a:solidFill>
+                <a:latin typeface="Calibri"/>
+              </a:defRPr>
+            </a:pPr>
+            <a:r>
+              <a:t>Bandit Algorithms (LinUCB / LinTS)</a:t>
+            </a:r>
+          </a:p>
+        </p:txBody>
+      </p:sp>
+      <p:sp>
+        <p:nvSpPr>
+          <p:cNvPr id="40" name="Rectangle 39"/>
+          <p:cNvSpPr/>
+          <p:nvPr/>
+        </p:nvSpPr>
+        <p:spPr>
+          <a:xfrm>
+            <a:off x="9500616" y="4087368"/>
+            <a:ext cx="2331720" cy="713232"/>
+          </a:xfrm>
+          <a:prstGeom prst="rect">
+            <a:avLst/>
+          </a:prstGeom>
+          <a:solidFill>
+            <a:srgbClr val="F7F5F6"/>
+          </a:solidFill>
+          <a:ln w="12700">
+            <a:solidFill>
+              <a:srgbClr val="DDDDDD"/>
+            </a:solidFill>
+          </a:ln>
+          <a:effectLst/>
+        </p:spPr>
+        <p:style>
+          <a:lnRef idx="1">
+            <a:schemeClr val="accent1"/>
+          </a:lnRef>
+          <a:fillRef idx="3">
+            <a:schemeClr val="accent1"/>
+          </a:fillRef>
+          <a:effectRef idx="2">
+            <a:schemeClr val="accent1"/>
+          </a:effectRef>
+          <a:fontRef idx="minor">
+            <a:schemeClr val="lt1"/>
+          </a:fontRef>
+        </p:style>
+        <p:txBody>
+          <a:bodyPr rtlCol="0" anchor="ctr"/>
+          <a:lstStyle/>
+          <a:p>
+            <a:pPr algn="ctr"/>
+          </a:p>
+        </p:txBody>
+      </p:sp>
+      <p:sp>
+        <p:nvSpPr>
+          <p:cNvPr id="41" name="Rectangle 40"/>
+          <p:cNvSpPr/>
+          <p:nvPr/>
+        </p:nvSpPr>
+        <p:spPr>
+          <a:xfrm>
+            <a:off x="9573768" y="4087368"/>
+            <a:ext cx="2185416" cy="713232"/>
+          </a:xfrm>
+          <a:prstGeom prst="rect">
+            <a:avLst/>
+          </a:prstGeom>
+          <a:noFill/>
+          <a:ln>
+            <a:noFill/>
+          </a:ln>
+          <a:effectLst/>
+        </p:spPr>
+        <p:style>
+          <a:lnRef idx="1">
+            <a:schemeClr val="accent1"/>
+          </a:lnRef>
+          <a:fillRef idx="3">
+            <a:schemeClr val="accent1"/>
+          </a:fillRef>
+          <a:effectRef idx="2">
+            <a:schemeClr val="accent1"/>
+          </a:effectRef>
+          <a:fontRef idx="minor">
+            <a:schemeClr val="lt1"/>
+          </a:fontRef>
+        </p:style>
+        <p:txBody>
+          <a:bodyPr rtlCol="0" anchor="ctr" wrap="square" lIns="45720" rIns="45720" tIns="18288" bIns="18288"/>
+          <a:lstStyle/>
+          <a:p>
+            <a:pPr algn="ctr">
+              <a:defRPr sz="1200" b="1" i="0">
+                <a:solidFill>
+                  <a:srgbClr val="1A1A1A"/>
+                </a:solidFill>
+                <a:latin typeface="Calibri"/>
+              </a:defRPr>
+            </a:pPr>
+            <a:r>
+              <a:t>PSI Compute</a:t>
+            </a:r>
+          </a:p>
+        </p:txBody>
+      </p:sp>
+      <p:sp>
+        <p:nvSpPr>
+          <p:cNvPr id="42" name="Rectangle 41"/>
+          <p:cNvSpPr/>
+          <p:nvPr/>
+        </p:nvSpPr>
+        <p:spPr>
+          <a:xfrm>
+            <a:off x="2011680" y="5504688"/>
+            <a:ext cx="4828032" cy="548640"/>
+          </a:xfrm>
+          <a:prstGeom prst="rect">
+            <a:avLst/>
+          </a:prstGeom>
+          <a:solidFill>
+            <a:srgbClr val="FFFFFF"/>
+          </a:solidFill>
+          <a:ln w="15240">
+            <a:solidFill>
+              <a:srgbClr val="5D2A42"/>
+            </a:solidFill>
+          </a:ln>
+          <a:effectLst/>
+        </p:spPr>
+        <p:style>
+          <a:lnRef idx="1">
+            <a:schemeClr val="accent1"/>
+          </a:lnRef>
+          <a:fillRef idx="3">
+            <a:schemeClr val="accent1"/>
+          </a:fillRef>
+          <a:effectRef idx="2">
+            <a:schemeClr val="accent1"/>
+          </a:effectRef>
+          <a:fontRef idx="minor">
+            <a:schemeClr val="lt1"/>
+          </a:fontRef>
+        </p:style>
+        <p:txBody>
+          <a:bodyPr rtlCol="0" anchor="ctr"/>
+          <a:lstStyle/>
+          <a:p>
+            <a:pPr algn="ctr"/>
+          </a:p>
+        </p:txBody>
+      </p:sp>
+      <p:sp>
+        <p:nvSpPr>
+          <p:cNvPr id="43" name="Rectangle 42"/>
+          <p:cNvSpPr/>
+          <p:nvPr/>
+        </p:nvSpPr>
+        <p:spPr>
+          <a:xfrm>
+            <a:off x="2011680" y="5504688"/>
+            <a:ext cx="4828032" cy="548640"/>
+          </a:xfrm>
+          <a:prstGeom prst="rect">
+            <a:avLst/>
+          </a:prstGeom>
+          <a:noFill/>
+          <a:ln>
+            <a:noFill/>
+          </a:ln>
+          <a:effectLst/>
+        </p:spPr>
+        <p:style>
+          <a:lnRef idx="1">
+            <a:schemeClr val="accent1"/>
+          </a:lnRef>
+          <a:fillRef idx="3">
+            <a:schemeClr val="accent1"/>
+          </a:fillRef>
+          <a:effectRef idx="2">
+            <a:schemeClr val="accent1"/>
+          </a:effectRef>
+          <a:fontRef idx="minor">
+            <a:schemeClr val="lt1"/>
+          </a:fontRef>
+        </p:style>
+        <p:txBody>
+          <a:bodyPr rtlCol="0" anchor="ctr" wrap="square" lIns="45720" rIns="45720" tIns="18288" bIns="18288"/>
+          <a:lstStyle/>
+          <a:p>
+            <a:pPr algn="ctr">
+              <a:defRPr sz="1200" b="0" i="0">
+                <a:solidFill>
+                  <a:srgbClr val="3A3A3A"/>
+                </a:solidFill>
+                <a:latin typeface="Calibri"/>
+              </a:defRPr>
+            </a:pPr>
+            <a:r>
+              <a:t>Cambodia synthetic dataset (2,000 applicants)</a:t>
+            </a:r>
+          </a:p>
+        </p:txBody>
+      </p:sp>
+      <p:sp>
+        <p:nvSpPr>
+          <p:cNvPr id="44" name="Rectangle 43"/>
+          <p:cNvSpPr/>
+          <p:nvPr/>
+        </p:nvSpPr>
+        <p:spPr>
+          <a:xfrm>
+            <a:off x="7004304" y="5504688"/>
+            <a:ext cx="4828032" cy="548640"/>
+          </a:xfrm>
+          <a:prstGeom prst="rect">
+            <a:avLst/>
+          </a:prstGeom>
+          <a:solidFill>
+            <a:srgbClr val="FFFFFF"/>
+          </a:solidFill>
+          <a:ln w="15240">
+            <a:solidFill>
+              <a:srgbClr val="5D2A42"/>
+            </a:solidFill>
+          </a:ln>
+          <a:effectLst/>
+        </p:spPr>
+        <p:style>
+          <a:lnRef idx="1">
+            <a:schemeClr val="accent1"/>
+          </a:lnRef>
+          <a:fillRef idx="3">
+            <a:schemeClr val="accent1"/>
+          </a:fillRef>
+          <a:effectRef idx="2">
+            <a:schemeClr val="accent1"/>
+          </a:effectRef>
+          <a:fontRef idx="minor">
+            <a:schemeClr val="lt1"/>
+          </a:fontRef>
+        </p:style>
+        <p:txBody>
+          <a:bodyPr rtlCol="0" anchor="ctr"/>
+          <a:lstStyle/>
+          <a:p>
+            <a:pPr algn="ctr"/>
+          </a:p>
+        </p:txBody>
+      </p:sp>
+      <p:sp>
+        <p:nvSpPr>
+          <p:cNvPr id="45" name="Rectangle 44"/>
+          <p:cNvSpPr/>
+          <p:nvPr/>
+        </p:nvSpPr>
+        <p:spPr>
+          <a:xfrm>
+            <a:off x="7004304" y="5504688"/>
+            <a:ext cx="4828032" cy="548640"/>
+          </a:xfrm>
+          <a:prstGeom prst="rect">
+            <a:avLst/>
+          </a:prstGeom>
+          <a:noFill/>
+          <a:ln>
+            <a:noFill/>
+          </a:ln>
+          <a:effectLst/>
+        </p:spPr>
+        <p:style>
+          <a:lnRef idx="1">
+            <a:schemeClr val="accent1"/>
+          </a:lnRef>
+          <a:fillRef idx="3">
+            <a:schemeClr val="accent1"/>
+          </a:fillRef>
+          <a:effectRef idx="2">
+            <a:schemeClr val="accent1"/>
+          </a:effectRef>
+          <a:fontRef idx="minor">
+            <a:schemeClr val="lt1"/>
+          </a:fontRef>
+        </p:style>
+        <p:txBody>
+          <a:bodyPr rtlCol="0" anchor="ctr" wrap="square" lIns="45720" rIns="45720" tIns="18288" bIns="18288"/>
+          <a:lstStyle/>
+          <a:p>
+            <a:pPr algn="ctr">
+              <a:defRPr sz="1200" b="0" i="0">
+                <a:solidFill>
+                  <a:srgbClr val="3A3A3A"/>
+                </a:solidFill>
+                <a:latin typeface="Calibri"/>
+              </a:defRPr>
+            </a:pPr>
+            <a:r>
+              <a:t>Static XGBoost baseline (mortality model)</a:t>
+            </a:r>
+          </a:p>
+        </p:txBody>
+      </p:sp>
     </p:spTree>
   </p:cSld>
   <p:clrMapOvr>
@@ -36100,8 +38464,560 @@
         </p:nvSpPr>
         <p:spPr>
           <a:xfrm>
-            <a:off x="457200" y="1207008"/>
-            <a:ext cx="2560320" cy="1417320"/>
+            <a:off x="457200" y="1252728"/>
+            <a:ext cx="2682163" cy="566928"/>
+          </a:xfrm>
+          <a:prstGeom prst="rect">
+            <a:avLst/>
+          </a:prstGeom>
+          <a:noFill/>
+          <a:ln>
+            <a:noFill/>
+          </a:ln>
+          <a:effectLst/>
+        </p:spPr>
+        <p:style>
+          <a:lnRef idx="1">
+            <a:schemeClr val="accent1"/>
+          </a:lnRef>
+          <a:fillRef idx="3">
+            <a:schemeClr val="accent1"/>
+          </a:fillRef>
+          <a:effectRef idx="2">
+            <a:schemeClr val="accent1"/>
+          </a:effectRef>
+          <a:fontRef idx="minor">
+            <a:schemeClr val="lt1"/>
+          </a:fontRef>
+        </p:style>
+        <p:txBody>
+          <a:bodyPr rtlCol="0" anchor="t" wrap="square" lIns="45720" rIns="45720" tIns="18288" bIns="18288"/>
+          <a:lstStyle/>
+          <a:p>
+            <a:pPr algn="l">
+              <a:defRPr sz="3000" b="1" i="0">
+                <a:solidFill>
+                  <a:srgbClr val="5D2A42"/>
+                </a:solidFill>
+                <a:latin typeface="Calibri"/>
+              </a:defRPr>
+            </a:pPr>
+            <a:r>
+              <a:t>2,000</a:t>
+            </a:r>
+          </a:p>
+        </p:txBody>
+      </p:sp>
+      <p:sp>
+        <p:nvSpPr>
+          <p:cNvPr id="8" name="Rectangle 7"/>
+          <p:cNvSpPr/>
+          <p:nvPr/>
+        </p:nvSpPr>
+        <p:spPr>
+          <a:xfrm>
+            <a:off x="457200" y="1819656"/>
+            <a:ext cx="2682163" cy="329184"/>
+          </a:xfrm>
+          <a:prstGeom prst="rect">
+            <a:avLst/>
+          </a:prstGeom>
+          <a:noFill/>
+          <a:ln>
+            <a:noFill/>
+          </a:ln>
+          <a:effectLst/>
+        </p:spPr>
+        <p:style>
+          <a:lnRef idx="1">
+            <a:schemeClr val="accent1"/>
+          </a:lnRef>
+          <a:fillRef idx="3">
+            <a:schemeClr val="accent1"/>
+          </a:fillRef>
+          <a:effectRef idx="2">
+            <a:schemeClr val="accent1"/>
+          </a:effectRef>
+          <a:fontRef idx="minor">
+            <a:schemeClr val="lt1"/>
+          </a:fontRef>
+        </p:style>
+        <p:txBody>
+          <a:bodyPr rtlCol="0" anchor="t" wrap="square" lIns="45720" rIns="45720" tIns="18288" bIns="18288"/>
+          <a:lstStyle/>
+          <a:p>
+            <a:pPr algn="l">
+              <a:defRPr sz="1000" b="0" i="0">
+                <a:solidFill>
+                  <a:srgbClr val="777777"/>
+                </a:solidFill>
+                <a:latin typeface="Calibri"/>
+              </a:defRPr>
+            </a:pPr>
+            <a:r>
+              <a:rPr spc="80"/>
+              <a:t>SYNTHETIC APPLICATIONS</a:t>
+            </a:r>
+          </a:p>
+        </p:txBody>
+      </p:sp>
+      <p:sp>
+        <p:nvSpPr>
+          <p:cNvPr id="9" name="Rectangle 8"/>
+          <p:cNvSpPr/>
+          <p:nvPr/>
+        </p:nvSpPr>
+        <p:spPr>
+          <a:xfrm>
+            <a:off x="3276523" y="1252728"/>
+            <a:ext cx="2682163" cy="566928"/>
+          </a:xfrm>
+          <a:prstGeom prst="rect">
+            <a:avLst/>
+          </a:prstGeom>
+          <a:noFill/>
+          <a:ln>
+            <a:noFill/>
+          </a:ln>
+          <a:effectLst/>
+        </p:spPr>
+        <p:style>
+          <a:lnRef idx="1">
+            <a:schemeClr val="accent1"/>
+          </a:lnRef>
+          <a:fillRef idx="3">
+            <a:schemeClr val="accent1"/>
+          </a:fillRef>
+          <a:effectRef idx="2">
+            <a:schemeClr val="accent1"/>
+          </a:effectRef>
+          <a:fontRef idx="minor">
+            <a:schemeClr val="lt1"/>
+          </a:fontRef>
+        </p:style>
+        <p:txBody>
+          <a:bodyPr rtlCol="0" anchor="t" wrap="square" lIns="45720" rIns="45720" tIns="18288" bIns="18288"/>
+          <a:lstStyle/>
+          <a:p>
+            <a:pPr algn="l">
+              <a:defRPr sz="3000" b="1" i="0">
+                <a:solidFill>
+                  <a:srgbClr val="1A1A1A"/>
+                </a:solidFill>
+                <a:latin typeface="Calibri"/>
+              </a:defRPr>
+            </a:pPr>
+            <a:r>
+              <a:t>5</a:t>
+            </a:r>
+          </a:p>
+        </p:txBody>
+      </p:sp>
+      <p:sp>
+        <p:nvSpPr>
+          <p:cNvPr id="10" name="Rectangle 9"/>
+          <p:cNvSpPr/>
+          <p:nvPr/>
+        </p:nvSpPr>
+        <p:spPr>
+          <a:xfrm>
+            <a:off x="3276523" y="1819656"/>
+            <a:ext cx="2682163" cy="329184"/>
+          </a:xfrm>
+          <a:prstGeom prst="rect">
+            <a:avLst/>
+          </a:prstGeom>
+          <a:noFill/>
+          <a:ln>
+            <a:noFill/>
+          </a:ln>
+          <a:effectLst/>
+        </p:spPr>
+        <p:style>
+          <a:lnRef idx="1">
+            <a:schemeClr val="accent1"/>
+          </a:lnRef>
+          <a:fillRef idx="3">
+            <a:schemeClr val="accent1"/>
+          </a:fillRef>
+          <a:effectRef idx="2">
+            <a:schemeClr val="accent1"/>
+          </a:effectRef>
+          <a:fontRef idx="minor">
+            <a:schemeClr val="lt1"/>
+          </a:fontRef>
+        </p:style>
+        <p:txBody>
+          <a:bodyPr rtlCol="0" anchor="t" wrap="square" lIns="45720" rIns="45720" tIns="18288" bIns="18288"/>
+          <a:lstStyle/>
+          <a:p>
+            <a:pPr algn="l">
+              <a:defRPr sz="1000" b="0" i="0">
+                <a:solidFill>
+                  <a:srgbClr val="777777"/>
+                </a:solidFill>
+                <a:latin typeface="Calibri"/>
+              </a:defRPr>
+            </a:pPr>
+            <a:r>
+              <a:rPr spc="80"/>
+              <a:t>DEMOGRAPHIC FEATURES</a:t>
+            </a:r>
+          </a:p>
+        </p:txBody>
+      </p:sp>
+      <p:sp>
+        <p:nvSpPr>
+          <p:cNvPr id="11" name="Rectangle 10"/>
+          <p:cNvSpPr/>
+          <p:nvPr/>
+        </p:nvSpPr>
+        <p:spPr>
+          <a:xfrm>
+            <a:off x="3166795" y="1298448"/>
+            <a:ext cx="10972" cy="822960"/>
+          </a:xfrm>
+          <a:prstGeom prst="rect">
+            <a:avLst/>
+          </a:prstGeom>
+          <a:solidFill>
+            <a:srgbClr val="DDDDDD"/>
+          </a:solidFill>
+          <a:ln>
+            <a:noFill/>
+          </a:ln>
+          <a:effectLst/>
+        </p:spPr>
+        <p:style>
+          <a:lnRef idx="1">
+            <a:schemeClr val="accent1"/>
+          </a:lnRef>
+          <a:fillRef idx="3">
+            <a:schemeClr val="accent1"/>
+          </a:fillRef>
+          <a:effectRef idx="2">
+            <a:schemeClr val="accent1"/>
+          </a:effectRef>
+          <a:fontRef idx="minor">
+            <a:schemeClr val="lt1"/>
+          </a:fontRef>
+        </p:style>
+        <p:txBody>
+          <a:bodyPr rtlCol="0" anchor="ctr"/>
+          <a:lstStyle/>
+          <a:p>
+            <a:pPr algn="ctr"/>
+          </a:p>
+        </p:txBody>
+      </p:sp>
+      <p:sp>
+        <p:nvSpPr>
+          <p:cNvPr id="12" name="Rectangle 11"/>
+          <p:cNvSpPr/>
+          <p:nvPr/>
+        </p:nvSpPr>
+        <p:spPr>
+          <a:xfrm>
+            <a:off x="6095846" y="1252728"/>
+            <a:ext cx="2682163" cy="566928"/>
+          </a:xfrm>
+          <a:prstGeom prst="rect">
+            <a:avLst/>
+          </a:prstGeom>
+          <a:noFill/>
+          <a:ln>
+            <a:noFill/>
+          </a:ln>
+          <a:effectLst/>
+        </p:spPr>
+        <p:style>
+          <a:lnRef idx="1">
+            <a:schemeClr val="accent1"/>
+          </a:lnRef>
+          <a:fillRef idx="3">
+            <a:schemeClr val="accent1"/>
+          </a:fillRef>
+          <a:effectRef idx="2">
+            <a:schemeClr val="accent1"/>
+          </a:effectRef>
+          <a:fontRef idx="minor">
+            <a:schemeClr val="lt1"/>
+          </a:fontRef>
+        </p:style>
+        <p:txBody>
+          <a:bodyPr rtlCol="0" anchor="t" wrap="square" lIns="45720" rIns="45720" tIns="18288" bIns="18288"/>
+          <a:lstStyle/>
+          <a:p>
+            <a:pPr algn="l">
+              <a:defRPr sz="3000" b="1" i="0">
+                <a:solidFill>
+                  <a:srgbClr val="1A1A1A"/>
+                </a:solidFill>
+                <a:latin typeface="Calibri"/>
+              </a:defRPr>
+            </a:pPr>
+            <a:r>
+              <a:t>4</a:t>
+            </a:r>
+          </a:p>
+        </p:txBody>
+      </p:sp>
+      <p:sp>
+        <p:nvSpPr>
+          <p:cNvPr id="13" name="Rectangle 12"/>
+          <p:cNvSpPr/>
+          <p:nvPr/>
+        </p:nvSpPr>
+        <p:spPr>
+          <a:xfrm>
+            <a:off x="6095846" y="1819656"/>
+            <a:ext cx="2682163" cy="329184"/>
+          </a:xfrm>
+          <a:prstGeom prst="rect">
+            <a:avLst/>
+          </a:prstGeom>
+          <a:noFill/>
+          <a:ln>
+            <a:noFill/>
+          </a:ln>
+          <a:effectLst/>
+        </p:spPr>
+        <p:style>
+          <a:lnRef idx="1">
+            <a:schemeClr val="accent1"/>
+          </a:lnRef>
+          <a:fillRef idx="3">
+            <a:schemeClr val="accent1"/>
+          </a:fillRef>
+          <a:effectRef idx="2">
+            <a:schemeClr val="accent1"/>
+          </a:effectRef>
+          <a:fontRef idx="minor">
+            <a:schemeClr val="lt1"/>
+          </a:fontRef>
+        </p:style>
+        <p:txBody>
+          <a:bodyPr rtlCol="0" anchor="t" wrap="square" lIns="45720" rIns="45720" tIns="18288" bIns="18288"/>
+          <a:lstStyle/>
+          <a:p>
+            <a:pPr algn="l">
+              <a:defRPr sz="1000" b="0" i="0">
+                <a:solidFill>
+                  <a:srgbClr val="777777"/>
+                </a:solidFill>
+                <a:latin typeface="Calibri"/>
+              </a:defRPr>
+            </a:pPr>
+            <a:r>
+              <a:rPr spc="80"/>
+              <a:t>UNDERWRITING ARMS</a:t>
+            </a:r>
+          </a:p>
+        </p:txBody>
+      </p:sp>
+      <p:sp>
+        <p:nvSpPr>
+          <p:cNvPr id="14" name="Rectangle 13"/>
+          <p:cNvSpPr/>
+          <p:nvPr/>
+        </p:nvSpPr>
+        <p:spPr>
+          <a:xfrm>
+            <a:off x="5986118" y="1298448"/>
+            <a:ext cx="10972" cy="822960"/>
+          </a:xfrm>
+          <a:prstGeom prst="rect">
+            <a:avLst/>
+          </a:prstGeom>
+          <a:solidFill>
+            <a:srgbClr val="DDDDDD"/>
+          </a:solidFill>
+          <a:ln>
+            <a:noFill/>
+          </a:ln>
+          <a:effectLst/>
+        </p:spPr>
+        <p:style>
+          <a:lnRef idx="1">
+            <a:schemeClr val="accent1"/>
+          </a:lnRef>
+          <a:fillRef idx="3">
+            <a:schemeClr val="accent1"/>
+          </a:fillRef>
+          <a:effectRef idx="2">
+            <a:schemeClr val="accent1"/>
+          </a:effectRef>
+          <a:fontRef idx="minor">
+            <a:schemeClr val="lt1"/>
+          </a:fontRef>
+        </p:style>
+        <p:txBody>
+          <a:bodyPr rtlCol="0" anchor="ctr"/>
+          <a:lstStyle/>
+          <a:p>
+            <a:pPr algn="ctr"/>
+          </a:p>
+        </p:txBody>
+      </p:sp>
+      <p:sp>
+        <p:nvSpPr>
+          <p:cNvPr id="15" name="Rectangle 14"/>
+          <p:cNvSpPr/>
+          <p:nvPr/>
+        </p:nvSpPr>
+        <p:spPr>
+          <a:xfrm>
+            <a:off x="8915169" y="1252728"/>
+            <a:ext cx="2682163" cy="566928"/>
+          </a:xfrm>
+          <a:prstGeom prst="rect">
+            <a:avLst/>
+          </a:prstGeom>
+          <a:noFill/>
+          <a:ln>
+            <a:noFill/>
+          </a:ln>
+          <a:effectLst/>
+        </p:spPr>
+        <p:style>
+          <a:lnRef idx="1">
+            <a:schemeClr val="accent1"/>
+          </a:lnRef>
+          <a:fillRef idx="3">
+            <a:schemeClr val="accent1"/>
+          </a:fillRef>
+          <a:effectRef idx="2">
+            <a:schemeClr val="accent1"/>
+          </a:effectRef>
+          <a:fontRef idx="minor">
+            <a:schemeClr val="lt1"/>
+          </a:fontRef>
+        </p:style>
+        <p:txBody>
+          <a:bodyPr rtlCol="0" anchor="t" wrap="square" lIns="45720" rIns="45720" tIns="18288" bIns="18288"/>
+          <a:lstStyle/>
+          <a:p>
+            <a:pPr algn="l">
+              <a:defRPr sz="3000" b="1" i="0">
+                <a:solidFill>
+                  <a:srgbClr val="1A1A1A"/>
+                </a:solidFill>
+                <a:latin typeface="Calibri"/>
+              </a:defRPr>
+            </a:pPr>
+            <a:r>
+              <a:t>4</a:t>
+            </a:r>
+          </a:p>
+        </p:txBody>
+      </p:sp>
+      <p:sp>
+        <p:nvSpPr>
+          <p:cNvPr id="16" name="Rectangle 15"/>
+          <p:cNvSpPr/>
+          <p:nvPr/>
+        </p:nvSpPr>
+        <p:spPr>
+          <a:xfrm>
+            <a:off x="8915169" y="1819656"/>
+            <a:ext cx="2682163" cy="329184"/>
+          </a:xfrm>
+          <a:prstGeom prst="rect">
+            <a:avLst/>
+          </a:prstGeom>
+          <a:noFill/>
+          <a:ln>
+            <a:noFill/>
+          </a:ln>
+          <a:effectLst/>
+        </p:spPr>
+        <p:style>
+          <a:lnRef idx="1">
+            <a:schemeClr val="accent1"/>
+          </a:lnRef>
+          <a:fillRef idx="3">
+            <a:schemeClr val="accent1"/>
+          </a:fillRef>
+          <a:effectRef idx="2">
+            <a:schemeClr val="accent1"/>
+          </a:effectRef>
+          <a:fontRef idx="minor">
+            <a:schemeClr val="lt1"/>
+          </a:fontRef>
+        </p:style>
+        <p:txBody>
+          <a:bodyPr rtlCol="0" anchor="t" wrap="square" lIns="45720" rIns="45720" tIns="18288" bIns="18288"/>
+          <a:lstStyle/>
+          <a:p>
+            <a:pPr algn="l">
+              <a:defRPr sz="1000" b="0" i="0">
+                <a:solidFill>
+                  <a:srgbClr val="777777"/>
+                </a:solidFill>
+                <a:latin typeface="Calibri"/>
+              </a:defRPr>
+            </a:pPr>
+            <a:r>
+              <a:rPr spc="80"/>
+              <a:t>ANCHORING SOURCES</a:t>
+            </a:r>
+          </a:p>
+        </p:txBody>
+      </p:sp>
+      <p:sp>
+        <p:nvSpPr>
+          <p:cNvPr id="17" name="Rectangle 16"/>
+          <p:cNvSpPr/>
+          <p:nvPr/>
+        </p:nvSpPr>
+        <p:spPr>
+          <a:xfrm>
+            <a:off x="8805441" y="1298448"/>
+            <a:ext cx="10972" cy="822960"/>
+          </a:xfrm>
+          <a:prstGeom prst="rect">
+            <a:avLst/>
+          </a:prstGeom>
+          <a:solidFill>
+            <a:srgbClr val="DDDDDD"/>
+          </a:solidFill>
+          <a:ln>
+            <a:noFill/>
+          </a:ln>
+          <a:effectLst/>
+        </p:spPr>
+        <p:style>
+          <a:lnRef idx="1">
+            <a:schemeClr val="accent1"/>
+          </a:lnRef>
+          <a:fillRef idx="3">
+            <a:schemeClr val="accent1"/>
+          </a:fillRef>
+          <a:effectRef idx="2">
+            <a:schemeClr val="accent1"/>
+          </a:effectRef>
+          <a:fontRef idx="minor">
+            <a:schemeClr val="lt1"/>
+          </a:fontRef>
+        </p:style>
+        <p:txBody>
+          <a:bodyPr rtlCol="0" anchor="ctr"/>
+          <a:lstStyle/>
+          <a:p>
+            <a:pPr algn="ctr"/>
+          </a:p>
+        </p:txBody>
+      </p:sp>
+      <p:sp>
+        <p:nvSpPr>
+          <p:cNvPr id="18" name="Rectangle 17"/>
+          <p:cNvSpPr/>
+          <p:nvPr/>
+        </p:nvSpPr>
+        <p:spPr>
+          <a:xfrm>
+            <a:off x="457200" y="2642616"/>
+            <a:ext cx="91440" cy="91440"/>
           </a:xfrm>
           <a:prstGeom prst="rect">
             <a:avLst/>
@@ -36138,14 +39054,14 @@
       </p:sp>
       <p:sp>
         <p:nvSpPr>
-          <p:cNvPr id="8" name="Rectangle 7"/>
-          <p:cNvSpPr/>
-          <p:nvPr/>
-        </p:nvSpPr>
-        <p:spPr>
-          <a:xfrm>
-            <a:off x="457200" y="1280160"/>
-            <a:ext cx="2560320" cy="713232"/>
+          <p:cNvPr id="19" name="Rectangle 18"/>
+          <p:cNvSpPr/>
+          <p:nvPr/>
+        </p:nvSpPr>
+        <p:spPr>
+          <a:xfrm>
+            <a:off x="713232" y="2532888"/>
+            <a:ext cx="5413248" cy="566928"/>
           </a:xfrm>
           <a:prstGeom prst="rect">
             <a:avLst/>
@@ -36174,86 +39090,30 @@
           <a:bodyPr rtlCol="0" anchor="t" wrap="square" lIns="45720" rIns="45720" tIns="18288" bIns="18288"/>
           <a:lstStyle/>
           <a:p>
-            <a:pPr algn="ctr">
-              <a:defRPr sz="4000" b="1" i="0">
-                <a:solidFill>
-                  <a:srgbClr val="FFFFFF"/>
-                </a:solidFill>
-                <a:latin typeface="Times New Roman"/>
-              </a:defRPr>
-            </a:pPr>
-            <a:r>
-              <a:t>2,000</a:t>
-            </a:r>
-          </a:p>
-        </p:txBody>
-      </p:sp>
-      <p:sp>
-        <p:nvSpPr>
-          <p:cNvPr id="9" name="Rectangle 8"/>
-          <p:cNvSpPr/>
-          <p:nvPr/>
-        </p:nvSpPr>
-        <p:spPr>
-          <a:xfrm>
-            <a:off x="457200" y="2011680"/>
-            <a:ext cx="2560320" cy="502920"/>
-          </a:xfrm>
-          <a:prstGeom prst="rect">
-            <a:avLst/>
-          </a:prstGeom>
-          <a:noFill/>
-          <a:ln>
-            <a:noFill/>
-          </a:ln>
-          <a:effectLst/>
-        </p:spPr>
-        <p:style>
-          <a:lnRef idx="1">
-            <a:schemeClr val="accent1"/>
-          </a:lnRef>
-          <a:fillRef idx="3">
-            <a:schemeClr val="accent1"/>
-          </a:fillRef>
-          <a:effectRef idx="2">
-            <a:schemeClr val="accent1"/>
-          </a:effectRef>
-          <a:fontRef idx="minor">
-            <a:schemeClr val="lt1"/>
-          </a:fontRef>
-        </p:style>
-        <p:txBody>
-          <a:bodyPr rtlCol="0" anchor="t" wrap="square" lIns="45720" rIns="45720" tIns="18288" bIns="18288"/>
-          <a:lstStyle/>
-          <a:p>
-            <a:pPr algn="ctr">
-              <a:defRPr sz="1200" b="0" i="0">
-                <a:solidFill>
-                  <a:srgbClr val="FFFFFF"/>
-                </a:solidFill>
-                <a:latin typeface="Calibri"/>
-              </a:defRPr>
-            </a:pPr>
-            <a:r>
-              <a:t>Synthetic</a:t>
-            </a:r>
-            <a:br/>
-            <a:r>
-              <a:t>Applications</a:t>
-            </a:r>
-          </a:p>
-        </p:txBody>
-      </p:sp>
-      <p:sp>
-        <p:nvSpPr>
-          <p:cNvPr id="10" name="Rectangle 9"/>
-          <p:cNvSpPr/>
-          <p:nvPr/>
-        </p:nvSpPr>
-        <p:spPr>
-          <a:xfrm>
-            <a:off x="3200400" y="1207008"/>
-            <a:ext cx="2560320" cy="1417320"/>
+            <a:pPr algn="l">
+              <a:defRPr sz="1700" b="0" i="0">
+                <a:solidFill>
+                  <a:srgbClr val="1A1A1A"/>
+                </a:solidFill>
+                <a:latin typeface="Calibri"/>
+              </a:defRPr>
+            </a:pPr>
+            <a:r>
+              <a:t>Anchored on CDHS, STEPS, ILO, WHO data</a:t>
+            </a:r>
+          </a:p>
+        </p:txBody>
+      </p:sp>
+      <p:sp>
+        <p:nvSpPr>
+          <p:cNvPr id="20" name="Rectangle 19"/>
+          <p:cNvSpPr/>
+          <p:nvPr/>
+        </p:nvSpPr>
+        <p:spPr>
+          <a:xfrm>
+            <a:off x="457200" y="3209544"/>
+            <a:ext cx="91440" cy="91440"/>
           </a:xfrm>
           <a:prstGeom prst="rect">
             <a:avLst/>
@@ -36290,14 +39150,14 @@
       </p:sp>
       <p:sp>
         <p:nvSpPr>
-          <p:cNvPr id="11" name="Rectangle 10"/>
-          <p:cNvSpPr/>
-          <p:nvPr/>
-        </p:nvSpPr>
-        <p:spPr>
-          <a:xfrm>
-            <a:off x="3200400" y="1280160"/>
-            <a:ext cx="2560320" cy="713232"/>
+          <p:cNvPr id="21" name="Rectangle 20"/>
+          <p:cNvSpPr/>
+          <p:nvPr/>
+        </p:nvSpPr>
+        <p:spPr>
+          <a:xfrm>
+            <a:off x="713232" y="3099816"/>
+            <a:ext cx="5413248" cy="566928"/>
           </a:xfrm>
           <a:prstGeom prst="rect">
             <a:avLst/>
@@ -36326,86 +39186,30 @@
           <a:bodyPr rtlCol="0" anchor="t" wrap="square" lIns="45720" rIns="45720" tIns="18288" bIns="18288"/>
           <a:lstStyle/>
           <a:p>
-            <a:pPr algn="ctr">
-              <a:defRPr sz="4000" b="1" i="0">
-                <a:solidFill>
-                  <a:srgbClr val="FFFFFF"/>
-                </a:solidFill>
-                <a:latin typeface="Times New Roman"/>
-              </a:defRPr>
-            </a:pPr>
-            <a:r>
-              <a:t>5</a:t>
-            </a:r>
-          </a:p>
-        </p:txBody>
-      </p:sp>
-      <p:sp>
-        <p:nvSpPr>
-          <p:cNvPr id="12" name="Rectangle 11"/>
-          <p:cNvSpPr/>
-          <p:nvPr/>
-        </p:nvSpPr>
-        <p:spPr>
-          <a:xfrm>
-            <a:off x="3200400" y="2011680"/>
-            <a:ext cx="2560320" cy="502920"/>
-          </a:xfrm>
-          <a:prstGeom prst="rect">
-            <a:avLst/>
-          </a:prstGeom>
-          <a:noFill/>
-          <a:ln>
-            <a:noFill/>
-          </a:ln>
-          <a:effectLst/>
-        </p:spPr>
-        <p:style>
-          <a:lnRef idx="1">
-            <a:schemeClr val="accent1"/>
-          </a:lnRef>
-          <a:fillRef idx="3">
-            <a:schemeClr val="accent1"/>
-          </a:fillRef>
-          <a:effectRef idx="2">
-            <a:schemeClr val="accent1"/>
-          </a:effectRef>
-          <a:fontRef idx="minor">
-            <a:schemeClr val="lt1"/>
-          </a:fontRef>
-        </p:style>
-        <p:txBody>
-          <a:bodyPr rtlCol="0" anchor="t" wrap="square" lIns="45720" rIns="45720" tIns="18288" bIns="18288"/>
-          <a:lstStyle/>
-          <a:p>
-            <a:pPr algn="ctr">
-              <a:defRPr sz="1200" b="0" i="0">
-                <a:solidFill>
-                  <a:srgbClr val="FFFFFF"/>
-                </a:solidFill>
-                <a:latin typeface="Calibri"/>
-              </a:defRPr>
-            </a:pPr>
-            <a:r>
-              <a:t>Demographic</a:t>
-            </a:r>
-            <a:br/>
-            <a:r>
-              <a:t>Features</a:t>
-            </a:r>
-          </a:p>
-        </p:txBody>
-      </p:sp>
-      <p:sp>
-        <p:nvSpPr>
-          <p:cNvPr id="13" name="Rectangle 12"/>
-          <p:cNvSpPr/>
-          <p:nvPr/>
-        </p:nvSpPr>
-        <p:spPr>
-          <a:xfrm>
-            <a:off x="5943600" y="1207008"/>
-            <a:ext cx="2560320" cy="1417320"/>
+            <a:pPr algn="l">
+              <a:defRPr sz="1700" b="0" i="0">
+                <a:solidFill>
+                  <a:srgbClr val="1A1A1A"/>
+                </a:solidFill>
+                <a:latin typeface="Calibri"/>
+              </a:defRPr>
+            </a:pPr>
+            <a:r>
+              <a:t>Adverse selection AF = 1.35; elasticity 3.5</a:t>
+            </a:r>
+          </a:p>
+        </p:txBody>
+      </p:sp>
+      <p:sp>
+        <p:nvSpPr>
+          <p:cNvPr id="22" name="Rectangle 21"/>
+          <p:cNvSpPr/>
+          <p:nvPr/>
+        </p:nvSpPr>
+        <p:spPr>
+          <a:xfrm>
+            <a:off x="457200" y="3776472"/>
+            <a:ext cx="91440" cy="91440"/>
           </a:xfrm>
           <a:prstGeom prst="rect">
             <a:avLst/>
@@ -36442,14 +39246,14 @@
       </p:sp>
       <p:sp>
         <p:nvSpPr>
-          <p:cNvPr id="14" name="Rectangle 13"/>
-          <p:cNvSpPr/>
-          <p:nvPr/>
-        </p:nvSpPr>
-        <p:spPr>
-          <a:xfrm>
-            <a:off x="5943600" y="1280160"/>
-            <a:ext cx="2560320" cy="713232"/>
+          <p:cNvPr id="23" name="Rectangle 22"/>
+          <p:cNvSpPr/>
+          <p:nvPr/>
+        </p:nvSpPr>
+        <p:spPr>
+          <a:xfrm>
+            <a:off x="713232" y="3666744"/>
+            <a:ext cx="5413248" cy="566928"/>
           </a:xfrm>
           <a:prstGeom prst="rect">
             <a:avLst/>
@@ -36478,30 +39282,30 @@
           <a:bodyPr rtlCol="0" anchor="t" wrap="square" lIns="45720" rIns="45720" tIns="18288" bIns="18288"/>
           <a:lstStyle/>
           <a:p>
-            <a:pPr algn="ctr">
-              <a:defRPr sz="4000" b="1" i="0">
-                <a:solidFill>
-                  <a:srgbClr val="FFFFFF"/>
-                </a:solidFill>
-                <a:latin typeface="Times New Roman"/>
-              </a:defRPr>
-            </a:pPr>
-            <a:r>
-              <a:t>4</a:t>
-            </a:r>
-          </a:p>
-        </p:txBody>
-      </p:sp>
-      <p:sp>
-        <p:nvSpPr>
-          <p:cNvPr id="15" name="Rectangle 14"/>
-          <p:cNvSpPr/>
-          <p:nvPr/>
-        </p:nvSpPr>
-        <p:spPr>
-          <a:xfrm>
-            <a:off x="5943600" y="2011680"/>
-            <a:ext cx="2560320" cy="502920"/>
+            <a:pPr algn="l">
+              <a:defRPr sz="1700" b="0" i="0">
+                <a:solidFill>
+                  <a:srgbClr val="1A1A1A"/>
+                </a:solidFill>
+                <a:latin typeface="Calibri"/>
+              </a:defRPr>
+            </a:pPr>
+            <a:r>
+              <a:t>Fully synthetic -- no real applicant PII</a:t>
+            </a:r>
+          </a:p>
+        </p:txBody>
+      </p:sp>
+      <p:sp>
+        <p:nvSpPr>
+          <p:cNvPr id="24" name="Rectangle 23"/>
+          <p:cNvSpPr/>
+          <p:nvPr/>
+        </p:nvSpPr>
+        <p:spPr>
+          <a:xfrm>
+            <a:off x="6492240" y="2578608"/>
+            <a:ext cx="1737360" cy="365760"/>
           </a:xfrm>
           <a:prstGeom prst="rect">
             <a:avLst/>
@@ -36530,40 +39334,192 @@
           <a:bodyPr rtlCol="0" anchor="t" wrap="square" lIns="45720" rIns="45720" tIns="18288" bIns="18288"/>
           <a:lstStyle/>
           <a:p>
-            <a:pPr algn="ctr">
-              <a:defRPr sz="1200" b="0" i="0">
-                <a:solidFill>
-                  <a:srgbClr val="FFFFFF"/>
-                </a:solidFill>
-                <a:latin typeface="Calibri"/>
-              </a:defRPr>
-            </a:pPr>
-            <a:r>
-              <a:t>Underwriting</a:t>
-            </a:r>
-            <a:br/>
-            <a:r>
-              <a:t>Arms</a:t>
-            </a:r>
-          </a:p>
-        </p:txBody>
-      </p:sp>
-      <p:sp>
-        <p:nvSpPr>
-          <p:cNvPr id="16" name="Rectangle 15"/>
-          <p:cNvSpPr/>
-          <p:nvPr/>
-        </p:nvSpPr>
-        <p:spPr>
-          <a:xfrm>
-            <a:off x="8686800" y="1207008"/>
-            <a:ext cx="2560320" cy="1417320"/>
+            <a:pPr algn="l">
+              <a:defRPr sz="1500" b="1" i="0">
+                <a:solidFill>
+                  <a:srgbClr val="5D2A42"/>
+                </a:solidFill>
+                <a:latin typeface="Calibri"/>
+              </a:defRPr>
+            </a:pPr>
+            <a:r>
+              <a:t>RATED</a:t>
+            </a:r>
+          </a:p>
+        </p:txBody>
+      </p:sp>
+      <p:sp>
+        <p:nvSpPr>
+          <p:cNvPr id="25" name="Rectangle 24"/>
+          <p:cNvSpPr/>
+          <p:nvPr/>
+        </p:nvSpPr>
+        <p:spPr>
+          <a:xfrm>
+            <a:off x="8321040" y="2596896"/>
+            <a:ext cx="3383280" cy="457200"/>
+          </a:xfrm>
+          <a:prstGeom prst="rect">
+            <a:avLst/>
+          </a:prstGeom>
+          <a:noFill/>
+          <a:ln>
+            <a:noFill/>
+          </a:ln>
+          <a:effectLst/>
+        </p:spPr>
+        <p:style>
+          <a:lnRef idx="1">
+            <a:schemeClr val="accent1"/>
+          </a:lnRef>
+          <a:fillRef idx="3">
+            <a:schemeClr val="accent1"/>
+          </a:fillRef>
+          <a:effectRef idx="2">
+            <a:schemeClr val="accent1"/>
+          </a:effectRef>
+          <a:fontRef idx="minor">
+            <a:schemeClr val="lt1"/>
+          </a:fontRef>
+        </p:style>
+        <p:txBody>
+          <a:bodyPr rtlCol="0" anchor="t" wrap="square" lIns="45720" rIns="45720" tIns="18288" bIns="18288"/>
+          <a:lstStyle/>
+          <a:p>
+            <a:pPr algn="l">
+              <a:defRPr sz="1300" b="0" i="0">
+                <a:solidFill>
+                  <a:srgbClr val="3A3A3A"/>
+                </a:solidFill>
+                <a:latin typeface="Calibri"/>
+              </a:defRPr>
+            </a:pPr>
+            <a:r>
+              <a:t>Accept + premium loading (+25%)</a:t>
+            </a:r>
+          </a:p>
+        </p:txBody>
+      </p:sp>
+      <p:sp>
+        <p:nvSpPr>
+          <p:cNvPr id="26" name="Rectangle 25"/>
+          <p:cNvSpPr/>
+          <p:nvPr/>
+        </p:nvSpPr>
+        <p:spPr>
+          <a:xfrm>
+            <a:off x="6492240" y="3291840"/>
+            <a:ext cx="1737360" cy="365760"/>
+          </a:xfrm>
+          <a:prstGeom prst="rect">
+            <a:avLst/>
+          </a:prstGeom>
+          <a:noFill/>
+          <a:ln>
+            <a:noFill/>
+          </a:ln>
+          <a:effectLst/>
+        </p:spPr>
+        <p:style>
+          <a:lnRef idx="1">
+            <a:schemeClr val="accent1"/>
+          </a:lnRef>
+          <a:fillRef idx="3">
+            <a:schemeClr val="accent1"/>
+          </a:fillRef>
+          <a:effectRef idx="2">
+            <a:schemeClr val="accent1"/>
+          </a:effectRef>
+          <a:fontRef idx="minor">
+            <a:schemeClr val="lt1"/>
+          </a:fontRef>
+        </p:style>
+        <p:txBody>
+          <a:bodyPr rtlCol="0" anchor="t" wrap="square" lIns="45720" rIns="45720" tIns="18288" bIns="18288"/>
+          <a:lstStyle/>
+          <a:p>
+            <a:pPr algn="l">
+              <a:defRPr sz="1500" b="1" i="0">
+                <a:solidFill>
+                  <a:srgbClr val="5D2A42"/>
+                </a:solidFill>
+                <a:latin typeface="Calibri"/>
+              </a:defRPr>
+            </a:pPr>
+            <a:r>
+              <a:t>STANDARD</a:t>
+            </a:r>
+          </a:p>
+        </p:txBody>
+      </p:sp>
+      <p:sp>
+        <p:nvSpPr>
+          <p:cNvPr id="27" name="Rectangle 26"/>
+          <p:cNvSpPr/>
+          <p:nvPr/>
+        </p:nvSpPr>
+        <p:spPr>
+          <a:xfrm>
+            <a:off x="8321040" y="3310128"/>
+            <a:ext cx="3383280" cy="457200"/>
+          </a:xfrm>
+          <a:prstGeom prst="rect">
+            <a:avLst/>
+          </a:prstGeom>
+          <a:noFill/>
+          <a:ln>
+            <a:noFill/>
+          </a:ln>
+          <a:effectLst/>
+        </p:spPr>
+        <p:style>
+          <a:lnRef idx="1">
+            <a:schemeClr val="accent1"/>
+          </a:lnRef>
+          <a:fillRef idx="3">
+            <a:schemeClr val="accent1"/>
+          </a:fillRef>
+          <a:effectRef idx="2">
+            <a:schemeClr val="accent1"/>
+          </a:effectRef>
+          <a:fontRef idx="minor">
+            <a:schemeClr val="lt1"/>
+          </a:fontRef>
+        </p:style>
+        <p:txBody>
+          <a:bodyPr rtlCol="0" anchor="t" wrap="square" lIns="45720" rIns="45720" tIns="18288" bIns="18288"/>
+          <a:lstStyle/>
+          <a:p>
+            <a:pPr algn="l">
+              <a:defRPr sz="1300" b="0" i="0">
+                <a:solidFill>
+                  <a:srgbClr val="3A3A3A"/>
+                </a:solidFill>
+                <a:latin typeface="Calibri"/>
+              </a:defRPr>
+            </a:pPr>
+            <a:r>
+              <a:t>Accept at standard premium</a:t>
+            </a:r>
+          </a:p>
+        </p:txBody>
+      </p:sp>
+      <p:sp>
+        <p:nvSpPr>
+          <p:cNvPr id="28" name="Rectangle 27"/>
+          <p:cNvSpPr/>
+          <p:nvPr/>
+        </p:nvSpPr>
+        <p:spPr>
+          <a:xfrm>
+            <a:off x="6492240" y="3163824"/>
+            <a:ext cx="5212080" cy="10972"/>
           </a:xfrm>
           <a:prstGeom prst="rect">
             <a:avLst/>
           </a:prstGeom>
           <a:solidFill>
-            <a:srgbClr val="5D2A42"/>
+            <a:srgbClr val="DDDDDD"/>
           </a:solidFill>
           <a:ln>
             <a:noFill/>
@@ -36594,14 +39550,14 @@
       </p:sp>
       <p:sp>
         <p:nvSpPr>
-          <p:cNvPr id="17" name="Rectangle 16"/>
-          <p:cNvSpPr/>
-          <p:nvPr/>
-        </p:nvSpPr>
-        <p:spPr>
-          <a:xfrm>
-            <a:off x="8686800" y="1280160"/>
-            <a:ext cx="2560320" cy="713232"/>
+          <p:cNvPr id="29" name="Rectangle 28"/>
+          <p:cNvSpPr/>
+          <p:nvPr/>
+        </p:nvSpPr>
+        <p:spPr>
+          <a:xfrm>
+            <a:off x="6492240" y="4005072"/>
+            <a:ext cx="1737360" cy="365760"/>
           </a:xfrm>
           <a:prstGeom prst="rect">
             <a:avLst/>
@@ -36630,30 +39586,30 @@
           <a:bodyPr rtlCol="0" anchor="t" wrap="square" lIns="45720" rIns="45720" tIns="18288" bIns="18288"/>
           <a:lstStyle/>
           <a:p>
-            <a:pPr algn="ctr">
-              <a:defRPr sz="4000" b="1" i="0">
-                <a:solidFill>
-                  <a:srgbClr val="FFFFFF"/>
-                </a:solidFill>
-                <a:latin typeface="Times New Roman"/>
-              </a:defRPr>
-            </a:pPr>
-            <a:r>
-              <a:t>4</a:t>
-            </a:r>
-          </a:p>
-        </p:txBody>
-      </p:sp>
-      <p:sp>
-        <p:nvSpPr>
-          <p:cNvPr id="18" name="Rectangle 17"/>
-          <p:cNvSpPr/>
-          <p:nvPr/>
-        </p:nvSpPr>
-        <p:spPr>
-          <a:xfrm>
-            <a:off x="8686800" y="2011680"/>
-            <a:ext cx="2560320" cy="502920"/>
+            <a:pPr algn="l">
+              <a:defRPr sz="1500" b="1" i="0">
+                <a:solidFill>
+                  <a:srgbClr val="5D2A42"/>
+                </a:solidFill>
+                <a:latin typeface="Calibri"/>
+              </a:defRPr>
+            </a:pPr>
+            <a:r>
+              <a:t>DECLINE</a:t>
+            </a:r>
+          </a:p>
+        </p:txBody>
+      </p:sp>
+      <p:sp>
+        <p:nvSpPr>
+          <p:cNvPr id="30" name="Rectangle 29"/>
+          <p:cNvSpPr/>
+          <p:nvPr/>
+        </p:nvSpPr>
+        <p:spPr>
+          <a:xfrm>
+            <a:off x="8321040" y="4023360"/>
+            <a:ext cx="3383280" cy="457200"/>
           </a:xfrm>
           <a:prstGeom prst="rect">
             <a:avLst/>
@@ -36682,34 +39638,74 @@
           <a:bodyPr rtlCol="0" anchor="t" wrap="square" lIns="45720" rIns="45720" tIns="18288" bIns="18288"/>
           <a:lstStyle/>
           <a:p>
-            <a:pPr algn="ctr">
-              <a:defRPr sz="1200" b="0" i="0">
-                <a:solidFill>
-                  <a:srgbClr val="FFFFFF"/>
-                </a:solidFill>
-                <a:latin typeface="Calibri"/>
-              </a:defRPr>
-            </a:pPr>
-            <a:r>
-              <a:t>Anchoring</a:t>
-            </a:r>
-            <a:br/>
-            <a:r>
-              <a:t>Sources</a:t>
-            </a:r>
-          </a:p>
-        </p:txBody>
-      </p:sp>
-      <p:sp>
-        <p:nvSpPr>
-          <p:cNvPr id="19" name="Rectangle 18"/>
-          <p:cNvSpPr/>
-          <p:nvPr/>
-        </p:nvSpPr>
-        <p:spPr>
-          <a:xfrm>
-            <a:off x="457200" y="2779776"/>
-            <a:ext cx="5486400" cy="329184"/>
+            <a:pPr algn="l">
+              <a:defRPr sz="1300" b="0" i="0">
+                <a:solidFill>
+                  <a:srgbClr val="3A3A3A"/>
+                </a:solidFill>
+                <a:latin typeface="Calibri"/>
+              </a:defRPr>
+            </a:pPr>
+            <a:r>
+              <a:t>Reject application</a:t>
+            </a:r>
+          </a:p>
+        </p:txBody>
+      </p:sp>
+      <p:sp>
+        <p:nvSpPr>
+          <p:cNvPr id="31" name="Rectangle 30"/>
+          <p:cNvSpPr/>
+          <p:nvPr/>
+        </p:nvSpPr>
+        <p:spPr>
+          <a:xfrm>
+            <a:off x="6492240" y="3877056"/>
+            <a:ext cx="5212080" cy="10972"/>
+          </a:xfrm>
+          <a:prstGeom prst="rect">
+            <a:avLst/>
+          </a:prstGeom>
+          <a:solidFill>
+            <a:srgbClr val="DDDDDD"/>
+          </a:solidFill>
+          <a:ln>
+            <a:noFill/>
+          </a:ln>
+          <a:effectLst/>
+        </p:spPr>
+        <p:style>
+          <a:lnRef idx="1">
+            <a:schemeClr val="accent1"/>
+          </a:lnRef>
+          <a:fillRef idx="3">
+            <a:schemeClr val="accent1"/>
+          </a:fillRef>
+          <a:effectRef idx="2">
+            <a:schemeClr val="accent1"/>
+          </a:effectRef>
+          <a:fontRef idx="minor">
+            <a:schemeClr val="lt1"/>
+          </a:fontRef>
+        </p:style>
+        <p:txBody>
+          <a:bodyPr rtlCol="0" anchor="ctr"/>
+          <a:lstStyle/>
+          <a:p>
+            <a:pPr algn="ctr"/>
+          </a:p>
+        </p:txBody>
+      </p:sp>
+      <p:sp>
+        <p:nvSpPr>
+          <p:cNvPr id="32" name="Rectangle 31"/>
+          <p:cNvSpPr/>
+          <p:nvPr/>
+        </p:nvSpPr>
+        <p:spPr>
+          <a:xfrm>
+            <a:off x="6492240" y="4718304"/>
+            <a:ext cx="1737360" cy="365760"/>
           </a:xfrm>
           <a:prstGeom prst="rect">
             <a:avLst/>
@@ -36739,7 +39735,7 @@
           <a:lstStyle/>
           <a:p>
             <a:pPr algn="l">
-              <a:defRPr sz="1400" b="1" i="0">
+              <a:defRPr sz="1500" b="1" i="0">
                 <a:solidFill>
                   <a:srgbClr val="5D2A42"/>
                 </a:solidFill>
@@ -36747,140 +39743,21 @@
               </a:defRPr>
             </a:pPr>
             <a:r>
-              <a:t>Dataset construction</a:t>
-            </a:r>
-          </a:p>
-        </p:txBody>
-      </p:sp>
-      <p:sp>
-        <p:nvSpPr>
-          <p:cNvPr id="20" name="Rectangle 19"/>
-          <p:cNvSpPr/>
-          <p:nvPr/>
-        </p:nvSpPr>
-        <p:spPr>
-          <a:xfrm>
-            <a:off x="457200" y="3145536"/>
-            <a:ext cx="5486400" cy="2926080"/>
-          </a:xfrm>
-          <a:prstGeom prst="rect">
-            <a:avLst/>
-          </a:prstGeom>
-          <a:noFill/>
-          <a:ln>
-            <a:noFill/>
-          </a:ln>
-          <a:effectLst/>
-        </p:spPr>
-        <p:style>
-          <a:lnRef idx="1">
-            <a:schemeClr val="accent1"/>
-          </a:lnRef>
-          <a:fillRef idx="3">
-            <a:schemeClr val="accent1"/>
-          </a:fillRef>
-          <a:effectRef idx="2">
-            <a:schemeClr val="accent1"/>
-          </a:effectRef>
-          <a:fontRef idx="minor">
-            <a:schemeClr val="lt1"/>
-          </a:fontRef>
-        </p:style>
-        <p:txBody>
-          <a:bodyPr rtlCol="0" anchor="ctr" wrap="square"/>
-          <a:lstStyle/>
-          <a:p>
-            <a:pPr algn="ctr">
-              <a:spcAft>
-                <a:spcPts val="400"/>
-              </a:spcAft>
-              <a:defRPr sz="1300" b="0">
-                <a:solidFill>
-                  <a:srgbClr val="1A1A1A"/>
-                </a:solidFill>
-                <a:latin typeface="Calibri"/>
-              </a:defRPr>
-            </a:pPr>
-            <a:r>
-              <a:t>• Age, sex, region, occupation, BMI from CDHS 2021-22 &amp; STEPS 2021</a:t>
-            </a:r>
-          </a:p>
-          <a:p>
-            <a:pPr>
-              <a:spcAft>
-                <a:spcPts val="400"/>
-              </a:spcAft>
-              <a:defRPr sz="1300" b="0">
-                <a:solidFill>
-                  <a:srgbClr val="1A1A1A"/>
-                </a:solidFill>
-                <a:latin typeface="Calibri"/>
-              </a:defRPr>
-            </a:pPr>
-            <a:r>
-              <a:t>• Income distribution anchored on ILO Cambodia labour force surveys</a:t>
-            </a:r>
-          </a:p>
-          <a:p>
-            <a:pPr>
-              <a:spcAft>
-                <a:spcPts val="400"/>
-              </a:spcAft>
-              <a:defRPr sz="1300" b="0">
-                <a:solidFill>
-                  <a:srgbClr val="1A1A1A"/>
-                </a:solidFill>
-                <a:latin typeface="Calibri"/>
-              </a:defRPr>
-            </a:pPr>
-            <a:r>
-              <a:t>• Claim probabilities calibrated from WHO SEARO health expenditure data</a:t>
-            </a:r>
-          </a:p>
-          <a:p>
-            <a:pPr>
-              <a:spcAft>
-                <a:spcPts val="400"/>
-              </a:spcAft>
-              <a:defRPr sz="1300" b="0">
-                <a:solidFill>
-                  <a:srgbClr val="1A1A1A"/>
-                </a:solidFill>
-                <a:latin typeface="Calibri"/>
-              </a:defRPr>
-            </a:pPr>
-            <a:r>
-              <a:t>• Adverse-selection factor AF = 1.35; price elasticity slope β = 3.5</a:t>
-            </a:r>
-          </a:p>
-          <a:p>
-            <a:pPr>
-              <a:spcAft>
-                <a:spcPts val="400"/>
-              </a:spcAft>
-              <a:defRPr sz="1300" b="0">
-                <a:solidFill>
-                  <a:srgbClr val="1A1A1A"/>
-                </a:solidFill>
-                <a:latin typeface="Calibri"/>
-              </a:defRPr>
-            </a:pPr>
-            <a:r>
-              <a:t>• Fully synthetic -- no real applicant PII included</a:t>
-            </a:r>
-          </a:p>
-        </p:txBody>
-      </p:sp>
-      <p:sp>
-        <p:nvSpPr>
-          <p:cNvPr id="21" name="Rectangle 20"/>
-          <p:cNvSpPr/>
-          <p:nvPr/>
-        </p:nvSpPr>
-        <p:spPr>
-          <a:xfrm>
-            <a:off x="6217920" y="2779776"/>
-            <a:ext cx="5394960" cy="329184"/>
+              <a:t>REFER</a:t>
+            </a:r>
+          </a:p>
+        </p:txBody>
+      </p:sp>
+      <p:sp>
+        <p:nvSpPr>
+          <p:cNvPr id="33" name="Rectangle 32"/>
+          <p:cNvSpPr/>
+          <p:nvPr/>
+        </p:nvSpPr>
+        <p:spPr>
+          <a:xfrm>
+            <a:off x="8321040" y="4736592"/>
+            <a:ext cx="3383280" cy="457200"/>
           </a:xfrm>
           <a:prstGeom prst="rect">
             <a:avLst/>
@@ -36910,35 +39787,35 @@
           <a:lstStyle/>
           <a:p>
             <a:pPr algn="l">
-              <a:defRPr sz="1400" b="1" i="0">
-                <a:solidFill>
-                  <a:srgbClr val="5D2A42"/>
-                </a:solidFill>
-                <a:latin typeface="Calibri"/>
-              </a:defRPr>
-            </a:pPr>
-            <a:r>
-              <a:t>Underwriting arms</a:t>
-            </a:r>
-          </a:p>
-        </p:txBody>
-      </p:sp>
-      <p:sp>
-        <p:nvSpPr>
-          <p:cNvPr id="22" name="Rectangle 21"/>
-          <p:cNvSpPr/>
-          <p:nvPr/>
-        </p:nvSpPr>
-        <p:spPr>
-          <a:xfrm>
-            <a:off x="6217920" y="3145536"/>
-            <a:ext cx="1417320" cy="640080"/>
+              <a:defRPr sz="1300" b="0" i="0">
+                <a:solidFill>
+                  <a:srgbClr val="3A3A3A"/>
+                </a:solidFill>
+                <a:latin typeface="Calibri"/>
+              </a:defRPr>
+            </a:pPr>
+            <a:r>
+              <a:t>Escalate to human underwriter</a:t>
+            </a:r>
+          </a:p>
+        </p:txBody>
+      </p:sp>
+      <p:sp>
+        <p:nvSpPr>
+          <p:cNvPr id="34" name="Rectangle 33"/>
+          <p:cNvSpPr/>
+          <p:nvPr/>
+        </p:nvSpPr>
+        <p:spPr>
+          <a:xfrm>
+            <a:off x="6492240" y="4590288"/>
+            <a:ext cx="5212080" cy="10972"/>
           </a:xfrm>
           <a:prstGeom prst="rect">
             <a:avLst/>
           </a:prstGeom>
           <a:solidFill>
-            <a:srgbClr val="5D2A42"/>
+            <a:srgbClr val="DDDDDD"/>
           </a:solidFill>
           <a:ln>
             <a:noFill/>
@@ -36969,14 +39846,14 @@
       </p:sp>
       <p:sp>
         <p:nvSpPr>
-          <p:cNvPr id="23" name="Rectangle 22"/>
-          <p:cNvSpPr/>
-          <p:nvPr/>
-        </p:nvSpPr>
-        <p:spPr>
-          <a:xfrm>
-            <a:off x="6291072" y="3255264"/>
-            <a:ext cx="1261872" cy="438912"/>
+          <p:cNvPr id="35" name="Rectangle 34"/>
+          <p:cNvSpPr/>
+          <p:nvPr/>
+        </p:nvSpPr>
+        <p:spPr>
+          <a:xfrm>
+            <a:off x="457200" y="6272784"/>
+            <a:ext cx="11277295" cy="329184"/>
           </a:xfrm>
           <a:prstGeom prst="rect">
             <a:avLst/>
@@ -37006,511 +39883,15 @@
           <a:lstStyle/>
           <a:p>
             <a:pPr algn="l">
-              <a:defRPr sz="1300" b="1" i="0">
-                <a:solidFill>
-                  <a:srgbClr val="FFFFFF"/>
-                </a:solidFill>
-                <a:latin typeface="Calibri"/>
-              </a:defRPr>
-            </a:pPr>
-            <a:r>
-              <a:t>RATED</a:t>
-            </a:r>
-          </a:p>
-        </p:txBody>
-      </p:sp>
-      <p:sp>
-        <p:nvSpPr>
-          <p:cNvPr id="24" name="Rectangle 23"/>
-          <p:cNvSpPr/>
-          <p:nvPr/>
-        </p:nvSpPr>
-        <p:spPr>
-          <a:xfrm>
-            <a:off x="7772400" y="3255264"/>
-            <a:ext cx="3794760" cy="502920"/>
-          </a:xfrm>
-          <a:prstGeom prst="rect">
-            <a:avLst/>
-          </a:prstGeom>
-          <a:noFill/>
-          <a:ln>
-            <a:noFill/>
-          </a:ln>
-          <a:effectLst/>
-        </p:spPr>
-        <p:style>
-          <a:lnRef idx="1">
-            <a:schemeClr val="accent1"/>
-          </a:lnRef>
-          <a:fillRef idx="3">
-            <a:schemeClr val="accent1"/>
-          </a:fillRef>
-          <a:effectRef idx="2">
-            <a:schemeClr val="accent1"/>
-          </a:effectRef>
-          <a:fontRef idx="minor">
-            <a:schemeClr val="lt1"/>
-          </a:fontRef>
-        </p:style>
-        <p:txBody>
-          <a:bodyPr rtlCol="0" anchor="t" wrap="square" lIns="45720" rIns="45720" tIns="18288" bIns="18288"/>
-          <a:lstStyle/>
-          <a:p>
-            <a:pPr algn="l">
-              <a:defRPr sz="1200" b="0" i="0">
-                <a:solidFill>
-                  <a:srgbClr val="1A1A1A"/>
-                </a:solidFill>
-                <a:latin typeface="Calibri"/>
-              </a:defRPr>
-            </a:pPr>
-            <a:r>
-              <a:t>Accept + premium loading (+25%)</a:t>
-            </a:r>
-          </a:p>
-        </p:txBody>
-      </p:sp>
-      <p:sp>
-        <p:nvSpPr>
-          <p:cNvPr id="25" name="Rectangle 24"/>
-          <p:cNvSpPr/>
-          <p:nvPr/>
-        </p:nvSpPr>
-        <p:spPr>
-          <a:xfrm>
-            <a:off x="6217920" y="3849624"/>
-            <a:ext cx="1417320" cy="640080"/>
-          </a:xfrm>
-          <a:prstGeom prst="rect">
-            <a:avLst/>
-          </a:prstGeom>
-          <a:solidFill>
-            <a:srgbClr val="471F33"/>
-          </a:solidFill>
-          <a:ln>
-            <a:noFill/>
-          </a:ln>
-          <a:effectLst/>
-        </p:spPr>
-        <p:style>
-          <a:lnRef idx="1">
-            <a:schemeClr val="accent1"/>
-          </a:lnRef>
-          <a:fillRef idx="3">
-            <a:schemeClr val="accent1"/>
-          </a:fillRef>
-          <a:effectRef idx="2">
-            <a:schemeClr val="accent1"/>
-          </a:effectRef>
-          <a:fontRef idx="minor">
-            <a:schemeClr val="lt1"/>
-          </a:fontRef>
-        </p:style>
-        <p:txBody>
-          <a:bodyPr rtlCol="0" anchor="ctr"/>
-          <a:lstStyle/>
-          <a:p>
-            <a:pPr algn="ctr"/>
-          </a:p>
-        </p:txBody>
-      </p:sp>
-      <p:sp>
-        <p:nvSpPr>
-          <p:cNvPr id="26" name="Rectangle 25"/>
-          <p:cNvSpPr/>
-          <p:nvPr/>
-        </p:nvSpPr>
-        <p:spPr>
-          <a:xfrm>
-            <a:off x="6291072" y="3959352"/>
-            <a:ext cx="1261872" cy="438912"/>
-          </a:xfrm>
-          <a:prstGeom prst="rect">
-            <a:avLst/>
-          </a:prstGeom>
-          <a:noFill/>
-          <a:ln>
-            <a:noFill/>
-          </a:ln>
-          <a:effectLst/>
-        </p:spPr>
-        <p:style>
-          <a:lnRef idx="1">
-            <a:schemeClr val="accent1"/>
-          </a:lnRef>
-          <a:fillRef idx="3">
-            <a:schemeClr val="accent1"/>
-          </a:fillRef>
-          <a:effectRef idx="2">
-            <a:schemeClr val="accent1"/>
-          </a:effectRef>
-          <a:fontRef idx="minor">
-            <a:schemeClr val="lt1"/>
-          </a:fontRef>
-        </p:style>
-        <p:txBody>
-          <a:bodyPr rtlCol="0" anchor="t" wrap="square" lIns="45720" rIns="45720" tIns="18288" bIns="18288"/>
-          <a:lstStyle/>
-          <a:p>
-            <a:pPr algn="l">
-              <a:defRPr sz="1300" b="1" i="0">
-                <a:solidFill>
-                  <a:srgbClr val="FFFFFF"/>
-                </a:solidFill>
-                <a:latin typeface="Calibri"/>
-              </a:defRPr>
-            </a:pPr>
-            <a:r>
-              <a:t>STANDARD</a:t>
-            </a:r>
-          </a:p>
-        </p:txBody>
-      </p:sp>
-      <p:sp>
-        <p:nvSpPr>
-          <p:cNvPr id="27" name="Rectangle 26"/>
-          <p:cNvSpPr/>
-          <p:nvPr/>
-        </p:nvSpPr>
-        <p:spPr>
-          <a:xfrm>
-            <a:off x="7772400" y="3959352"/>
-            <a:ext cx="3794760" cy="502920"/>
-          </a:xfrm>
-          <a:prstGeom prst="rect">
-            <a:avLst/>
-          </a:prstGeom>
-          <a:noFill/>
-          <a:ln>
-            <a:noFill/>
-          </a:ln>
-          <a:effectLst/>
-        </p:spPr>
-        <p:style>
-          <a:lnRef idx="1">
-            <a:schemeClr val="accent1"/>
-          </a:lnRef>
-          <a:fillRef idx="3">
-            <a:schemeClr val="accent1"/>
-          </a:fillRef>
-          <a:effectRef idx="2">
-            <a:schemeClr val="accent1"/>
-          </a:effectRef>
-          <a:fontRef idx="minor">
-            <a:schemeClr val="lt1"/>
-          </a:fontRef>
-        </p:style>
-        <p:txBody>
-          <a:bodyPr rtlCol="0" anchor="t" wrap="square" lIns="45720" rIns="45720" tIns="18288" bIns="18288"/>
-          <a:lstStyle/>
-          <a:p>
-            <a:pPr algn="l">
-              <a:defRPr sz="1200" b="0" i="0">
-                <a:solidFill>
-                  <a:srgbClr val="1A1A1A"/>
-                </a:solidFill>
-                <a:latin typeface="Calibri"/>
-              </a:defRPr>
-            </a:pPr>
-            <a:r>
-              <a:t>Accept at standard premium rate</a:t>
-            </a:r>
-          </a:p>
-        </p:txBody>
-      </p:sp>
-      <p:sp>
-        <p:nvSpPr>
-          <p:cNvPr id="28" name="Rectangle 27"/>
-          <p:cNvSpPr/>
-          <p:nvPr/>
-        </p:nvSpPr>
-        <p:spPr>
-          <a:xfrm>
-            <a:off x="6217920" y="4553712"/>
-            <a:ext cx="1417320" cy="640080"/>
-          </a:xfrm>
-          <a:prstGeom prst="rect">
-            <a:avLst/>
-          </a:prstGeom>
-          <a:solidFill>
-            <a:srgbClr val="5D2A42"/>
-          </a:solidFill>
-          <a:ln>
-            <a:noFill/>
-          </a:ln>
-          <a:effectLst/>
-        </p:spPr>
-        <p:style>
-          <a:lnRef idx="1">
-            <a:schemeClr val="accent1"/>
-          </a:lnRef>
-          <a:fillRef idx="3">
-            <a:schemeClr val="accent1"/>
-          </a:fillRef>
-          <a:effectRef idx="2">
-            <a:schemeClr val="accent1"/>
-          </a:effectRef>
-          <a:fontRef idx="minor">
-            <a:schemeClr val="lt1"/>
-          </a:fontRef>
-        </p:style>
-        <p:txBody>
-          <a:bodyPr rtlCol="0" anchor="ctr"/>
-          <a:lstStyle/>
-          <a:p>
-            <a:pPr algn="ctr"/>
-          </a:p>
-        </p:txBody>
-      </p:sp>
-      <p:sp>
-        <p:nvSpPr>
-          <p:cNvPr id="29" name="Rectangle 28"/>
-          <p:cNvSpPr/>
-          <p:nvPr/>
-        </p:nvSpPr>
-        <p:spPr>
-          <a:xfrm>
-            <a:off x="6291072" y="4663440"/>
-            <a:ext cx="1261872" cy="438912"/>
-          </a:xfrm>
-          <a:prstGeom prst="rect">
-            <a:avLst/>
-          </a:prstGeom>
-          <a:noFill/>
-          <a:ln>
-            <a:noFill/>
-          </a:ln>
-          <a:effectLst/>
-        </p:spPr>
-        <p:style>
-          <a:lnRef idx="1">
-            <a:schemeClr val="accent1"/>
-          </a:lnRef>
-          <a:fillRef idx="3">
-            <a:schemeClr val="accent1"/>
-          </a:fillRef>
-          <a:effectRef idx="2">
-            <a:schemeClr val="accent1"/>
-          </a:effectRef>
-          <a:fontRef idx="minor">
-            <a:schemeClr val="lt1"/>
-          </a:fontRef>
-        </p:style>
-        <p:txBody>
-          <a:bodyPr rtlCol="0" anchor="t" wrap="square" lIns="45720" rIns="45720" tIns="18288" bIns="18288"/>
-          <a:lstStyle/>
-          <a:p>
-            <a:pPr algn="l">
-              <a:defRPr sz="1300" b="1" i="0">
-                <a:solidFill>
-                  <a:srgbClr val="FFFFFF"/>
-                </a:solidFill>
-                <a:latin typeface="Calibri"/>
-              </a:defRPr>
-            </a:pPr>
-            <a:r>
-              <a:t>DECLINE</a:t>
-            </a:r>
-          </a:p>
-        </p:txBody>
-      </p:sp>
-      <p:sp>
-        <p:nvSpPr>
-          <p:cNvPr id="30" name="Rectangle 29"/>
-          <p:cNvSpPr/>
-          <p:nvPr/>
-        </p:nvSpPr>
-        <p:spPr>
-          <a:xfrm>
-            <a:off x="7772400" y="4663440"/>
-            <a:ext cx="3794760" cy="502920"/>
-          </a:xfrm>
-          <a:prstGeom prst="rect">
-            <a:avLst/>
-          </a:prstGeom>
-          <a:noFill/>
-          <a:ln>
-            <a:noFill/>
-          </a:ln>
-          <a:effectLst/>
-        </p:spPr>
-        <p:style>
-          <a:lnRef idx="1">
-            <a:schemeClr val="accent1"/>
-          </a:lnRef>
-          <a:fillRef idx="3">
-            <a:schemeClr val="accent1"/>
-          </a:fillRef>
-          <a:effectRef idx="2">
-            <a:schemeClr val="accent1"/>
-          </a:effectRef>
-          <a:fontRef idx="minor">
-            <a:schemeClr val="lt1"/>
-          </a:fontRef>
-        </p:style>
-        <p:txBody>
-          <a:bodyPr rtlCol="0" anchor="t" wrap="square" lIns="45720" rIns="45720" tIns="18288" bIns="18288"/>
-          <a:lstStyle/>
-          <a:p>
-            <a:pPr algn="l">
-              <a:defRPr sz="1200" b="0" i="0">
-                <a:solidFill>
-                  <a:srgbClr val="1A1A1A"/>
-                </a:solidFill>
-                <a:latin typeface="Calibri"/>
-              </a:defRPr>
-            </a:pPr>
-            <a:r>
-              <a:t>Reject application</a:t>
-            </a:r>
-          </a:p>
-        </p:txBody>
-      </p:sp>
-      <p:sp>
-        <p:nvSpPr>
-          <p:cNvPr id="31" name="Rectangle 30"/>
-          <p:cNvSpPr/>
-          <p:nvPr/>
-        </p:nvSpPr>
-        <p:spPr>
-          <a:xfrm>
-            <a:off x="6217920" y="5257800"/>
-            <a:ext cx="1417320" cy="640080"/>
-          </a:xfrm>
-          <a:prstGeom prst="rect">
-            <a:avLst/>
-          </a:prstGeom>
-          <a:solidFill>
-            <a:srgbClr val="471F33"/>
-          </a:solidFill>
-          <a:ln>
-            <a:noFill/>
-          </a:ln>
-          <a:effectLst/>
-        </p:spPr>
-        <p:style>
-          <a:lnRef idx="1">
-            <a:schemeClr val="accent1"/>
-          </a:lnRef>
-          <a:fillRef idx="3">
-            <a:schemeClr val="accent1"/>
-          </a:fillRef>
-          <a:effectRef idx="2">
-            <a:schemeClr val="accent1"/>
-          </a:effectRef>
-          <a:fontRef idx="minor">
-            <a:schemeClr val="lt1"/>
-          </a:fontRef>
-        </p:style>
-        <p:txBody>
-          <a:bodyPr rtlCol="0" anchor="ctr"/>
-          <a:lstStyle/>
-          <a:p>
-            <a:pPr algn="ctr"/>
-          </a:p>
-        </p:txBody>
-      </p:sp>
-      <p:sp>
-        <p:nvSpPr>
-          <p:cNvPr id="32" name="Rectangle 31"/>
-          <p:cNvSpPr/>
-          <p:nvPr/>
-        </p:nvSpPr>
-        <p:spPr>
-          <a:xfrm>
-            <a:off x="6291072" y="5367528"/>
-            <a:ext cx="1261872" cy="438912"/>
-          </a:xfrm>
-          <a:prstGeom prst="rect">
-            <a:avLst/>
-          </a:prstGeom>
-          <a:noFill/>
-          <a:ln>
-            <a:noFill/>
-          </a:ln>
-          <a:effectLst/>
-        </p:spPr>
-        <p:style>
-          <a:lnRef idx="1">
-            <a:schemeClr val="accent1"/>
-          </a:lnRef>
-          <a:fillRef idx="3">
-            <a:schemeClr val="accent1"/>
-          </a:fillRef>
-          <a:effectRef idx="2">
-            <a:schemeClr val="accent1"/>
-          </a:effectRef>
-          <a:fontRef idx="minor">
-            <a:schemeClr val="lt1"/>
-          </a:fontRef>
-        </p:style>
-        <p:txBody>
-          <a:bodyPr rtlCol="0" anchor="t" wrap="square" lIns="45720" rIns="45720" tIns="18288" bIns="18288"/>
-          <a:lstStyle/>
-          <a:p>
-            <a:pPr algn="l">
-              <a:defRPr sz="1300" b="1" i="0">
-                <a:solidFill>
-                  <a:srgbClr val="FFFFFF"/>
-                </a:solidFill>
-                <a:latin typeface="Calibri"/>
-              </a:defRPr>
-            </a:pPr>
-            <a:r>
-              <a:t>REFER</a:t>
-            </a:r>
-          </a:p>
-        </p:txBody>
-      </p:sp>
-      <p:sp>
-        <p:nvSpPr>
-          <p:cNvPr id="33" name="Rectangle 32"/>
-          <p:cNvSpPr/>
-          <p:nvPr/>
-        </p:nvSpPr>
-        <p:spPr>
-          <a:xfrm>
-            <a:off x="7772400" y="5367528"/>
-            <a:ext cx="3794760" cy="502920"/>
-          </a:xfrm>
-          <a:prstGeom prst="rect">
-            <a:avLst/>
-          </a:prstGeom>
-          <a:noFill/>
-          <a:ln>
-            <a:noFill/>
-          </a:ln>
-          <a:effectLst/>
-        </p:spPr>
-        <p:style>
-          <a:lnRef idx="1">
-            <a:schemeClr val="accent1"/>
-          </a:lnRef>
-          <a:fillRef idx="3">
-            <a:schemeClr val="accent1"/>
-          </a:fillRef>
-          <a:effectRef idx="2">
-            <a:schemeClr val="accent1"/>
-          </a:effectRef>
-          <a:fontRef idx="minor">
-            <a:schemeClr val="lt1"/>
-          </a:fontRef>
-        </p:style>
-        <p:txBody>
-          <a:bodyPr rtlCol="0" anchor="t" wrap="square" lIns="45720" rIns="45720" tIns="18288" bIns="18288"/>
-          <a:lstStyle/>
-          <a:p>
-            <a:pPr algn="l">
-              <a:defRPr sz="1200" b="0" i="0">
-                <a:solidFill>
-                  <a:srgbClr val="1A1A1A"/>
-                </a:solidFill>
-                <a:latin typeface="Calibri"/>
-              </a:defRPr>
-            </a:pPr>
-            <a:r>
-              <a:t>Escalate to human underwriter</a:t>
+              <a:defRPr sz="1050" b="0" i="1">
+                <a:solidFill>
+                  <a:srgbClr val="777777"/>
+                </a:solidFill>
+                <a:latin typeface="Calibri"/>
+              </a:defRPr>
+            </a:pPr>
+            <a:r>
+              <a:t>Construction detail: appendix A5 (sources, simulator parameters).</a:t>
             </a:r>
           </a:p>
         </p:txBody>

--- a/thesis/health_rl/burgundy_defense_presentation.pptx
+++ b/thesis/health_rl/burgundy_defense_presentation.pptx
@@ -1305,7 +1305,7 @@
           <a:lstStyle/>
           <a:p>
             <a:r>
-              <a:t>Cambodia context: the National Social Security Fund covers only formal-sector workers, roughly 16 percent; private voluntary insurance is nascent and underwriting is mostly manual and rule-based. Actuaries apply fixed premium rules without learning from outcomes, suboptimal decisions compound over a growing applicant pool, and penetration is below 10 percent (2023 estimate). The opportunity: a contextual bandit learns online from each decision while a PSI guardrail watches demographic fairness. This positions the work against Cambodia's Sustainable Development Goals: SDG 3 good health and well-being through wider insurance access, SDG 1 no poverty by shielding households from catastrophic health costs, and SDG 10 reduced inequalities through the PSI fairness guardrail. Frame these as the project's contribution - the report argues them through the penetration gap and fairness monitoring, not as a separate SDG section.</a:t>
+              <a:t>Cambodia context: the National Social Security Fund covers only formal-sector workers, roughly 16 percent; private voluntary insurance is nascent and underwriting is mostly manual and rule-based. Actuaries apply fixed premium rules without learning from outcomes, suboptimal decisions compound over a growing applicant pool, and penetration is below 10 percent (2023 estimate). The opportunity: a contextual bandit learns online from each decision while a PSI guardrail watches demographic fairness. This positions the work against Cambodia's Sustainable Development Goals: SDG 3 good health and well-being through wider insurance access, SDG 1 no poverty by shielding households from catastrophic health costs, and SDG 10 reduced inequalities through the PSI fairness guardrail. The thesis now develops this in a dedicated section - chapter 2 section 2.4, Significance and Alignment with Cambodia's SDGs - which maps the project to SDG 3, 1 and 10. Frame it as the project's intended societal contribution argued through the penetration gap and fairness monitoring; be ready to note this is an alignment argument, not a measured SDG impact.</a:t>
             </a:r>
           </a:p>
         </p:txBody>
@@ -45620,7 +45620,7 @@
             </a:pPr>
             <a:r>
               <a:rPr spc="60"/>
-              <a:t>CONTRIBUTION TOWARD CAMBODIA'S SDGs</a:t>
+              <a:t>ALIGNMENT WITH CAMBODIA'S SDGs</a:t>
             </a:r>
           </a:p>
         </p:txBody>

--- a/thesis/health_rl/burgundy_defense_presentation.pptx
+++ b/thesis/health_rl/burgundy_defense_presentation.pptx
@@ -955,7 +955,7 @@
           <a:lstStyle/>
           <a:p>
             <a:r>
-              <a:t>All four algorithms under common random numbers. LinTS ranks first at $93,572, LinUCB second at $91,947 - statistically tied (p = 0.87). Epsilon-greedy trails, static XGB last. The log-log plot validates theory: fitted slope 0.572 with R squared 0.992, close to the 0.5 of the O(root-T d) bound - the bandit's regret really is sub-linear, it is learning, not memorising.</a:t>
+              <a:t>All four algorithms on the common-random-number harness (thesis Table 13). LinTS ranks first at $93,723, LinUCB second at $91,864 - statistically tied (p = 0.87). Epsilon-greedy trails, static XGB last. The log-log plot validates theory: fitted slope 0.572 with R squared 0.992, close to the 0.5 of the O(root-T d) bound - the bandit's regret really is sub-linear, it is learning, not memorising.</a:t>
             </a:r>
           </a:p>
         </p:txBody>
@@ -1445,7 +1445,7 @@
           <a:lstStyle/>
           <a:p>
             <a:r>
-              <a:t>The sources actually cited across this deck, every one traceable to the thesis bibliography. Left: bandit theory and method - Li and Agrawal &amp; Goyal for the linear policies, Zhou, Zhang and Ban for the neural extensions, Sutton &amp; Barto and Lattimore &amp; Szepesvari for foundations, Barocas for fairness. Right: Ensign on feedback loops, Yurdakul &amp; Naranjo and Lin for the PSI guardrail, then the Cambodia data anchors - the CDHS, the ILO bulletin, ADB, World Bank and Swiss Re. The full APA list lives in thesis Chapter III.</a:t>
+              <a:t>The sources actually cited across this deck, every one traceable to the thesis bibliography. Left: bandit theory and method - Li and Agrawal &amp; Goyal for the linear policies, Zhou, Zhang and Ban for the neural extensions, Sutton &amp; Barto and Lattimore &amp; Szepesvari for foundations, Barocas for fairness. Right: Ensign on feedback loops, Yurdakul &amp; Naranjo and Lin for the PSI guardrail, then the Cambodia data anchors - the CDHS, the ILO bulletin and ADB. The full APA list lives in thesis Chapter III.</a:t>
             </a:r>
           </a:p>
         </p:txBody>
@@ -1935,7 +1935,7 @@
           <a:lstStyle/>
           <a:p>
             <a:r>
-              <a:t>Read the goal once, slowly. The four objectives map one-to-one onto the chapters: O1 the algorithms (Chapter IV), O2 the dataset (Chapter IV), O3 the evaluation (Chapter V), O4 fairness plus HITL (Chapter V). These are verbatim from the thesis - the examiners will check the wording.</a:t>
+              <a:t>Read the primary objective once, slowly, then the five secondary objectives - these mirror the thesis, chapter 2 section 2.3. O1 the dataset and O2 the algorithms are delivered in Chapter IV; O3 the fairness-guardrail design, O4 the fairness audit, and O5 the human-in-the-loop integration are evaluated in Chapters IV-V. The wording is drawn from the thesis objectives; if pressed, point the panel to section 2.3.</a:t>
             </a:r>
           </a:p>
         </p:txBody>
@@ -2145,7 +2145,7 @@
           <a:lstStyle/>
           <a:p>
             <a:r>
-              <a:t>The dataset is 2,000 synthetic applicants whose raw attributes one-hot encode into a 34-dimensional standardised context vector (Table 7). Distributions are anchored on CDHS 2021-22 and STEPS 2023; income on ILO labour-force surveys; disease prevalence calibrated from WHO disease-burden reports. Adverse-selection factor 1.35 and price-elasticity slope 3.5 come from DAC actuarial priors. Four arms: RATED accepts with a 25 percent loading, STANDARD accepts at standard rate, DECLINE rejects, REFER escalates to a human. No real applicant data is used anywhere.</a:t>
+              <a:t>The dataset is 2,000 synthetic applicants whose raw attributes one-hot encode into a 34-dimensional standardised context vector (Table 8). Distributions are anchored on CDHS 2021-22 and STEPS 2023; income on ILO labour-force surveys; disease prevalence calibrated from WHO disease-burden reports. Adverse-selection factor 1.35 and price-elasticity slope 3.5 come from DAC actuarial priors. Four arms: RATED accepts with a 25 percent loading, STANDARD accepts at standard rate, DECLINE rejects, REFER escalates to a human. No real applicant data is used anywhere.</a:t>
             </a:r>
           </a:p>
         </p:txBody>
@@ -2215,7 +2215,7 @@
           <a:lstStyle/>
           <a:p>
             <a:r>
-              <a:t>This is the dataset at a glance. Left, the feature catalogue from thesis Table 7: raw applicant attributes fall into demographics and vitals, lifestyle behaviours, social determinants, economic and clinical groups; after one-hot encoding region and occupation and standardising, each applicant becomes a 34-dimensional context vector. Right, a four-row snapshot of the 2,000 synthetic records - the real column values before encoding. No real applicant data is used anywhere.</a:t>
+              <a:t>This is the dataset at a glance. Left, the feature catalogue from thesis Table 8: raw applicant attributes fall into demographics and vitals, lifestyle behaviours, social determinants, economic and clinical groups; after one-hot encoding region and occupation and standardising, each applicant becomes a 34-dimensional context vector. Right, a four-row snapshot of the 2,000 synthetic records - the real column values before encoding. No real applicant data is used anywhere.</a:t>
             </a:r>
           </a:p>
         </p:txBody>
@@ -10929,7 +10929,7 @@
               </a:defRPr>
             </a:pPr>
             <a:r>
-              <a:t>2,000 synthetic applicants -&gt; a 34-dimensional standardised context vector, from raw features organised by category (thesis Table 7). Fully synthetic — no real applicant PII.</a:t>
+              <a:t>2,000 synthetic applicants -&gt; a 34-dimensional standardised context vector, from raw features organised by category (thesis Table 8). Fully synthetic — no real applicant PII.</a:t>
             </a:r>
           </a:p>
         </p:txBody>
@@ -25547,7 +25547,7 @@
               </a:defRPr>
             </a:pPr>
             <a:r>
-              <a:t>$93,572</a:t>
+              <a:t>$93,723</a:t>
             </a:r>
           </a:p>
         </p:txBody>
@@ -25703,7 +25703,7 @@
               </a:defRPr>
             </a:pPr>
             <a:r>
-              <a:t>$91,947</a:t>
+              <a:t>$91,864</a:t>
             </a:r>
           </a:p>
         </p:txBody>
@@ -25851,7 +25851,7 @@
               </a:defRPr>
             </a:pPr>
             <a:r>
-              <a:t>EpsilonGreedy</a:t>
+              <a:t>Epsilon-Greedy</a:t>
             </a:r>
           </a:p>
         </p:txBody>
@@ -26007,7 +26007,7 @@
               </a:defRPr>
             </a:pPr>
             <a:r>
-              <a:t>StaticXGB</a:t>
+              <a:t>Static XGB</a:t>
             </a:r>
           </a:p>
         </p:txBody>
@@ -26059,7 +26059,7 @@
               </a:defRPr>
             </a:pPr>
             <a:r>
-              <a:t>$72,173</a:t>
+              <a:t>$72,206</a:t>
             </a:r>
           </a:p>
         </p:txBody>
@@ -32623,7 +32623,7 @@
           <a:lstStyle/>
           <a:p>
             <a:pPr algn="l">
-              <a:defRPr sz="1300" b="1" i="0">
+              <a:defRPr sz="1200" b="1" i="0">
                 <a:solidFill>
                   <a:srgbClr val="1A1A1A"/>
                 </a:solidFill>
@@ -32675,7 +32675,7 @@
           <a:lstStyle/>
           <a:p>
             <a:pPr algn="l">
-              <a:defRPr sz="1300" b="1" i="0">
+              <a:defRPr sz="1200" b="1" i="0">
                 <a:solidFill>
                   <a:srgbClr val="1A1A1A"/>
                 </a:solidFill>
@@ -32727,7 +32727,7 @@
           <a:lstStyle/>
           <a:p>
             <a:pPr algn="l">
-              <a:defRPr sz="1300" b="1" i="0">
+              <a:defRPr sz="1200" b="1" i="0">
                 <a:solidFill>
                   <a:srgbClr val="1A1A1A"/>
                 </a:solidFill>
@@ -32793,7 +32793,7 @@
         <p:spPr>
           <a:xfrm>
             <a:off x="6400800" y="1773936"/>
-            <a:ext cx="5760720" cy="640080"/>
+            <a:ext cx="5760720" cy="512064"/>
           </a:xfrm>
           <a:prstGeom prst="rect">
             <a:avLst/>
@@ -32837,7 +32837,7 @@
         <p:spPr>
           <a:xfrm>
             <a:off x="6455664" y="1810512"/>
-            <a:ext cx="621792" cy="566928"/>
+            <a:ext cx="621792" cy="438912"/>
           </a:xfrm>
           <a:prstGeom prst="rect">
             <a:avLst/>
@@ -32867,7 +32867,7 @@
           <a:lstStyle/>
           <a:p>
             <a:pPr algn="l">
-              <a:defRPr sz="1300" b="1" i="0">
+              <a:defRPr sz="1200" b="1" i="0">
                 <a:solidFill>
                   <a:srgbClr val="1B5697"/>
                 </a:solidFill>
@@ -32889,7 +32889,7 @@
         <p:spPr>
           <a:xfrm>
             <a:off x="7187184" y="1810512"/>
-            <a:ext cx="3547872" cy="566928"/>
+            <a:ext cx="3547872" cy="438912"/>
           </a:xfrm>
           <a:prstGeom prst="rect">
             <a:avLst/>
@@ -32919,7 +32919,7 @@
           <a:lstStyle/>
           <a:p>
             <a:pPr algn="l">
-              <a:defRPr sz="1300" b="0" i="0">
+              <a:defRPr sz="1200" b="0" i="0">
                 <a:solidFill>
                   <a:srgbClr val="1A1A1A"/>
                 </a:solidFill>
@@ -32927,7 +32927,7 @@
               </a:defRPr>
             </a:pPr>
             <a:r>
-              <a:t>LinUCB + LinTS implemented &amp; adapted</a:t>
+              <a:t>2,000-record CDHS-anchored dataset built</a:t>
             </a:r>
           </a:p>
         </p:txBody>
@@ -32941,7 +32941,7 @@
         <p:spPr>
           <a:xfrm>
             <a:off x="10844784" y="1810512"/>
-            <a:ext cx="1261872" cy="566928"/>
+            <a:ext cx="1261872" cy="438912"/>
           </a:xfrm>
           <a:prstGeom prst="rect">
             <a:avLst/>
@@ -32971,7 +32971,7 @@
           <a:lstStyle/>
           <a:p>
             <a:pPr algn="l">
-              <a:defRPr sz="1300" b="1" i="0">
+              <a:defRPr sz="1200" b="1" i="0">
                 <a:solidFill>
                   <a:srgbClr val="2E8B57"/>
                 </a:solidFill>
@@ -32992,8 +32992,8 @@
         </p:nvSpPr>
         <p:spPr>
           <a:xfrm>
-            <a:off x="6455664" y="2450592"/>
-            <a:ext cx="621792" cy="566928"/>
+            <a:off x="6455664" y="2322576"/>
+            <a:ext cx="621792" cy="438912"/>
           </a:xfrm>
           <a:prstGeom prst="rect">
             <a:avLst/>
@@ -33023,7 +33023,7 @@
           <a:lstStyle/>
           <a:p>
             <a:pPr algn="l">
-              <a:defRPr sz="1300" b="1" i="0">
+              <a:defRPr sz="1200" b="1" i="0">
                 <a:solidFill>
                   <a:srgbClr val="1B5697"/>
                 </a:solidFill>
@@ -33044,8 +33044,8 @@
         </p:nvSpPr>
         <p:spPr>
           <a:xfrm>
-            <a:off x="7187184" y="2450592"/>
-            <a:ext cx="3547872" cy="566928"/>
+            <a:off x="7187184" y="2322576"/>
+            <a:ext cx="3547872" cy="438912"/>
           </a:xfrm>
           <a:prstGeom prst="rect">
             <a:avLst/>
@@ -33075,7 +33075,7 @@
           <a:lstStyle/>
           <a:p>
             <a:pPr algn="l">
-              <a:defRPr sz="1300" b="0" i="0">
+              <a:defRPr sz="1200" b="0" i="0">
                 <a:solidFill>
                   <a:srgbClr val="1A1A1A"/>
                 </a:solidFill>
@@ -33083,7 +33083,7 @@
               </a:defRPr>
             </a:pPr>
             <a:r>
-              <a:t>2,000-record CDHS-anchored dataset built</a:t>
+              <a:t>LinUCB, LinTS, ε-Greedy vs Static XGB</a:t>
             </a:r>
           </a:p>
         </p:txBody>
@@ -33096,8 +33096,8 @@
         </p:nvSpPr>
         <p:spPr>
           <a:xfrm>
-            <a:off x="10844784" y="2450592"/>
-            <a:ext cx="1261872" cy="566928"/>
+            <a:off x="10844784" y="2322576"/>
+            <a:ext cx="1261872" cy="438912"/>
           </a:xfrm>
           <a:prstGeom prst="rect">
             <a:avLst/>
@@ -33127,7 +33127,7 @@
           <a:lstStyle/>
           <a:p>
             <a:pPr algn="l">
-              <a:defRPr sz="1300" b="1" i="0">
+              <a:defRPr sz="1200" b="1" i="0">
                 <a:solidFill>
                   <a:srgbClr val="2E8B57"/>
                 </a:solidFill>
@@ -33148,8 +33148,8 @@
         </p:nvSpPr>
         <p:spPr>
           <a:xfrm>
-            <a:off x="6400800" y="3054096"/>
-            <a:ext cx="5760720" cy="640080"/>
+            <a:off x="6400800" y="2798064"/>
+            <a:ext cx="5760720" cy="512064"/>
           </a:xfrm>
           <a:prstGeom prst="rect">
             <a:avLst/>
@@ -33192,8 +33192,8 @@
         </p:nvSpPr>
         <p:spPr>
           <a:xfrm>
-            <a:off x="6455664" y="3090672"/>
-            <a:ext cx="621792" cy="566928"/>
+            <a:off x="6455664" y="2834640"/>
+            <a:ext cx="621792" cy="438912"/>
           </a:xfrm>
           <a:prstGeom prst="rect">
             <a:avLst/>
@@ -33223,7 +33223,7 @@
           <a:lstStyle/>
           <a:p>
             <a:pPr algn="l">
-              <a:defRPr sz="1300" b="1" i="0">
+              <a:defRPr sz="1200" b="1" i="0">
                 <a:solidFill>
                   <a:srgbClr val="1B5697"/>
                 </a:solidFill>
@@ -33244,8 +33244,8 @@
         </p:nvSpPr>
         <p:spPr>
           <a:xfrm>
-            <a:off x="7187184" y="3090672"/>
-            <a:ext cx="3547872" cy="566928"/>
+            <a:off x="7187184" y="2834640"/>
+            <a:ext cx="3547872" cy="438912"/>
           </a:xfrm>
           <a:prstGeom prst="rect">
             <a:avLst/>
@@ -33275,7 +33275,7 @@
           <a:lstStyle/>
           <a:p>
             <a:pPr algn="l">
-              <a:defRPr sz="1300" b="0" i="0">
+              <a:defRPr sz="1200" b="0" i="0">
                 <a:solidFill>
                   <a:srgbClr val="1A1A1A"/>
                 </a:solidFill>
@@ -33283,7 +33283,7 @@
               </a:defRPr>
             </a:pPr>
             <a:r>
-              <a:t>20-seed eval, bootstrap CI, Wilcoxon</a:t>
+              <a:t>PSI fairness guardrails designed &amp; validated</a:t>
             </a:r>
           </a:p>
         </p:txBody>
@@ -33296,8 +33296,8 @@
         </p:nvSpPr>
         <p:spPr>
           <a:xfrm>
-            <a:off x="10844784" y="3090672"/>
-            <a:ext cx="1261872" cy="566928"/>
+            <a:off x="10844784" y="2834640"/>
+            <a:ext cx="1261872" cy="438912"/>
           </a:xfrm>
           <a:prstGeom prst="rect">
             <a:avLst/>
@@ -33327,7 +33327,7 @@
           <a:lstStyle/>
           <a:p>
             <a:pPr algn="l">
-              <a:defRPr sz="1300" b="1" i="0">
+              <a:defRPr sz="1200" b="1" i="0">
                 <a:solidFill>
                   <a:srgbClr val="2E8B57"/>
                 </a:solidFill>
@@ -33348,8 +33348,8 @@
         </p:nvSpPr>
         <p:spPr>
           <a:xfrm>
-            <a:off x="6455664" y="3730752"/>
-            <a:ext cx="621792" cy="566928"/>
+            <a:off x="6455664" y="3346704"/>
+            <a:ext cx="621792" cy="438912"/>
           </a:xfrm>
           <a:prstGeom prst="rect">
             <a:avLst/>
@@ -33379,7 +33379,7 @@
           <a:lstStyle/>
           <a:p>
             <a:pPr algn="l">
-              <a:defRPr sz="1300" b="1" i="0">
+              <a:defRPr sz="1200" b="1" i="0">
                 <a:solidFill>
                   <a:srgbClr val="1B5697"/>
                 </a:solidFill>
@@ -33400,8 +33400,8 @@
         </p:nvSpPr>
         <p:spPr>
           <a:xfrm>
-            <a:off x="7187184" y="3730752"/>
-            <a:ext cx="3547872" cy="566928"/>
+            <a:off x="7187184" y="3346704"/>
+            <a:ext cx="3547872" cy="438912"/>
           </a:xfrm>
           <a:prstGeom prst="rect">
             <a:avLst/>
@@ -33431,7 +33431,7 @@
           <a:lstStyle/>
           <a:p>
             <a:pPr algn="l">
-              <a:defRPr sz="1300" b="0" i="0">
+              <a:defRPr sz="1200" b="0" i="0">
                 <a:solidFill>
                   <a:srgbClr val="1A1A1A"/>
                 </a:solidFill>
@@ -33439,7 +33439,7 @@
               </a:defRPr>
             </a:pPr>
             <a:r>
-              <a:t>PSI fairness monitoring + HITL wrapper</a:t>
+              <a:t>EEOC four-fifths parity audit (≥ 80%)</a:t>
             </a:r>
           </a:p>
         </p:txBody>
@@ -33452,8 +33452,8 @@
         </p:nvSpPr>
         <p:spPr>
           <a:xfrm>
-            <a:off x="10844784" y="3730752"/>
-            <a:ext cx="1261872" cy="566928"/>
+            <a:off x="10844784" y="3346704"/>
+            <a:ext cx="1261872" cy="438912"/>
           </a:xfrm>
           <a:prstGeom prst="rect">
             <a:avLst/>
@@ -33483,7 +33483,7 @@
           <a:lstStyle/>
           <a:p>
             <a:pPr algn="l">
-              <a:defRPr sz="1300" b="1" i="0">
+              <a:defRPr sz="1200" b="1" i="0">
                 <a:solidFill>
                   <a:srgbClr val="2E8B57"/>
                 </a:solidFill>
@@ -33499,6 +33499,206 @@
       <p:sp>
         <p:nvSpPr>
           <p:cNvPr id="36" name="Rectangle 35"/>
+          <p:cNvSpPr/>
+          <p:nvPr/>
+        </p:nvSpPr>
+        <p:spPr>
+          <a:xfrm>
+            <a:off x="6400800" y="3822192"/>
+            <a:ext cx="5760720" cy="512064"/>
+          </a:xfrm>
+          <a:prstGeom prst="rect">
+            <a:avLst/>
+          </a:prstGeom>
+          <a:solidFill>
+            <a:srgbClr val="F3F6FB"/>
+          </a:solidFill>
+          <a:ln>
+            <a:noFill/>
+          </a:ln>
+          <a:effectLst/>
+        </p:spPr>
+        <p:style>
+          <a:lnRef idx="1">
+            <a:schemeClr val="accent1"/>
+          </a:lnRef>
+          <a:fillRef idx="3">
+            <a:schemeClr val="accent1"/>
+          </a:fillRef>
+          <a:effectRef idx="2">
+            <a:schemeClr val="accent1"/>
+          </a:effectRef>
+          <a:fontRef idx="minor">
+            <a:schemeClr val="lt1"/>
+          </a:fontRef>
+        </p:style>
+        <p:txBody>
+          <a:bodyPr rtlCol="0" anchor="ctr"/>
+          <a:lstStyle/>
+          <a:p>
+            <a:pPr algn="ctr"/>
+          </a:p>
+        </p:txBody>
+      </p:sp>
+      <p:sp>
+        <p:nvSpPr>
+          <p:cNvPr id="37" name="Rectangle 36"/>
+          <p:cNvSpPr/>
+          <p:nvPr/>
+        </p:nvSpPr>
+        <p:spPr>
+          <a:xfrm>
+            <a:off x="6455664" y="3858768"/>
+            <a:ext cx="621792" cy="438912"/>
+          </a:xfrm>
+          <a:prstGeom prst="rect">
+            <a:avLst/>
+          </a:prstGeom>
+          <a:noFill/>
+          <a:ln>
+            <a:noFill/>
+          </a:ln>
+          <a:effectLst/>
+        </p:spPr>
+        <p:style>
+          <a:lnRef idx="1">
+            <a:schemeClr val="accent1"/>
+          </a:lnRef>
+          <a:fillRef idx="3">
+            <a:schemeClr val="accent1"/>
+          </a:fillRef>
+          <a:effectRef idx="2">
+            <a:schemeClr val="accent1"/>
+          </a:effectRef>
+          <a:fontRef idx="minor">
+            <a:schemeClr val="lt1"/>
+          </a:fontRef>
+        </p:style>
+        <p:txBody>
+          <a:bodyPr rtlCol="0" anchor="t" wrap="square" lIns="45720" rIns="45720" tIns="18288" bIns="18288"/>
+          <a:lstStyle/>
+          <a:p>
+            <a:pPr algn="l">
+              <a:defRPr sz="1200" b="1" i="0">
+                <a:solidFill>
+                  <a:srgbClr val="1B5697"/>
+                </a:solidFill>
+                <a:latin typeface="Calibri"/>
+              </a:defRPr>
+            </a:pPr>
+            <a:r>
+              <a:t>O5</a:t>
+            </a:r>
+          </a:p>
+        </p:txBody>
+      </p:sp>
+      <p:sp>
+        <p:nvSpPr>
+          <p:cNvPr id="38" name="Rectangle 37"/>
+          <p:cNvSpPr/>
+          <p:nvPr/>
+        </p:nvSpPr>
+        <p:spPr>
+          <a:xfrm>
+            <a:off x="7187184" y="3858768"/>
+            <a:ext cx="3547872" cy="438912"/>
+          </a:xfrm>
+          <a:prstGeom prst="rect">
+            <a:avLst/>
+          </a:prstGeom>
+          <a:noFill/>
+          <a:ln>
+            <a:noFill/>
+          </a:ln>
+          <a:effectLst/>
+        </p:spPr>
+        <p:style>
+          <a:lnRef idx="1">
+            <a:schemeClr val="accent1"/>
+          </a:lnRef>
+          <a:fillRef idx="3">
+            <a:schemeClr val="accent1"/>
+          </a:fillRef>
+          <a:effectRef idx="2">
+            <a:schemeClr val="accent1"/>
+          </a:effectRef>
+          <a:fontRef idx="minor">
+            <a:schemeClr val="lt1"/>
+          </a:fontRef>
+        </p:style>
+        <p:txBody>
+          <a:bodyPr rtlCol="0" anchor="t" wrap="square" lIns="45720" rIns="45720" tIns="18288" bIns="18288"/>
+          <a:lstStyle/>
+          <a:p>
+            <a:pPr algn="l">
+              <a:defRPr sz="1200" b="0" i="0">
+                <a:solidFill>
+                  <a:srgbClr val="1A1A1A"/>
+                </a:solidFill>
+                <a:latin typeface="Calibri"/>
+              </a:defRPr>
+            </a:pPr>
+            <a:r>
+              <a:t>Human-in-the-loop wrapper evaluated</a:t>
+            </a:r>
+          </a:p>
+        </p:txBody>
+      </p:sp>
+      <p:sp>
+        <p:nvSpPr>
+          <p:cNvPr id="39" name="Rectangle 38"/>
+          <p:cNvSpPr/>
+          <p:nvPr/>
+        </p:nvSpPr>
+        <p:spPr>
+          <a:xfrm>
+            <a:off x="10844784" y="3858768"/>
+            <a:ext cx="1261872" cy="438912"/>
+          </a:xfrm>
+          <a:prstGeom prst="rect">
+            <a:avLst/>
+          </a:prstGeom>
+          <a:noFill/>
+          <a:ln>
+            <a:noFill/>
+          </a:ln>
+          <a:effectLst/>
+        </p:spPr>
+        <p:style>
+          <a:lnRef idx="1">
+            <a:schemeClr val="accent1"/>
+          </a:lnRef>
+          <a:fillRef idx="3">
+            <a:schemeClr val="accent1"/>
+          </a:fillRef>
+          <a:effectRef idx="2">
+            <a:schemeClr val="accent1"/>
+          </a:effectRef>
+          <a:fontRef idx="minor">
+            <a:schemeClr val="lt1"/>
+          </a:fontRef>
+        </p:style>
+        <p:txBody>
+          <a:bodyPr rtlCol="0" anchor="t" wrap="square" lIns="45720" rIns="45720" tIns="18288" bIns="18288"/>
+          <a:lstStyle/>
+          <a:p>
+            <a:pPr algn="l">
+              <a:defRPr sz="1200" b="1" i="0">
+                <a:solidFill>
+                  <a:srgbClr val="2E8B57"/>
+                </a:solidFill>
+                <a:latin typeface="Calibri"/>
+              </a:defRPr>
+            </a:pPr>
+            <a:r>
+              <a:t>ACHIEVED</a:t>
+            </a:r>
+          </a:p>
+        </p:txBody>
+      </p:sp>
+      <p:sp>
+        <p:nvSpPr>
+          <p:cNvPr id="40" name="Rectangle 39"/>
           <p:cNvSpPr/>
           <p:nvPr/>
         </p:nvSpPr>
@@ -34688,110 +34888,6 @@
         </p:nvSpPr>
         <p:spPr>
           <a:xfrm>
-            <a:off x="6309360" y="4809744"/>
-            <a:ext cx="5486400" cy="822960"/>
-          </a:xfrm>
-          <a:prstGeom prst="rect">
-            <a:avLst/>
-          </a:prstGeom>
-          <a:noFill/>
-          <a:ln>
-            <a:noFill/>
-          </a:ln>
-          <a:effectLst/>
-        </p:spPr>
-        <p:style>
-          <a:lnRef idx="1">
-            <a:schemeClr val="accent1"/>
-          </a:lnRef>
-          <a:fillRef idx="3">
-            <a:schemeClr val="accent1"/>
-          </a:fillRef>
-          <a:effectRef idx="2">
-            <a:schemeClr val="accent1"/>
-          </a:effectRef>
-          <a:fontRef idx="minor">
-            <a:schemeClr val="lt1"/>
-          </a:fontRef>
-        </p:style>
-        <p:txBody>
-          <a:bodyPr rtlCol="0" anchor="t" wrap="square" lIns="45720" rIns="45720" tIns="18288" bIns="18288"/>
-          <a:lstStyle/>
-          <a:p>
-            <a:pPr algn="l">
-              <a:defRPr sz="1100" b="0" i="0">
-                <a:solidFill>
-                  <a:srgbClr val="1A1A1A"/>
-                </a:solidFill>
-                <a:latin typeface="Calibri"/>
-              </a:defRPr>
-            </a:pPr>
-            <a:r>
-              <a:t>[15]  World Bank (2023). World Development Indicators: Cambodia.</a:t>
-            </a:r>
-          </a:p>
-        </p:txBody>
-      </p:sp>
-      <p:sp>
-        <p:nvSpPr>
-          <p:cNvPr id="25" name="Rectangle 24"/>
-          <p:cNvSpPr/>
-          <p:nvPr/>
-        </p:nvSpPr>
-        <p:spPr>
-          <a:xfrm>
-            <a:off x="6309360" y="5413248"/>
-            <a:ext cx="5486400" cy="822960"/>
-          </a:xfrm>
-          <a:prstGeom prst="rect">
-            <a:avLst/>
-          </a:prstGeom>
-          <a:noFill/>
-          <a:ln>
-            <a:noFill/>
-          </a:ln>
-          <a:effectLst/>
-        </p:spPr>
-        <p:style>
-          <a:lnRef idx="1">
-            <a:schemeClr val="accent1"/>
-          </a:lnRef>
-          <a:fillRef idx="3">
-            <a:schemeClr val="accent1"/>
-          </a:fillRef>
-          <a:effectRef idx="2">
-            <a:schemeClr val="accent1"/>
-          </a:effectRef>
-          <a:fontRef idx="minor">
-            <a:schemeClr val="lt1"/>
-          </a:fontRef>
-        </p:style>
-        <p:txBody>
-          <a:bodyPr rtlCol="0" anchor="t" wrap="square" lIns="45720" rIns="45720" tIns="18288" bIns="18288"/>
-          <a:lstStyle/>
-          <a:p>
-            <a:pPr algn="l">
-              <a:defRPr sz="1100" b="0" i="0">
-                <a:solidFill>
-                  <a:srgbClr val="1A1A1A"/>
-                </a:solidFill>
-                <a:latin typeface="Calibri"/>
-              </a:defRPr>
-            </a:pPr>
-            <a:r>
-              <a:t>[16]  Swiss Re Institute (2023). Sigma 3/2023: World insurance.</a:t>
-            </a:r>
-          </a:p>
-        </p:txBody>
-      </p:sp>
-      <p:sp>
-        <p:nvSpPr>
-          <p:cNvPr id="26" name="Rectangle 25"/>
-          <p:cNvSpPr/>
-          <p:nvPr/>
-        </p:nvSpPr>
-        <p:spPr>
-          <a:xfrm>
             <a:off x="457200" y="6053328"/>
             <a:ext cx="11277295" cy="329184"/>
           </a:xfrm>
@@ -38703,7 +38799,7 @@
               </a:defRPr>
             </a:pPr>
             <a:r>
-              <a:t>CRN harness, reward-maximising policy (Table 9, §5.0.1)</a:t>
+              <a:t>CRN harness, reward-maximising policy (Table 10, §5.0.1)</a:t>
             </a:r>
           </a:p>
         </p:txBody>
@@ -38903,7 +38999,7 @@
               </a:defRPr>
             </a:pPr>
             <a:r>
-              <a:t>CRN harness, LinTS reward-maximising (Table 9, §5.0.1)</a:t>
+              <a:t>CRN harness, LinTS reward-maximising (Table 10, §5.0.1)</a:t>
             </a:r>
           </a:p>
         </p:txBody>
@@ -47806,7 +47902,7 @@
         <p:spPr>
           <a:xfrm>
             <a:off x="457200" y="1188720"/>
-            <a:ext cx="3657600" cy="292608"/>
+            <a:ext cx="5486400" cy="292608"/>
           </a:xfrm>
           <a:prstGeom prst="rect">
             <a:avLst/>
@@ -47844,8 +47940,8 @@
               </a:defRPr>
             </a:pPr>
             <a:r>
-              <a:rPr spc="120"/>
-              <a:t>RESEARCH GOAL</a:t>
+              <a:rPr spc="80"/>
+              <a:t>RESEARCH GOAL (PRIMARY OBJECTIVE)</a:t>
             </a:r>
           </a:p>
         </p:txBody>
@@ -47858,8 +47954,8 @@
         </p:nvSpPr>
         <p:spPr>
           <a:xfrm>
-            <a:off x="457200" y="1536192"/>
-            <a:ext cx="11277295" cy="685800"/>
+            <a:off x="457200" y="1517904"/>
+            <a:ext cx="11277295" cy="713232"/>
           </a:xfrm>
           <a:prstGeom prst="rect">
             <a:avLst/>
@@ -47889,7 +47985,7 @@
           <a:lstStyle/>
           <a:p>
             <a:pPr algn="l">
-              <a:defRPr sz="1500" b="0" i="0">
+              <a:defRPr sz="1400" b="0" i="0">
                 <a:solidFill>
                   <a:srgbClr val="1A1A1A"/>
                 </a:solidFill>
@@ -47897,7 +47993,7 @@
               </a:defRPr>
             </a:pPr>
             <a:r>
-              <a:t>Design and evaluate an adaptive health insurance underwriting system using contextual bandit algorithms on a synthetic Cambodia applicant dataset, incorporating demographic fairness monitoring and human-in-the-loop augmentation.</a:t>
+              <a:t>To design, implement, and empirically validate a contextual bandit framework for health insurance underwriting that outperforms static rule-based baselines on cumulative profitability while maintaining regional and occupational fairness on a synthetic Cambodia dataset.</a:t>
             </a:r>
           </a:p>
         </p:txBody>
@@ -47910,8 +48006,8 @@
         </p:nvSpPr>
         <p:spPr>
           <a:xfrm>
-            <a:off x="457200" y="2423160"/>
-            <a:ext cx="3657600" cy="292608"/>
+            <a:off x="457200" y="2286000"/>
+            <a:ext cx="5486400" cy="292608"/>
           </a:xfrm>
           <a:prstGeom prst="rect">
             <a:avLst/>
@@ -47949,8 +48045,8 @@
               </a:defRPr>
             </a:pPr>
             <a:r>
-              <a:rPr spc="120"/>
-              <a:t>OBJECTIVES</a:t>
+              <a:rPr spc="80"/>
+              <a:t>SECONDARY OBJECTIVES</a:t>
             </a:r>
           </a:p>
         </p:txBody>
@@ -47963,7 +48059,7 @@
         </p:nvSpPr>
         <p:spPr>
           <a:xfrm>
-            <a:off x="457200" y="2834640"/>
+            <a:off x="457200" y="2606040"/>
             <a:ext cx="685800" cy="457200"/>
           </a:xfrm>
           <a:prstGeom prst="rect">
@@ -47994,7 +48090,7 @@
           <a:lstStyle/>
           <a:p>
             <a:pPr algn="l">
-              <a:defRPr sz="2000" b="1" i="0">
+              <a:defRPr sz="1700" b="1" i="0">
                 <a:solidFill>
                   <a:srgbClr val="1B5697"/>
                 </a:solidFill>
@@ -48015,8 +48111,8 @@
         </p:nvSpPr>
         <p:spPr>
           <a:xfrm>
-            <a:off x="1234440" y="2852928"/>
-            <a:ext cx="10500055" cy="777240"/>
+            <a:off x="1234440" y="2624328"/>
+            <a:ext cx="10500055" cy="676656"/>
           </a:xfrm>
           <a:prstGeom prst="rect">
             <a:avLst/>
@@ -48046,7 +48142,7 @@
           <a:lstStyle/>
           <a:p>
             <a:pPr algn="l">
-              <a:defRPr sz="1400" b="0" i="0">
+              <a:defRPr sz="1200" b="0" i="0">
                 <a:solidFill>
                   <a:srgbClr val="1A1A1A"/>
                 </a:solidFill>
@@ -48054,7 +48150,7 @@
               </a:defRPr>
             </a:pPr>
             <a:r>
-              <a:t>Implement and adapt linear contextual bandit algorithms (LinUCB, LinTS) for multi-arm health insurance underwriting decisions.</a:t>
+              <a:t>Develop a reproducible 2,000-record synthetic Cambodia applicant dataset anchored on the CDHS 2021-22: demographics, disease prevalence (incl. TB and hepatitis B), and regional and occupational risk.</a:t>
             </a:r>
           </a:p>
         </p:txBody>
@@ -48067,7 +48163,7 @@
         </p:nvSpPr>
         <p:spPr>
           <a:xfrm>
-            <a:off x="457200" y="3703320"/>
+            <a:off x="457200" y="3337560"/>
             <a:ext cx="685800" cy="457200"/>
           </a:xfrm>
           <a:prstGeom prst="rect">
@@ -48098,7 +48194,7 @@
           <a:lstStyle/>
           <a:p>
             <a:pPr algn="l">
-              <a:defRPr sz="2000" b="1" i="0">
+              <a:defRPr sz="1700" b="1" i="0">
                 <a:solidFill>
                   <a:srgbClr val="1B5697"/>
                 </a:solidFill>
@@ -48119,8 +48215,8 @@
         </p:nvSpPr>
         <p:spPr>
           <a:xfrm>
-            <a:off x="1234440" y="3721608"/>
-            <a:ext cx="10500055" cy="777240"/>
+            <a:off x="1234440" y="3355848"/>
+            <a:ext cx="10500055" cy="676656"/>
           </a:xfrm>
           <a:prstGeom prst="rect">
             <a:avLst/>
@@ -48150,7 +48246,7 @@
           <a:lstStyle/>
           <a:p>
             <a:pPr algn="l">
-              <a:defRPr sz="1400" b="0" i="0">
+              <a:defRPr sz="1200" b="0" i="0">
                 <a:solidFill>
                   <a:srgbClr val="1A1A1A"/>
                 </a:solidFill>
@@ -48158,7 +48254,7 @@
               </a:defRPr>
             </a:pPr>
             <a:r>
-              <a:t>Construct a 2,000-record synthetic Cambodia applicant dataset anchored on CDHS, STEPS, ILO, and WHO demographic distributions.</a:t>
+              <a:t>Implement and compare three contextual bandit algorithms (LinUCB, LinTS, and Epsilon-Greedy) against a static XGBoost rule baseline on cumulative reward and regret over 5,000 rounds.</a:t>
             </a:r>
           </a:p>
         </p:txBody>
@@ -48171,7 +48267,7 @@
         </p:nvSpPr>
         <p:spPr>
           <a:xfrm>
-            <a:off x="457200" y="3611880"/>
+            <a:off x="457200" y="3264408"/>
             <a:ext cx="11277295" cy="10972"/>
           </a:xfrm>
           <a:prstGeom prst="rect">
@@ -48215,7 +48311,7 @@
         </p:nvSpPr>
         <p:spPr>
           <a:xfrm>
-            <a:off x="457200" y="4572000"/>
+            <a:off x="457200" y="4069080"/>
             <a:ext cx="685800" cy="457200"/>
           </a:xfrm>
           <a:prstGeom prst="rect">
@@ -48246,7 +48342,7 @@
           <a:lstStyle/>
           <a:p>
             <a:pPr algn="l">
-              <a:defRPr sz="2000" b="1" i="0">
+              <a:defRPr sz="1700" b="1" i="0">
                 <a:solidFill>
                   <a:srgbClr val="1B5697"/>
                 </a:solidFill>
@@ -48267,8 +48363,8 @@
         </p:nvSpPr>
         <p:spPr>
           <a:xfrm>
-            <a:off x="1234440" y="4590288"/>
-            <a:ext cx="10500055" cy="777240"/>
+            <a:off x="1234440" y="4087368"/>
+            <a:ext cx="10500055" cy="676656"/>
           </a:xfrm>
           <a:prstGeom prst="rect">
             <a:avLst/>
@@ -48298,7 +48394,7 @@
           <a:lstStyle/>
           <a:p>
             <a:pPr algn="l">
-              <a:defRPr sz="1400" b="0" i="0">
+              <a:defRPr sz="1200" b="0" i="0">
                 <a:solidFill>
                   <a:srgbClr val="1A1A1A"/>
                 </a:solidFill>
@@ -48306,7 +48402,7 @@
               </a:defRPr>
             </a:pPr>
             <a:r>
-              <a:t>Evaluate bandit performance versus static rule-based baselines via 20-seed multi-run trials, bootstrap CIs, and paired Wilcoxon tests.</a:t>
+              <a:t>Design and validate PSI-based fairness guardrails so the approved portfolio does not drift demographically from the applicant population.</a:t>
             </a:r>
           </a:p>
         </p:txBody>
@@ -48319,7 +48415,7 @@
         </p:nvSpPr>
         <p:spPr>
           <a:xfrm>
-            <a:off x="457200" y="4480560"/>
+            <a:off x="457200" y="3995928"/>
             <a:ext cx="11277295" cy="10972"/>
           </a:xfrm>
           <a:prstGeom prst="rect">
@@ -48363,7 +48459,7 @@
         </p:nvSpPr>
         <p:spPr>
           <a:xfrm>
-            <a:off x="457200" y="5440680"/>
+            <a:off x="457200" y="4800600"/>
             <a:ext cx="685800" cy="457200"/>
           </a:xfrm>
           <a:prstGeom prst="rect">
@@ -48394,7 +48490,7 @@
           <a:lstStyle/>
           <a:p>
             <a:pPr algn="l">
-              <a:defRPr sz="2000" b="1" i="0">
+              <a:defRPr sz="1700" b="1" i="0">
                 <a:solidFill>
                   <a:srgbClr val="1B5697"/>
                 </a:solidFill>
@@ -48415,8 +48511,8 @@
         </p:nvSpPr>
         <p:spPr>
           <a:xfrm>
-            <a:off x="1234440" y="5458968"/>
-            <a:ext cx="10500055" cy="777240"/>
+            <a:off x="1234440" y="4818888"/>
+            <a:ext cx="10500055" cy="676656"/>
           </a:xfrm>
           <a:prstGeom prst="rect">
             <a:avLst/>
@@ -48446,7 +48542,7 @@
           <a:lstStyle/>
           <a:p>
             <a:pPr algn="l">
-              <a:defRPr sz="1400" b="0" i="0">
+              <a:defRPr sz="1200" b="0" i="0">
                 <a:solidFill>
                   <a:srgbClr val="1A1A1A"/>
                 </a:solidFill>
@@ -48454,7 +48550,7 @@
               </a:defRPr>
             </a:pPr>
             <a:r>
-              <a:t>Assess demographic fairness via PSI monitoring across region and occupation, and integrate a human-in-the-loop underwriting wrapper.</a:t>
+              <a:t>Conduct a fairness audit verifying that no regional or occupational segment falls below the EEOC four-fifths (80%) approval-rate benchmark.</a:t>
             </a:r>
           </a:p>
         </p:txBody>
@@ -48467,7 +48563,155 @@
         </p:nvSpPr>
         <p:spPr>
           <a:xfrm>
-            <a:off x="457200" y="5349240"/>
+            <a:off x="457200" y="4727448"/>
+            <a:ext cx="11277295" cy="10972"/>
+          </a:xfrm>
+          <a:prstGeom prst="rect">
+            <a:avLst/>
+          </a:prstGeom>
+          <a:solidFill>
+            <a:srgbClr val="DDDDDD"/>
+          </a:solidFill>
+          <a:ln>
+            <a:noFill/>
+          </a:ln>
+          <a:effectLst/>
+        </p:spPr>
+        <p:style>
+          <a:lnRef idx="1">
+            <a:schemeClr val="accent1"/>
+          </a:lnRef>
+          <a:fillRef idx="3">
+            <a:schemeClr val="accent1"/>
+          </a:fillRef>
+          <a:effectRef idx="2">
+            <a:schemeClr val="accent1"/>
+          </a:effectRef>
+          <a:fontRef idx="minor">
+            <a:schemeClr val="lt1"/>
+          </a:fontRef>
+        </p:style>
+        <p:txBody>
+          <a:bodyPr rtlCol="0" anchor="ctr"/>
+          <a:lstStyle/>
+          <a:p>
+            <a:pPr algn="ctr"/>
+          </a:p>
+        </p:txBody>
+      </p:sp>
+      <p:sp>
+        <p:nvSpPr>
+          <p:cNvPr id="24" name="Rectangle 23"/>
+          <p:cNvSpPr/>
+          <p:nvPr/>
+        </p:nvSpPr>
+        <p:spPr>
+          <a:xfrm>
+            <a:off x="457200" y="5532120"/>
+            <a:ext cx="685800" cy="457200"/>
+          </a:xfrm>
+          <a:prstGeom prst="rect">
+            <a:avLst/>
+          </a:prstGeom>
+          <a:noFill/>
+          <a:ln>
+            <a:noFill/>
+          </a:ln>
+          <a:effectLst/>
+        </p:spPr>
+        <p:style>
+          <a:lnRef idx="1">
+            <a:schemeClr val="accent1"/>
+          </a:lnRef>
+          <a:fillRef idx="3">
+            <a:schemeClr val="accent1"/>
+          </a:fillRef>
+          <a:effectRef idx="2">
+            <a:schemeClr val="accent1"/>
+          </a:effectRef>
+          <a:fontRef idx="minor">
+            <a:schemeClr val="lt1"/>
+          </a:fontRef>
+        </p:style>
+        <p:txBody>
+          <a:bodyPr rtlCol="0" anchor="t" wrap="square" lIns="45720" rIns="45720" tIns="18288" bIns="18288"/>
+          <a:lstStyle/>
+          <a:p>
+            <a:pPr algn="l">
+              <a:defRPr sz="1700" b="1" i="0">
+                <a:solidFill>
+                  <a:srgbClr val="1B5697"/>
+                </a:solidFill>
+                <a:latin typeface="Segoe UI"/>
+              </a:defRPr>
+            </a:pPr>
+            <a:r>
+              <a:t>O5</a:t>
+            </a:r>
+          </a:p>
+        </p:txBody>
+      </p:sp>
+      <p:sp>
+        <p:nvSpPr>
+          <p:cNvPr id="25" name="Rectangle 24"/>
+          <p:cNvSpPr/>
+          <p:nvPr/>
+        </p:nvSpPr>
+        <p:spPr>
+          <a:xfrm>
+            <a:off x="1234440" y="5550408"/>
+            <a:ext cx="10500055" cy="676656"/>
+          </a:xfrm>
+          <a:prstGeom prst="rect">
+            <a:avLst/>
+          </a:prstGeom>
+          <a:noFill/>
+          <a:ln>
+            <a:noFill/>
+          </a:ln>
+          <a:effectLst/>
+        </p:spPr>
+        <p:style>
+          <a:lnRef idx="1">
+            <a:schemeClr val="accent1"/>
+          </a:lnRef>
+          <a:fillRef idx="3">
+            <a:schemeClr val="accent1"/>
+          </a:fillRef>
+          <a:effectRef idx="2">
+            <a:schemeClr val="accent1"/>
+          </a:effectRef>
+          <a:fontRef idx="minor">
+            <a:schemeClr val="lt1"/>
+          </a:fontRef>
+        </p:style>
+        <p:txBody>
+          <a:bodyPr rtlCol="0" anchor="t" wrap="square" lIns="45720" rIns="45720" tIns="18288" bIns="18288"/>
+          <a:lstStyle/>
+          <a:p>
+            <a:pPr algn="l">
+              <a:defRPr sz="1200" b="0" i="0">
+                <a:solidFill>
+                  <a:srgbClr val="1A1A1A"/>
+                </a:solidFill>
+                <a:latin typeface="Calibri"/>
+              </a:defRPr>
+            </a:pPr>
+            <a:r>
+              <a:t>Design and evaluate a human-in-the-loop wrapper that escalates only the most uncertain applicants, quantifying reward gain against review cost.</a:t>
+            </a:r>
+          </a:p>
+        </p:txBody>
+      </p:sp>
+      <p:sp>
+        <p:nvSpPr>
+          <p:cNvPr id="26" name="Rectangle 25"/>
+          <p:cNvSpPr/>
+          <p:nvPr/>
+        </p:nvSpPr>
+        <p:spPr>
+          <a:xfrm>
+            <a:off x="457200" y="5458968"/>
             <a:ext cx="11277295" cy="10972"/>
           </a:xfrm>
           <a:prstGeom prst="rect">
